--- a/docs/ECommerce_Data_Engineering_RabbitMQ_Technical_Presentation.pptx
+++ b/docs/ECommerce_Data_Engineering_RabbitMQ_Technical_Presentation.pptx
@@ -2,24 +2,24 @@
 <file path=ppt/presentation.xml><?xml version="1.0" encoding="utf-8"?>
 <p:presentation xmlns:p="http://schemas.openxmlformats.org/presentationml/2006/main">
   <p:sldMasterIdLst>
-    <p:sldMasterId xmlns:r="http://schemas.openxmlformats.org/officeDocument/2006/relationships" id="2147483648" r:id="R63e2f67936ba474c"/>
+    <p:sldMasterId xmlns:r="http://schemas.openxmlformats.org/officeDocument/2006/relationships" id="2147483648" r:id="Rc524f30f46504441"/>
   </p:sldMasterIdLst>
   <p:notesMasterIdLst>
-    <p:notesMasterId xmlns:r="http://schemas.openxmlformats.org/officeDocument/2006/relationships" r:id="R63ab0323982c4dee"/>
+    <p:notesMasterId xmlns:r="http://schemas.openxmlformats.org/officeDocument/2006/relationships" r:id="Rece0346c7361425b"/>
   </p:notesMasterIdLst>
   <p:sldIdLst>
-    <p:sldId xmlns:r="http://schemas.openxmlformats.org/officeDocument/2006/relationships" id="256" r:id="Rc7d72c4550a9479a"/>
-    <p:sldId xmlns:r="http://schemas.openxmlformats.org/officeDocument/2006/relationships" id="257" r:id="R4b03ec0ac0b04a8b"/>
-    <p:sldId xmlns:r="http://schemas.openxmlformats.org/officeDocument/2006/relationships" id="258" r:id="R625a479446704f7e"/>
-    <p:sldId xmlns:r="http://schemas.openxmlformats.org/officeDocument/2006/relationships" id="259" r:id="R298b10b173394e2f"/>
-    <p:sldId xmlns:r="http://schemas.openxmlformats.org/officeDocument/2006/relationships" id="260" r:id="R3e171faf16b6409a"/>
-    <p:sldId xmlns:r="http://schemas.openxmlformats.org/officeDocument/2006/relationships" id="261" r:id="R03292b225a0f488f"/>
-    <p:sldId xmlns:r="http://schemas.openxmlformats.org/officeDocument/2006/relationships" id="262" r:id="R3294771fb4f84ff1"/>
-    <p:sldId xmlns:r="http://schemas.openxmlformats.org/officeDocument/2006/relationships" id="263" r:id="R0dbd92a4ef824689"/>
-    <p:sldId xmlns:r="http://schemas.openxmlformats.org/officeDocument/2006/relationships" id="264" r:id="R4bbbbbe4f8bb49c0"/>
-    <p:sldId xmlns:r="http://schemas.openxmlformats.org/officeDocument/2006/relationships" id="265" r:id="Rae8802af5d65468f"/>
-    <p:sldId xmlns:r="http://schemas.openxmlformats.org/officeDocument/2006/relationships" id="266" r:id="R12375162d12143c3"/>
-    <p:sldId xmlns:r="http://schemas.openxmlformats.org/officeDocument/2006/relationships" id="267" r:id="R2790e9b6356d4b99"/>
+    <p:sldId xmlns:r="http://schemas.openxmlformats.org/officeDocument/2006/relationships" id="256" r:id="R27eea61ecad640e4"/>
+    <p:sldId xmlns:r="http://schemas.openxmlformats.org/officeDocument/2006/relationships" id="257" r:id="R3081325e963844f4"/>
+    <p:sldId xmlns:r="http://schemas.openxmlformats.org/officeDocument/2006/relationships" id="258" r:id="R069fedf4fce74037"/>
+    <p:sldId xmlns:r="http://schemas.openxmlformats.org/officeDocument/2006/relationships" id="259" r:id="Rab3e687aa09d47b5"/>
+    <p:sldId xmlns:r="http://schemas.openxmlformats.org/officeDocument/2006/relationships" id="260" r:id="R7910f7b1f3a34711"/>
+    <p:sldId xmlns:r="http://schemas.openxmlformats.org/officeDocument/2006/relationships" id="261" r:id="R06fed7b7ed4b4d29"/>
+    <p:sldId xmlns:r="http://schemas.openxmlformats.org/officeDocument/2006/relationships" id="262" r:id="Rdf5ef768957e4fb4"/>
+    <p:sldId xmlns:r="http://schemas.openxmlformats.org/officeDocument/2006/relationships" id="263" r:id="R6eaad1ab156d4714"/>
+    <p:sldId xmlns:r="http://schemas.openxmlformats.org/officeDocument/2006/relationships" id="264" r:id="R02242c31a2214f23"/>
+    <p:sldId xmlns:r="http://schemas.openxmlformats.org/officeDocument/2006/relationships" id="265" r:id="R7bac79bb3082429b"/>
+    <p:sldId xmlns:r="http://schemas.openxmlformats.org/officeDocument/2006/relationships" id="266" r:id="Re26b0e4117ea4186"/>
+    <p:sldId xmlns:r="http://schemas.openxmlformats.org/officeDocument/2006/relationships" id="267" r:id="R1b8f61bc94dd480f"/>
   </p:sldIdLst>
   <p:sldSz cx="12192000" cy="6858000"/>
   <p:notesSz cx="6858000" cy="9144000"/>
@@ -453,7 +453,7 @@
           <a:lstStyle xmlns:a="http://schemas.openxmlformats.org/drawingml/2006/main"/>
           <a:p xmlns:a="http://schemas.openxmlformats.org/drawingml/2006/main">
             <a:r>
-              <a:t>Member 1 speaking guide</a:t>
+              <a:t>Harsh Birje speaking guide</a:t>
             </a:r>
           </a:p>
           <a:p xmlns:a="http://schemas.openxmlformats.org/drawingml/2006/main">
@@ -473,7 +473,7 @@
           </a:p>
           <a:p xmlns:a="http://schemas.openxmlformats.org/drawingml/2006/main">
             <a:r>
-              <a:t>Handoff: Member 1 continues with the problem and scope.</a:t>
+              <a:t>Handoff: Harsh Birje continues with the problem and scope.</a:t>
             </a:r>
           </a:p>
         </p:txBody>
@@ -543,7 +543,7 @@
           <a:lstStyle xmlns:a="http://schemas.openxmlformats.org/drawingml/2006/main"/>
           <a:p xmlns:a="http://schemas.openxmlformats.org/drawingml/2006/main">
             <a:r>
-              <a:t>Member 4 speaking guide</a:t>
+              <a:t>Lokesh Ture speaking guide</a:t>
             </a:r>
           </a:p>
           <a:p xmlns:a="http://schemas.openxmlformats.org/drawingml/2006/main">
@@ -633,7 +633,7 @@
           <a:lstStyle xmlns:a="http://schemas.openxmlformats.org/drawingml/2006/main"/>
           <a:p xmlns:a="http://schemas.openxmlformats.org/drawingml/2006/main">
             <a:r>
-              <a:t>Member 4 speaking guide</a:t>
+              <a:t>Lokesh Ture speaking guide</a:t>
             </a:r>
           </a:p>
           <a:p xmlns:a="http://schemas.openxmlformats.org/drawingml/2006/main">
@@ -723,12 +723,12 @@
           <a:lstStyle xmlns:a="http://schemas.openxmlformats.org/drawingml/2006/main"/>
           <a:p xmlns:a="http://schemas.openxmlformats.org/drawingml/2006/main">
             <a:r>
-              <a:t>Member 4 speaking guide</a:t>
-            </a:r>
-          </a:p>
-          <a:p xmlns:a="http://schemas.openxmlformats.org/drawingml/2006/main">
-            <a:r>
-              <a:t>Replace Member 1–4 with the four names before submission. Each presenter owns exactly three slides.</a:t>
+              <a:t>Lokesh Ture speaking guide</a:t>
+            </a:r>
+          </a:p>
+          <a:p xmlns:a="http://schemas.openxmlformats.org/drawingml/2006/main">
+            <a:r>
+              <a:t>Each presenter owns exactly three slides: Harsh Birje 1–3, Aayush Chavanke 4–6, Aniket Nikam 7–9 and Lokesh Ture 10–12.</a:t>
             </a:r>
           </a:p>
           <a:p xmlns:a="http://schemas.openxmlformats.org/drawingml/2006/main">
@@ -818,7 +818,7 @@
           <a:lstStyle xmlns:a="http://schemas.openxmlformats.org/drawingml/2006/main"/>
           <a:p xmlns:a="http://schemas.openxmlformats.org/drawingml/2006/main">
             <a:r>
-              <a:t>Member 1 speaking guide</a:t>
+              <a:t>Harsh Birje speaking guide</a:t>
             </a:r>
           </a:p>
           <a:p xmlns:a="http://schemas.openxmlformats.org/drawingml/2006/main">
@@ -908,7 +908,7 @@
           <a:lstStyle xmlns:a="http://schemas.openxmlformats.org/drawingml/2006/main"/>
           <a:p xmlns:a="http://schemas.openxmlformats.org/drawingml/2006/main">
             <a:r>
-              <a:t>Member 1 speaking guide</a:t>
+              <a:t>Harsh Birje speaking guide</a:t>
             </a:r>
           </a:p>
           <a:p xmlns:a="http://schemas.openxmlformats.org/drawingml/2006/main">
@@ -928,7 +928,7 @@
           </a:p>
           <a:p xmlns:a="http://schemas.openxmlformats.org/drawingml/2006/main">
             <a:r>
-              <a:t>Handoff to Member 2: the next slides explain how the data becomes trustworthy and queryable.</a:t>
+              <a:t>Handoff to Aayush Chavanke: the next slides explain how the data becomes trustworthy and queryable.</a:t>
             </a:r>
           </a:p>
         </p:txBody>
@@ -998,7 +998,7 @@
           <a:lstStyle xmlns:a="http://schemas.openxmlformats.org/drawingml/2006/main"/>
           <a:p xmlns:a="http://schemas.openxmlformats.org/drawingml/2006/main">
             <a:r>
-              <a:t>Member 2 speaking guide</a:t>
+              <a:t>Aayush Chavanke speaking guide</a:t>
             </a:r>
           </a:p>
           <a:p xmlns:a="http://schemas.openxmlformats.org/drawingml/2006/main">
@@ -1088,7 +1088,7 @@
           <a:lstStyle xmlns:a="http://schemas.openxmlformats.org/drawingml/2006/main"/>
           <a:p xmlns:a="http://schemas.openxmlformats.org/drawingml/2006/main">
             <a:r>
-              <a:t>Member 2 speaking guide</a:t>
+              <a:t>Aayush Chavanke speaking guide</a:t>
             </a:r>
           </a:p>
           <a:p xmlns:a="http://schemas.openxmlformats.org/drawingml/2006/main">
@@ -1178,7 +1178,7 @@
           <a:lstStyle xmlns:a="http://schemas.openxmlformats.org/drawingml/2006/main"/>
           <a:p xmlns:a="http://schemas.openxmlformats.org/drawingml/2006/main">
             <a:r>
-              <a:t>Member 2 speaking guide</a:t>
+              <a:t>Aayush Chavanke speaking guide</a:t>
             </a:r>
           </a:p>
           <a:p xmlns:a="http://schemas.openxmlformats.org/drawingml/2006/main">
@@ -1198,7 +1198,7 @@
           </a:p>
           <a:p xmlns:a="http://schemas.openxmlformats.org/drawingml/2006/main">
             <a:r>
-              <a:t>Handoff to Member 3: the next section evaluates speed and shows the BI output.</a:t>
+              <a:t>Handoff to Aniket Nikam: the next section evaluates speed and shows the BI output.</a:t>
             </a:r>
           </a:p>
         </p:txBody>
@@ -1268,7 +1268,7 @@
           <a:lstStyle xmlns:a="http://schemas.openxmlformats.org/drawingml/2006/main"/>
           <a:p xmlns:a="http://schemas.openxmlformats.org/drawingml/2006/main">
             <a:r>
-              <a:t>Member 3 speaking guide</a:t>
+              <a:t>Aniket Nikam speaking guide</a:t>
             </a:r>
           </a:p>
           <a:p xmlns:a="http://schemas.openxmlformats.org/drawingml/2006/main">
@@ -1358,7 +1358,7 @@
           <a:lstStyle xmlns:a="http://schemas.openxmlformats.org/drawingml/2006/main"/>
           <a:p xmlns:a="http://schemas.openxmlformats.org/drawingml/2006/main">
             <a:r>
-              <a:t>Member 3 speaking guide</a:t>
+              <a:t>Aniket Nikam speaking guide</a:t>
             </a:r>
           </a:p>
           <a:p xmlns:a="http://schemas.openxmlformats.org/drawingml/2006/main">
@@ -1448,7 +1448,7 @@
           <a:lstStyle xmlns:a="http://schemas.openxmlformats.org/drawingml/2006/main"/>
           <a:p xmlns:a="http://schemas.openxmlformats.org/drawingml/2006/main">
             <a:r>
-              <a:t>Member 3 speaking guide</a:t>
+              <a:t>Aniket Nikam speaking guide</a:t>
             </a:r>
           </a:p>
           <a:p xmlns:a="http://schemas.openxmlformats.org/drawingml/2006/main">
@@ -1473,7 +1473,7 @@
           </a:p>
           <a:p xmlns:a="http://schemas.openxmlformats.org/drawingml/2006/main">
             <a:r>
-              <a:t>Handoff to Member 4: the remaining slides cover the API contract, deployment and live demonstration.</a:t>
+              <a:t>Handoff to Lokesh Ture: the remaining slides cover the API contract, deployment and live demonstration.</a:t>
             </a:r>
           </a:p>
         </p:txBody>
@@ -1520,7 +1520,7 @@
           <p:cNvPr id="3" name="Title">
             <a:extLst xmlns:a="http://schemas.openxmlformats.org/drawingml/2006/main">
               <a:ext uri="{FF2B5EF4-FFF2-40B4-BE49-F238E27FC236}">
-                <a16:creationId xmlns:a16="http://schemas.microsoft.com/office/drawing/2014/main" id="{A8996477-0D95-4A70-9C63-4FEE223A4347}"/>
+                <a16:creationId xmlns:a16="http://schemas.microsoft.com/office/drawing/2014/main" id="{AB253BA2-DFA7-4065-8EF0-9D998D4E69CF}"/>
               </a:ext>
             </a:extLst>
           </p:cNvPr>
@@ -1677,7 +1677,7 @@
           <p:cNvPr id="2" name="Subtitle">
             <a:extLst xmlns:a="http://schemas.openxmlformats.org/drawingml/2006/main">
               <a:ext uri="{FF2B5EF4-FFF2-40B4-BE49-F238E27FC236}">
-                <a16:creationId xmlns:a16="http://schemas.microsoft.com/office/drawing/2014/main" id="{A99ACBF7-D92C-4396-A4CB-4758CBB00D27}"/>
+                <a16:creationId xmlns:a16="http://schemas.microsoft.com/office/drawing/2014/main" id="{C14CCF84-2660-4511-9B4E-7071EF0B0F50}"/>
               </a:ext>
             </a:extLst>
           </p:cNvPr>
@@ -1851,7 +1851,7 @@
           <p:cNvPr id="2" name="Section title">
             <a:extLst xmlns:a="http://schemas.openxmlformats.org/drawingml/2006/main">
               <a:ext uri="{FF2B5EF4-FFF2-40B4-BE49-F238E27FC236}">
-                <a16:creationId xmlns:a16="http://schemas.microsoft.com/office/drawing/2014/main" id="{13F038F1-D6D8-4B26-9FD8-4135618B81A5}"/>
+                <a16:creationId xmlns:a16="http://schemas.microsoft.com/office/drawing/2014/main" id="{954DA110-81FF-4B96-A9F0-AE4C0EC86A5C}"/>
               </a:ext>
             </a:extLst>
           </p:cNvPr>
@@ -2025,7 +2025,7 @@
           <p:cNvPr id="3" name="Title">
             <a:extLst xmlns:a="http://schemas.openxmlformats.org/drawingml/2006/main">
               <a:ext uri="{FF2B5EF4-FFF2-40B4-BE49-F238E27FC236}">
-                <a16:creationId xmlns:a16="http://schemas.microsoft.com/office/drawing/2014/main" id="{F2563D4D-622A-46A1-BD76-EBB46CF7D70B}"/>
+                <a16:creationId xmlns:a16="http://schemas.microsoft.com/office/drawing/2014/main" id="{0F614C57-88D6-4F50-A18D-79F7885689AD}"/>
               </a:ext>
             </a:extLst>
           </p:cNvPr>
@@ -2182,7 +2182,7 @@
           <p:cNvPr id="2" name="Body">
             <a:extLst xmlns:a="http://schemas.openxmlformats.org/drawingml/2006/main">
               <a:ext uri="{FF2B5EF4-FFF2-40B4-BE49-F238E27FC236}">
-                <a16:creationId xmlns:a16="http://schemas.microsoft.com/office/drawing/2014/main" id="{2886D22E-D3E6-414F-9C05-9E63F701A1DE}"/>
+                <a16:creationId xmlns:a16="http://schemas.microsoft.com/office/drawing/2014/main" id="{7FD0B365-9DAD-4DB9-B4E0-641DF2ECE1AB}"/>
               </a:ext>
             </a:extLst>
           </p:cNvPr>
@@ -2356,7 +2356,7 @@
           <p:cNvPr id="4" name="Title">
             <a:extLst xmlns:a="http://schemas.openxmlformats.org/drawingml/2006/main">
               <a:ext uri="{FF2B5EF4-FFF2-40B4-BE49-F238E27FC236}">
-                <a16:creationId xmlns:a16="http://schemas.microsoft.com/office/drawing/2014/main" id="{8F26DFCC-8FA8-43F7-8665-F927DAB686D7}"/>
+                <a16:creationId xmlns:a16="http://schemas.microsoft.com/office/drawing/2014/main" id="{A559DAC4-1110-465C-8CDF-2E91E0916E91}"/>
               </a:ext>
             </a:extLst>
           </p:cNvPr>
@@ -2513,7 +2513,7 @@
           <p:cNvPr id="2" name="Left column">
             <a:extLst xmlns:a="http://schemas.openxmlformats.org/drawingml/2006/main">
               <a:ext uri="{FF2B5EF4-FFF2-40B4-BE49-F238E27FC236}">
-                <a16:creationId xmlns:a16="http://schemas.microsoft.com/office/drawing/2014/main" id="{F4BF7F70-F58C-4DBA-9EE1-E325955A6472}"/>
+                <a16:creationId xmlns:a16="http://schemas.microsoft.com/office/drawing/2014/main" id="{CD2B734F-5BF6-4FA8-AED7-22A2442368AA}"/>
               </a:ext>
             </a:extLst>
           </p:cNvPr>
@@ -2670,7 +2670,7 @@
           <p:cNvPr id="3" name="Right column">
             <a:extLst xmlns:a="http://schemas.openxmlformats.org/drawingml/2006/main">
               <a:ext uri="{FF2B5EF4-FFF2-40B4-BE49-F238E27FC236}">
-                <a16:creationId xmlns:a16="http://schemas.microsoft.com/office/drawing/2014/main" id="{14A25F28-6F8C-4B61-B1CA-94E244E6A1C8}"/>
+                <a16:creationId xmlns:a16="http://schemas.microsoft.com/office/drawing/2014/main" id="{AF36B868-CB31-4AF4-B5A5-69F026704755}"/>
               </a:ext>
             </a:extLst>
           </p:cNvPr>
@@ -2844,7 +2844,7 @@
           <p:cNvPr id="3" name="Title">
             <a:extLst xmlns:a="http://schemas.openxmlformats.org/drawingml/2006/main">
               <a:ext uri="{FF2B5EF4-FFF2-40B4-BE49-F238E27FC236}">
-                <a16:creationId xmlns:a16="http://schemas.microsoft.com/office/drawing/2014/main" id="{4CA79D09-2482-4222-B711-21FF8BDE93EE}"/>
+                <a16:creationId xmlns:a16="http://schemas.microsoft.com/office/drawing/2014/main" id="{F0AA5998-EB4D-4757-BBBD-224FAD582BBA}"/>
               </a:ext>
             </a:extLst>
           </p:cNvPr>
@@ -3001,7 +3001,7 @@
           <p:cNvPr id="2" name="Left column">
             <a:extLst xmlns:a="http://schemas.openxmlformats.org/drawingml/2006/main">
               <a:ext uri="{FF2B5EF4-FFF2-40B4-BE49-F238E27FC236}">
-                <a16:creationId xmlns:a16="http://schemas.microsoft.com/office/drawing/2014/main" id="{93920D74-7AEA-4C33-BFB8-209204834872}"/>
+                <a16:creationId xmlns:a16="http://schemas.microsoft.com/office/drawing/2014/main" id="{34ADAE6E-9817-4F35-B3E0-A6A2EB937C75}"/>
               </a:ext>
             </a:extLst>
           </p:cNvPr>
@@ -3196,12 +3196,12 @@
   </p:cSld>
   <p:clrMap bg1="lt1" tx1="dk1" bg2="lt2" tx2="dk2" accent1="accent1" accent2="accent2" accent3="accent3" accent4="accent4" accent5="accent5" accent6="accent6" hlink="hlink" folHlink="folHlink"/>
   <p:sldLayoutIdLst>
-    <p:sldLayoutId xmlns:r="http://schemas.openxmlformats.org/officeDocument/2006/relationships" id="2147483649" r:id="R7baf40d21add4fc1"/>
-    <p:sldLayoutId xmlns:r="http://schemas.openxmlformats.org/officeDocument/2006/relationships" id="2147483650" r:id="Rec9ea9387145467e"/>
-    <p:sldLayoutId xmlns:r="http://schemas.openxmlformats.org/officeDocument/2006/relationships" id="2147483651" r:id="Re3176eb0d88a42d8"/>
-    <p:sldLayoutId xmlns:r="http://schemas.openxmlformats.org/officeDocument/2006/relationships" id="2147483652" r:id="R90d7a69c6df441da"/>
-    <p:sldLayoutId xmlns:r="http://schemas.openxmlformats.org/officeDocument/2006/relationships" id="2147483653" r:id="Ref895dc0ee6949c9"/>
-    <p:sldLayoutId xmlns:r="http://schemas.openxmlformats.org/officeDocument/2006/relationships" id="2147483654" r:id="R305fc9c3f98847c2"/>
+    <p:sldLayoutId xmlns:r="http://schemas.openxmlformats.org/officeDocument/2006/relationships" id="2147483649" r:id="R5f126c4693194a2c"/>
+    <p:sldLayoutId xmlns:r="http://schemas.openxmlformats.org/officeDocument/2006/relationships" id="2147483650" r:id="R6952c47f04a746d6"/>
+    <p:sldLayoutId xmlns:r="http://schemas.openxmlformats.org/officeDocument/2006/relationships" id="2147483651" r:id="Rd3b9f7810e9b4402"/>
+    <p:sldLayoutId xmlns:r="http://schemas.openxmlformats.org/officeDocument/2006/relationships" id="2147483652" r:id="R2d587f8a98554658"/>
+    <p:sldLayoutId xmlns:r="http://schemas.openxmlformats.org/officeDocument/2006/relationships" id="2147483653" r:id="R441bd9f472984f98"/>
+    <p:sldLayoutId xmlns:r="http://schemas.openxmlformats.org/officeDocument/2006/relationships" id="2147483654" r:id="R1e85d16006394072"/>
   </p:sldLayoutIdLst>
   <p:txStyles>
     <p:titleStyle>
@@ -4039,7 +4039,7 @@
           <p:cNvPr id="14" name="">
             <a:extLst xmlns:a="http://schemas.openxmlformats.org/drawingml/2006/main">
               <a:ext uri="{FF2B5EF4-FFF2-40B4-BE49-F238E27FC236}">
-                <a16:creationId xmlns:a16="http://schemas.microsoft.com/office/drawing/2014/main" id="{CE98D726-0AE4-4B59-9574-2F44076CD74A}"/>
+                <a16:creationId xmlns:a16="http://schemas.microsoft.com/office/drawing/2014/main" id="{0A9CE16F-B279-4E48-99E0-457C87B944A7}"/>
               </a:ext>
             </a:extLst>
           </p:cNvPr>
@@ -4070,7 +4070,7 @@
           <p:cNvPr id="2" name="">
             <a:extLst xmlns:a="http://schemas.openxmlformats.org/drawingml/2006/main">
               <a:ext uri="{FF2B5EF4-FFF2-40B4-BE49-F238E27FC236}">
-                <a16:creationId xmlns:a16="http://schemas.microsoft.com/office/drawing/2014/main" id="{AE4540DE-9F78-4A65-86B9-0FE7FD2D5A29}"/>
+                <a16:creationId xmlns:a16="http://schemas.microsoft.com/office/drawing/2014/main" id="{9E6B7C08-F3EB-42D5-AB5B-93CA13CFCD33}"/>
               </a:ext>
             </a:extLst>
           </p:cNvPr>
@@ -4139,7 +4139,7 @@
           <p:cNvPr id="3" name="">
             <a:extLst xmlns:a="http://schemas.openxmlformats.org/drawingml/2006/main">
               <a:ext uri="{FF2B5EF4-FFF2-40B4-BE49-F238E27FC236}">
-                <a16:creationId xmlns:a16="http://schemas.microsoft.com/office/drawing/2014/main" id="{5CE4B7CB-6B0E-4BB6-888A-505B3CBB3A7A}"/>
+                <a16:creationId xmlns:a16="http://schemas.microsoft.com/office/drawing/2014/main" id="{442D7411-15DE-48AB-82CA-83CEA8CBE321}"/>
               </a:ext>
             </a:extLst>
           </p:cNvPr>
@@ -4231,7 +4231,7 @@
           <p:cNvPr id="4" name="">
             <a:extLst xmlns:a="http://schemas.openxmlformats.org/drawingml/2006/main">
               <a:ext uri="{FF2B5EF4-FFF2-40B4-BE49-F238E27FC236}">
-                <a16:creationId xmlns:a16="http://schemas.microsoft.com/office/drawing/2014/main" id="{D2BC656F-D3FD-4287-89F3-52934B02F9B8}"/>
+                <a16:creationId xmlns:a16="http://schemas.microsoft.com/office/drawing/2014/main" id="{E1700878-EBAC-4367-B427-49B23DD4F645}"/>
               </a:ext>
             </a:extLst>
           </p:cNvPr>
@@ -4300,7 +4300,7 @@
           <p:cNvPr id="5" name="">
             <a:extLst xmlns:a="http://schemas.openxmlformats.org/drawingml/2006/main">
               <a:ext uri="{FF2B5EF4-FFF2-40B4-BE49-F238E27FC236}">
-                <a16:creationId xmlns:a16="http://schemas.microsoft.com/office/drawing/2014/main" id="{45603874-0643-4CDA-9ACB-F76E5E56A357}"/>
+                <a16:creationId xmlns:a16="http://schemas.microsoft.com/office/drawing/2014/main" id="{8FAB7E29-DB02-414B-B351-14A06003F8F0}"/>
               </a:ext>
             </a:extLst>
           </p:cNvPr>
@@ -4331,7 +4331,7 @@
           <p:cNvPr id="6" name="">
             <a:extLst xmlns:a="http://schemas.openxmlformats.org/drawingml/2006/main">
               <a:ext uri="{FF2B5EF4-FFF2-40B4-BE49-F238E27FC236}">
-                <a16:creationId xmlns:a16="http://schemas.microsoft.com/office/drawing/2014/main" id="{FF0E4643-7558-4C3F-A3C7-789D2D191CEB}"/>
+                <a16:creationId xmlns:a16="http://schemas.microsoft.com/office/drawing/2014/main" id="{0FB10D6B-7B1A-4B25-9423-016B87AC060F}"/>
               </a:ext>
             </a:extLst>
           </p:cNvPr>
@@ -4400,7 +4400,7 @@
           <p:cNvPr id="7" name="">
             <a:extLst xmlns:a="http://schemas.openxmlformats.org/drawingml/2006/main">
               <a:ext uri="{FF2B5EF4-FFF2-40B4-BE49-F238E27FC236}">
-                <a16:creationId xmlns:a16="http://schemas.microsoft.com/office/drawing/2014/main" id="{CF86091A-8F1F-480C-A1D4-5589BD5C0EA8}"/>
+                <a16:creationId xmlns:a16="http://schemas.microsoft.com/office/drawing/2014/main" id="{72FF049C-AF91-4994-9991-0788B4689122}"/>
               </a:ext>
             </a:extLst>
           </p:cNvPr>
@@ -4469,7 +4469,7 @@
           <p:cNvPr id="8" name="">
             <a:extLst xmlns:a="http://schemas.openxmlformats.org/drawingml/2006/main">
               <a:ext uri="{FF2B5EF4-FFF2-40B4-BE49-F238E27FC236}">
-                <a16:creationId xmlns:a16="http://schemas.microsoft.com/office/drawing/2014/main" id="{D55E9758-C479-4B92-A5C4-0CC5428E2B08}"/>
+                <a16:creationId xmlns:a16="http://schemas.microsoft.com/office/drawing/2014/main" id="{E9B4ACE7-4F2A-4837-BAE5-3CAB7B2DF0CA}"/>
               </a:ext>
             </a:extLst>
           </p:cNvPr>
@@ -4538,7 +4538,7 @@
           <p:cNvPr id="9" name="">
             <a:extLst xmlns:a="http://schemas.openxmlformats.org/drawingml/2006/main">
               <a:ext uri="{FF2B5EF4-FFF2-40B4-BE49-F238E27FC236}">
-                <a16:creationId xmlns:a16="http://schemas.microsoft.com/office/drawing/2014/main" id="{B68E037F-E8CB-496E-B7A1-C86E191C4EEB}"/>
+                <a16:creationId xmlns:a16="http://schemas.microsoft.com/office/drawing/2014/main" id="{FE7A6DE2-38FD-4A96-B696-5D287887DC26}"/>
               </a:ext>
             </a:extLst>
           </p:cNvPr>
@@ -4607,7 +4607,7 @@
           <p:cNvPr id="10" name="">
             <a:extLst xmlns:a="http://schemas.openxmlformats.org/drawingml/2006/main">
               <a:ext uri="{FF2B5EF4-FFF2-40B4-BE49-F238E27FC236}">
-                <a16:creationId xmlns:a16="http://schemas.microsoft.com/office/drawing/2014/main" id="{B0EDA6DE-D686-4920-8084-A5A488712FF7}"/>
+                <a16:creationId xmlns:a16="http://schemas.microsoft.com/office/drawing/2014/main" id="{1D41FAE3-B1F6-4860-8B08-8D4987AEC5B3}"/>
               </a:ext>
             </a:extLst>
           </p:cNvPr>
@@ -4676,7 +4676,7 @@
           <p:cNvPr id="11" name="">
             <a:extLst xmlns:a="http://schemas.openxmlformats.org/drawingml/2006/main">
               <a:ext uri="{FF2B5EF4-FFF2-40B4-BE49-F238E27FC236}">
-                <a16:creationId xmlns:a16="http://schemas.microsoft.com/office/drawing/2014/main" id="{566BF7B6-D197-4CAE-AB8B-3C81F2560E4A}"/>
+                <a16:creationId xmlns:a16="http://schemas.microsoft.com/office/drawing/2014/main" id="{ACD4B89F-D6EF-4213-A6A0-07BC65D3D756}"/>
               </a:ext>
             </a:extLst>
           </p:cNvPr>
@@ -4688,7 +4688,7 @@
         <p:spPr>
           <a:xfrm xmlns:a="http://schemas.openxmlformats.org/drawingml/2006/main">
             <a:off x="781050" y="5353050"/>
-            <a:ext cx="6286500" cy="342900"/>
+            <a:ext cx="9334500" cy="342900"/>
           </a:xfrm>
           <a:prstGeom xmlns:a="http://schemas.openxmlformats.org/drawingml/2006/main" prst="rect">
             <a:avLst/>
@@ -4735,7 +4735,7 @@
                 <a:ea typeface="Segoe UI"/>
                 <a:cs typeface="Segoe UI"/>
               </a:rPr>
-              <a:t>Team: Member 1 · Member 2 · Member 3 · Member 4</a:t>
+              <a:t>Team: Harsh Birje · Aayush Chavanke · Aniket Nikam · Lokesh Ture</a:t>
             </a:r>
           </a:p>
         </p:txBody>
@@ -4745,7 +4745,7 @@
           <p:cNvPr id="12" name="">
             <a:extLst xmlns:a="http://schemas.openxmlformats.org/drawingml/2006/main">
               <a:ext uri="{FF2B5EF4-FFF2-40B4-BE49-F238E27FC236}">
-                <a16:creationId xmlns:a16="http://schemas.microsoft.com/office/drawing/2014/main" id="{26E331E9-DE38-4F2F-A8E5-C7F03230CF45}"/>
+                <a16:creationId xmlns:a16="http://schemas.microsoft.com/office/drawing/2014/main" id="{04FC5024-78D7-4B05-9083-CD16E78D89D7}"/>
               </a:ext>
             </a:extLst>
           </p:cNvPr>
@@ -4814,19 +4814,19 @@
           <p:cNvPr id="13" name="">
             <a:extLst xmlns:a="http://schemas.openxmlformats.org/drawingml/2006/main">
               <a:ext uri="{FF2B5EF4-FFF2-40B4-BE49-F238E27FC236}">
-                <a16:creationId xmlns:a16="http://schemas.microsoft.com/office/drawing/2014/main" id="{905B724B-3C02-45E6-BB9A-83CF14456A36}"/>
-              </a:ext>
-            </a:extLst>
-          </p:cNvPr>
-          <p:cNvSpPr>
-            <a:spLocks xmlns:a="http://schemas.openxmlformats.org/drawingml/2006/main" noGrp="1"/>
-          </p:cNvSpPr>
-          <p:nvPr/>
-        </p:nvSpPr>
-        <p:spPr>
-          <a:xfrm xmlns:a="http://schemas.openxmlformats.org/drawingml/2006/main">
-            <a:off x="9810750" y="6438900"/>
-            <a:ext cx="1771650" cy="209550"/>
+                <a16:creationId xmlns:a16="http://schemas.microsoft.com/office/drawing/2014/main" id="{7B080467-DC34-4D9A-ABEE-A7029B50B6AF}"/>
+              </a:ext>
+            </a:extLst>
+          </p:cNvPr>
+          <p:cNvSpPr>
+            <a:spLocks xmlns:a="http://schemas.openxmlformats.org/drawingml/2006/main" noGrp="1"/>
+          </p:cNvSpPr>
+          <p:nvPr/>
+        </p:nvSpPr>
+        <p:spPr>
+          <a:xfrm xmlns:a="http://schemas.openxmlformats.org/drawingml/2006/main">
+            <a:off x="8724900" y="6438900"/>
+            <a:ext cx="2857500" cy="209550"/>
           </a:xfrm>
           <a:prstGeom xmlns:a="http://schemas.openxmlformats.org/drawingml/2006/main" prst="rect">
             <a:avLst/>
@@ -4873,7 +4873,7 @@
                 <a:ea typeface="Segoe UI"/>
                 <a:cs typeface="Segoe UI"/>
               </a:rPr>
-              <a:t>Presenter: Member 1</a:t>
+              <a:t>Presenter: Harsh Birje</a:t>
             </a:r>
           </a:p>
         </p:txBody>
@@ -4881,7 +4881,7 @@
     </p:spTree>
     <p:extLst>
       <p:ext uri="{BB962C8B-B14F-4D97-AF65-F5344CB8AC3E}">
-        <p14:creationId xmlns:p14="http://schemas.microsoft.com/office/powerpoint/2010/main" val="1204237353"/>
+        <p14:creationId xmlns:p14="http://schemas.microsoft.com/office/powerpoint/2010/main" val="1315638807"/>
       </p:ext>
     </p:extLst>
   </p:cSld>
@@ -4912,7 +4912,7 @@
           <p:cNvPr id="27" name="">
             <a:extLst xmlns:a="http://schemas.openxmlformats.org/drawingml/2006/main">
               <a:ext uri="{FF2B5EF4-FFF2-40B4-BE49-F238E27FC236}">
-                <a16:creationId xmlns:a16="http://schemas.microsoft.com/office/drawing/2014/main" id="{29568147-326E-447F-B8B7-30B7BA01305C}"/>
+                <a16:creationId xmlns:a16="http://schemas.microsoft.com/office/drawing/2014/main" id="{56AA4CCA-2797-42B5-8608-35E584B1D7EF}"/>
               </a:ext>
             </a:extLst>
           </p:cNvPr>
@@ -4981,7 +4981,7 @@
           <p:cNvPr id="2" name="">
             <a:extLst xmlns:a="http://schemas.openxmlformats.org/drawingml/2006/main">
               <a:ext uri="{FF2B5EF4-FFF2-40B4-BE49-F238E27FC236}">
-                <a16:creationId xmlns:a16="http://schemas.microsoft.com/office/drawing/2014/main" id="{A9406042-B93C-4562-BFD0-170D56618AD5}"/>
+                <a16:creationId xmlns:a16="http://schemas.microsoft.com/office/drawing/2014/main" id="{6CE850D2-1B3C-433C-826D-08EE995BDF4A}"/>
               </a:ext>
             </a:extLst>
           </p:cNvPr>
@@ -5050,7 +5050,7 @@
           <p:cNvPr id="3" name="">
             <a:extLst xmlns:a="http://schemas.openxmlformats.org/drawingml/2006/main">
               <a:ext uri="{FF2B5EF4-FFF2-40B4-BE49-F238E27FC236}">
-                <a16:creationId xmlns:a16="http://schemas.microsoft.com/office/drawing/2014/main" id="{50F7F0A0-148F-4FC9-BF31-6FA5BD119153}"/>
+                <a16:creationId xmlns:a16="http://schemas.microsoft.com/office/drawing/2014/main" id="{521FC9A0-E75E-4942-804D-53434C82C2AC}"/>
               </a:ext>
             </a:extLst>
           </p:cNvPr>
@@ -5081,7 +5081,7 @@
           <p:cNvPr id="4" name="">
             <a:extLst xmlns:a="http://schemas.openxmlformats.org/drawingml/2006/main">
               <a:ext uri="{FF2B5EF4-FFF2-40B4-BE49-F238E27FC236}">
-                <a16:creationId xmlns:a16="http://schemas.microsoft.com/office/drawing/2014/main" id="{A300C995-D4C3-4000-8B14-C4C02F78299B}"/>
+                <a16:creationId xmlns:a16="http://schemas.microsoft.com/office/drawing/2014/main" id="{263C47B1-5B9D-45F4-8C11-6C9399D73834}"/>
               </a:ext>
             </a:extLst>
           </p:cNvPr>
@@ -5140,7 +5140,7 @@
                 <a:ea typeface="Segoe UI"/>
                 <a:cs typeface="Segoe UI"/>
               </a:rPr>
-              <a:t>Presenter: Member 4</a:t>
+              <a:t>Presenter: Lokesh Ture</a:t>
             </a:r>
           </a:p>
         </p:txBody>
@@ -5150,7 +5150,7 @@
           <p:cNvPr id="5" name="">
             <a:extLst xmlns:a="http://schemas.openxmlformats.org/drawingml/2006/main">
               <a:ext uri="{FF2B5EF4-FFF2-40B4-BE49-F238E27FC236}">
-                <a16:creationId xmlns:a16="http://schemas.microsoft.com/office/drawing/2014/main" id="{1B38FB35-1D90-4B23-95D3-8F887103B7A5}"/>
+                <a16:creationId xmlns:a16="http://schemas.microsoft.com/office/drawing/2014/main" id="{7D12CDBA-B093-4B4D-939B-5E4C27C5D57B}"/>
               </a:ext>
             </a:extLst>
           </p:cNvPr>
@@ -5219,7 +5219,7 @@
           <p:cNvPr id="6" name="">
             <a:extLst xmlns:a="http://schemas.openxmlformats.org/drawingml/2006/main">
               <a:ext uri="{FF2B5EF4-FFF2-40B4-BE49-F238E27FC236}">
-                <a16:creationId xmlns:a16="http://schemas.microsoft.com/office/drawing/2014/main" id="{34564157-860D-4CD9-8B0E-940FEBBD9BBA}"/>
+                <a16:creationId xmlns:a16="http://schemas.microsoft.com/office/drawing/2014/main" id="{01C1AA1C-A261-4439-A948-C8C636DABD47}"/>
               </a:ext>
             </a:extLst>
           </p:cNvPr>
@@ -5288,7 +5288,7 @@
           <p:cNvPr id="7" name="">
             <a:extLst xmlns:a="http://schemas.openxmlformats.org/drawingml/2006/main">
               <a:ext uri="{FF2B5EF4-FFF2-40B4-BE49-F238E27FC236}">
-                <a16:creationId xmlns:a16="http://schemas.microsoft.com/office/drawing/2014/main" id="{6ED262AD-CBE6-4073-9F8B-6A40BCB48379}"/>
+                <a16:creationId xmlns:a16="http://schemas.microsoft.com/office/drawing/2014/main" id="{6374DFEE-A3BD-4BFD-8D39-4942E804C225}"/>
               </a:ext>
             </a:extLst>
           </p:cNvPr>
@@ -5323,7 +5323,7 @@
           <p:cNvPr id="8" name="">
             <a:extLst xmlns:a="http://schemas.openxmlformats.org/drawingml/2006/main">
               <a:ext uri="{FF2B5EF4-FFF2-40B4-BE49-F238E27FC236}">
-                <a16:creationId xmlns:a16="http://schemas.microsoft.com/office/drawing/2014/main" id="{91A26ED8-304D-45B1-814E-B23778D89EB3}"/>
+                <a16:creationId xmlns:a16="http://schemas.microsoft.com/office/drawing/2014/main" id="{EC91B625-1655-4014-B904-A83FC5BE7110}"/>
               </a:ext>
             </a:extLst>
           </p:cNvPr>
@@ -5354,7 +5354,7 @@
           <p:cNvPr id="9" name="">
             <a:extLst xmlns:a="http://schemas.openxmlformats.org/drawingml/2006/main">
               <a:ext uri="{FF2B5EF4-FFF2-40B4-BE49-F238E27FC236}">
-                <a16:creationId xmlns:a16="http://schemas.microsoft.com/office/drawing/2014/main" id="{CDE80067-6051-4DC5-BAA6-B86E786E26E9}"/>
+                <a16:creationId xmlns:a16="http://schemas.microsoft.com/office/drawing/2014/main" id="{7733933B-8665-47D8-B0FF-2A5938410D0B}"/>
               </a:ext>
             </a:extLst>
           </p:cNvPr>
@@ -5653,7 +5653,7 @@
           <p:cNvPr id="10" name="">
             <a:extLst xmlns:a="http://schemas.openxmlformats.org/drawingml/2006/main">
               <a:ext uri="{FF2B5EF4-FFF2-40B4-BE49-F238E27FC236}">
-                <a16:creationId xmlns:a16="http://schemas.microsoft.com/office/drawing/2014/main" id="{C930B5FC-202F-47AD-996E-BAA8AE946B53}"/>
+                <a16:creationId xmlns:a16="http://schemas.microsoft.com/office/drawing/2014/main" id="{85DBB4DA-3AA3-4CCB-8070-A466745ACD5F}"/>
               </a:ext>
             </a:extLst>
           </p:cNvPr>
@@ -5722,7 +5722,7 @@
           <p:cNvPr id="11" name="">
             <a:extLst xmlns:a="http://schemas.openxmlformats.org/drawingml/2006/main">
               <a:ext uri="{FF2B5EF4-FFF2-40B4-BE49-F238E27FC236}">
-                <a16:creationId xmlns:a16="http://schemas.microsoft.com/office/drawing/2014/main" id="{0AA246D3-87EC-4A41-81A0-5ABE78DDE9B8}"/>
+                <a16:creationId xmlns:a16="http://schemas.microsoft.com/office/drawing/2014/main" id="{F786958D-FAA4-4CB3-BE51-615A89C36B49}"/>
               </a:ext>
             </a:extLst>
           </p:cNvPr>
@@ -5753,7 +5753,7 @@
           <p:cNvPr id="12" name="">
             <a:extLst xmlns:a="http://schemas.openxmlformats.org/drawingml/2006/main">
               <a:ext uri="{FF2B5EF4-FFF2-40B4-BE49-F238E27FC236}">
-                <a16:creationId xmlns:a16="http://schemas.microsoft.com/office/drawing/2014/main" id="{E8DB325A-37B7-4EB4-AFFF-77AA7E7DE02B}"/>
+                <a16:creationId xmlns:a16="http://schemas.microsoft.com/office/drawing/2014/main" id="{E8CE1F84-48E0-449D-9655-E7501C100931}"/>
               </a:ext>
             </a:extLst>
           </p:cNvPr>
@@ -5822,7 +5822,7 @@
           <p:cNvPr id="13" name="">
             <a:extLst xmlns:a="http://schemas.openxmlformats.org/drawingml/2006/main">
               <a:ext uri="{FF2B5EF4-FFF2-40B4-BE49-F238E27FC236}">
-                <a16:creationId xmlns:a16="http://schemas.microsoft.com/office/drawing/2014/main" id="{240D28AD-48D6-4DE9-A750-C3A1B71D3A78}"/>
+                <a16:creationId xmlns:a16="http://schemas.microsoft.com/office/drawing/2014/main" id="{B00F552E-C2F2-494C-ABC6-453D2A41006B}"/>
               </a:ext>
             </a:extLst>
           </p:cNvPr>
@@ -5853,7 +5853,7 @@
           <p:cNvPr id="14" name="">
             <a:extLst xmlns:a="http://schemas.openxmlformats.org/drawingml/2006/main">
               <a:ext uri="{FF2B5EF4-FFF2-40B4-BE49-F238E27FC236}">
-                <a16:creationId xmlns:a16="http://schemas.microsoft.com/office/drawing/2014/main" id="{667847D1-1090-429B-B5A1-2B5C58BAEFFF}"/>
+                <a16:creationId xmlns:a16="http://schemas.microsoft.com/office/drawing/2014/main" id="{D9C3C671-CCEC-49FC-ACE4-8BD4C0154DBB}"/>
               </a:ext>
             </a:extLst>
           </p:cNvPr>
@@ -5922,7 +5922,7 @@
           <p:cNvPr id="15" name="">
             <a:extLst xmlns:a="http://schemas.openxmlformats.org/drawingml/2006/main">
               <a:ext uri="{FF2B5EF4-FFF2-40B4-BE49-F238E27FC236}">
-                <a16:creationId xmlns:a16="http://schemas.microsoft.com/office/drawing/2014/main" id="{5FA6F91D-1650-44C7-A8EC-69B0CE4152B0}"/>
+                <a16:creationId xmlns:a16="http://schemas.microsoft.com/office/drawing/2014/main" id="{44BA8276-130D-4981-A9BC-2FB645C99875}"/>
               </a:ext>
             </a:extLst>
           </p:cNvPr>
@@ -5991,7 +5991,7 @@
           <p:cNvPr id="16" name="">
             <a:extLst xmlns:a="http://schemas.openxmlformats.org/drawingml/2006/main">
               <a:ext uri="{FF2B5EF4-FFF2-40B4-BE49-F238E27FC236}">
-                <a16:creationId xmlns:a16="http://schemas.microsoft.com/office/drawing/2014/main" id="{ACF7B1D1-D067-4766-960B-351042336183}"/>
+                <a16:creationId xmlns:a16="http://schemas.microsoft.com/office/drawing/2014/main" id="{ECC51029-869E-46A4-A2F3-5D0B9ED5C7FF}"/>
               </a:ext>
             </a:extLst>
           </p:cNvPr>
@@ -6022,7 +6022,7 @@
           <p:cNvPr id="17" name="">
             <a:extLst xmlns:a="http://schemas.openxmlformats.org/drawingml/2006/main">
               <a:ext uri="{FF2B5EF4-FFF2-40B4-BE49-F238E27FC236}">
-                <a16:creationId xmlns:a16="http://schemas.microsoft.com/office/drawing/2014/main" id="{463C6E02-0006-4A1E-B9C2-E441DC9B05F7}"/>
+                <a16:creationId xmlns:a16="http://schemas.microsoft.com/office/drawing/2014/main" id="{550CFD8A-A459-409A-A789-231319EE349B}"/>
               </a:ext>
             </a:extLst>
           </p:cNvPr>
@@ -6091,7 +6091,7 @@
           <p:cNvPr id="18" name="">
             <a:extLst xmlns:a="http://schemas.openxmlformats.org/drawingml/2006/main">
               <a:ext uri="{FF2B5EF4-FFF2-40B4-BE49-F238E27FC236}">
-                <a16:creationId xmlns:a16="http://schemas.microsoft.com/office/drawing/2014/main" id="{4D16D9DE-813C-4F9F-81C1-69243C796F72}"/>
+                <a16:creationId xmlns:a16="http://schemas.microsoft.com/office/drawing/2014/main" id="{31042A73-16D2-4A77-AF46-A644A14C421D}"/>
               </a:ext>
             </a:extLst>
           </p:cNvPr>
@@ -6160,7 +6160,7 @@
           <p:cNvPr id="19" name="">
             <a:extLst xmlns:a="http://schemas.openxmlformats.org/drawingml/2006/main">
               <a:ext uri="{FF2B5EF4-FFF2-40B4-BE49-F238E27FC236}">
-                <a16:creationId xmlns:a16="http://schemas.microsoft.com/office/drawing/2014/main" id="{2EEF4AB3-4939-4B0E-B244-4CD6778FA156}"/>
+                <a16:creationId xmlns:a16="http://schemas.microsoft.com/office/drawing/2014/main" id="{91744C75-81E6-47F1-BEB4-1211BBD07E97}"/>
               </a:ext>
             </a:extLst>
           </p:cNvPr>
@@ -6191,7 +6191,7 @@
           <p:cNvPr id="20" name="">
             <a:extLst xmlns:a="http://schemas.openxmlformats.org/drawingml/2006/main">
               <a:ext uri="{FF2B5EF4-FFF2-40B4-BE49-F238E27FC236}">
-                <a16:creationId xmlns:a16="http://schemas.microsoft.com/office/drawing/2014/main" id="{F857E4F4-423F-4D2D-9A7F-AE6BAB929D03}"/>
+                <a16:creationId xmlns:a16="http://schemas.microsoft.com/office/drawing/2014/main" id="{FFB9F275-FD1F-476C-9B55-96C1B499F2CD}"/>
               </a:ext>
             </a:extLst>
           </p:cNvPr>
@@ -6260,7 +6260,7 @@
           <p:cNvPr id="21" name="">
             <a:extLst xmlns:a="http://schemas.openxmlformats.org/drawingml/2006/main">
               <a:ext uri="{FF2B5EF4-FFF2-40B4-BE49-F238E27FC236}">
-                <a16:creationId xmlns:a16="http://schemas.microsoft.com/office/drawing/2014/main" id="{4A42038F-EA9A-4DEE-B7C5-09C1169FA2D3}"/>
+                <a16:creationId xmlns:a16="http://schemas.microsoft.com/office/drawing/2014/main" id="{015904EF-1CCC-44FE-BBD1-725BDEF5555F}"/>
               </a:ext>
             </a:extLst>
           </p:cNvPr>
@@ -6329,7 +6329,7 @@
           <p:cNvPr id="22" name="">
             <a:extLst xmlns:a="http://schemas.openxmlformats.org/drawingml/2006/main">
               <a:ext uri="{FF2B5EF4-FFF2-40B4-BE49-F238E27FC236}">
-                <a16:creationId xmlns:a16="http://schemas.microsoft.com/office/drawing/2014/main" id="{30FEF47B-EDD4-4288-AD5F-8258EA121B2C}"/>
+                <a16:creationId xmlns:a16="http://schemas.microsoft.com/office/drawing/2014/main" id="{3DF7FC42-A1E1-4073-8BAB-1D813D7BC741}"/>
               </a:ext>
             </a:extLst>
           </p:cNvPr>
@@ -6360,7 +6360,7 @@
           <p:cNvPr id="23" name="">
             <a:extLst xmlns:a="http://schemas.openxmlformats.org/drawingml/2006/main">
               <a:ext uri="{FF2B5EF4-FFF2-40B4-BE49-F238E27FC236}">
-                <a16:creationId xmlns:a16="http://schemas.microsoft.com/office/drawing/2014/main" id="{BD935752-63F0-4386-A8CB-9C9C48943187}"/>
+                <a16:creationId xmlns:a16="http://schemas.microsoft.com/office/drawing/2014/main" id="{ECCE4B81-4814-4CD3-B10E-F4EBF2757BCE}"/>
               </a:ext>
             </a:extLst>
           </p:cNvPr>
@@ -6429,7 +6429,7 @@
           <p:cNvPr id="24" name="">
             <a:extLst xmlns:a="http://schemas.openxmlformats.org/drawingml/2006/main">
               <a:ext uri="{FF2B5EF4-FFF2-40B4-BE49-F238E27FC236}">
-                <a16:creationId xmlns:a16="http://schemas.microsoft.com/office/drawing/2014/main" id="{27F86DE2-9B6D-4C0C-8603-CFE4C9DB92A0}"/>
+                <a16:creationId xmlns:a16="http://schemas.microsoft.com/office/drawing/2014/main" id="{F3F742FB-18B8-4FBE-AE68-6537A1A95CFF}"/>
               </a:ext>
             </a:extLst>
           </p:cNvPr>
@@ -6498,7 +6498,7 @@
           <p:cNvPr id="25" name="">
             <a:extLst xmlns:a="http://schemas.openxmlformats.org/drawingml/2006/main">
               <a:ext uri="{FF2B5EF4-FFF2-40B4-BE49-F238E27FC236}">
-                <a16:creationId xmlns:a16="http://schemas.microsoft.com/office/drawing/2014/main" id="{1B333300-9393-4C2C-9B2A-BBC4E129F36F}"/>
+                <a16:creationId xmlns:a16="http://schemas.microsoft.com/office/drawing/2014/main" id="{2A833662-5D38-4961-8E87-11EB5D028549}"/>
               </a:ext>
             </a:extLst>
           </p:cNvPr>
@@ -6567,7 +6567,7 @@
           <p:cNvPr id="26" name="">
             <a:extLst xmlns:a="http://schemas.openxmlformats.org/drawingml/2006/main">
               <a:ext uri="{FF2B5EF4-FFF2-40B4-BE49-F238E27FC236}">
-                <a16:creationId xmlns:a16="http://schemas.microsoft.com/office/drawing/2014/main" id="{1520309B-3D74-48A7-879B-99EB8A316E79}"/>
+                <a16:creationId xmlns:a16="http://schemas.microsoft.com/office/drawing/2014/main" id="{55B4E1B8-0804-4A83-A5B8-DA65CF9B75DE}"/>
               </a:ext>
             </a:extLst>
           </p:cNvPr>
@@ -6634,7 +6634,7 @@
     </p:spTree>
     <p:extLst>
       <p:ext uri="{BB962C8B-B14F-4D97-AF65-F5344CB8AC3E}">
-        <p14:creationId xmlns:p14="http://schemas.microsoft.com/office/powerpoint/2010/main" val="272353007"/>
+        <p14:creationId xmlns:p14="http://schemas.microsoft.com/office/powerpoint/2010/main" val="916781797"/>
       </p:ext>
     </p:extLst>
   </p:cSld>
@@ -6665,7 +6665,7 @@
           <p:cNvPr id="38" name="">
             <a:extLst xmlns:a="http://schemas.openxmlformats.org/drawingml/2006/main">
               <a:ext uri="{FF2B5EF4-FFF2-40B4-BE49-F238E27FC236}">
-                <a16:creationId xmlns:a16="http://schemas.microsoft.com/office/drawing/2014/main" id="{EDFA3075-4939-477C-9A38-BDCEDBB6CCAD}"/>
+                <a16:creationId xmlns:a16="http://schemas.microsoft.com/office/drawing/2014/main" id="{AE28733D-1776-45BE-AEA5-15D193DF7086}"/>
               </a:ext>
             </a:extLst>
           </p:cNvPr>
@@ -6734,7 +6734,7 @@
           <p:cNvPr id="2" name="">
             <a:extLst xmlns:a="http://schemas.openxmlformats.org/drawingml/2006/main">
               <a:ext uri="{FF2B5EF4-FFF2-40B4-BE49-F238E27FC236}">
-                <a16:creationId xmlns:a16="http://schemas.microsoft.com/office/drawing/2014/main" id="{B212A81A-331B-49B2-882B-3E4C156B9AD7}"/>
+                <a16:creationId xmlns:a16="http://schemas.microsoft.com/office/drawing/2014/main" id="{31E0FEB2-6A6B-4292-B05E-3ED685915CFF}"/>
               </a:ext>
             </a:extLst>
           </p:cNvPr>
@@ -6803,7 +6803,7 @@
           <p:cNvPr id="3" name="">
             <a:extLst xmlns:a="http://schemas.openxmlformats.org/drawingml/2006/main">
               <a:ext uri="{FF2B5EF4-FFF2-40B4-BE49-F238E27FC236}">
-                <a16:creationId xmlns:a16="http://schemas.microsoft.com/office/drawing/2014/main" id="{81ABD7E8-DC09-44F2-8BC8-7F5BCD2FE206}"/>
+                <a16:creationId xmlns:a16="http://schemas.microsoft.com/office/drawing/2014/main" id="{ED5866B0-2126-4D4C-A49F-110447DC97AB}"/>
               </a:ext>
             </a:extLst>
           </p:cNvPr>
@@ -6834,7 +6834,7 @@
           <p:cNvPr id="4" name="">
             <a:extLst xmlns:a="http://schemas.openxmlformats.org/drawingml/2006/main">
               <a:ext uri="{FF2B5EF4-FFF2-40B4-BE49-F238E27FC236}">
-                <a16:creationId xmlns:a16="http://schemas.microsoft.com/office/drawing/2014/main" id="{4DCF0797-58D3-47F4-98D6-317E847E6C93}"/>
+                <a16:creationId xmlns:a16="http://schemas.microsoft.com/office/drawing/2014/main" id="{975E5D6B-6785-4588-A562-EF1B420CD51F}"/>
               </a:ext>
             </a:extLst>
           </p:cNvPr>
@@ -6893,7 +6893,7 @@
                 <a:ea typeface="Segoe UI"/>
                 <a:cs typeface="Segoe UI"/>
               </a:rPr>
-              <a:t>Presenter: Member 4</a:t>
+              <a:t>Presenter: Lokesh Ture</a:t>
             </a:r>
           </a:p>
         </p:txBody>
@@ -6903,7 +6903,7 @@
           <p:cNvPr id="5" name="">
             <a:extLst xmlns:a="http://schemas.openxmlformats.org/drawingml/2006/main">
               <a:ext uri="{FF2B5EF4-FFF2-40B4-BE49-F238E27FC236}">
-                <a16:creationId xmlns:a16="http://schemas.microsoft.com/office/drawing/2014/main" id="{CA48FB0C-8C80-42B5-AE1F-6FBADE5CC3F6}"/>
+                <a16:creationId xmlns:a16="http://schemas.microsoft.com/office/drawing/2014/main" id="{0C63C1A2-2DD9-4570-9691-0741D585DCDA}"/>
               </a:ext>
             </a:extLst>
           </p:cNvPr>
@@ -6972,7 +6972,7 @@
           <p:cNvPr id="6" name="">
             <a:extLst xmlns:a="http://schemas.openxmlformats.org/drawingml/2006/main">
               <a:ext uri="{FF2B5EF4-FFF2-40B4-BE49-F238E27FC236}">
-                <a16:creationId xmlns:a16="http://schemas.microsoft.com/office/drawing/2014/main" id="{D4549435-74BF-4209-936A-E9E79F52480A}"/>
+                <a16:creationId xmlns:a16="http://schemas.microsoft.com/office/drawing/2014/main" id="{44D657BC-6688-42B1-8540-E38F24A28CE8}"/>
               </a:ext>
             </a:extLst>
           </p:cNvPr>
@@ -7041,7 +7041,7 @@
           <p:cNvPr id="7" name="">
             <a:extLst xmlns:a="http://schemas.openxmlformats.org/drawingml/2006/main">
               <a:ext uri="{FF2B5EF4-FFF2-40B4-BE49-F238E27FC236}">
-                <a16:creationId xmlns:a16="http://schemas.microsoft.com/office/drawing/2014/main" id="{851AEF71-C56C-412D-AEB0-1534F41C345A}"/>
+                <a16:creationId xmlns:a16="http://schemas.microsoft.com/office/drawing/2014/main" id="{CEDC539B-C559-4244-9A6D-19663B5B53C8}"/>
               </a:ext>
             </a:extLst>
           </p:cNvPr>
@@ -7074,7 +7074,7 @@
           <p:cNvPr id="8" name="">
             <a:extLst xmlns:a="http://schemas.openxmlformats.org/drawingml/2006/main">
               <a:ext uri="{FF2B5EF4-FFF2-40B4-BE49-F238E27FC236}">
-                <a16:creationId xmlns:a16="http://schemas.microsoft.com/office/drawing/2014/main" id="{815C36BE-BC4C-475C-8FA1-5D979ED96373}"/>
+                <a16:creationId xmlns:a16="http://schemas.microsoft.com/office/drawing/2014/main" id="{AE44DD71-6A03-44C0-A685-42BA1C27E7F1}"/>
               </a:ext>
             </a:extLst>
           </p:cNvPr>
@@ -7143,7 +7143,7 @@
           <p:cNvPr id="9" name="">
             <a:extLst xmlns:a="http://schemas.openxmlformats.org/drawingml/2006/main">
               <a:ext uri="{FF2B5EF4-FFF2-40B4-BE49-F238E27FC236}">
-                <a16:creationId xmlns:a16="http://schemas.microsoft.com/office/drawing/2014/main" id="{39E993EE-DB5C-4460-9726-FE64E8E8AC26}"/>
+                <a16:creationId xmlns:a16="http://schemas.microsoft.com/office/drawing/2014/main" id="{0F7DBF8A-4224-4266-945A-3EDE3EDC6A41}"/>
               </a:ext>
             </a:extLst>
           </p:cNvPr>
@@ -7212,7 +7212,7 @@
           <p:cNvPr id="10" name="">
             <a:extLst xmlns:a="http://schemas.openxmlformats.org/drawingml/2006/main">
               <a:ext uri="{FF2B5EF4-FFF2-40B4-BE49-F238E27FC236}">
-                <a16:creationId xmlns:a16="http://schemas.microsoft.com/office/drawing/2014/main" id="{2C2C29F7-2EF9-450B-B9A3-6CB9286B4BFC}"/>
+                <a16:creationId xmlns:a16="http://schemas.microsoft.com/office/drawing/2014/main" id="{5C706794-32B2-4839-A4DD-ABBF0ADC0BCE}"/>
               </a:ext>
             </a:extLst>
           </p:cNvPr>
@@ -7245,7 +7245,7 @@
           <p:cNvPr id="11" name="">
             <a:extLst xmlns:a="http://schemas.openxmlformats.org/drawingml/2006/main">
               <a:ext uri="{FF2B5EF4-FFF2-40B4-BE49-F238E27FC236}">
-                <a16:creationId xmlns:a16="http://schemas.microsoft.com/office/drawing/2014/main" id="{78D000D8-F435-48D0-8C68-C95AD9DB11AC}"/>
+                <a16:creationId xmlns:a16="http://schemas.microsoft.com/office/drawing/2014/main" id="{036FDC44-A71C-4559-B5F1-1F034488E95E}"/>
               </a:ext>
             </a:extLst>
           </p:cNvPr>
@@ -7314,7 +7314,7 @@
           <p:cNvPr id="12" name="">
             <a:extLst xmlns:a="http://schemas.openxmlformats.org/drawingml/2006/main">
               <a:ext uri="{FF2B5EF4-FFF2-40B4-BE49-F238E27FC236}">
-                <a16:creationId xmlns:a16="http://schemas.microsoft.com/office/drawing/2014/main" id="{E6933BC1-003A-4143-AF6D-4ED5172CE95A}"/>
+                <a16:creationId xmlns:a16="http://schemas.microsoft.com/office/drawing/2014/main" id="{D4D3A401-E1DF-4938-BDD3-55D12A130AC6}"/>
               </a:ext>
             </a:extLst>
           </p:cNvPr>
@@ -7383,7 +7383,7 @@
           <p:cNvPr id="13" name="">
             <a:extLst xmlns:a="http://schemas.openxmlformats.org/drawingml/2006/main">
               <a:ext uri="{FF2B5EF4-FFF2-40B4-BE49-F238E27FC236}">
-                <a16:creationId xmlns:a16="http://schemas.microsoft.com/office/drawing/2014/main" id="{53D55F9A-BDCA-463D-830D-33D3E2D00EA7}"/>
+                <a16:creationId xmlns:a16="http://schemas.microsoft.com/office/drawing/2014/main" id="{BD1EDEBC-692C-4513-BD34-6A822C7F05EB}"/>
               </a:ext>
             </a:extLst>
           </p:cNvPr>
@@ -7416,7 +7416,7 @@
           <p:cNvPr id="14" name="">
             <a:extLst xmlns:a="http://schemas.openxmlformats.org/drawingml/2006/main">
               <a:ext uri="{FF2B5EF4-FFF2-40B4-BE49-F238E27FC236}">
-                <a16:creationId xmlns:a16="http://schemas.microsoft.com/office/drawing/2014/main" id="{94CD6E38-30B2-472A-8010-B7F789BCC9EA}"/>
+                <a16:creationId xmlns:a16="http://schemas.microsoft.com/office/drawing/2014/main" id="{82FBE7CE-1068-4E7D-8B00-5F8D6D2865AE}"/>
               </a:ext>
             </a:extLst>
           </p:cNvPr>
@@ -7485,7 +7485,7 @@
           <p:cNvPr id="15" name="">
             <a:extLst xmlns:a="http://schemas.openxmlformats.org/drawingml/2006/main">
               <a:ext uri="{FF2B5EF4-FFF2-40B4-BE49-F238E27FC236}">
-                <a16:creationId xmlns:a16="http://schemas.microsoft.com/office/drawing/2014/main" id="{5B53983D-A015-4017-9C8A-345468440924}"/>
+                <a16:creationId xmlns:a16="http://schemas.microsoft.com/office/drawing/2014/main" id="{59C6C92B-3600-4081-B563-BA3F85F7A85C}"/>
               </a:ext>
             </a:extLst>
           </p:cNvPr>
@@ -7554,7 +7554,7 @@
           <p:cNvPr id="16" name="">
             <a:extLst xmlns:a="http://schemas.openxmlformats.org/drawingml/2006/main">
               <a:ext uri="{FF2B5EF4-FFF2-40B4-BE49-F238E27FC236}">
-                <a16:creationId xmlns:a16="http://schemas.microsoft.com/office/drawing/2014/main" id="{50E97EDF-301C-4315-BE9E-11135CA2CF4C}"/>
+                <a16:creationId xmlns:a16="http://schemas.microsoft.com/office/drawing/2014/main" id="{6D8CD2AF-C804-41CF-8B92-A7AE37455D90}"/>
               </a:ext>
             </a:extLst>
           </p:cNvPr>
@@ -7587,7 +7587,7 @@
           <p:cNvPr id="17" name="">
             <a:extLst xmlns:a="http://schemas.openxmlformats.org/drawingml/2006/main">
               <a:ext uri="{FF2B5EF4-FFF2-40B4-BE49-F238E27FC236}">
-                <a16:creationId xmlns:a16="http://schemas.microsoft.com/office/drawing/2014/main" id="{53C42D16-17BB-4EF2-A20D-EE922EB691AB}"/>
+                <a16:creationId xmlns:a16="http://schemas.microsoft.com/office/drawing/2014/main" id="{D5B2771F-2429-4836-B1AE-553236476A4A}"/>
               </a:ext>
             </a:extLst>
           </p:cNvPr>
@@ -7656,7 +7656,7 @@
           <p:cNvPr id="18" name="">
             <a:extLst xmlns:a="http://schemas.openxmlformats.org/drawingml/2006/main">
               <a:ext uri="{FF2B5EF4-FFF2-40B4-BE49-F238E27FC236}">
-                <a16:creationId xmlns:a16="http://schemas.microsoft.com/office/drawing/2014/main" id="{D864C5E5-0CBA-4723-8DA4-F57D3FA68B19}"/>
+                <a16:creationId xmlns:a16="http://schemas.microsoft.com/office/drawing/2014/main" id="{258985A0-0246-40CA-898E-84F8F02EA998}"/>
               </a:ext>
             </a:extLst>
           </p:cNvPr>
@@ -7725,7 +7725,7 @@
           <p:cNvPr id="19" name="">
             <a:extLst xmlns:a="http://schemas.openxmlformats.org/drawingml/2006/main">
               <a:ext uri="{FF2B5EF4-FFF2-40B4-BE49-F238E27FC236}">
-                <a16:creationId xmlns:a16="http://schemas.microsoft.com/office/drawing/2014/main" id="{E8E87535-8609-42CA-A1C3-EA1DBD7EB313}"/>
+                <a16:creationId xmlns:a16="http://schemas.microsoft.com/office/drawing/2014/main" id="{67C0A17F-59F3-444E-BD42-E9C03E083CA8}"/>
               </a:ext>
             </a:extLst>
           </p:cNvPr>
@@ -7794,7 +7794,7 @@
           <p:cNvPr id="20" name="">
             <a:extLst xmlns:a="http://schemas.openxmlformats.org/drawingml/2006/main">
               <a:ext uri="{FF2B5EF4-FFF2-40B4-BE49-F238E27FC236}">
-                <a16:creationId xmlns:a16="http://schemas.microsoft.com/office/drawing/2014/main" id="{AB62464D-F6AB-4204-AC44-E92656454592}"/>
+                <a16:creationId xmlns:a16="http://schemas.microsoft.com/office/drawing/2014/main" id="{F13D1AAC-1BDC-4490-8B53-AA9E16E54236}"/>
               </a:ext>
             </a:extLst>
           </p:cNvPr>
@@ -7948,7 +7948,7 @@
           <p:cNvPr id="21" name="">
             <a:extLst xmlns:a="http://schemas.openxmlformats.org/drawingml/2006/main">
               <a:ext uri="{FF2B5EF4-FFF2-40B4-BE49-F238E27FC236}">
-                <a16:creationId xmlns:a16="http://schemas.microsoft.com/office/drawing/2014/main" id="{BD24CA88-E201-4328-BBA0-B1829B887A23}"/>
+                <a16:creationId xmlns:a16="http://schemas.microsoft.com/office/drawing/2014/main" id="{9C2EFDF6-5918-4188-AB9C-0651E01634AE}"/>
               </a:ext>
             </a:extLst>
           </p:cNvPr>
@@ -7979,7 +7979,7 @@
           <p:cNvPr id="22" name="">
             <a:extLst xmlns:a="http://schemas.openxmlformats.org/drawingml/2006/main">
               <a:ext uri="{FF2B5EF4-FFF2-40B4-BE49-F238E27FC236}">
-                <a16:creationId xmlns:a16="http://schemas.microsoft.com/office/drawing/2014/main" id="{B5CA534E-5C45-451C-A374-23FFEEC1D3C6}"/>
+                <a16:creationId xmlns:a16="http://schemas.microsoft.com/office/drawing/2014/main" id="{1AD20BFD-94FA-4633-BC46-038BED0ACDA8}"/>
               </a:ext>
             </a:extLst>
           </p:cNvPr>
@@ -8048,7 +8048,7 @@
           <p:cNvPr id="23" name="">
             <a:extLst xmlns:a="http://schemas.openxmlformats.org/drawingml/2006/main">
               <a:ext uri="{FF2B5EF4-FFF2-40B4-BE49-F238E27FC236}">
-                <a16:creationId xmlns:a16="http://schemas.microsoft.com/office/drawing/2014/main" id="{6B66491D-6720-4B13-B9B6-62C354D93DCC}"/>
+                <a16:creationId xmlns:a16="http://schemas.microsoft.com/office/drawing/2014/main" id="{290845A6-93EB-4A97-9A82-19686C49590F}"/>
               </a:ext>
             </a:extLst>
           </p:cNvPr>
@@ -8079,7 +8079,7 @@
           <p:cNvPr id="24" name="">
             <a:extLst xmlns:a="http://schemas.openxmlformats.org/drawingml/2006/main">
               <a:ext uri="{FF2B5EF4-FFF2-40B4-BE49-F238E27FC236}">
-                <a16:creationId xmlns:a16="http://schemas.microsoft.com/office/drawing/2014/main" id="{362DBEC4-ACB0-41EB-A2F5-AE6CAF71B400}"/>
+                <a16:creationId xmlns:a16="http://schemas.microsoft.com/office/drawing/2014/main" id="{01C1598C-0276-4B52-847F-3AF293314B3D}"/>
               </a:ext>
             </a:extLst>
           </p:cNvPr>
@@ -8148,7 +8148,7 @@
           <p:cNvPr id="25" name="">
             <a:extLst xmlns:a="http://schemas.openxmlformats.org/drawingml/2006/main">
               <a:ext uri="{FF2B5EF4-FFF2-40B4-BE49-F238E27FC236}">
-                <a16:creationId xmlns:a16="http://schemas.microsoft.com/office/drawing/2014/main" id="{CF550CC2-FE3E-426B-867B-C8CD167D2752}"/>
+                <a16:creationId xmlns:a16="http://schemas.microsoft.com/office/drawing/2014/main" id="{5AD66C2B-F146-4BB6-A7E0-76FB0214806E}"/>
               </a:ext>
             </a:extLst>
           </p:cNvPr>
@@ -8217,7 +8217,7 @@
           <p:cNvPr id="26" name="">
             <a:extLst xmlns:a="http://schemas.openxmlformats.org/drawingml/2006/main">
               <a:ext uri="{FF2B5EF4-FFF2-40B4-BE49-F238E27FC236}">
-                <a16:creationId xmlns:a16="http://schemas.microsoft.com/office/drawing/2014/main" id="{13E154C4-F8E3-4E53-A09F-A3A86F586CF9}"/>
+                <a16:creationId xmlns:a16="http://schemas.microsoft.com/office/drawing/2014/main" id="{544BE590-35E8-438A-85E6-ED0B509BE969}"/>
               </a:ext>
             </a:extLst>
           </p:cNvPr>
@@ -8286,7 +8286,7 @@
           <p:cNvPr id="27" name="">
             <a:extLst xmlns:a="http://schemas.openxmlformats.org/drawingml/2006/main">
               <a:ext uri="{FF2B5EF4-FFF2-40B4-BE49-F238E27FC236}">
-                <a16:creationId xmlns:a16="http://schemas.microsoft.com/office/drawing/2014/main" id="{18420E9F-EA87-4CA7-B819-58C3EEB0B83B}"/>
+                <a16:creationId xmlns:a16="http://schemas.microsoft.com/office/drawing/2014/main" id="{623DDFC9-8413-4410-8939-7CF0BC086C90}"/>
               </a:ext>
             </a:extLst>
           </p:cNvPr>
@@ -8317,7 +8317,7 @@
           <p:cNvPr id="28" name="">
             <a:extLst xmlns:a="http://schemas.openxmlformats.org/drawingml/2006/main">
               <a:ext uri="{FF2B5EF4-FFF2-40B4-BE49-F238E27FC236}">
-                <a16:creationId xmlns:a16="http://schemas.microsoft.com/office/drawing/2014/main" id="{BB65A044-B702-4DC8-BBDE-5B3844BB20A8}"/>
+                <a16:creationId xmlns:a16="http://schemas.microsoft.com/office/drawing/2014/main" id="{8D90DE46-7194-471E-B462-66D474463571}"/>
               </a:ext>
             </a:extLst>
           </p:cNvPr>
@@ -8386,7 +8386,7 @@
           <p:cNvPr id="29" name="">
             <a:extLst xmlns:a="http://schemas.openxmlformats.org/drawingml/2006/main">
               <a:ext uri="{FF2B5EF4-FFF2-40B4-BE49-F238E27FC236}">
-                <a16:creationId xmlns:a16="http://schemas.microsoft.com/office/drawing/2014/main" id="{969003A6-4404-4FB3-81C9-93F5AC6C27BB}"/>
+                <a16:creationId xmlns:a16="http://schemas.microsoft.com/office/drawing/2014/main" id="{2767058F-3030-4C10-9D38-12DB8F35981B}"/>
               </a:ext>
             </a:extLst>
           </p:cNvPr>
@@ -8455,7 +8455,7 @@
           <p:cNvPr id="30" name="">
             <a:extLst xmlns:a="http://schemas.openxmlformats.org/drawingml/2006/main">
               <a:ext uri="{FF2B5EF4-FFF2-40B4-BE49-F238E27FC236}">
-                <a16:creationId xmlns:a16="http://schemas.microsoft.com/office/drawing/2014/main" id="{D18F3C59-ADAA-468D-BE5D-553FA22A28A7}"/>
+                <a16:creationId xmlns:a16="http://schemas.microsoft.com/office/drawing/2014/main" id="{327EEDBB-EC73-44E4-9C89-C72F3AC8C8DC}"/>
               </a:ext>
             </a:extLst>
           </p:cNvPr>
@@ -8524,7 +8524,7 @@
           <p:cNvPr id="31" name="">
             <a:extLst xmlns:a="http://schemas.openxmlformats.org/drawingml/2006/main">
               <a:ext uri="{FF2B5EF4-FFF2-40B4-BE49-F238E27FC236}">
-                <a16:creationId xmlns:a16="http://schemas.microsoft.com/office/drawing/2014/main" id="{6332298E-5740-4529-AABA-CF9947415384}"/>
+                <a16:creationId xmlns:a16="http://schemas.microsoft.com/office/drawing/2014/main" id="{DD8E643D-F8EF-4DCF-8446-079996A1E4F7}"/>
               </a:ext>
             </a:extLst>
           </p:cNvPr>
@@ -8555,7 +8555,7 @@
           <p:cNvPr id="32" name="">
             <a:extLst xmlns:a="http://schemas.openxmlformats.org/drawingml/2006/main">
               <a:ext uri="{FF2B5EF4-FFF2-40B4-BE49-F238E27FC236}">
-                <a16:creationId xmlns:a16="http://schemas.microsoft.com/office/drawing/2014/main" id="{E21CD75F-6D1F-46F2-B7CA-C59EB6FD5B22}"/>
+                <a16:creationId xmlns:a16="http://schemas.microsoft.com/office/drawing/2014/main" id="{274DAC79-4F68-4A1F-A3EF-88B7A1976D91}"/>
               </a:ext>
             </a:extLst>
           </p:cNvPr>
@@ -8624,7 +8624,7 @@
           <p:cNvPr id="33" name="">
             <a:extLst xmlns:a="http://schemas.openxmlformats.org/drawingml/2006/main">
               <a:ext uri="{FF2B5EF4-FFF2-40B4-BE49-F238E27FC236}">
-                <a16:creationId xmlns:a16="http://schemas.microsoft.com/office/drawing/2014/main" id="{0E14ED49-D260-49CD-BC10-469491753ED8}"/>
+                <a16:creationId xmlns:a16="http://schemas.microsoft.com/office/drawing/2014/main" id="{991CE9EB-B2AC-4AC3-B1B6-2E23DCFB98EA}"/>
               </a:ext>
             </a:extLst>
           </p:cNvPr>
@@ -8693,7 +8693,7 @@
           <p:cNvPr id="34" name="">
             <a:extLst xmlns:a="http://schemas.openxmlformats.org/drawingml/2006/main">
               <a:ext uri="{FF2B5EF4-FFF2-40B4-BE49-F238E27FC236}">
-                <a16:creationId xmlns:a16="http://schemas.microsoft.com/office/drawing/2014/main" id="{CDB157AF-67A5-4ADD-86FE-7ACB6899C153}"/>
+                <a16:creationId xmlns:a16="http://schemas.microsoft.com/office/drawing/2014/main" id="{F8B35D53-22CC-4628-AF57-CAF44AE6DCCD}"/>
               </a:ext>
             </a:extLst>
           </p:cNvPr>
@@ -8762,7 +8762,7 @@
           <p:cNvPr id="35" name="">
             <a:extLst xmlns:a="http://schemas.openxmlformats.org/drawingml/2006/main">
               <a:ext uri="{FF2B5EF4-FFF2-40B4-BE49-F238E27FC236}">
-                <a16:creationId xmlns:a16="http://schemas.microsoft.com/office/drawing/2014/main" id="{4C5610EB-9B3F-4661-B161-FD36C484A1AD}"/>
+                <a16:creationId xmlns:a16="http://schemas.microsoft.com/office/drawing/2014/main" id="{7F4BA4C3-1E25-4EF6-B65B-7AE9C0C20D6C}"/>
               </a:ext>
             </a:extLst>
           </p:cNvPr>
@@ -8795,7 +8795,7 @@
           <p:cNvPr id="36" name="">
             <a:extLst xmlns:a="http://schemas.openxmlformats.org/drawingml/2006/main">
               <a:ext uri="{FF2B5EF4-FFF2-40B4-BE49-F238E27FC236}">
-                <a16:creationId xmlns:a16="http://schemas.microsoft.com/office/drawing/2014/main" id="{C04BEAC1-81EA-490F-A9E6-9727FDB978B7}"/>
+                <a16:creationId xmlns:a16="http://schemas.microsoft.com/office/drawing/2014/main" id="{2751142D-D588-4429-AA74-C537F425F870}"/>
               </a:ext>
             </a:extLst>
           </p:cNvPr>
@@ -8864,7 +8864,7 @@
           <p:cNvPr id="37" name="">
             <a:extLst xmlns:a="http://schemas.openxmlformats.org/drawingml/2006/main">
               <a:ext uri="{FF2B5EF4-FFF2-40B4-BE49-F238E27FC236}">
-                <a16:creationId xmlns:a16="http://schemas.microsoft.com/office/drawing/2014/main" id="{3591CA80-2EF4-43B9-8D5A-E43E87026B16}"/>
+                <a16:creationId xmlns:a16="http://schemas.microsoft.com/office/drawing/2014/main" id="{E99CBF74-B50C-4E86-9088-621C8B7FBB47}"/>
               </a:ext>
             </a:extLst>
           </p:cNvPr>
@@ -8931,7 +8931,7 @@
     </p:spTree>
     <p:extLst>
       <p:ext uri="{BB962C8B-B14F-4D97-AF65-F5344CB8AC3E}">
-        <p14:creationId xmlns:p14="http://schemas.microsoft.com/office/powerpoint/2010/main" val="352762730"/>
+        <p14:creationId xmlns:p14="http://schemas.microsoft.com/office/powerpoint/2010/main" val="264652860"/>
       </p:ext>
     </p:extLst>
   </p:cSld>
@@ -8962,7 +8962,7 @@
           <p:cNvPr id="14" name="">
             <a:extLst xmlns:a="http://schemas.openxmlformats.org/drawingml/2006/main">
               <a:ext uri="{FF2B5EF4-FFF2-40B4-BE49-F238E27FC236}">
-                <a16:creationId xmlns:a16="http://schemas.microsoft.com/office/drawing/2014/main" id="{FADCEEF0-EDD4-4677-A514-59C38F0D2740}"/>
+                <a16:creationId xmlns:a16="http://schemas.microsoft.com/office/drawing/2014/main" id="{68DAB939-C796-49AD-BA6A-77E8EB0644F0}"/>
               </a:ext>
             </a:extLst>
           </p:cNvPr>
@@ -9031,7 +9031,7 @@
           <p:cNvPr id="2" name="">
             <a:extLst xmlns:a="http://schemas.openxmlformats.org/drawingml/2006/main">
               <a:ext uri="{FF2B5EF4-FFF2-40B4-BE49-F238E27FC236}">
-                <a16:creationId xmlns:a16="http://schemas.microsoft.com/office/drawing/2014/main" id="{E84802C5-C631-4209-98F1-AA46E77CB89B}"/>
+                <a16:creationId xmlns:a16="http://schemas.microsoft.com/office/drawing/2014/main" id="{BFA9B53B-26D9-4251-8785-39B33762ADE0}"/>
               </a:ext>
             </a:extLst>
           </p:cNvPr>
@@ -9100,7 +9100,7 @@
           <p:cNvPr id="3" name="">
             <a:extLst xmlns:a="http://schemas.openxmlformats.org/drawingml/2006/main">
               <a:ext uri="{FF2B5EF4-FFF2-40B4-BE49-F238E27FC236}">
-                <a16:creationId xmlns:a16="http://schemas.microsoft.com/office/drawing/2014/main" id="{5348C825-8AD3-4B6D-ABA0-2FA25AC24D15}"/>
+                <a16:creationId xmlns:a16="http://schemas.microsoft.com/office/drawing/2014/main" id="{5AF78E06-6D8E-4F64-9607-B4EC6FB9250B}"/>
               </a:ext>
             </a:extLst>
           </p:cNvPr>
@@ -9131,7 +9131,7 @@
           <p:cNvPr id="4" name="">
             <a:extLst xmlns:a="http://schemas.openxmlformats.org/drawingml/2006/main">
               <a:ext uri="{FF2B5EF4-FFF2-40B4-BE49-F238E27FC236}">
-                <a16:creationId xmlns:a16="http://schemas.microsoft.com/office/drawing/2014/main" id="{82879F40-6842-4CBF-823A-B08F799167DB}"/>
+                <a16:creationId xmlns:a16="http://schemas.microsoft.com/office/drawing/2014/main" id="{248AD366-C13A-4278-A479-80B7EF318E55}"/>
               </a:ext>
             </a:extLst>
           </p:cNvPr>
@@ -9190,7 +9190,7 @@
                 <a:ea typeface="Segoe UI"/>
                 <a:cs typeface="Segoe UI"/>
               </a:rPr>
-              <a:t>Presenter: Member 4</a:t>
+              <a:t>Presenter: Lokesh Ture</a:t>
             </a:r>
           </a:p>
         </p:txBody>
@@ -9200,7 +9200,7 @@
           <p:cNvPr id="5" name="">
             <a:extLst xmlns:a="http://schemas.openxmlformats.org/drawingml/2006/main">
               <a:ext uri="{FF2B5EF4-FFF2-40B4-BE49-F238E27FC236}">
-                <a16:creationId xmlns:a16="http://schemas.microsoft.com/office/drawing/2014/main" id="{71726FA8-1660-44FB-B559-8829C1B8183F}"/>
+                <a16:creationId xmlns:a16="http://schemas.microsoft.com/office/drawing/2014/main" id="{2DD97D6C-CCC8-4CB7-A1D5-57AD452105ED}"/>
               </a:ext>
             </a:extLst>
           </p:cNvPr>
@@ -9269,7 +9269,7 @@
           <p:cNvPr id="6" name="">
             <a:extLst xmlns:a="http://schemas.openxmlformats.org/drawingml/2006/main">
               <a:ext uri="{FF2B5EF4-FFF2-40B4-BE49-F238E27FC236}">
-                <a16:creationId xmlns:a16="http://schemas.microsoft.com/office/drawing/2014/main" id="{60850D5A-8FED-41C5-85FD-43794657D37D}"/>
+                <a16:creationId xmlns:a16="http://schemas.microsoft.com/office/drawing/2014/main" id="{8FCE22FB-BE63-4E27-85F7-A12DD966E939}"/>
               </a:ext>
             </a:extLst>
           </p:cNvPr>
@@ -9403,7 +9403,7 @@
                           <a:ea typeface="Segoe UI"/>
                           <a:cs typeface="Segoe UI"/>
                         </a:rPr>
-                        <a:t>Member 1</a:t>
+                        <a:t>Harsh Birje</a:t>
                       </a:r>
                     </a:p>
                   </a:txBody>
@@ -9501,7 +9501,7 @@
                           <a:ea typeface="Segoe UI"/>
                           <a:cs typeface="Segoe UI"/>
                         </a:rPr>
-                        <a:t>Member 2</a:t>
+                        <a:t>Aayush Chavanke</a:t>
                       </a:r>
                     </a:p>
                   </a:txBody>
@@ -9583,7 +9583,7 @@
                           <a:ea typeface="Segoe UI"/>
                           <a:cs typeface="Segoe UI"/>
                         </a:rPr>
-                        <a:t>Member 3</a:t>
+                        <a:t>Aniket Nikam</a:t>
                       </a:r>
                     </a:p>
                   </a:txBody>
@@ -9681,7 +9681,7 @@
                           <a:ea typeface="Segoe UI"/>
                           <a:cs typeface="Segoe UI"/>
                         </a:rPr>
-                        <a:t>Member 4</a:t>
+                        <a:t>Lokesh Ture</a:t>
                       </a:r>
                     </a:p>
                   </a:txBody>
@@ -9757,7 +9757,7 @@
           <p:cNvPr id="7" name="">
             <a:extLst xmlns:a="http://schemas.openxmlformats.org/drawingml/2006/main">
               <a:ext uri="{FF2B5EF4-FFF2-40B4-BE49-F238E27FC236}">
-                <a16:creationId xmlns:a16="http://schemas.microsoft.com/office/drawing/2014/main" id="{F912D794-531E-4127-88A4-D81926C9B82C}"/>
+                <a16:creationId xmlns:a16="http://schemas.microsoft.com/office/drawing/2014/main" id="{3A43894E-93CA-496B-ABBE-BF783D9FC4C9}"/>
               </a:ext>
             </a:extLst>
           </p:cNvPr>
@@ -9826,7 +9826,7 @@
           <p:cNvPr id="8" name="">
             <a:extLst xmlns:a="http://schemas.openxmlformats.org/drawingml/2006/main">
               <a:ext uri="{FF2B5EF4-FFF2-40B4-BE49-F238E27FC236}">
-                <a16:creationId xmlns:a16="http://schemas.microsoft.com/office/drawing/2014/main" id="{AB4417F4-DE40-438C-A455-0E58D0203C57}"/>
+                <a16:creationId xmlns:a16="http://schemas.microsoft.com/office/drawing/2014/main" id="{B2DC595C-0683-4CE9-9958-F8A3FCD3A30A}"/>
               </a:ext>
             </a:extLst>
           </p:cNvPr>
@@ -9861,7 +9861,7 @@
           <p:cNvPr id="9" name="">
             <a:extLst xmlns:a="http://schemas.openxmlformats.org/drawingml/2006/main">
               <a:ext uri="{FF2B5EF4-FFF2-40B4-BE49-F238E27FC236}">
-                <a16:creationId xmlns:a16="http://schemas.microsoft.com/office/drawing/2014/main" id="{693E62AF-C334-4BDD-A0B0-4B901EF599B5}"/>
+                <a16:creationId xmlns:a16="http://schemas.microsoft.com/office/drawing/2014/main" id="{B53D9208-B108-44E4-BE01-754E65FD3056}"/>
               </a:ext>
             </a:extLst>
           </p:cNvPr>
@@ -9892,7 +9892,7 @@
           <p:cNvPr id="10" name="">
             <a:extLst xmlns:a="http://schemas.openxmlformats.org/drawingml/2006/main">
               <a:ext uri="{FF2B5EF4-FFF2-40B4-BE49-F238E27FC236}">
-                <a16:creationId xmlns:a16="http://schemas.microsoft.com/office/drawing/2014/main" id="{A2C0F58F-7092-4E65-9572-DF3CCF55C0EA}"/>
+                <a16:creationId xmlns:a16="http://schemas.microsoft.com/office/drawing/2014/main" id="{F92F40F3-4EBE-4AD0-A5D3-2904A1C3CBA5}"/>
               </a:ext>
             </a:extLst>
           </p:cNvPr>
@@ -10030,7 +10030,7 @@
           <p:cNvPr id="11" name="">
             <a:extLst xmlns:a="http://schemas.openxmlformats.org/drawingml/2006/main">
               <a:ext uri="{FF2B5EF4-FFF2-40B4-BE49-F238E27FC236}">
-                <a16:creationId xmlns:a16="http://schemas.microsoft.com/office/drawing/2014/main" id="{BE8B45CE-1FF3-4264-9F83-6F004995EA7E}"/>
+                <a16:creationId xmlns:a16="http://schemas.microsoft.com/office/drawing/2014/main" id="{C6AAB6E9-880B-41AE-AA45-94E52ADC31F5}"/>
               </a:ext>
             </a:extLst>
           </p:cNvPr>
@@ -10099,7 +10099,7 @@
           <p:cNvPr id="12" name="">
             <a:extLst xmlns:a="http://schemas.openxmlformats.org/drawingml/2006/main">
               <a:ext uri="{FF2B5EF4-FFF2-40B4-BE49-F238E27FC236}">
-                <a16:creationId xmlns:a16="http://schemas.microsoft.com/office/drawing/2014/main" id="{D2135636-4BA3-4F94-B7C2-85A98AA20C6F}"/>
+                <a16:creationId xmlns:a16="http://schemas.microsoft.com/office/drawing/2014/main" id="{D6B93616-61D9-490C-80EC-A068E0A0E154}"/>
               </a:ext>
             </a:extLst>
           </p:cNvPr>
@@ -10253,7 +10253,7 @@
           <p:cNvPr id="13" name="">
             <a:extLst xmlns:a="http://schemas.openxmlformats.org/drawingml/2006/main">
               <a:ext uri="{FF2B5EF4-FFF2-40B4-BE49-F238E27FC236}">
-                <a16:creationId xmlns:a16="http://schemas.microsoft.com/office/drawing/2014/main" id="{5BA49B94-77BB-4382-866F-547D7A5A8121}"/>
+                <a16:creationId xmlns:a16="http://schemas.microsoft.com/office/drawing/2014/main" id="{875FE377-3B3F-4353-BA64-5F047AF633C9}"/>
               </a:ext>
             </a:extLst>
           </p:cNvPr>
@@ -10320,7 +10320,7 @@
     </p:spTree>
     <p:extLst>
       <p:ext uri="{BB962C8B-B14F-4D97-AF65-F5344CB8AC3E}">
-        <p14:creationId xmlns:p14="http://schemas.microsoft.com/office/powerpoint/2010/main" val="1968000223"/>
+        <p14:creationId xmlns:p14="http://schemas.microsoft.com/office/powerpoint/2010/main" val="1029688840"/>
       </p:ext>
     </p:extLst>
   </p:cSld>
@@ -10351,7 +10351,7 @@
           <p:cNvPr id="29" name="">
             <a:extLst xmlns:a="http://schemas.openxmlformats.org/drawingml/2006/main">
               <a:ext uri="{FF2B5EF4-FFF2-40B4-BE49-F238E27FC236}">
-                <a16:creationId xmlns:a16="http://schemas.microsoft.com/office/drawing/2014/main" id="{C412B7BD-9159-44CA-8514-6479E25EDFFB}"/>
+                <a16:creationId xmlns:a16="http://schemas.microsoft.com/office/drawing/2014/main" id="{D9BC8B26-B4A0-4C81-8BDF-908137840AAE}"/>
               </a:ext>
             </a:extLst>
           </p:cNvPr>
@@ -10420,7 +10420,7 @@
           <p:cNvPr id="2" name="">
             <a:extLst xmlns:a="http://schemas.openxmlformats.org/drawingml/2006/main">
               <a:ext uri="{FF2B5EF4-FFF2-40B4-BE49-F238E27FC236}">
-                <a16:creationId xmlns:a16="http://schemas.microsoft.com/office/drawing/2014/main" id="{ED45ABF3-6F3F-496D-BA0E-A4E5AF77BC49}"/>
+                <a16:creationId xmlns:a16="http://schemas.microsoft.com/office/drawing/2014/main" id="{B52F73B6-0223-4C38-8001-DB5C8D3AA929}"/>
               </a:ext>
             </a:extLst>
           </p:cNvPr>
@@ -10489,7 +10489,7 @@
           <p:cNvPr id="3" name="">
             <a:extLst xmlns:a="http://schemas.openxmlformats.org/drawingml/2006/main">
               <a:ext uri="{FF2B5EF4-FFF2-40B4-BE49-F238E27FC236}">
-                <a16:creationId xmlns:a16="http://schemas.microsoft.com/office/drawing/2014/main" id="{8239E7AC-98FE-42CF-85CD-B87108B95114}"/>
+                <a16:creationId xmlns:a16="http://schemas.microsoft.com/office/drawing/2014/main" id="{A33F33C9-D8AB-49B6-8BE8-D2A0040C3CAB}"/>
               </a:ext>
             </a:extLst>
           </p:cNvPr>
@@ -10520,7 +10520,7 @@
           <p:cNvPr id="4" name="">
             <a:extLst xmlns:a="http://schemas.openxmlformats.org/drawingml/2006/main">
               <a:ext uri="{FF2B5EF4-FFF2-40B4-BE49-F238E27FC236}">
-                <a16:creationId xmlns:a16="http://schemas.microsoft.com/office/drawing/2014/main" id="{D3004B83-CE8D-4C9E-867F-6D1308B89D11}"/>
+                <a16:creationId xmlns:a16="http://schemas.microsoft.com/office/drawing/2014/main" id="{2146754C-EC1E-4AF0-9B10-B118EE8243A0}"/>
               </a:ext>
             </a:extLst>
           </p:cNvPr>
@@ -10579,7 +10579,7 @@
                 <a:ea typeface="Segoe UI"/>
                 <a:cs typeface="Segoe UI"/>
               </a:rPr>
-              <a:t>Presenter: Member 1</a:t>
+              <a:t>Presenter: Harsh Birje</a:t>
             </a:r>
           </a:p>
         </p:txBody>
@@ -10589,7 +10589,7 @@
           <p:cNvPr id="5" name="">
             <a:extLst xmlns:a="http://schemas.openxmlformats.org/drawingml/2006/main">
               <a:ext uri="{FF2B5EF4-FFF2-40B4-BE49-F238E27FC236}">
-                <a16:creationId xmlns:a16="http://schemas.microsoft.com/office/drawing/2014/main" id="{2B4C03D8-0685-4677-A611-A1B2E381DA9D}"/>
+                <a16:creationId xmlns:a16="http://schemas.microsoft.com/office/drawing/2014/main" id="{40659C64-C96B-4760-8504-18E0CB54990A}"/>
               </a:ext>
             </a:extLst>
           </p:cNvPr>
@@ -10658,7 +10658,7 @@
           <p:cNvPr id="6" name="">
             <a:extLst xmlns:a="http://schemas.openxmlformats.org/drawingml/2006/main">
               <a:ext uri="{FF2B5EF4-FFF2-40B4-BE49-F238E27FC236}">
-                <a16:creationId xmlns:a16="http://schemas.microsoft.com/office/drawing/2014/main" id="{61997B48-4C44-4C1F-BC28-BEC2BA285268}"/>
+                <a16:creationId xmlns:a16="http://schemas.microsoft.com/office/drawing/2014/main" id="{24B0C403-04DB-441B-A610-2FDB00DCE038}"/>
               </a:ext>
             </a:extLst>
           </p:cNvPr>
@@ -10727,7 +10727,7 @@
           <p:cNvPr id="7" name="">
             <a:extLst xmlns:a="http://schemas.openxmlformats.org/drawingml/2006/main">
               <a:ext uri="{FF2B5EF4-FFF2-40B4-BE49-F238E27FC236}">
-                <a16:creationId xmlns:a16="http://schemas.microsoft.com/office/drawing/2014/main" id="{ADAE7E9F-6D2E-404F-8E0E-AD1B4C0404B4}"/>
+                <a16:creationId xmlns:a16="http://schemas.microsoft.com/office/drawing/2014/main" id="{3A742E69-AD29-4FD7-9140-5BF99DA859B4}"/>
               </a:ext>
             </a:extLst>
           </p:cNvPr>
@@ -10796,7 +10796,7 @@
           <p:cNvPr id="8" name="">
             <a:extLst xmlns:a="http://schemas.openxmlformats.org/drawingml/2006/main">
               <a:ext uri="{FF2B5EF4-FFF2-40B4-BE49-F238E27FC236}">
-                <a16:creationId xmlns:a16="http://schemas.microsoft.com/office/drawing/2014/main" id="{18D862AB-6546-4926-88DA-C5C7843EB214}"/>
+                <a16:creationId xmlns:a16="http://schemas.microsoft.com/office/drawing/2014/main" id="{62ECC1F0-EE2E-4E3F-A71B-9936F6C176F0}"/>
               </a:ext>
             </a:extLst>
           </p:cNvPr>
@@ -10865,7 +10865,7 @@
           <p:cNvPr id="9" name="">
             <a:extLst xmlns:a="http://schemas.openxmlformats.org/drawingml/2006/main">
               <a:ext uri="{FF2B5EF4-FFF2-40B4-BE49-F238E27FC236}">
-                <a16:creationId xmlns:a16="http://schemas.microsoft.com/office/drawing/2014/main" id="{5CA7287F-72C2-44C2-848D-4D5BF81DE2FA}"/>
+                <a16:creationId xmlns:a16="http://schemas.microsoft.com/office/drawing/2014/main" id="{7FE829A4-13A1-4E00-98B3-87D9AB1A634C}"/>
               </a:ext>
             </a:extLst>
           </p:cNvPr>
@@ -11019,7 +11019,7 @@
           <p:cNvPr id="10" name="">
             <a:extLst xmlns:a="http://schemas.openxmlformats.org/drawingml/2006/main">
               <a:ext uri="{FF2B5EF4-FFF2-40B4-BE49-F238E27FC236}">
-                <a16:creationId xmlns:a16="http://schemas.microsoft.com/office/drawing/2014/main" id="{93DC8F57-DD1F-497A-9789-B3554B3DA4F0}"/>
+                <a16:creationId xmlns:a16="http://schemas.microsoft.com/office/drawing/2014/main" id="{010E0317-D679-4E4B-BCB3-2E3C5546B66E}"/>
               </a:ext>
             </a:extLst>
           </p:cNvPr>
@@ -11050,7 +11050,7 @@
           <p:cNvPr id="11" name="">
             <a:extLst xmlns:a="http://schemas.openxmlformats.org/drawingml/2006/main">
               <a:ext uri="{FF2B5EF4-FFF2-40B4-BE49-F238E27FC236}">
-                <a16:creationId xmlns:a16="http://schemas.microsoft.com/office/drawing/2014/main" id="{35F9CE89-C11C-4218-9C03-BED79D280DD4}"/>
+                <a16:creationId xmlns:a16="http://schemas.microsoft.com/office/drawing/2014/main" id="{FCBA6282-ADF4-4E0F-B4CF-56AC452643ED}"/>
               </a:ext>
             </a:extLst>
           </p:cNvPr>
@@ -11119,7 +11119,7 @@
           <p:cNvPr id="12" name="">
             <a:extLst xmlns:a="http://schemas.openxmlformats.org/drawingml/2006/main">
               <a:ext uri="{FF2B5EF4-FFF2-40B4-BE49-F238E27FC236}">
-                <a16:creationId xmlns:a16="http://schemas.microsoft.com/office/drawing/2014/main" id="{B8075473-C076-431A-B897-994267F9CF57}"/>
+                <a16:creationId xmlns:a16="http://schemas.microsoft.com/office/drawing/2014/main" id="{AB7B3EEA-51E5-48F9-8F07-7DADC669289E}"/>
               </a:ext>
             </a:extLst>
           </p:cNvPr>
@@ -11152,7 +11152,7 @@
           <p:cNvPr id="13" name="">
             <a:extLst xmlns:a="http://schemas.openxmlformats.org/drawingml/2006/main">
               <a:ext uri="{FF2B5EF4-FFF2-40B4-BE49-F238E27FC236}">
-                <a16:creationId xmlns:a16="http://schemas.microsoft.com/office/drawing/2014/main" id="{EEADB130-53CA-4D59-9B83-35D5673CC908}"/>
+                <a16:creationId xmlns:a16="http://schemas.microsoft.com/office/drawing/2014/main" id="{83E7BABE-9992-4CA8-A921-05A221281B12}"/>
               </a:ext>
             </a:extLst>
           </p:cNvPr>
@@ -11221,7 +11221,7 @@
           <p:cNvPr id="14" name="">
             <a:extLst xmlns:a="http://schemas.openxmlformats.org/drawingml/2006/main">
               <a:ext uri="{FF2B5EF4-FFF2-40B4-BE49-F238E27FC236}">
-                <a16:creationId xmlns:a16="http://schemas.microsoft.com/office/drawing/2014/main" id="{AB13301C-8D2F-4FE8-A420-52C376A50013}"/>
+                <a16:creationId xmlns:a16="http://schemas.microsoft.com/office/drawing/2014/main" id="{A7F39D8F-2EB8-4E08-B4A5-6080E08AACDE}"/>
               </a:ext>
             </a:extLst>
           </p:cNvPr>
@@ -11290,7 +11290,7 @@
           <p:cNvPr id="15" name="">
             <a:extLst xmlns:a="http://schemas.openxmlformats.org/drawingml/2006/main">
               <a:ext uri="{FF2B5EF4-FFF2-40B4-BE49-F238E27FC236}">
-                <a16:creationId xmlns:a16="http://schemas.microsoft.com/office/drawing/2014/main" id="{C140C43A-5369-4EB3-BEDE-0EF1AB22AB9F}"/>
+                <a16:creationId xmlns:a16="http://schemas.microsoft.com/office/drawing/2014/main" id="{BC72A726-8644-4EE0-9459-CE1DB8B1BA52}"/>
               </a:ext>
             </a:extLst>
           </p:cNvPr>
@@ -11359,7 +11359,7 @@
           <p:cNvPr id="16" name="">
             <a:extLst xmlns:a="http://schemas.openxmlformats.org/drawingml/2006/main">
               <a:ext uri="{FF2B5EF4-FFF2-40B4-BE49-F238E27FC236}">
-                <a16:creationId xmlns:a16="http://schemas.microsoft.com/office/drawing/2014/main" id="{B4F262C4-1689-44DD-AEB8-BC02DE9BFCF9}"/>
+                <a16:creationId xmlns:a16="http://schemas.microsoft.com/office/drawing/2014/main" id="{B49AE561-133E-45A2-A9E3-B267FB452EAF}"/>
               </a:ext>
             </a:extLst>
           </p:cNvPr>
@@ -11392,7 +11392,7 @@
           <p:cNvPr id="17" name="">
             <a:extLst xmlns:a="http://schemas.openxmlformats.org/drawingml/2006/main">
               <a:ext uri="{FF2B5EF4-FFF2-40B4-BE49-F238E27FC236}">
-                <a16:creationId xmlns:a16="http://schemas.microsoft.com/office/drawing/2014/main" id="{0E485929-397C-4C53-9F2D-B8F29D648635}"/>
+                <a16:creationId xmlns:a16="http://schemas.microsoft.com/office/drawing/2014/main" id="{B763D356-301C-4189-9F76-5CCF7F3EDE52}"/>
               </a:ext>
             </a:extLst>
           </p:cNvPr>
@@ -11461,7 +11461,7 @@
           <p:cNvPr id="18" name="">
             <a:extLst xmlns:a="http://schemas.openxmlformats.org/drawingml/2006/main">
               <a:ext uri="{FF2B5EF4-FFF2-40B4-BE49-F238E27FC236}">
-                <a16:creationId xmlns:a16="http://schemas.microsoft.com/office/drawing/2014/main" id="{29A34A6C-83FA-4443-A4DA-5D98FF01CABF}"/>
+                <a16:creationId xmlns:a16="http://schemas.microsoft.com/office/drawing/2014/main" id="{A8AEED4E-5DEF-4F74-B6BA-79357DD92664}"/>
               </a:ext>
             </a:extLst>
           </p:cNvPr>
@@ -11530,7 +11530,7 @@
           <p:cNvPr id="19" name="">
             <a:extLst xmlns:a="http://schemas.openxmlformats.org/drawingml/2006/main">
               <a:ext uri="{FF2B5EF4-FFF2-40B4-BE49-F238E27FC236}">
-                <a16:creationId xmlns:a16="http://schemas.microsoft.com/office/drawing/2014/main" id="{9E28E533-8C0D-439C-B784-64A6C6D6F4F7}"/>
+                <a16:creationId xmlns:a16="http://schemas.microsoft.com/office/drawing/2014/main" id="{2C41BDB6-3CC8-4699-AE23-9A142C0E4240}"/>
               </a:ext>
             </a:extLst>
           </p:cNvPr>
@@ -11599,7 +11599,7 @@
           <p:cNvPr id="20" name="">
             <a:extLst xmlns:a="http://schemas.openxmlformats.org/drawingml/2006/main">
               <a:ext uri="{FF2B5EF4-FFF2-40B4-BE49-F238E27FC236}">
-                <a16:creationId xmlns:a16="http://schemas.microsoft.com/office/drawing/2014/main" id="{BC759711-000F-44D1-99D8-69AE1E1F2A01}"/>
+                <a16:creationId xmlns:a16="http://schemas.microsoft.com/office/drawing/2014/main" id="{97803095-7A78-49D6-A08A-8286619633CC}"/>
               </a:ext>
             </a:extLst>
           </p:cNvPr>
@@ -11632,7 +11632,7 @@
           <p:cNvPr id="21" name="">
             <a:extLst xmlns:a="http://schemas.openxmlformats.org/drawingml/2006/main">
               <a:ext uri="{FF2B5EF4-FFF2-40B4-BE49-F238E27FC236}">
-                <a16:creationId xmlns:a16="http://schemas.microsoft.com/office/drawing/2014/main" id="{5BB461A8-8C06-4305-AE46-39FFFE6AE123}"/>
+                <a16:creationId xmlns:a16="http://schemas.microsoft.com/office/drawing/2014/main" id="{B0559586-9234-4D28-A1CD-7BA153C5C838}"/>
               </a:ext>
             </a:extLst>
           </p:cNvPr>
@@ -11701,7 +11701,7 @@
           <p:cNvPr id="22" name="">
             <a:extLst xmlns:a="http://schemas.openxmlformats.org/drawingml/2006/main">
               <a:ext uri="{FF2B5EF4-FFF2-40B4-BE49-F238E27FC236}">
-                <a16:creationId xmlns:a16="http://schemas.microsoft.com/office/drawing/2014/main" id="{CA8B614A-C99F-47DE-B8B7-CB92EE0CA321}"/>
+                <a16:creationId xmlns:a16="http://schemas.microsoft.com/office/drawing/2014/main" id="{40ECAFE4-1ADF-4BD6-AE77-23ABF419D94E}"/>
               </a:ext>
             </a:extLst>
           </p:cNvPr>
@@ -11770,7 +11770,7 @@
           <p:cNvPr id="23" name="">
             <a:extLst xmlns:a="http://schemas.openxmlformats.org/drawingml/2006/main">
               <a:ext uri="{FF2B5EF4-FFF2-40B4-BE49-F238E27FC236}">
-                <a16:creationId xmlns:a16="http://schemas.microsoft.com/office/drawing/2014/main" id="{BEDED4E5-CAFB-4DD9-B987-55E61E1A79ED}"/>
+                <a16:creationId xmlns:a16="http://schemas.microsoft.com/office/drawing/2014/main" id="{36C30317-4E39-4503-BCBD-4E720DEB02A1}"/>
               </a:ext>
             </a:extLst>
           </p:cNvPr>
@@ -11839,7 +11839,7 @@
           <p:cNvPr id="24" name="">
             <a:extLst xmlns:a="http://schemas.openxmlformats.org/drawingml/2006/main">
               <a:ext uri="{FF2B5EF4-FFF2-40B4-BE49-F238E27FC236}">
-                <a16:creationId xmlns:a16="http://schemas.microsoft.com/office/drawing/2014/main" id="{6AFCE64F-18FA-49B5-AC74-3230AB9A2BAD}"/>
+                <a16:creationId xmlns:a16="http://schemas.microsoft.com/office/drawing/2014/main" id="{E4A38D30-053B-49D2-A99F-F98DF628FB10}"/>
               </a:ext>
             </a:extLst>
           </p:cNvPr>
@@ -11872,7 +11872,7 @@
           <p:cNvPr id="25" name="">
             <a:extLst xmlns:a="http://schemas.openxmlformats.org/drawingml/2006/main">
               <a:ext uri="{FF2B5EF4-FFF2-40B4-BE49-F238E27FC236}">
-                <a16:creationId xmlns:a16="http://schemas.microsoft.com/office/drawing/2014/main" id="{1C0C9F9C-8E45-4377-A1B7-CE4FB484DE78}"/>
+                <a16:creationId xmlns:a16="http://schemas.microsoft.com/office/drawing/2014/main" id="{B99B9CC9-1071-49AC-924C-A52605CE7773}"/>
               </a:ext>
             </a:extLst>
           </p:cNvPr>
@@ -11941,7 +11941,7 @@
           <p:cNvPr id="26" name="">
             <a:extLst xmlns:a="http://schemas.openxmlformats.org/drawingml/2006/main">
               <a:ext uri="{FF2B5EF4-FFF2-40B4-BE49-F238E27FC236}">
-                <a16:creationId xmlns:a16="http://schemas.microsoft.com/office/drawing/2014/main" id="{1F748336-CE90-463F-95A1-0AE700E1127D}"/>
+                <a16:creationId xmlns:a16="http://schemas.microsoft.com/office/drawing/2014/main" id="{0704A59B-D2D5-4A41-836A-E82B6393FD06}"/>
               </a:ext>
             </a:extLst>
           </p:cNvPr>
@@ -12010,7 +12010,7 @@
           <p:cNvPr id="27" name="">
             <a:extLst xmlns:a="http://schemas.openxmlformats.org/drawingml/2006/main">
               <a:ext uri="{FF2B5EF4-FFF2-40B4-BE49-F238E27FC236}">
-                <a16:creationId xmlns:a16="http://schemas.microsoft.com/office/drawing/2014/main" id="{5AEE6B40-A6D8-4E82-B999-276B4218AF79}"/>
+                <a16:creationId xmlns:a16="http://schemas.microsoft.com/office/drawing/2014/main" id="{EB1FB0F8-B3A5-4C1C-83BF-3063FCB4C5A5}"/>
               </a:ext>
             </a:extLst>
           </p:cNvPr>
@@ -12079,7 +12079,7 @@
           <p:cNvPr id="28" name="">
             <a:extLst xmlns:a="http://schemas.openxmlformats.org/drawingml/2006/main">
               <a:ext uri="{FF2B5EF4-FFF2-40B4-BE49-F238E27FC236}">
-                <a16:creationId xmlns:a16="http://schemas.microsoft.com/office/drawing/2014/main" id="{EAAF141F-67E0-48DA-A060-20D7094F3B59}"/>
+                <a16:creationId xmlns:a16="http://schemas.microsoft.com/office/drawing/2014/main" id="{F21B04F0-BFC2-4333-B200-3964DA219AF7}"/>
               </a:ext>
             </a:extLst>
           </p:cNvPr>
@@ -12146,7 +12146,7 @@
     </p:spTree>
     <p:extLst>
       <p:ext uri="{BB962C8B-B14F-4D97-AF65-F5344CB8AC3E}">
-        <p14:creationId xmlns:p14="http://schemas.microsoft.com/office/powerpoint/2010/main" val="1107444226"/>
+        <p14:creationId xmlns:p14="http://schemas.microsoft.com/office/powerpoint/2010/main" val="251468379"/>
       </p:ext>
     </p:extLst>
   </p:cSld>
@@ -12177,7 +12177,7 @@
           <p:cNvPr id="67" name="">
             <a:extLst xmlns:a="http://schemas.openxmlformats.org/drawingml/2006/main">
               <a:ext uri="{FF2B5EF4-FFF2-40B4-BE49-F238E27FC236}">
-                <a16:creationId xmlns:a16="http://schemas.microsoft.com/office/drawing/2014/main" id="{BF86BEA4-1157-45D8-8FC6-B6B6B742ED72}"/>
+                <a16:creationId xmlns:a16="http://schemas.microsoft.com/office/drawing/2014/main" id="{F4466D7B-A060-4D00-A465-FB9337C8625C}"/>
               </a:ext>
             </a:extLst>
           </p:cNvPr>
@@ -12246,7 +12246,7 @@
           <p:cNvPr id="2" name="">
             <a:extLst xmlns:a="http://schemas.openxmlformats.org/drawingml/2006/main">
               <a:ext uri="{FF2B5EF4-FFF2-40B4-BE49-F238E27FC236}">
-                <a16:creationId xmlns:a16="http://schemas.microsoft.com/office/drawing/2014/main" id="{B13BBABC-9E85-44D5-AC06-F9DB5C67BBF5}"/>
+                <a16:creationId xmlns:a16="http://schemas.microsoft.com/office/drawing/2014/main" id="{D27B8FDD-E835-4DC0-A4BD-B16EF045442A}"/>
               </a:ext>
             </a:extLst>
           </p:cNvPr>
@@ -12315,7 +12315,7 @@
           <p:cNvPr id="3" name="">
             <a:extLst xmlns:a="http://schemas.openxmlformats.org/drawingml/2006/main">
               <a:ext uri="{FF2B5EF4-FFF2-40B4-BE49-F238E27FC236}">
-                <a16:creationId xmlns:a16="http://schemas.microsoft.com/office/drawing/2014/main" id="{5A8313A6-B750-4B1B-8211-21333B1A7A6E}"/>
+                <a16:creationId xmlns:a16="http://schemas.microsoft.com/office/drawing/2014/main" id="{13970481-46FA-4CA9-9BE3-4D2669936205}"/>
               </a:ext>
             </a:extLst>
           </p:cNvPr>
@@ -12346,7 +12346,7 @@
           <p:cNvPr id="4" name="">
             <a:extLst xmlns:a="http://schemas.openxmlformats.org/drawingml/2006/main">
               <a:ext uri="{FF2B5EF4-FFF2-40B4-BE49-F238E27FC236}">
-                <a16:creationId xmlns:a16="http://schemas.microsoft.com/office/drawing/2014/main" id="{24FC3CBF-A564-4CBA-BFE8-F4C73AD052A7}"/>
+                <a16:creationId xmlns:a16="http://schemas.microsoft.com/office/drawing/2014/main" id="{D5A82DC0-0DED-4D24-B24C-A3D4354836D6}"/>
               </a:ext>
             </a:extLst>
           </p:cNvPr>
@@ -12405,7 +12405,7 @@
                 <a:ea typeface="Segoe UI"/>
                 <a:cs typeface="Segoe UI"/>
               </a:rPr>
-              <a:t>Presenter: Member 1</a:t>
+              <a:t>Presenter: Harsh Birje</a:t>
             </a:r>
           </a:p>
         </p:txBody>
@@ -12415,7 +12415,7 @@
           <p:cNvPr id="5" name="">
             <a:extLst xmlns:a="http://schemas.openxmlformats.org/drawingml/2006/main">
               <a:ext uri="{FF2B5EF4-FFF2-40B4-BE49-F238E27FC236}">
-                <a16:creationId xmlns:a16="http://schemas.microsoft.com/office/drawing/2014/main" id="{717A1863-94CA-4FD7-A753-B89071E63FD0}"/>
+                <a16:creationId xmlns:a16="http://schemas.microsoft.com/office/drawing/2014/main" id="{D2844F3A-2C61-4F16-BABD-426E74602EDC}"/>
               </a:ext>
             </a:extLst>
           </p:cNvPr>
@@ -12484,7 +12484,7 @@
           <p:cNvPr id="6" name="">
             <a:extLst xmlns:a="http://schemas.openxmlformats.org/drawingml/2006/main">
               <a:ext uri="{FF2B5EF4-FFF2-40B4-BE49-F238E27FC236}">
-                <a16:creationId xmlns:a16="http://schemas.microsoft.com/office/drawing/2014/main" id="{E7D7A7C4-1E21-4912-BB92-CE33495C89B3}"/>
+                <a16:creationId xmlns:a16="http://schemas.microsoft.com/office/drawing/2014/main" id="{E5B82F8E-327A-4E75-B1B9-15D8DC7AA83E}"/>
               </a:ext>
             </a:extLst>
           </p:cNvPr>
@@ -12553,7 +12553,7 @@
           <p:cNvPr id="7" name="">
             <a:extLst xmlns:a="http://schemas.openxmlformats.org/drawingml/2006/main">
               <a:ext uri="{FF2B5EF4-FFF2-40B4-BE49-F238E27FC236}">
-                <a16:creationId xmlns:a16="http://schemas.microsoft.com/office/drawing/2014/main" id="{23BA0D1A-B43B-4F12-B294-58498A204283}"/>
+                <a16:creationId xmlns:a16="http://schemas.microsoft.com/office/drawing/2014/main" id="{9D6CBF4D-F6B0-4C80-B4DB-7BE27146C083}"/>
               </a:ext>
             </a:extLst>
           </p:cNvPr>
@@ -12586,7 +12586,7 @@
           <p:cNvPr id="8" name="">
             <a:extLst xmlns:a="http://schemas.openxmlformats.org/drawingml/2006/main">
               <a:ext uri="{FF2B5EF4-FFF2-40B4-BE49-F238E27FC236}">
-                <a16:creationId xmlns:a16="http://schemas.microsoft.com/office/drawing/2014/main" id="{93A88BF7-D109-4544-B8C0-30D849BBF432}"/>
+                <a16:creationId xmlns:a16="http://schemas.microsoft.com/office/drawing/2014/main" id="{4716CF11-8C85-4A1E-9B54-012B09089FF8}"/>
               </a:ext>
             </a:extLst>
           </p:cNvPr>
@@ -12655,7 +12655,7 @@
           <p:cNvPr id="9" name="">
             <a:extLst xmlns:a="http://schemas.openxmlformats.org/drawingml/2006/main">
               <a:ext uri="{FF2B5EF4-FFF2-40B4-BE49-F238E27FC236}">
-                <a16:creationId xmlns:a16="http://schemas.microsoft.com/office/drawing/2014/main" id="{76303C56-306D-42D6-AB46-454402A0BB93}"/>
+                <a16:creationId xmlns:a16="http://schemas.microsoft.com/office/drawing/2014/main" id="{64D24567-099F-4908-877A-383533E79BCB}"/>
               </a:ext>
             </a:extLst>
           </p:cNvPr>
@@ -12724,7 +12724,7 @@
           <p:cNvPr id="10" name="">
             <a:extLst xmlns:a="http://schemas.openxmlformats.org/drawingml/2006/main">
               <a:ext uri="{FF2B5EF4-FFF2-40B4-BE49-F238E27FC236}">
-                <a16:creationId xmlns:a16="http://schemas.microsoft.com/office/drawing/2014/main" id="{771506AA-5E62-4914-A1CA-4073DCAC8083}"/>
+                <a16:creationId xmlns:a16="http://schemas.microsoft.com/office/drawing/2014/main" id="{E3EA1695-18AB-45C6-B576-B6225BC67D1E}"/>
               </a:ext>
             </a:extLst>
           </p:cNvPr>
@@ -12755,7 +12755,7 @@
           <p:cNvPr id="11" name="">
             <a:extLst xmlns:a="http://schemas.openxmlformats.org/drawingml/2006/main">
               <a:ext uri="{FF2B5EF4-FFF2-40B4-BE49-F238E27FC236}">
-                <a16:creationId xmlns:a16="http://schemas.microsoft.com/office/drawing/2014/main" id="{7893CD63-EF92-42E3-AEA5-8E36FD67CE9B}"/>
+                <a16:creationId xmlns:a16="http://schemas.microsoft.com/office/drawing/2014/main" id="{D007E752-9936-48F8-B892-C95D108AC6C6}"/>
               </a:ext>
             </a:extLst>
           </p:cNvPr>
@@ -12786,7 +12786,7 @@
           <p:cNvPr id="12" name="">
             <a:extLst xmlns:a="http://schemas.openxmlformats.org/drawingml/2006/main">
               <a:ext uri="{FF2B5EF4-FFF2-40B4-BE49-F238E27FC236}">
-                <a16:creationId xmlns:a16="http://schemas.microsoft.com/office/drawing/2014/main" id="{497D97B7-B2EA-482B-80B9-50BDB08873BE}"/>
+                <a16:creationId xmlns:a16="http://schemas.microsoft.com/office/drawing/2014/main" id="{3E49F3EF-D648-44F0-B44C-3A338FA8A7D4}"/>
               </a:ext>
             </a:extLst>
           </p:cNvPr>
@@ -12819,7 +12819,7 @@
           <p:cNvPr id="13" name="">
             <a:extLst xmlns:a="http://schemas.openxmlformats.org/drawingml/2006/main">
               <a:ext uri="{FF2B5EF4-FFF2-40B4-BE49-F238E27FC236}">
-                <a16:creationId xmlns:a16="http://schemas.microsoft.com/office/drawing/2014/main" id="{369C9AC5-4D50-4CF8-B79F-E78F7187826F}"/>
+                <a16:creationId xmlns:a16="http://schemas.microsoft.com/office/drawing/2014/main" id="{F1515BA5-835A-4E64-ADF3-4D2D097774B2}"/>
               </a:ext>
             </a:extLst>
           </p:cNvPr>
@@ -12888,7 +12888,7 @@
           <p:cNvPr id="14" name="">
             <a:extLst xmlns:a="http://schemas.openxmlformats.org/drawingml/2006/main">
               <a:ext uri="{FF2B5EF4-FFF2-40B4-BE49-F238E27FC236}">
-                <a16:creationId xmlns:a16="http://schemas.microsoft.com/office/drawing/2014/main" id="{74F1C622-71C3-4DDE-A99B-D398F8436094}"/>
+                <a16:creationId xmlns:a16="http://schemas.microsoft.com/office/drawing/2014/main" id="{69439DE4-52E0-49E3-92A1-C8B03E9DE1B6}"/>
               </a:ext>
             </a:extLst>
           </p:cNvPr>
@@ -12957,7 +12957,7 @@
           <p:cNvPr id="15" name="">
             <a:extLst xmlns:a="http://schemas.openxmlformats.org/drawingml/2006/main">
               <a:ext uri="{FF2B5EF4-FFF2-40B4-BE49-F238E27FC236}">
-                <a16:creationId xmlns:a16="http://schemas.microsoft.com/office/drawing/2014/main" id="{C937F683-5D57-4BEC-96EE-69FD6D808B15}"/>
+                <a16:creationId xmlns:a16="http://schemas.microsoft.com/office/drawing/2014/main" id="{04B539C1-848C-4555-A66C-8E6BBD523BCB}"/>
               </a:ext>
             </a:extLst>
           </p:cNvPr>
@@ -12988,7 +12988,7 @@
           <p:cNvPr id="16" name="">
             <a:extLst xmlns:a="http://schemas.openxmlformats.org/drawingml/2006/main">
               <a:ext uri="{FF2B5EF4-FFF2-40B4-BE49-F238E27FC236}">
-                <a16:creationId xmlns:a16="http://schemas.microsoft.com/office/drawing/2014/main" id="{6C95E907-F237-4D57-884B-EF69E2F73137}"/>
+                <a16:creationId xmlns:a16="http://schemas.microsoft.com/office/drawing/2014/main" id="{1AAE3592-9CFB-4F99-85D5-4D7C1B057DEB}"/>
               </a:ext>
             </a:extLst>
           </p:cNvPr>
@@ -13019,7 +13019,7 @@
           <p:cNvPr id="17" name="">
             <a:extLst xmlns:a="http://schemas.openxmlformats.org/drawingml/2006/main">
               <a:ext uri="{FF2B5EF4-FFF2-40B4-BE49-F238E27FC236}">
-                <a16:creationId xmlns:a16="http://schemas.microsoft.com/office/drawing/2014/main" id="{C28D4C41-9101-4B15-ACC3-53C6E8A77876}"/>
+                <a16:creationId xmlns:a16="http://schemas.microsoft.com/office/drawing/2014/main" id="{4C0418E7-51F7-4D46-8E2B-DEF4FC671478}"/>
               </a:ext>
             </a:extLst>
           </p:cNvPr>
@@ -13052,7 +13052,7 @@
           <p:cNvPr id="18" name="">
             <a:extLst xmlns:a="http://schemas.openxmlformats.org/drawingml/2006/main">
               <a:ext uri="{FF2B5EF4-FFF2-40B4-BE49-F238E27FC236}">
-                <a16:creationId xmlns:a16="http://schemas.microsoft.com/office/drawing/2014/main" id="{D3D5715F-6A11-4B26-920A-C719DD4339F1}"/>
+                <a16:creationId xmlns:a16="http://schemas.microsoft.com/office/drawing/2014/main" id="{0CFE3C20-124C-4B3F-AC3D-D2EEA39C8B3A}"/>
               </a:ext>
             </a:extLst>
           </p:cNvPr>
@@ -13121,7 +13121,7 @@
           <p:cNvPr id="19" name="">
             <a:extLst xmlns:a="http://schemas.openxmlformats.org/drawingml/2006/main">
               <a:ext uri="{FF2B5EF4-FFF2-40B4-BE49-F238E27FC236}">
-                <a16:creationId xmlns:a16="http://schemas.microsoft.com/office/drawing/2014/main" id="{9380519D-BC5F-4D8C-BC45-51D5BEEAE51C}"/>
+                <a16:creationId xmlns:a16="http://schemas.microsoft.com/office/drawing/2014/main" id="{747426CE-9736-4D7E-9B95-0C9C49BD65BC}"/>
               </a:ext>
             </a:extLst>
           </p:cNvPr>
@@ -13190,7 +13190,7 @@
           <p:cNvPr id="20" name="">
             <a:extLst xmlns:a="http://schemas.openxmlformats.org/drawingml/2006/main">
               <a:ext uri="{FF2B5EF4-FFF2-40B4-BE49-F238E27FC236}">
-                <a16:creationId xmlns:a16="http://schemas.microsoft.com/office/drawing/2014/main" id="{1CC1C6F6-D3BE-4AE5-A9B5-0BF489A1037C}"/>
+                <a16:creationId xmlns:a16="http://schemas.microsoft.com/office/drawing/2014/main" id="{05CB7DAC-3B6F-45AA-BF2B-0C09395C7494}"/>
               </a:ext>
             </a:extLst>
           </p:cNvPr>
@@ -13221,7 +13221,7 @@
           <p:cNvPr id="21" name="">
             <a:extLst xmlns:a="http://schemas.openxmlformats.org/drawingml/2006/main">
               <a:ext uri="{FF2B5EF4-FFF2-40B4-BE49-F238E27FC236}">
-                <a16:creationId xmlns:a16="http://schemas.microsoft.com/office/drawing/2014/main" id="{2FCC0810-3587-48EF-AE6C-976756DB3F90}"/>
+                <a16:creationId xmlns:a16="http://schemas.microsoft.com/office/drawing/2014/main" id="{B2A69DB2-7BA6-45A7-B272-8B307228D9EE}"/>
               </a:ext>
             </a:extLst>
           </p:cNvPr>
@@ -13252,7 +13252,7 @@
           <p:cNvPr id="22" name="">
             <a:extLst xmlns:a="http://schemas.openxmlformats.org/drawingml/2006/main">
               <a:ext uri="{FF2B5EF4-FFF2-40B4-BE49-F238E27FC236}">
-                <a16:creationId xmlns:a16="http://schemas.microsoft.com/office/drawing/2014/main" id="{2E67416F-EA32-4D65-BBF0-10075150106C}"/>
+                <a16:creationId xmlns:a16="http://schemas.microsoft.com/office/drawing/2014/main" id="{853C2238-8A8C-489C-9854-62B5D13DA434}"/>
               </a:ext>
             </a:extLst>
           </p:cNvPr>
@@ -13285,7 +13285,7 @@
           <p:cNvPr id="23" name="">
             <a:extLst xmlns:a="http://schemas.openxmlformats.org/drawingml/2006/main">
               <a:ext uri="{FF2B5EF4-FFF2-40B4-BE49-F238E27FC236}">
-                <a16:creationId xmlns:a16="http://schemas.microsoft.com/office/drawing/2014/main" id="{CB2D27FE-3547-4690-B972-3BA57A893DD1}"/>
+                <a16:creationId xmlns:a16="http://schemas.microsoft.com/office/drawing/2014/main" id="{1C75D53A-96B9-4732-BF5B-915236701FC4}"/>
               </a:ext>
             </a:extLst>
           </p:cNvPr>
@@ -13354,7 +13354,7 @@
           <p:cNvPr id="24" name="">
             <a:extLst xmlns:a="http://schemas.openxmlformats.org/drawingml/2006/main">
               <a:ext uri="{FF2B5EF4-FFF2-40B4-BE49-F238E27FC236}">
-                <a16:creationId xmlns:a16="http://schemas.microsoft.com/office/drawing/2014/main" id="{7B9C207B-CE58-4A31-8089-052F53AC42FF}"/>
+                <a16:creationId xmlns:a16="http://schemas.microsoft.com/office/drawing/2014/main" id="{1A053D44-B165-4671-B6B6-9F8B4D400BAE}"/>
               </a:ext>
             </a:extLst>
           </p:cNvPr>
@@ -13423,7 +13423,7 @@
           <p:cNvPr id="25" name="">
             <a:extLst xmlns:a="http://schemas.openxmlformats.org/drawingml/2006/main">
               <a:ext uri="{FF2B5EF4-FFF2-40B4-BE49-F238E27FC236}">
-                <a16:creationId xmlns:a16="http://schemas.microsoft.com/office/drawing/2014/main" id="{D5E834B5-0195-4669-BE0F-A6C5E24693B1}"/>
+                <a16:creationId xmlns:a16="http://schemas.microsoft.com/office/drawing/2014/main" id="{91C15C65-A742-4D6A-9D46-ED716D60DF67}"/>
               </a:ext>
             </a:extLst>
           </p:cNvPr>
@@ -13454,7 +13454,7 @@
           <p:cNvPr id="26" name="">
             <a:extLst xmlns:a="http://schemas.openxmlformats.org/drawingml/2006/main">
               <a:ext uri="{FF2B5EF4-FFF2-40B4-BE49-F238E27FC236}">
-                <a16:creationId xmlns:a16="http://schemas.microsoft.com/office/drawing/2014/main" id="{EACD3648-F3BA-414B-ADBB-A248828D54F4}"/>
+                <a16:creationId xmlns:a16="http://schemas.microsoft.com/office/drawing/2014/main" id="{6BE488A9-0BAF-4616-8D8A-0B78913055A8}"/>
               </a:ext>
             </a:extLst>
           </p:cNvPr>
@@ -13485,7 +13485,7 @@
           <p:cNvPr id="27" name="">
             <a:extLst xmlns:a="http://schemas.openxmlformats.org/drawingml/2006/main">
               <a:ext uri="{FF2B5EF4-FFF2-40B4-BE49-F238E27FC236}">
-                <a16:creationId xmlns:a16="http://schemas.microsoft.com/office/drawing/2014/main" id="{9E8EAB5B-062D-4902-A68C-C2027E34412A}"/>
+                <a16:creationId xmlns:a16="http://schemas.microsoft.com/office/drawing/2014/main" id="{55FE29ED-CE0F-4C13-A3F1-6E4F36732579}"/>
               </a:ext>
             </a:extLst>
           </p:cNvPr>
@@ -13518,7 +13518,7 @@
           <p:cNvPr id="28" name="">
             <a:extLst xmlns:a="http://schemas.openxmlformats.org/drawingml/2006/main">
               <a:ext uri="{FF2B5EF4-FFF2-40B4-BE49-F238E27FC236}">
-                <a16:creationId xmlns:a16="http://schemas.microsoft.com/office/drawing/2014/main" id="{281F5CB7-1E48-4780-A319-071D89DDD4AD}"/>
+                <a16:creationId xmlns:a16="http://schemas.microsoft.com/office/drawing/2014/main" id="{A910EA32-A049-46D5-9FDE-6257F2C667C2}"/>
               </a:ext>
             </a:extLst>
           </p:cNvPr>
@@ -13587,7 +13587,7 @@
           <p:cNvPr id="29" name="">
             <a:extLst xmlns:a="http://schemas.openxmlformats.org/drawingml/2006/main">
               <a:ext uri="{FF2B5EF4-FFF2-40B4-BE49-F238E27FC236}">
-                <a16:creationId xmlns:a16="http://schemas.microsoft.com/office/drawing/2014/main" id="{8722322B-82E9-40D4-B9F1-61C2D50AFE81}"/>
+                <a16:creationId xmlns:a16="http://schemas.microsoft.com/office/drawing/2014/main" id="{E62B0F7F-28B7-4893-B5DD-99775FCC9FFD}"/>
               </a:ext>
             </a:extLst>
           </p:cNvPr>
@@ -13656,7 +13656,7 @@
           <p:cNvPr id="30" name="">
             <a:extLst xmlns:a="http://schemas.openxmlformats.org/drawingml/2006/main">
               <a:ext uri="{FF2B5EF4-FFF2-40B4-BE49-F238E27FC236}">
-                <a16:creationId xmlns:a16="http://schemas.microsoft.com/office/drawing/2014/main" id="{8BF92892-E29C-4E7A-BAB8-0D96F3827005}"/>
+                <a16:creationId xmlns:a16="http://schemas.microsoft.com/office/drawing/2014/main" id="{EC7DD546-B60E-4F23-8356-7740A3CF5A76}"/>
               </a:ext>
             </a:extLst>
           </p:cNvPr>
@@ -13687,7 +13687,7 @@
           <p:cNvPr id="31" name="">
             <a:extLst xmlns:a="http://schemas.openxmlformats.org/drawingml/2006/main">
               <a:ext uri="{FF2B5EF4-FFF2-40B4-BE49-F238E27FC236}">
-                <a16:creationId xmlns:a16="http://schemas.microsoft.com/office/drawing/2014/main" id="{4434394D-2075-4629-9BD6-163B79C5513A}"/>
+                <a16:creationId xmlns:a16="http://schemas.microsoft.com/office/drawing/2014/main" id="{20066FFA-D131-4369-9C5D-702D588734B0}"/>
               </a:ext>
             </a:extLst>
           </p:cNvPr>
@@ -13718,7 +13718,7 @@
           <p:cNvPr id="32" name="">
             <a:extLst xmlns:a="http://schemas.openxmlformats.org/drawingml/2006/main">
               <a:ext uri="{FF2B5EF4-FFF2-40B4-BE49-F238E27FC236}">
-                <a16:creationId xmlns:a16="http://schemas.microsoft.com/office/drawing/2014/main" id="{57F4AA16-0462-4328-A5E6-48D5271828CF}"/>
+                <a16:creationId xmlns:a16="http://schemas.microsoft.com/office/drawing/2014/main" id="{2161A09D-C745-4C9A-9B85-6478EBE27CA7}"/>
               </a:ext>
             </a:extLst>
           </p:cNvPr>
@@ -13751,7 +13751,7 @@
           <p:cNvPr id="33" name="">
             <a:extLst xmlns:a="http://schemas.openxmlformats.org/drawingml/2006/main">
               <a:ext uri="{FF2B5EF4-FFF2-40B4-BE49-F238E27FC236}">
-                <a16:creationId xmlns:a16="http://schemas.microsoft.com/office/drawing/2014/main" id="{C7236053-C956-4B91-BAF8-392492133D54}"/>
+                <a16:creationId xmlns:a16="http://schemas.microsoft.com/office/drawing/2014/main" id="{0D90A73D-0AC6-44B5-B296-7B2C38E67952}"/>
               </a:ext>
             </a:extLst>
           </p:cNvPr>
@@ -13820,7 +13820,7 @@
           <p:cNvPr id="34" name="">
             <a:extLst xmlns:a="http://schemas.openxmlformats.org/drawingml/2006/main">
               <a:ext uri="{FF2B5EF4-FFF2-40B4-BE49-F238E27FC236}">
-                <a16:creationId xmlns:a16="http://schemas.microsoft.com/office/drawing/2014/main" id="{938603D1-D3E0-4706-B24D-1362640E96E7}"/>
+                <a16:creationId xmlns:a16="http://schemas.microsoft.com/office/drawing/2014/main" id="{B91305CC-0D76-4409-A018-9EC4FED61304}"/>
               </a:ext>
             </a:extLst>
           </p:cNvPr>
@@ -13889,7 +13889,7 @@
           <p:cNvPr id="35" name="">
             <a:extLst xmlns:a="http://schemas.openxmlformats.org/drawingml/2006/main">
               <a:ext uri="{FF2B5EF4-FFF2-40B4-BE49-F238E27FC236}">
-                <a16:creationId xmlns:a16="http://schemas.microsoft.com/office/drawing/2014/main" id="{595547C5-279C-4E77-83E0-823A7C690688}"/>
+                <a16:creationId xmlns:a16="http://schemas.microsoft.com/office/drawing/2014/main" id="{04CF38D0-0034-42E6-A2CB-0E46AD14FEB9}"/>
               </a:ext>
             </a:extLst>
           </p:cNvPr>
@@ -13958,7 +13958,7 @@
           <p:cNvPr id="36" name="">
             <a:extLst xmlns:a="http://schemas.openxmlformats.org/drawingml/2006/main">
               <a:ext uri="{FF2B5EF4-FFF2-40B4-BE49-F238E27FC236}">
-                <a16:creationId xmlns:a16="http://schemas.microsoft.com/office/drawing/2014/main" id="{D5C35C6B-E5E5-435E-94F0-C5368FDE1881}"/>
+                <a16:creationId xmlns:a16="http://schemas.microsoft.com/office/drawing/2014/main" id="{E7E8F470-38FC-4AA5-B698-75D616FC12F0}"/>
               </a:ext>
             </a:extLst>
           </p:cNvPr>
@@ -13991,7 +13991,7 @@
           <p:cNvPr id="37" name="">
             <a:extLst xmlns:a="http://schemas.openxmlformats.org/drawingml/2006/main">
               <a:ext uri="{FF2B5EF4-FFF2-40B4-BE49-F238E27FC236}">
-                <a16:creationId xmlns:a16="http://schemas.microsoft.com/office/drawing/2014/main" id="{3D5564AB-2513-43B5-BD8E-62DB65507EED}"/>
+                <a16:creationId xmlns:a16="http://schemas.microsoft.com/office/drawing/2014/main" id="{CA93BB0D-6B49-4BD8-AAAE-20DB986F7BDE}"/>
               </a:ext>
             </a:extLst>
           </p:cNvPr>
@@ -14060,7 +14060,7 @@
           <p:cNvPr id="38" name="">
             <a:extLst xmlns:a="http://schemas.openxmlformats.org/drawingml/2006/main">
               <a:ext uri="{FF2B5EF4-FFF2-40B4-BE49-F238E27FC236}">
-                <a16:creationId xmlns:a16="http://schemas.microsoft.com/office/drawing/2014/main" id="{7A402FD7-9183-4DD0-8569-D9050A25D701}"/>
+                <a16:creationId xmlns:a16="http://schemas.microsoft.com/office/drawing/2014/main" id="{6878236C-AE81-42F0-B36A-9678B6E104CF}"/>
               </a:ext>
             </a:extLst>
           </p:cNvPr>
@@ -14129,7 +14129,7 @@
           <p:cNvPr id="39" name="">
             <a:extLst xmlns:a="http://schemas.openxmlformats.org/drawingml/2006/main">
               <a:ext uri="{FF2B5EF4-FFF2-40B4-BE49-F238E27FC236}">
-                <a16:creationId xmlns:a16="http://schemas.microsoft.com/office/drawing/2014/main" id="{5D6E3951-A78D-4270-9BD8-37A4219FA1DE}"/>
+                <a16:creationId xmlns:a16="http://schemas.microsoft.com/office/drawing/2014/main" id="{634300DC-B2E0-4899-99E0-E0E615387FE4}"/>
               </a:ext>
             </a:extLst>
           </p:cNvPr>
@@ -14160,7 +14160,7 @@
           <p:cNvPr id="40" name="">
             <a:extLst xmlns:a="http://schemas.openxmlformats.org/drawingml/2006/main">
               <a:ext uri="{FF2B5EF4-FFF2-40B4-BE49-F238E27FC236}">
-                <a16:creationId xmlns:a16="http://schemas.microsoft.com/office/drawing/2014/main" id="{4EE0161C-A609-457A-86C1-9B62A0D18E5C}"/>
+                <a16:creationId xmlns:a16="http://schemas.microsoft.com/office/drawing/2014/main" id="{8AE6490E-8EA4-410F-8002-09E1B4289C44}"/>
               </a:ext>
             </a:extLst>
           </p:cNvPr>
@@ -14191,7 +14191,7 @@
           <p:cNvPr id="41" name="">
             <a:extLst xmlns:a="http://schemas.openxmlformats.org/drawingml/2006/main">
               <a:ext uri="{FF2B5EF4-FFF2-40B4-BE49-F238E27FC236}">
-                <a16:creationId xmlns:a16="http://schemas.microsoft.com/office/drawing/2014/main" id="{42F1C0C3-B53E-4A7B-868D-C79F1ADA0E36}"/>
+                <a16:creationId xmlns:a16="http://schemas.microsoft.com/office/drawing/2014/main" id="{55AF3E9E-E5E0-4105-AF9E-D3AD0F5BCE70}"/>
               </a:ext>
             </a:extLst>
           </p:cNvPr>
@@ -14224,7 +14224,7 @@
           <p:cNvPr id="42" name="">
             <a:extLst xmlns:a="http://schemas.openxmlformats.org/drawingml/2006/main">
               <a:ext uri="{FF2B5EF4-FFF2-40B4-BE49-F238E27FC236}">
-                <a16:creationId xmlns:a16="http://schemas.microsoft.com/office/drawing/2014/main" id="{4430E02C-07A7-436F-815A-6B03036C196B}"/>
+                <a16:creationId xmlns:a16="http://schemas.microsoft.com/office/drawing/2014/main" id="{CC4D6BAF-4BD6-4833-A483-4200B32375EA}"/>
               </a:ext>
             </a:extLst>
           </p:cNvPr>
@@ -14293,7 +14293,7 @@
           <p:cNvPr id="43" name="">
             <a:extLst xmlns:a="http://schemas.openxmlformats.org/drawingml/2006/main">
               <a:ext uri="{FF2B5EF4-FFF2-40B4-BE49-F238E27FC236}">
-                <a16:creationId xmlns:a16="http://schemas.microsoft.com/office/drawing/2014/main" id="{C100C6B9-AC23-440A-8632-F4BCDEC8B294}"/>
+                <a16:creationId xmlns:a16="http://schemas.microsoft.com/office/drawing/2014/main" id="{5069F6B7-F085-451A-9C6F-26EDFF3F9A5E}"/>
               </a:ext>
             </a:extLst>
           </p:cNvPr>
@@ -14362,7 +14362,7 @@
           <p:cNvPr id="44" name="">
             <a:extLst xmlns:a="http://schemas.openxmlformats.org/drawingml/2006/main">
               <a:ext uri="{FF2B5EF4-FFF2-40B4-BE49-F238E27FC236}">
-                <a16:creationId xmlns:a16="http://schemas.microsoft.com/office/drawing/2014/main" id="{58E4A176-29C6-4B93-B567-D9E482C3FB7D}"/>
+                <a16:creationId xmlns:a16="http://schemas.microsoft.com/office/drawing/2014/main" id="{CF5D9CC8-D474-4D55-9F9A-6ED57ED611DF}"/>
               </a:ext>
             </a:extLst>
           </p:cNvPr>
@@ -14393,7 +14393,7 @@
           <p:cNvPr id="45" name="">
             <a:extLst xmlns:a="http://schemas.openxmlformats.org/drawingml/2006/main">
               <a:ext uri="{FF2B5EF4-FFF2-40B4-BE49-F238E27FC236}">
-                <a16:creationId xmlns:a16="http://schemas.microsoft.com/office/drawing/2014/main" id="{077B9706-1C4E-4FE1-8F9A-D510419C030B}"/>
+                <a16:creationId xmlns:a16="http://schemas.microsoft.com/office/drawing/2014/main" id="{9360E22B-CC8E-462F-9F6F-98B84567EDA4}"/>
               </a:ext>
             </a:extLst>
           </p:cNvPr>
@@ -14424,7 +14424,7 @@
           <p:cNvPr id="46" name="">
             <a:extLst xmlns:a="http://schemas.openxmlformats.org/drawingml/2006/main">
               <a:ext uri="{FF2B5EF4-FFF2-40B4-BE49-F238E27FC236}">
-                <a16:creationId xmlns:a16="http://schemas.microsoft.com/office/drawing/2014/main" id="{3C20A298-C191-4B75-9104-508D590E1717}"/>
+                <a16:creationId xmlns:a16="http://schemas.microsoft.com/office/drawing/2014/main" id="{658A6963-EDCB-48EB-B2B1-53DAFDDC2846}"/>
               </a:ext>
             </a:extLst>
           </p:cNvPr>
@@ -14457,7 +14457,7 @@
           <p:cNvPr id="47" name="">
             <a:extLst xmlns:a="http://schemas.openxmlformats.org/drawingml/2006/main">
               <a:ext uri="{FF2B5EF4-FFF2-40B4-BE49-F238E27FC236}">
-                <a16:creationId xmlns:a16="http://schemas.microsoft.com/office/drawing/2014/main" id="{26E4DD20-66E9-4401-9C85-704C29ADA86B}"/>
+                <a16:creationId xmlns:a16="http://schemas.microsoft.com/office/drawing/2014/main" id="{2BDD7E52-2320-4EA7-BFEF-E4465CE209D6}"/>
               </a:ext>
             </a:extLst>
           </p:cNvPr>
@@ -14526,7 +14526,7 @@
           <p:cNvPr id="48" name="">
             <a:extLst xmlns:a="http://schemas.openxmlformats.org/drawingml/2006/main">
               <a:ext uri="{FF2B5EF4-FFF2-40B4-BE49-F238E27FC236}">
-                <a16:creationId xmlns:a16="http://schemas.microsoft.com/office/drawing/2014/main" id="{D49C5AC0-F68D-42D3-B1F1-DF3E0600AE30}"/>
+                <a16:creationId xmlns:a16="http://schemas.microsoft.com/office/drawing/2014/main" id="{42ACA68D-464A-4770-BBD6-4FF183A7921E}"/>
               </a:ext>
             </a:extLst>
           </p:cNvPr>
@@ -14595,7 +14595,7 @@
           <p:cNvPr id="49" name="">
             <a:extLst xmlns:a="http://schemas.openxmlformats.org/drawingml/2006/main">
               <a:ext uri="{FF2B5EF4-FFF2-40B4-BE49-F238E27FC236}">
-                <a16:creationId xmlns:a16="http://schemas.microsoft.com/office/drawing/2014/main" id="{8D2A8C74-208D-4BB8-AFB0-C9160D7F0771}"/>
+                <a16:creationId xmlns:a16="http://schemas.microsoft.com/office/drawing/2014/main" id="{5DA3E8ED-8F2C-437A-BBDA-3A29ECA6ADB4}"/>
               </a:ext>
             </a:extLst>
           </p:cNvPr>
@@ -14626,7 +14626,7 @@
           <p:cNvPr id="50" name="">
             <a:extLst xmlns:a="http://schemas.openxmlformats.org/drawingml/2006/main">
               <a:ext uri="{FF2B5EF4-FFF2-40B4-BE49-F238E27FC236}">
-                <a16:creationId xmlns:a16="http://schemas.microsoft.com/office/drawing/2014/main" id="{7392FC22-048E-461A-9F7B-BC84964CE58B}"/>
+                <a16:creationId xmlns:a16="http://schemas.microsoft.com/office/drawing/2014/main" id="{32C7FD0A-F3C4-45C1-9705-27E03EE1B363}"/>
               </a:ext>
             </a:extLst>
           </p:cNvPr>
@@ -14657,7 +14657,7 @@
           <p:cNvPr id="51" name="">
             <a:extLst xmlns:a="http://schemas.openxmlformats.org/drawingml/2006/main">
               <a:ext uri="{FF2B5EF4-FFF2-40B4-BE49-F238E27FC236}">
-                <a16:creationId xmlns:a16="http://schemas.microsoft.com/office/drawing/2014/main" id="{720F9C38-D865-497F-8A82-ADCA2906B7A4}"/>
+                <a16:creationId xmlns:a16="http://schemas.microsoft.com/office/drawing/2014/main" id="{1239E12B-6789-49E8-B351-A1A18DAC8230}"/>
               </a:ext>
             </a:extLst>
           </p:cNvPr>
@@ -14690,7 +14690,7 @@
           <p:cNvPr id="52" name="">
             <a:extLst xmlns:a="http://schemas.openxmlformats.org/drawingml/2006/main">
               <a:ext uri="{FF2B5EF4-FFF2-40B4-BE49-F238E27FC236}">
-                <a16:creationId xmlns:a16="http://schemas.microsoft.com/office/drawing/2014/main" id="{74142117-B3DE-4902-872F-5546C4813AA2}"/>
+                <a16:creationId xmlns:a16="http://schemas.microsoft.com/office/drawing/2014/main" id="{B1DDC350-E42A-4F45-A00B-421FD67D55A1}"/>
               </a:ext>
             </a:extLst>
           </p:cNvPr>
@@ -14759,7 +14759,7 @@
           <p:cNvPr id="53" name="">
             <a:extLst xmlns:a="http://schemas.openxmlformats.org/drawingml/2006/main">
               <a:ext uri="{FF2B5EF4-FFF2-40B4-BE49-F238E27FC236}">
-                <a16:creationId xmlns:a16="http://schemas.microsoft.com/office/drawing/2014/main" id="{D3B3C4EE-B8A7-458E-85E6-A5E3FB5CB21E}"/>
+                <a16:creationId xmlns:a16="http://schemas.microsoft.com/office/drawing/2014/main" id="{CDA99787-CAD7-4010-B052-067B2A4CA3FA}"/>
               </a:ext>
             </a:extLst>
           </p:cNvPr>
@@ -14828,7 +14828,7 @@
           <p:cNvPr id="54" name="">
             <a:extLst xmlns:a="http://schemas.openxmlformats.org/drawingml/2006/main">
               <a:ext uri="{FF2B5EF4-FFF2-40B4-BE49-F238E27FC236}">
-                <a16:creationId xmlns:a16="http://schemas.microsoft.com/office/drawing/2014/main" id="{CD87223F-247D-4377-BC18-9CB31E18F12B}"/>
+                <a16:creationId xmlns:a16="http://schemas.microsoft.com/office/drawing/2014/main" id="{96B86055-B1C0-49C3-9758-5382D158C2E5}"/>
               </a:ext>
             </a:extLst>
           </p:cNvPr>
@@ -14859,7 +14859,7 @@
           <p:cNvPr id="55" name="">
             <a:extLst xmlns:a="http://schemas.openxmlformats.org/drawingml/2006/main">
               <a:ext uri="{FF2B5EF4-FFF2-40B4-BE49-F238E27FC236}">
-                <a16:creationId xmlns:a16="http://schemas.microsoft.com/office/drawing/2014/main" id="{EE392561-ED01-4003-A2D1-3DCB51562C2B}"/>
+                <a16:creationId xmlns:a16="http://schemas.microsoft.com/office/drawing/2014/main" id="{D9639727-C962-40CD-AFCE-8182CA47638D}"/>
               </a:ext>
             </a:extLst>
           </p:cNvPr>
@@ -14890,7 +14890,7 @@
           <p:cNvPr id="56" name="">
             <a:extLst xmlns:a="http://schemas.openxmlformats.org/drawingml/2006/main">
               <a:ext uri="{FF2B5EF4-FFF2-40B4-BE49-F238E27FC236}">
-                <a16:creationId xmlns:a16="http://schemas.microsoft.com/office/drawing/2014/main" id="{808AF9CF-ADBA-4529-8152-4708A0187B0F}"/>
+                <a16:creationId xmlns:a16="http://schemas.microsoft.com/office/drawing/2014/main" id="{D40F2702-DCB7-4005-B9BE-7E94AEC29DA6}"/>
               </a:ext>
             </a:extLst>
           </p:cNvPr>
@@ -14923,7 +14923,7 @@
           <p:cNvPr id="57" name="">
             <a:extLst xmlns:a="http://schemas.openxmlformats.org/drawingml/2006/main">
               <a:ext uri="{FF2B5EF4-FFF2-40B4-BE49-F238E27FC236}">
-                <a16:creationId xmlns:a16="http://schemas.microsoft.com/office/drawing/2014/main" id="{DAD87091-CCC2-43B5-ABB8-53B1E4E78121}"/>
+                <a16:creationId xmlns:a16="http://schemas.microsoft.com/office/drawing/2014/main" id="{EB8AEE69-5341-4684-956E-9AAAA4A8A454}"/>
               </a:ext>
             </a:extLst>
           </p:cNvPr>
@@ -14992,7 +14992,7 @@
           <p:cNvPr id="58" name="">
             <a:extLst xmlns:a="http://schemas.openxmlformats.org/drawingml/2006/main">
               <a:ext uri="{FF2B5EF4-FFF2-40B4-BE49-F238E27FC236}">
-                <a16:creationId xmlns:a16="http://schemas.microsoft.com/office/drawing/2014/main" id="{900DDC33-82A2-43DD-AD0C-95BC26E6A4B2}"/>
+                <a16:creationId xmlns:a16="http://schemas.microsoft.com/office/drawing/2014/main" id="{C16B1DCD-CDF4-440E-A3EC-B2CAC5CC5657}"/>
               </a:ext>
             </a:extLst>
           </p:cNvPr>
@@ -15061,7 +15061,7 @@
           <p:cNvPr id="59" name="">
             <a:extLst xmlns:a="http://schemas.openxmlformats.org/drawingml/2006/main">
               <a:ext uri="{FF2B5EF4-FFF2-40B4-BE49-F238E27FC236}">
-                <a16:creationId xmlns:a16="http://schemas.microsoft.com/office/drawing/2014/main" id="{1BFF8ECF-43B6-4BD5-8DDF-D0B651018992}"/>
+                <a16:creationId xmlns:a16="http://schemas.microsoft.com/office/drawing/2014/main" id="{F53783EB-4B0D-4E95-9AD5-79A2E92E9FD1}"/>
               </a:ext>
             </a:extLst>
           </p:cNvPr>
@@ -15092,7 +15092,7 @@
           <p:cNvPr id="60" name="">
             <a:extLst xmlns:a="http://schemas.openxmlformats.org/drawingml/2006/main">
               <a:ext uri="{FF2B5EF4-FFF2-40B4-BE49-F238E27FC236}">
-                <a16:creationId xmlns:a16="http://schemas.microsoft.com/office/drawing/2014/main" id="{C40B1A69-D2CE-4F13-A4D8-08163D6B0ABA}"/>
+                <a16:creationId xmlns:a16="http://schemas.microsoft.com/office/drawing/2014/main" id="{CC2B0104-574F-4542-A95D-6ED26E532983}"/>
               </a:ext>
             </a:extLst>
           </p:cNvPr>
@@ -15123,7 +15123,7 @@
           <p:cNvPr id="61" name="">
             <a:extLst xmlns:a="http://schemas.openxmlformats.org/drawingml/2006/main">
               <a:ext uri="{FF2B5EF4-FFF2-40B4-BE49-F238E27FC236}">
-                <a16:creationId xmlns:a16="http://schemas.microsoft.com/office/drawing/2014/main" id="{1BABC830-7177-4587-8FEF-6EC0F49091BA}"/>
+                <a16:creationId xmlns:a16="http://schemas.microsoft.com/office/drawing/2014/main" id="{6AAA6597-D708-4326-A356-3B7304EDC481}"/>
               </a:ext>
             </a:extLst>
           </p:cNvPr>
@@ -15156,7 +15156,7 @@
           <p:cNvPr id="62" name="">
             <a:extLst xmlns:a="http://schemas.openxmlformats.org/drawingml/2006/main">
               <a:ext uri="{FF2B5EF4-FFF2-40B4-BE49-F238E27FC236}">
-                <a16:creationId xmlns:a16="http://schemas.microsoft.com/office/drawing/2014/main" id="{3C05FA0B-4328-4FD8-80DA-2BF118D2D6BE}"/>
+                <a16:creationId xmlns:a16="http://schemas.microsoft.com/office/drawing/2014/main" id="{0BC09E3F-2C73-4D6D-AA88-BF9AFCF88BFE}"/>
               </a:ext>
             </a:extLst>
           </p:cNvPr>
@@ -15225,7 +15225,7 @@
           <p:cNvPr id="63" name="">
             <a:extLst xmlns:a="http://schemas.openxmlformats.org/drawingml/2006/main">
               <a:ext uri="{FF2B5EF4-FFF2-40B4-BE49-F238E27FC236}">
-                <a16:creationId xmlns:a16="http://schemas.microsoft.com/office/drawing/2014/main" id="{247D7033-A11E-4E0E-B1FD-A412B734F05A}"/>
+                <a16:creationId xmlns:a16="http://schemas.microsoft.com/office/drawing/2014/main" id="{F3E9F04C-E21F-4887-94DB-D3D205D5FA64}"/>
               </a:ext>
             </a:extLst>
           </p:cNvPr>
@@ -15294,7 +15294,7 @@
           <p:cNvPr id="64" name="">
             <a:extLst xmlns:a="http://schemas.openxmlformats.org/drawingml/2006/main">
               <a:ext uri="{FF2B5EF4-FFF2-40B4-BE49-F238E27FC236}">
-                <a16:creationId xmlns:a16="http://schemas.microsoft.com/office/drawing/2014/main" id="{DC78C62F-8DE0-4ED2-8E27-BF1E12FF7086}"/>
+                <a16:creationId xmlns:a16="http://schemas.microsoft.com/office/drawing/2014/main" id="{C559F2BC-E9C4-4671-97F6-FFA4D51B3F58}"/>
               </a:ext>
             </a:extLst>
           </p:cNvPr>
@@ -15329,7 +15329,7 @@
           <p:cNvPr id="65" name="">
             <a:extLst xmlns:a="http://schemas.openxmlformats.org/drawingml/2006/main">
               <a:ext uri="{FF2B5EF4-FFF2-40B4-BE49-F238E27FC236}">
-                <a16:creationId xmlns:a16="http://schemas.microsoft.com/office/drawing/2014/main" id="{7B28398A-441B-44E9-8EAD-53986FAAE6B7}"/>
+                <a16:creationId xmlns:a16="http://schemas.microsoft.com/office/drawing/2014/main" id="{6B512167-9A4D-4A01-B265-6703F4C2CEF3}"/>
               </a:ext>
             </a:extLst>
           </p:cNvPr>
@@ -15398,7 +15398,7 @@
           <p:cNvPr id="66" name="">
             <a:extLst xmlns:a="http://schemas.openxmlformats.org/drawingml/2006/main">
               <a:ext uri="{FF2B5EF4-FFF2-40B4-BE49-F238E27FC236}">
-                <a16:creationId xmlns:a16="http://schemas.microsoft.com/office/drawing/2014/main" id="{C267F085-6C49-443E-A7F7-57DD1BA92A55}"/>
+                <a16:creationId xmlns:a16="http://schemas.microsoft.com/office/drawing/2014/main" id="{D324DDBB-99CC-441B-B646-711606720289}"/>
               </a:ext>
             </a:extLst>
           </p:cNvPr>
@@ -15465,7 +15465,7 @@
     </p:spTree>
     <p:extLst>
       <p:ext uri="{BB962C8B-B14F-4D97-AF65-F5344CB8AC3E}">
-        <p14:creationId xmlns:p14="http://schemas.microsoft.com/office/powerpoint/2010/main" val="284970026"/>
+        <p14:creationId xmlns:p14="http://schemas.microsoft.com/office/powerpoint/2010/main" val="1640352065"/>
       </p:ext>
     </p:extLst>
   </p:cSld>
@@ -15496,7 +15496,7 @@
           <p:cNvPr id="27" name="">
             <a:extLst xmlns:a="http://schemas.openxmlformats.org/drawingml/2006/main">
               <a:ext uri="{FF2B5EF4-FFF2-40B4-BE49-F238E27FC236}">
-                <a16:creationId xmlns:a16="http://schemas.microsoft.com/office/drawing/2014/main" id="{EE6BDF31-EC5B-48F2-A60F-A13BA88447DF}"/>
+                <a16:creationId xmlns:a16="http://schemas.microsoft.com/office/drawing/2014/main" id="{6007E1B1-2BB0-413C-B322-ED9211A7BC31}"/>
               </a:ext>
             </a:extLst>
           </p:cNvPr>
@@ -15565,7 +15565,7 @@
           <p:cNvPr id="2" name="">
             <a:extLst xmlns:a="http://schemas.openxmlformats.org/drawingml/2006/main">
               <a:ext uri="{FF2B5EF4-FFF2-40B4-BE49-F238E27FC236}">
-                <a16:creationId xmlns:a16="http://schemas.microsoft.com/office/drawing/2014/main" id="{AE1A3446-810E-4290-A6D7-BFEFD3A7FB9A}"/>
+                <a16:creationId xmlns:a16="http://schemas.microsoft.com/office/drawing/2014/main" id="{81DA6C1B-4B63-49E7-A766-E65C541BBE6D}"/>
               </a:ext>
             </a:extLst>
           </p:cNvPr>
@@ -15634,7 +15634,7 @@
           <p:cNvPr id="3" name="">
             <a:extLst xmlns:a="http://schemas.openxmlformats.org/drawingml/2006/main">
               <a:ext uri="{FF2B5EF4-FFF2-40B4-BE49-F238E27FC236}">
-                <a16:creationId xmlns:a16="http://schemas.microsoft.com/office/drawing/2014/main" id="{B31838CB-AC23-42AC-A476-B127B8F5FEB5}"/>
+                <a16:creationId xmlns:a16="http://schemas.microsoft.com/office/drawing/2014/main" id="{65B4691D-D5E0-4CC4-9C02-43B3720EF07E}"/>
               </a:ext>
             </a:extLst>
           </p:cNvPr>
@@ -15665,7 +15665,7 @@
           <p:cNvPr id="4" name="">
             <a:extLst xmlns:a="http://schemas.openxmlformats.org/drawingml/2006/main">
               <a:ext uri="{FF2B5EF4-FFF2-40B4-BE49-F238E27FC236}">
-                <a16:creationId xmlns:a16="http://schemas.microsoft.com/office/drawing/2014/main" id="{519415D3-0FF4-4D7F-9573-6ABAA127C7D7}"/>
+                <a16:creationId xmlns:a16="http://schemas.microsoft.com/office/drawing/2014/main" id="{D90FDBB6-5450-4FAA-91FC-5B9FC0F4EAE4}"/>
               </a:ext>
             </a:extLst>
           </p:cNvPr>
@@ -15724,7 +15724,7 @@
                 <a:ea typeface="Segoe UI"/>
                 <a:cs typeface="Segoe UI"/>
               </a:rPr>
-              <a:t>Presenter: Member 2</a:t>
+              <a:t>Presenter: Aayush Chavanke</a:t>
             </a:r>
           </a:p>
         </p:txBody>
@@ -15734,7 +15734,7 @@
           <p:cNvPr id="5" name="">
             <a:extLst xmlns:a="http://schemas.openxmlformats.org/drawingml/2006/main">
               <a:ext uri="{FF2B5EF4-FFF2-40B4-BE49-F238E27FC236}">
-                <a16:creationId xmlns:a16="http://schemas.microsoft.com/office/drawing/2014/main" id="{FBF5356B-3425-4F1E-A614-02320ED5AFE2}"/>
+                <a16:creationId xmlns:a16="http://schemas.microsoft.com/office/drawing/2014/main" id="{32ABD827-CC4C-4647-8BCB-A3CC5F988FEA}"/>
               </a:ext>
             </a:extLst>
           </p:cNvPr>
@@ -15803,7 +15803,7 @@
           <p:cNvPr id="6" name="">
             <a:extLst xmlns:a="http://schemas.openxmlformats.org/drawingml/2006/main">
               <a:ext uri="{FF2B5EF4-FFF2-40B4-BE49-F238E27FC236}">
-                <a16:creationId xmlns:a16="http://schemas.microsoft.com/office/drawing/2014/main" id="{EACF79CD-7283-459A-842E-0CE03F436031}"/>
+                <a16:creationId xmlns:a16="http://schemas.microsoft.com/office/drawing/2014/main" id="{6EF3D26D-4587-4A4E-B212-D596E0015565}"/>
               </a:ext>
             </a:extLst>
           </p:cNvPr>
@@ -15872,7 +15872,7 @@
           <p:cNvPr id="7" name="">
             <a:extLst xmlns:a="http://schemas.openxmlformats.org/drawingml/2006/main">
               <a:ext uri="{FF2B5EF4-FFF2-40B4-BE49-F238E27FC236}">
-                <a16:creationId xmlns:a16="http://schemas.microsoft.com/office/drawing/2014/main" id="{40C2ACA1-0321-43D4-9844-602F35CCA8E9}"/>
+                <a16:creationId xmlns:a16="http://schemas.microsoft.com/office/drawing/2014/main" id="{6A38C112-D006-48D2-B85A-9CCA8D86AFB1}"/>
               </a:ext>
             </a:extLst>
           </p:cNvPr>
@@ -15905,7 +15905,7 @@
           <p:cNvPr id="8" name="">
             <a:extLst xmlns:a="http://schemas.openxmlformats.org/drawingml/2006/main">
               <a:ext uri="{FF2B5EF4-FFF2-40B4-BE49-F238E27FC236}">
-                <a16:creationId xmlns:a16="http://schemas.microsoft.com/office/drawing/2014/main" id="{88C88001-F7D6-4629-A46C-BF5525F2D415}"/>
+                <a16:creationId xmlns:a16="http://schemas.microsoft.com/office/drawing/2014/main" id="{6CC91349-A6B1-4D91-8CC2-AE666CB8FE27}"/>
               </a:ext>
             </a:extLst>
           </p:cNvPr>
@@ -15974,7 +15974,7 @@
           <p:cNvPr id="9" name="">
             <a:extLst xmlns:a="http://schemas.openxmlformats.org/drawingml/2006/main">
               <a:ext uri="{FF2B5EF4-FFF2-40B4-BE49-F238E27FC236}">
-                <a16:creationId xmlns:a16="http://schemas.microsoft.com/office/drawing/2014/main" id="{9457798E-3F48-421B-9C25-B7D12107F9AC}"/>
+                <a16:creationId xmlns:a16="http://schemas.microsoft.com/office/drawing/2014/main" id="{B6295382-4F2B-41D8-9F87-27BBABE82481}"/>
               </a:ext>
             </a:extLst>
           </p:cNvPr>
@@ -16043,7 +16043,7 @@
           <p:cNvPr id="10" name="">
             <a:extLst xmlns:a="http://schemas.openxmlformats.org/drawingml/2006/main">
               <a:ext uri="{FF2B5EF4-FFF2-40B4-BE49-F238E27FC236}">
-                <a16:creationId xmlns:a16="http://schemas.microsoft.com/office/drawing/2014/main" id="{076B194C-8FB1-4D15-9FA7-B17E47B1A4F2}"/>
+                <a16:creationId xmlns:a16="http://schemas.microsoft.com/office/drawing/2014/main" id="{C78F4120-B38D-4458-BFAC-6AF10C957764}"/>
               </a:ext>
             </a:extLst>
           </p:cNvPr>
@@ -16076,7 +16076,7 @@
           <p:cNvPr id="11" name="">
             <a:extLst xmlns:a="http://schemas.openxmlformats.org/drawingml/2006/main">
               <a:ext uri="{FF2B5EF4-FFF2-40B4-BE49-F238E27FC236}">
-                <a16:creationId xmlns:a16="http://schemas.microsoft.com/office/drawing/2014/main" id="{AD31550E-79B0-4DFD-A6EC-FBACFDCD7844}"/>
+                <a16:creationId xmlns:a16="http://schemas.microsoft.com/office/drawing/2014/main" id="{6A7208CE-2F37-429B-9B2D-A5510D15CD1D}"/>
               </a:ext>
             </a:extLst>
           </p:cNvPr>
@@ -16145,7 +16145,7 @@
           <p:cNvPr id="12" name="">
             <a:extLst xmlns:a="http://schemas.openxmlformats.org/drawingml/2006/main">
               <a:ext uri="{FF2B5EF4-FFF2-40B4-BE49-F238E27FC236}">
-                <a16:creationId xmlns:a16="http://schemas.microsoft.com/office/drawing/2014/main" id="{0EA12FBA-93BB-4A85-9396-35E1812624B9}"/>
+                <a16:creationId xmlns:a16="http://schemas.microsoft.com/office/drawing/2014/main" id="{6E47D46F-0A9A-4B89-89EC-D7C00FEEECAB}"/>
               </a:ext>
             </a:extLst>
           </p:cNvPr>
@@ -16214,7 +16214,7 @@
           <p:cNvPr id="13" name="">
             <a:extLst xmlns:a="http://schemas.openxmlformats.org/drawingml/2006/main">
               <a:ext uri="{FF2B5EF4-FFF2-40B4-BE49-F238E27FC236}">
-                <a16:creationId xmlns:a16="http://schemas.microsoft.com/office/drawing/2014/main" id="{98871893-1339-4632-9753-4B735EF73878}"/>
+                <a16:creationId xmlns:a16="http://schemas.microsoft.com/office/drawing/2014/main" id="{E93DDF20-8029-47DA-A653-5DD190BA5285}"/>
               </a:ext>
             </a:extLst>
           </p:cNvPr>
@@ -16247,7 +16247,7 @@
           <p:cNvPr id="14" name="">
             <a:extLst xmlns:a="http://schemas.openxmlformats.org/drawingml/2006/main">
               <a:ext uri="{FF2B5EF4-FFF2-40B4-BE49-F238E27FC236}">
-                <a16:creationId xmlns:a16="http://schemas.microsoft.com/office/drawing/2014/main" id="{A9DED579-4F74-4CA1-92D5-08394416B977}"/>
+                <a16:creationId xmlns:a16="http://schemas.microsoft.com/office/drawing/2014/main" id="{CC3BB0AA-875D-407D-BD28-077BD7F915A5}"/>
               </a:ext>
             </a:extLst>
           </p:cNvPr>
@@ -16316,7 +16316,7 @@
           <p:cNvPr id="15" name="">
             <a:extLst xmlns:a="http://schemas.openxmlformats.org/drawingml/2006/main">
               <a:ext uri="{FF2B5EF4-FFF2-40B4-BE49-F238E27FC236}">
-                <a16:creationId xmlns:a16="http://schemas.microsoft.com/office/drawing/2014/main" id="{AE8E9667-FDDA-473C-8B19-73D57FC67DF0}"/>
+                <a16:creationId xmlns:a16="http://schemas.microsoft.com/office/drawing/2014/main" id="{78C7B7D8-3B77-4E07-BC82-2A90335B0118}"/>
               </a:ext>
             </a:extLst>
           </p:cNvPr>
@@ -16385,7 +16385,7 @@
           <p:cNvPr id="16" name="">
             <a:extLst xmlns:a="http://schemas.openxmlformats.org/drawingml/2006/main">
               <a:ext uri="{FF2B5EF4-FFF2-40B4-BE49-F238E27FC236}">
-                <a16:creationId xmlns:a16="http://schemas.microsoft.com/office/drawing/2014/main" id="{4BED9214-2A2A-4C2E-8888-67D05B563EB3}"/>
+                <a16:creationId xmlns:a16="http://schemas.microsoft.com/office/drawing/2014/main" id="{88E47F0C-206A-4763-8938-0386571B7112}"/>
               </a:ext>
             </a:extLst>
           </p:cNvPr>
@@ -16418,7 +16418,7 @@
           <p:cNvPr id="17" name="">
             <a:extLst xmlns:a="http://schemas.openxmlformats.org/drawingml/2006/main">
               <a:ext uri="{FF2B5EF4-FFF2-40B4-BE49-F238E27FC236}">
-                <a16:creationId xmlns:a16="http://schemas.microsoft.com/office/drawing/2014/main" id="{18C8B727-3A3F-4CEB-93E9-FB19A8A1FC64}"/>
+                <a16:creationId xmlns:a16="http://schemas.microsoft.com/office/drawing/2014/main" id="{03242F2F-CF5A-4FF5-9C6E-ACFFF9A2653A}"/>
               </a:ext>
             </a:extLst>
           </p:cNvPr>
@@ -16487,7 +16487,7 @@
           <p:cNvPr id="18" name="">
             <a:extLst xmlns:a="http://schemas.openxmlformats.org/drawingml/2006/main">
               <a:ext uri="{FF2B5EF4-FFF2-40B4-BE49-F238E27FC236}">
-                <a16:creationId xmlns:a16="http://schemas.microsoft.com/office/drawing/2014/main" id="{54D66659-3344-4A57-8279-B423FBE09219}"/>
+                <a16:creationId xmlns:a16="http://schemas.microsoft.com/office/drawing/2014/main" id="{F35302F1-D643-4CEA-B2A5-F2A8B7ECB0F7}"/>
               </a:ext>
             </a:extLst>
           </p:cNvPr>
@@ -16556,7 +16556,7 @@
           <p:cNvPr id="19" name="">
             <a:extLst xmlns:a="http://schemas.openxmlformats.org/drawingml/2006/main">
               <a:ext uri="{FF2B5EF4-FFF2-40B4-BE49-F238E27FC236}">
-                <a16:creationId xmlns:a16="http://schemas.microsoft.com/office/drawing/2014/main" id="{2DB3325B-95D5-4FAE-BA09-2FCB2C5E5091}"/>
+                <a16:creationId xmlns:a16="http://schemas.microsoft.com/office/drawing/2014/main" id="{376C6B07-E1F6-4EAF-BFC8-4C67E40C00F5}"/>
               </a:ext>
             </a:extLst>
           </p:cNvPr>
@@ -16625,7 +16625,7 @@
           <p:cNvPr id="20" name="">
             <a:extLst xmlns:a="http://schemas.openxmlformats.org/drawingml/2006/main">
               <a:ext uri="{FF2B5EF4-FFF2-40B4-BE49-F238E27FC236}">
-                <a16:creationId xmlns:a16="http://schemas.microsoft.com/office/drawing/2014/main" id="{70C51F4C-79CC-40FF-9727-6908DA5C6F20}"/>
+                <a16:creationId xmlns:a16="http://schemas.microsoft.com/office/drawing/2014/main" id="{E4F9D5DD-B839-447B-BF35-1931F8E40C01}"/>
               </a:ext>
             </a:extLst>
           </p:cNvPr>
@@ -16694,7 +16694,7 @@
           <p:cNvPr id="21" name="">
             <a:extLst xmlns:a="http://schemas.openxmlformats.org/drawingml/2006/main">
               <a:ext uri="{FF2B5EF4-FFF2-40B4-BE49-F238E27FC236}">
-                <a16:creationId xmlns:a16="http://schemas.microsoft.com/office/drawing/2014/main" id="{77425A06-38A0-40FD-84EE-7E9028D1D8FC}"/>
+                <a16:creationId xmlns:a16="http://schemas.microsoft.com/office/drawing/2014/main" id="{658D97C7-3B29-4FF6-9317-5FB5F4112DAF}"/>
               </a:ext>
             </a:extLst>
           </p:cNvPr>
@@ -16763,7 +16763,7 @@
           <p:cNvPr id="22" name="">
             <a:extLst xmlns:a="http://schemas.openxmlformats.org/drawingml/2006/main">
               <a:ext uri="{FF2B5EF4-FFF2-40B4-BE49-F238E27FC236}">
-                <a16:creationId xmlns:a16="http://schemas.microsoft.com/office/drawing/2014/main" id="{0B9F2D86-2781-4840-A77C-F4134787B421}"/>
+                <a16:creationId xmlns:a16="http://schemas.microsoft.com/office/drawing/2014/main" id="{77DE65BD-7585-4D06-B4F1-18F7A6ED48BF}"/>
               </a:ext>
             </a:extLst>
           </p:cNvPr>
@@ -16832,7 +16832,7 @@
           <p:cNvPr id="23" name="">
             <a:extLst xmlns:a="http://schemas.openxmlformats.org/drawingml/2006/main">
               <a:ext uri="{FF2B5EF4-FFF2-40B4-BE49-F238E27FC236}">
-                <a16:creationId xmlns:a16="http://schemas.microsoft.com/office/drawing/2014/main" id="{A7908D83-500E-495A-B7A8-8F1F09843073}"/>
+                <a16:creationId xmlns:a16="http://schemas.microsoft.com/office/drawing/2014/main" id="{D4881D0B-E39E-4673-9AD0-618901CE8CD3}"/>
               </a:ext>
             </a:extLst>
           </p:cNvPr>
@@ -17013,7 +17013,7 @@
           <p:cNvPr id="24" name="">
             <a:extLst xmlns:a="http://schemas.openxmlformats.org/drawingml/2006/main">
               <a:ext uri="{FF2B5EF4-FFF2-40B4-BE49-F238E27FC236}">
-                <a16:creationId xmlns:a16="http://schemas.microsoft.com/office/drawing/2014/main" id="{E45C8012-B2A0-4449-AD5A-6AFDFBD142B0}"/>
+                <a16:creationId xmlns:a16="http://schemas.microsoft.com/office/drawing/2014/main" id="{3202A293-D22C-4F4E-A1A3-CA438D0EFD06}"/>
               </a:ext>
             </a:extLst>
           </p:cNvPr>
@@ -17048,7 +17048,7 @@
           <p:cNvPr id="25" name="">
             <a:extLst xmlns:a="http://schemas.openxmlformats.org/drawingml/2006/main">
               <a:ext uri="{FF2B5EF4-FFF2-40B4-BE49-F238E27FC236}">
-                <a16:creationId xmlns:a16="http://schemas.microsoft.com/office/drawing/2014/main" id="{EDADFC59-9874-4ABA-B74C-9D055B8E1B27}"/>
+                <a16:creationId xmlns:a16="http://schemas.microsoft.com/office/drawing/2014/main" id="{E519BCD0-6039-4ACA-B052-34E79F950A24}"/>
               </a:ext>
             </a:extLst>
           </p:cNvPr>
@@ -17079,7 +17079,7 @@
           <p:cNvPr id="26" name="">
             <a:extLst xmlns:a="http://schemas.openxmlformats.org/drawingml/2006/main">
               <a:ext uri="{FF2B5EF4-FFF2-40B4-BE49-F238E27FC236}">
-                <a16:creationId xmlns:a16="http://schemas.microsoft.com/office/drawing/2014/main" id="{C0B46731-F76A-4312-894E-6C863653E7C1}"/>
+                <a16:creationId xmlns:a16="http://schemas.microsoft.com/office/drawing/2014/main" id="{20B40B62-72B5-4B4D-8E5D-BBF2FF81212D}"/>
               </a:ext>
             </a:extLst>
           </p:cNvPr>
@@ -17238,7 +17238,7 @@
     </p:spTree>
     <p:extLst>
       <p:ext uri="{BB962C8B-B14F-4D97-AF65-F5344CB8AC3E}">
-        <p14:creationId xmlns:p14="http://schemas.microsoft.com/office/powerpoint/2010/main" val="135763125"/>
+        <p14:creationId xmlns:p14="http://schemas.microsoft.com/office/powerpoint/2010/main" val="2090188326"/>
       </p:ext>
     </p:extLst>
   </p:cSld>
@@ -17266,10 +17266,10 @@
       </p:grpSpPr>
       <p:sp>
         <p:nvSpPr>
-          <p:cNvPr id="28" name="">
-            <a:extLst xmlns:a="http://schemas.openxmlformats.org/drawingml/2006/main">
-              <a:ext uri="{FF2B5EF4-FFF2-40B4-BE49-F238E27FC236}">
-                <a16:creationId xmlns:a16="http://schemas.microsoft.com/office/drawing/2014/main" id="{FEBCAB3B-5993-4771-A5AC-E55FADDEFEBD}"/>
+          <p:cNvPr id="69" name="">
+            <a:extLst xmlns:a="http://schemas.openxmlformats.org/drawingml/2006/main">
+              <a:ext uri="{FF2B5EF4-FFF2-40B4-BE49-F238E27FC236}">
+                <a16:creationId xmlns:a16="http://schemas.microsoft.com/office/drawing/2014/main" id="{B2C45D4A-C129-4624-84E6-DFE7A7A9D0E0}"/>
               </a:ext>
             </a:extLst>
           </p:cNvPr>
@@ -17338,7 +17338,7 @@
           <p:cNvPr id="2" name="">
             <a:extLst xmlns:a="http://schemas.openxmlformats.org/drawingml/2006/main">
               <a:ext uri="{FF2B5EF4-FFF2-40B4-BE49-F238E27FC236}">
-                <a16:creationId xmlns:a16="http://schemas.microsoft.com/office/drawing/2014/main" id="{F33BEA12-DF8A-4509-9A4E-EE89A8B7A3CB}"/>
+                <a16:creationId xmlns:a16="http://schemas.microsoft.com/office/drawing/2014/main" id="{238BEE0F-E03C-4644-B5FE-BF408E92EC34}"/>
               </a:ext>
             </a:extLst>
           </p:cNvPr>
@@ -17407,7 +17407,7 @@
           <p:cNvPr id="3" name="">
             <a:extLst xmlns:a="http://schemas.openxmlformats.org/drawingml/2006/main">
               <a:ext uri="{FF2B5EF4-FFF2-40B4-BE49-F238E27FC236}">
-                <a16:creationId xmlns:a16="http://schemas.microsoft.com/office/drawing/2014/main" id="{5B8A91A0-5DC8-4297-99F3-982165834DBB}"/>
+                <a16:creationId xmlns:a16="http://schemas.microsoft.com/office/drawing/2014/main" id="{B7857086-A898-4BFE-8166-A2D96C9DB833}"/>
               </a:ext>
             </a:extLst>
           </p:cNvPr>
@@ -17438,7 +17438,7 @@
           <p:cNvPr id="4" name="">
             <a:extLst xmlns:a="http://schemas.openxmlformats.org/drawingml/2006/main">
               <a:ext uri="{FF2B5EF4-FFF2-40B4-BE49-F238E27FC236}">
-                <a16:creationId xmlns:a16="http://schemas.microsoft.com/office/drawing/2014/main" id="{A7E9C3AD-F1E9-48D3-896F-6CC719DF90B9}"/>
+                <a16:creationId xmlns:a16="http://schemas.microsoft.com/office/drawing/2014/main" id="{4D614862-4427-4FAB-80E9-262D9F69A9EC}"/>
               </a:ext>
             </a:extLst>
           </p:cNvPr>
@@ -17497,7 +17497,7 @@
                 <a:ea typeface="Segoe UI"/>
                 <a:cs typeface="Segoe UI"/>
               </a:rPr>
-              <a:t>Presenter: Member 2</a:t>
+              <a:t>Presenter: Aayush Chavanke</a:t>
             </a:r>
           </a:p>
         </p:txBody>
@@ -17507,7 +17507,7 @@
           <p:cNvPr id="5" name="">
             <a:extLst xmlns:a="http://schemas.openxmlformats.org/drawingml/2006/main">
               <a:ext uri="{FF2B5EF4-FFF2-40B4-BE49-F238E27FC236}">
-                <a16:creationId xmlns:a16="http://schemas.microsoft.com/office/drawing/2014/main" id="{CA2C737D-6B39-4DAE-85CE-8D98C49C5B26}"/>
+                <a16:creationId xmlns:a16="http://schemas.microsoft.com/office/drawing/2014/main" id="{307A520C-7E1C-4A95-93ED-5940671A5C7B}"/>
               </a:ext>
             </a:extLst>
           </p:cNvPr>
@@ -17576,18 +17576,18 @@
           <p:cNvPr id="6" name="">
             <a:extLst xmlns:a="http://schemas.openxmlformats.org/drawingml/2006/main">
               <a:ext uri="{FF2B5EF4-FFF2-40B4-BE49-F238E27FC236}">
-                <a16:creationId xmlns:a16="http://schemas.microsoft.com/office/drawing/2014/main" id="{D1B5EF12-AB11-4F55-9AA5-1A052675A690}"/>
-              </a:ext>
-            </a:extLst>
-          </p:cNvPr>
-          <p:cNvSpPr>
-            <a:spLocks xmlns:a="http://schemas.openxmlformats.org/drawingml/2006/main" noGrp="1"/>
-          </p:cNvSpPr>
-          <p:nvPr/>
-        </p:nvSpPr>
-        <p:spPr>
-          <a:xfrm xmlns:a="http://schemas.openxmlformats.org/drawingml/2006/main">
-            <a:off x="609600" y="1181100"/>
+                <a16:creationId xmlns:a16="http://schemas.microsoft.com/office/drawing/2014/main" id="{411AE794-C632-445E-A101-EE726C81460A}"/>
+              </a:ext>
+            </a:extLst>
+          </p:cNvPr>
+          <p:cNvSpPr>
+            <a:spLocks xmlns:a="http://schemas.openxmlformats.org/drawingml/2006/main" noGrp="1"/>
+          </p:cNvSpPr>
+          <p:nvPr/>
+        </p:nvSpPr>
+        <p:spPr>
+          <a:xfrm xmlns:a="http://schemas.openxmlformats.org/drawingml/2006/main">
+            <a:off x="609600" y="1104900"/>
             <a:ext cx="3143250" cy="304800"/>
           </a:xfrm>
           <a:prstGeom xmlns:a="http://schemas.openxmlformats.org/drawingml/2006/main" prst="rect">
@@ -17601,11 +17601,11 @@
         </p:spPr>
         <p:txBody>
           <a:bodyPr xmlns:a="http://schemas.openxmlformats.org/drawingml/2006/main" anchor="t">
-            <a:normAutofit fontScale="71795"/>
+            <a:normAutofit fontScale="74667"/>
           </a:bodyPr>
           <a:lstStyle xmlns:a="http://schemas.openxmlformats.org/drawingml/2006/main">
             <a:defPPr algn="l">
-              <a:defRPr sz="1950" b="1">
+              <a:defRPr sz="1875" b="1">
                 <a:solidFill>
                   <a:srgbClr val="101C33"/>
                 </a:solidFill>
@@ -17617,7 +17617,7 @@
           </a:lstStyle>
           <a:p xmlns:a="http://schemas.openxmlformats.org/drawingml/2006/main">
             <a:pPr algn="l">
-              <a:defRPr sz="1950" b="1">
+              <a:defRPr sz="1875" b="1">
                 <a:solidFill>
                   <a:srgbClr val="101C33"/>
                 </a:solidFill>
@@ -17627,7 +17627,7 @@
               </a:defRPr>
             </a:pPr>
             <a:r>
-              <a:rPr sz="1950" b="1">
+              <a:rPr sz="1875" b="1">
                 <a:solidFill>
                   <a:srgbClr val="101C33"/>
                 </a:solidFill>
@@ -17645,23 +17645,2623 @@
           <p:cNvPr id="7" name="">
             <a:extLst xmlns:a="http://schemas.openxmlformats.org/drawingml/2006/main">
               <a:ext uri="{FF2B5EF4-FFF2-40B4-BE49-F238E27FC236}">
-                <a16:creationId xmlns:a16="http://schemas.microsoft.com/office/drawing/2014/main" id="{9AF2D007-5674-4B06-9970-8BA87A11DBCE}"/>
-              </a:ext>
-            </a:extLst>
-          </p:cNvPr>
-          <p:cNvSpPr>
-            <a:spLocks xmlns:a="http://schemas.openxmlformats.org/drawingml/2006/main" noGrp="1"/>
-          </p:cNvSpPr>
-          <p:nvPr/>
-        </p:nvSpPr>
-        <p:spPr>
-          <a:xfrm xmlns:a="http://schemas.openxmlformats.org/drawingml/2006/main">
-            <a:off x="857250" y="1714500"/>
-            <a:ext cx="2400300" cy="1009650"/>
+                <a16:creationId xmlns:a16="http://schemas.microsoft.com/office/drawing/2014/main" id="{4187D152-85FD-4423-A42A-7419D046CB6F}"/>
+              </a:ext>
+            </a:extLst>
+          </p:cNvPr>
+          <p:cNvSpPr>
+            <a:spLocks xmlns:a="http://schemas.openxmlformats.org/drawingml/2006/main" noGrp="1"/>
+          </p:cNvSpPr>
+          <p:nvPr/>
+        </p:nvSpPr>
+        <p:spPr>
+          <a:xfrm xmlns:a="http://schemas.openxmlformats.org/drawingml/2006/main">
+            <a:off x="6324600" y="1143000"/>
+            <a:ext cx="5257800" cy="238125"/>
+          </a:xfrm>
+          <a:prstGeom xmlns:a="http://schemas.openxmlformats.org/drawingml/2006/main" prst="rect">
+            <a:avLst/>
+          </a:prstGeom>
+          <a:noFill xmlns:a="http://schemas.openxmlformats.org/drawingml/2006/main"/>
+          <a:ln xmlns:a="http://schemas.openxmlformats.org/drawingml/2006/main" w="0">
+            <a:noFill/>
+            <a:prstDash val="solid"/>
+          </a:ln>
+        </p:spPr>
+        <p:txBody>
+          <a:bodyPr xmlns:a="http://schemas.openxmlformats.org/drawingml/2006/main" anchor="t">
+            <a:normAutofit fontScale="85556"/>
+          </a:bodyPr>
+          <a:lstStyle xmlns:a="http://schemas.openxmlformats.org/drawingml/2006/main">
+            <a:defPPr algn="r">
+              <a:defRPr sz="1125" b="0">
+                <a:solidFill>
+                  <a:srgbClr val="56657A"/>
+                </a:solidFill>
+                <a:latin typeface="Segoe UI"/>
+                <a:ea typeface="Segoe UI"/>
+                <a:cs typeface="Segoe UI"/>
+              </a:defRPr>
+            </a:defPPr>
+          </a:lstStyle>
+          <a:p xmlns:a="http://schemas.openxmlformats.org/drawingml/2006/main">
+            <a:pPr algn="r">
+              <a:defRPr sz="1125" b="0">
+                <a:solidFill>
+                  <a:srgbClr val="56657A"/>
+                </a:solidFill>
+                <a:latin typeface="Segoe UI"/>
+                <a:ea typeface="Segoe UI"/>
+                <a:cs typeface="Segoe UI"/>
+              </a:defRPr>
+            </a:pPr>
+            <a:r>
+              <a:rPr sz="1125" b="0">
+                <a:solidFill>
+                  <a:srgbClr val="56657A"/>
+                </a:solidFill>
+                <a:latin typeface="Segoe UI"/>
+                <a:ea typeface="Segoe UI"/>
+                <a:cs typeface="Segoe UI"/>
+              </a:rPr>
+              <a:t>1 : many joins · PK = primary key · FK = foreign key · DD = degenerate dimension</a:t>
+            </a:r>
+          </a:p>
+        </p:txBody>
+      </p:sp>
+      <p:sp>
+        <p:nvSpPr>
+          <p:cNvPr id="8" name="">
+            <a:extLst xmlns:a="http://schemas.openxmlformats.org/drawingml/2006/main">
+              <a:ext uri="{FF2B5EF4-FFF2-40B4-BE49-F238E27FC236}">
+                <a16:creationId xmlns:a16="http://schemas.microsoft.com/office/drawing/2014/main" id="{2D62728E-EF0A-4FEF-A59A-4D0E828A1948}"/>
+              </a:ext>
+            </a:extLst>
+          </p:cNvPr>
+          <p:cNvSpPr>
+            <a:spLocks xmlns:a="http://schemas.openxmlformats.org/drawingml/2006/main" noGrp="1"/>
+          </p:cNvSpPr>
+          <p:nvPr/>
+        </p:nvSpPr>
+        <p:spPr>
+          <a:xfrm xmlns:a="http://schemas.openxmlformats.org/drawingml/2006/main">
+            <a:off x="609600" y="1562100"/>
+            <a:ext cx="2857500" cy="1428750"/>
           </a:xfrm>
           <a:prstGeom xmlns:a="http://schemas.openxmlformats.org/drawingml/2006/main" prst="roundRect">
             <a:avLst>
-              <a:gd name="adj" fmla="val 7547"/>
+              <a:gd name="adj" fmla="val 5333"/>
+            </a:avLst>
+          </a:prstGeom>
+          <a:solidFill xmlns:a="http://schemas.openxmlformats.org/drawingml/2006/main">
+            <a:srgbClr val="FFFFFF"/>
+          </a:solidFill>
+          <a:ln xmlns:a="http://schemas.openxmlformats.org/drawingml/2006/main" w="14288">
+            <a:solidFill>
+              <a:srgbClr val="AEB8E8"/>
+            </a:solidFill>
+            <a:prstDash val="solid"/>
+          </a:ln>
+        </p:spPr>
+      </p:sp>
+      <p:sp>
+        <p:nvSpPr>
+          <p:cNvPr id="9" name="">
+            <a:extLst xmlns:a="http://schemas.openxmlformats.org/drawingml/2006/main">
+              <a:ext uri="{FF2B5EF4-FFF2-40B4-BE49-F238E27FC236}">
+                <a16:creationId xmlns:a16="http://schemas.microsoft.com/office/drawing/2014/main" id="{8F5EC4FD-92DD-4E29-B3F5-270B545F909F}"/>
+              </a:ext>
+            </a:extLst>
+          </p:cNvPr>
+          <p:cNvSpPr>
+            <a:spLocks xmlns:a="http://schemas.openxmlformats.org/drawingml/2006/main" noGrp="1"/>
+          </p:cNvSpPr>
+          <p:nvPr/>
+        </p:nvSpPr>
+        <p:spPr>
+          <a:xfrm xmlns:a="http://schemas.openxmlformats.org/drawingml/2006/main">
+            <a:off x="609600" y="1562100"/>
+            <a:ext cx="2857500" cy="361950"/>
+          </a:xfrm>
+          <a:prstGeom xmlns:a="http://schemas.openxmlformats.org/drawingml/2006/main" prst="roundRect">
+            <a:avLst>
+              <a:gd name="adj" fmla="val 21053"/>
+            </a:avLst>
+          </a:prstGeom>
+          <a:solidFill xmlns:a="http://schemas.openxmlformats.org/drawingml/2006/main">
+            <a:srgbClr val="5267D7"/>
+          </a:solidFill>
+          <a:ln xmlns:a="http://schemas.openxmlformats.org/drawingml/2006/main" w="9525">
+            <a:solidFill>
+              <a:srgbClr val="5267D7"/>
+            </a:solidFill>
+            <a:prstDash val="solid"/>
+          </a:ln>
+        </p:spPr>
+      </p:sp>
+      <p:sp>
+        <p:nvSpPr>
+          <p:cNvPr id="10" name="">
+            <a:extLst xmlns:a="http://schemas.openxmlformats.org/drawingml/2006/main">
+              <a:ext uri="{FF2B5EF4-FFF2-40B4-BE49-F238E27FC236}">
+                <a16:creationId xmlns:a16="http://schemas.microsoft.com/office/drawing/2014/main" id="{17DC68D9-9EE7-4602-97F0-34113ACE4853}"/>
+              </a:ext>
+            </a:extLst>
+          </p:cNvPr>
+          <p:cNvSpPr>
+            <a:spLocks xmlns:a="http://schemas.openxmlformats.org/drawingml/2006/main" noGrp="1"/>
+          </p:cNvSpPr>
+          <p:nvPr/>
+        </p:nvSpPr>
+        <p:spPr>
+          <a:xfrm xmlns:a="http://schemas.openxmlformats.org/drawingml/2006/main">
+            <a:off x="781050" y="1628775"/>
+            <a:ext cx="2514600" cy="228600"/>
+          </a:xfrm>
+          <a:prstGeom xmlns:a="http://schemas.openxmlformats.org/drawingml/2006/main" prst="rect">
+            <a:avLst/>
+          </a:prstGeom>
+          <a:noFill xmlns:a="http://schemas.openxmlformats.org/drawingml/2006/main"/>
+          <a:ln xmlns:a="http://schemas.openxmlformats.org/drawingml/2006/main" w="0">
+            <a:noFill/>
+            <a:prstDash val="solid"/>
+          </a:ln>
+        </p:spPr>
+        <p:txBody>
+          <a:bodyPr xmlns:a="http://schemas.openxmlformats.org/drawingml/2006/main" anchor="t">
+            <a:normAutofit fontScale="63158"/>
+          </a:bodyPr>
+          <a:lstStyle xmlns:a="http://schemas.openxmlformats.org/drawingml/2006/main">
+            <a:defPPr algn="l">
+              <a:defRPr sz="1425" b="1">
+                <a:solidFill>
+                  <a:srgbClr val="FFFFFF"/>
+                </a:solidFill>
+                <a:latin typeface="Segoe UI"/>
+                <a:ea typeface="Segoe UI"/>
+                <a:cs typeface="Segoe UI"/>
+              </a:defRPr>
+            </a:defPPr>
+          </a:lstStyle>
+          <a:p xmlns:a="http://schemas.openxmlformats.org/drawingml/2006/main">
+            <a:pPr algn="l">
+              <a:defRPr sz="1425" b="1">
+                <a:solidFill>
+                  <a:srgbClr val="FFFFFF"/>
+                </a:solidFill>
+                <a:latin typeface="Segoe UI"/>
+                <a:ea typeface="Segoe UI"/>
+                <a:cs typeface="Segoe UI"/>
+              </a:defRPr>
+            </a:pPr>
+            <a:r>
+              <a:rPr sz="1425" b="1">
+                <a:solidFill>
+                  <a:srgbClr val="FFFFFF"/>
+                </a:solidFill>
+                <a:latin typeface="Segoe UI"/>
+                <a:ea typeface="Segoe UI"/>
+                <a:cs typeface="Segoe UI"/>
+              </a:rPr>
+              <a:t>DIM_DATE</a:t>
+            </a:r>
+          </a:p>
+        </p:txBody>
+      </p:sp>
+      <p:sp>
+        <p:nvSpPr>
+          <p:cNvPr id="11" name="">
+            <a:extLst xmlns:a="http://schemas.openxmlformats.org/drawingml/2006/main">
+              <a:ext uri="{FF2B5EF4-FFF2-40B4-BE49-F238E27FC236}">
+                <a16:creationId xmlns:a16="http://schemas.microsoft.com/office/drawing/2014/main" id="{24AC29B1-C9A2-461D-A559-A999FA193144}"/>
+              </a:ext>
+            </a:extLst>
+          </p:cNvPr>
+          <p:cNvSpPr>
+            <a:spLocks xmlns:a="http://schemas.openxmlformats.org/drawingml/2006/main" noGrp="1"/>
+          </p:cNvSpPr>
+          <p:nvPr/>
+        </p:nvSpPr>
+        <p:spPr>
+          <a:xfrm xmlns:a="http://schemas.openxmlformats.org/drawingml/2006/main">
+            <a:off x="781050" y="2000250"/>
+            <a:ext cx="2514600" cy="895350"/>
+          </a:xfrm>
+          <a:prstGeom xmlns:a="http://schemas.openxmlformats.org/drawingml/2006/main" prst="rect">
+            <a:avLst/>
+          </a:prstGeom>
+          <a:noFill xmlns:a="http://schemas.openxmlformats.org/drawingml/2006/main"/>
+          <a:ln xmlns:a="http://schemas.openxmlformats.org/drawingml/2006/main" w="0">
+            <a:noFill/>
+            <a:prstDash val="solid"/>
+          </a:ln>
+        </p:spPr>
+        <p:txBody>
+          <a:bodyPr xmlns:a="http://schemas.openxmlformats.org/drawingml/2006/main" anchor="t">
+            <a:normAutofit fontScale="100000"/>
+          </a:bodyPr>
+          <a:lstStyle xmlns:a="http://schemas.openxmlformats.org/drawingml/2006/main">
+            <a:defPPr algn="l">
+              <a:defRPr sz="1200" b="0">
+                <a:solidFill>
+                  <a:srgbClr val="172033"/>
+                </a:solidFill>
+                <a:latin typeface="Segoe UI"/>
+                <a:ea typeface="Segoe UI"/>
+                <a:cs typeface="Segoe UI"/>
+              </a:defRPr>
+            </a:defPPr>
+          </a:lstStyle>
+          <a:p xmlns:a="http://schemas.openxmlformats.org/drawingml/2006/main">
+            <a:pPr algn="l">
+              <a:defRPr sz="1200" b="0">
+                <a:solidFill>
+                  <a:srgbClr val="172033"/>
+                </a:solidFill>
+                <a:latin typeface="Segoe UI"/>
+                <a:ea typeface="Segoe UI"/>
+                <a:cs typeface="Segoe UI"/>
+              </a:defRPr>
+            </a:pPr>
+            <a:r>
+              <a:rPr sz="1200" b="0">
+                <a:solidFill>
+                  <a:srgbClr val="172033"/>
+                </a:solidFill>
+                <a:latin typeface="Segoe UI"/>
+                <a:ea typeface="Segoe UI"/>
+                <a:cs typeface="Segoe UI"/>
+              </a:rPr>
+              <a:t>PK  date_key</a:t>
+            </a:r>
+          </a:p>
+          <a:p xmlns:a="http://schemas.openxmlformats.org/drawingml/2006/main">
+            <a:pPr algn="l">
+              <a:defRPr sz="1200" b="0">
+                <a:solidFill>
+                  <a:srgbClr val="172033"/>
+                </a:solidFill>
+                <a:latin typeface="Segoe UI"/>
+                <a:ea typeface="Segoe UI"/>
+                <a:cs typeface="Segoe UI"/>
+              </a:defRPr>
+            </a:pPr>
+            <a:r>
+              <a:rPr sz="1200" b="0">
+                <a:solidFill>
+                  <a:srgbClr val="172033"/>
+                </a:solidFill>
+                <a:latin typeface="Segoe UI"/>
+                <a:ea typeface="Segoe UI"/>
+                <a:cs typeface="Segoe UI"/>
+              </a:rPr>
+              <a:t>     full_date</a:t>
+            </a:r>
+          </a:p>
+          <a:p xmlns:a="http://schemas.openxmlformats.org/drawingml/2006/main">
+            <a:pPr algn="l">
+              <a:defRPr sz="1200" b="0">
+                <a:solidFill>
+                  <a:srgbClr val="172033"/>
+                </a:solidFill>
+                <a:latin typeface="Segoe UI"/>
+                <a:ea typeface="Segoe UI"/>
+                <a:cs typeface="Segoe UI"/>
+              </a:defRPr>
+            </a:pPr>
+            <a:r>
+              <a:rPr sz="1200" b="0">
+                <a:solidFill>
+                  <a:srgbClr val="172033"/>
+                </a:solidFill>
+                <a:latin typeface="Segoe UI"/>
+                <a:ea typeface="Segoe UI"/>
+                <a:cs typeface="Segoe UI"/>
+              </a:rPr>
+              <a:t>     year · quarter · month</a:t>
+            </a:r>
+          </a:p>
+          <a:p xmlns:a="http://schemas.openxmlformats.org/drawingml/2006/main">
+            <a:pPr algn="l">
+              <a:defRPr sz="1200" b="0">
+                <a:solidFill>
+                  <a:srgbClr val="172033"/>
+                </a:solidFill>
+                <a:latin typeface="Segoe UI"/>
+                <a:ea typeface="Segoe UI"/>
+                <a:cs typeface="Segoe UI"/>
+              </a:defRPr>
+            </a:pPr>
+            <a:r>
+              <a:rPr sz="1200" b="0">
+                <a:solidFill>
+                  <a:srgbClr val="172033"/>
+                </a:solidFill>
+                <a:latin typeface="Segoe UI"/>
+                <a:ea typeface="Segoe UI"/>
+                <a:cs typeface="Segoe UI"/>
+              </a:rPr>
+              <a:t>     week_of_year · day_of_week</a:t>
+            </a:r>
+          </a:p>
+        </p:txBody>
+      </p:sp>
+      <p:sp>
+        <p:nvSpPr>
+          <p:cNvPr id="12" name="">
+            <a:extLst xmlns:a="http://schemas.openxmlformats.org/drawingml/2006/main">
+              <a:ext uri="{FF2B5EF4-FFF2-40B4-BE49-F238E27FC236}">
+                <a16:creationId xmlns:a16="http://schemas.microsoft.com/office/drawing/2014/main" id="{A493FE27-95B3-434C-AC3A-818E73BFAAA2}"/>
+              </a:ext>
+            </a:extLst>
+          </p:cNvPr>
+          <p:cNvSpPr>
+            <a:spLocks xmlns:a="http://schemas.openxmlformats.org/drawingml/2006/main" noGrp="1"/>
+          </p:cNvSpPr>
+          <p:nvPr/>
+        </p:nvSpPr>
+        <p:spPr>
+          <a:xfrm xmlns:a="http://schemas.openxmlformats.org/drawingml/2006/main">
+            <a:off x="609600" y="3543300"/>
+            <a:ext cx="2857500" cy="1428750"/>
+          </a:xfrm>
+          <a:prstGeom xmlns:a="http://schemas.openxmlformats.org/drawingml/2006/main" prst="roundRect">
+            <a:avLst>
+              <a:gd name="adj" fmla="val 5333"/>
+            </a:avLst>
+          </a:prstGeom>
+          <a:solidFill xmlns:a="http://schemas.openxmlformats.org/drawingml/2006/main">
+            <a:srgbClr val="FFFFFF"/>
+          </a:solidFill>
+          <a:ln xmlns:a="http://schemas.openxmlformats.org/drawingml/2006/main" w="14288">
+            <a:solidFill>
+              <a:srgbClr val="82DACE"/>
+            </a:solidFill>
+            <a:prstDash val="solid"/>
+          </a:ln>
+        </p:spPr>
+      </p:sp>
+      <p:sp>
+        <p:nvSpPr>
+          <p:cNvPr id="13" name="">
+            <a:extLst xmlns:a="http://schemas.openxmlformats.org/drawingml/2006/main">
+              <a:ext uri="{FF2B5EF4-FFF2-40B4-BE49-F238E27FC236}">
+                <a16:creationId xmlns:a16="http://schemas.microsoft.com/office/drawing/2014/main" id="{48CE627E-0D27-4B3B-8ED8-99E5A5813BE6}"/>
+              </a:ext>
+            </a:extLst>
+          </p:cNvPr>
+          <p:cNvSpPr>
+            <a:spLocks xmlns:a="http://schemas.openxmlformats.org/drawingml/2006/main" noGrp="1"/>
+          </p:cNvSpPr>
+          <p:nvPr/>
+        </p:nvSpPr>
+        <p:spPr>
+          <a:xfrm xmlns:a="http://schemas.openxmlformats.org/drawingml/2006/main">
+            <a:off x="609600" y="3543300"/>
+            <a:ext cx="2857500" cy="361950"/>
+          </a:xfrm>
+          <a:prstGeom xmlns:a="http://schemas.openxmlformats.org/drawingml/2006/main" prst="roundRect">
+            <a:avLst>
+              <a:gd name="adj" fmla="val 21053"/>
+            </a:avLst>
+          </a:prstGeom>
+          <a:solidFill xmlns:a="http://schemas.openxmlformats.org/drawingml/2006/main">
+            <a:srgbClr val="16B8A6"/>
+          </a:solidFill>
+          <a:ln xmlns:a="http://schemas.openxmlformats.org/drawingml/2006/main" w="9525">
+            <a:solidFill>
+              <a:srgbClr val="16B8A6"/>
+            </a:solidFill>
+            <a:prstDash val="solid"/>
+          </a:ln>
+        </p:spPr>
+      </p:sp>
+      <p:sp>
+        <p:nvSpPr>
+          <p:cNvPr id="14" name="">
+            <a:extLst xmlns:a="http://schemas.openxmlformats.org/drawingml/2006/main">
+              <a:ext uri="{FF2B5EF4-FFF2-40B4-BE49-F238E27FC236}">
+                <a16:creationId xmlns:a16="http://schemas.microsoft.com/office/drawing/2014/main" id="{77A9EBDE-8D2D-4972-99EB-1AA844F5B46E}"/>
+              </a:ext>
+            </a:extLst>
+          </p:cNvPr>
+          <p:cNvSpPr>
+            <a:spLocks xmlns:a="http://schemas.openxmlformats.org/drawingml/2006/main" noGrp="1"/>
+          </p:cNvSpPr>
+          <p:nvPr/>
+        </p:nvSpPr>
+        <p:spPr>
+          <a:xfrm xmlns:a="http://schemas.openxmlformats.org/drawingml/2006/main">
+            <a:off x="781050" y="3609975"/>
+            <a:ext cx="2514600" cy="228600"/>
+          </a:xfrm>
+          <a:prstGeom xmlns:a="http://schemas.openxmlformats.org/drawingml/2006/main" prst="rect">
+            <a:avLst/>
+          </a:prstGeom>
+          <a:noFill xmlns:a="http://schemas.openxmlformats.org/drawingml/2006/main"/>
+          <a:ln xmlns:a="http://schemas.openxmlformats.org/drawingml/2006/main" w="0">
+            <a:noFill/>
+            <a:prstDash val="solid"/>
+          </a:ln>
+        </p:spPr>
+        <p:txBody>
+          <a:bodyPr xmlns:a="http://schemas.openxmlformats.org/drawingml/2006/main" anchor="t">
+            <a:normAutofit fontScale="63158"/>
+          </a:bodyPr>
+          <a:lstStyle xmlns:a="http://schemas.openxmlformats.org/drawingml/2006/main">
+            <a:defPPr algn="l">
+              <a:defRPr sz="1425" b="1">
+                <a:solidFill>
+                  <a:srgbClr val="FFFFFF"/>
+                </a:solidFill>
+                <a:latin typeface="Segoe UI"/>
+                <a:ea typeface="Segoe UI"/>
+                <a:cs typeface="Segoe UI"/>
+              </a:defRPr>
+            </a:defPPr>
+          </a:lstStyle>
+          <a:p xmlns:a="http://schemas.openxmlformats.org/drawingml/2006/main">
+            <a:pPr algn="l">
+              <a:defRPr sz="1425" b="1">
+                <a:solidFill>
+                  <a:srgbClr val="FFFFFF"/>
+                </a:solidFill>
+                <a:latin typeface="Segoe UI"/>
+                <a:ea typeface="Segoe UI"/>
+                <a:cs typeface="Segoe UI"/>
+              </a:defRPr>
+            </a:pPr>
+            <a:r>
+              <a:rPr sz="1425" b="1">
+                <a:solidFill>
+                  <a:srgbClr val="FFFFFF"/>
+                </a:solidFill>
+                <a:latin typeface="Segoe UI"/>
+                <a:ea typeface="Segoe UI"/>
+                <a:cs typeface="Segoe UI"/>
+              </a:rPr>
+              <a:t>DIM_CUSTOMER</a:t>
+            </a:r>
+          </a:p>
+        </p:txBody>
+      </p:sp>
+      <p:sp>
+        <p:nvSpPr>
+          <p:cNvPr id="15" name="">
+            <a:extLst xmlns:a="http://schemas.openxmlformats.org/drawingml/2006/main">
+              <a:ext uri="{FF2B5EF4-FFF2-40B4-BE49-F238E27FC236}">
+                <a16:creationId xmlns:a16="http://schemas.microsoft.com/office/drawing/2014/main" id="{C21A2403-4ED1-4914-89E0-94B5CD57416D}"/>
+              </a:ext>
+            </a:extLst>
+          </p:cNvPr>
+          <p:cNvSpPr>
+            <a:spLocks xmlns:a="http://schemas.openxmlformats.org/drawingml/2006/main" noGrp="1"/>
+          </p:cNvSpPr>
+          <p:nvPr/>
+        </p:nvSpPr>
+        <p:spPr>
+          <a:xfrm xmlns:a="http://schemas.openxmlformats.org/drawingml/2006/main">
+            <a:off x="781050" y="3981450"/>
+            <a:ext cx="2514600" cy="876300"/>
+          </a:xfrm>
+          <a:prstGeom xmlns:a="http://schemas.openxmlformats.org/drawingml/2006/main" prst="rect">
+            <a:avLst/>
+          </a:prstGeom>
+          <a:noFill xmlns:a="http://schemas.openxmlformats.org/drawingml/2006/main"/>
+          <a:ln xmlns:a="http://schemas.openxmlformats.org/drawingml/2006/main" w="0">
+            <a:noFill/>
+            <a:prstDash val="solid"/>
+          </a:ln>
+        </p:spPr>
+        <p:txBody>
+          <a:bodyPr xmlns:a="http://schemas.openxmlformats.org/drawingml/2006/main" anchor="t">
+            <a:normAutofit fontScale="100000"/>
+          </a:bodyPr>
+          <a:lstStyle xmlns:a="http://schemas.openxmlformats.org/drawingml/2006/main">
+            <a:defPPr algn="l">
+              <a:defRPr sz="1200" b="0">
+                <a:solidFill>
+                  <a:srgbClr val="172033"/>
+                </a:solidFill>
+                <a:latin typeface="Segoe UI"/>
+                <a:ea typeface="Segoe UI"/>
+                <a:cs typeface="Segoe UI"/>
+              </a:defRPr>
+            </a:defPPr>
+          </a:lstStyle>
+          <a:p xmlns:a="http://schemas.openxmlformats.org/drawingml/2006/main">
+            <a:pPr algn="l">
+              <a:defRPr sz="1200" b="0">
+                <a:solidFill>
+                  <a:srgbClr val="172033"/>
+                </a:solidFill>
+                <a:latin typeface="Segoe UI"/>
+                <a:ea typeface="Segoe UI"/>
+                <a:cs typeface="Segoe UI"/>
+              </a:defRPr>
+            </a:pPr>
+            <a:r>
+              <a:rPr sz="1200" b="0">
+                <a:solidFill>
+                  <a:srgbClr val="172033"/>
+                </a:solidFill>
+                <a:latin typeface="Segoe UI"/>
+                <a:ea typeface="Segoe UI"/>
+                <a:cs typeface="Segoe UI"/>
+              </a:rPr>
+              <a:t>PK  customer_key</a:t>
+            </a:r>
+          </a:p>
+          <a:p xmlns:a="http://schemas.openxmlformats.org/drawingml/2006/main">
+            <a:pPr algn="l">
+              <a:defRPr sz="1200" b="0">
+                <a:solidFill>
+                  <a:srgbClr val="172033"/>
+                </a:solidFill>
+                <a:latin typeface="Segoe UI"/>
+                <a:ea typeface="Segoe UI"/>
+                <a:cs typeface="Segoe UI"/>
+              </a:defRPr>
+            </a:pPr>
+            <a:r>
+              <a:rPr sz="1200" b="0">
+                <a:solidFill>
+                  <a:srgbClr val="172033"/>
+                </a:solidFill>
+                <a:latin typeface="Segoe UI"/>
+                <a:ea typeface="Segoe UI"/>
+                <a:cs typeface="Segoe UI"/>
+              </a:rPr>
+              <a:t>     customer_id</a:t>
+            </a:r>
+          </a:p>
+          <a:p xmlns:a="http://schemas.openxmlformats.org/drawingml/2006/main">
+            <a:pPr algn="l">
+              <a:defRPr sz="1200" b="0">
+                <a:solidFill>
+                  <a:srgbClr val="172033"/>
+                </a:solidFill>
+                <a:latin typeface="Segoe UI"/>
+                <a:ea typeface="Segoe UI"/>
+                <a:cs typeface="Segoe UI"/>
+              </a:defRPr>
+            </a:pPr>
+            <a:r>
+              <a:rPr sz="1200" b="0">
+                <a:solidFill>
+                  <a:srgbClr val="172033"/>
+                </a:solidFill>
+                <a:latin typeface="Segoe UI"/>
+                <a:ea typeface="Segoe UI"/>
+                <a:cs typeface="Segoe UI"/>
+              </a:rPr>
+              <a:t>     customer_segment</a:t>
+            </a:r>
+          </a:p>
+          <a:p xmlns:a="http://schemas.openxmlformats.org/drawingml/2006/main">
+            <a:pPr algn="l">
+              <a:defRPr sz="1200" b="0">
+                <a:solidFill>
+                  <a:srgbClr val="172033"/>
+                </a:solidFill>
+                <a:latin typeface="Segoe UI"/>
+                <a:ea typeface="Segoe UI"/>
+                <a:cs typeface="Segoe UI"/>
+              </a:defRPr>
+            </a:pPr>
+            <a:r>
+              <a:rPr sz="1200" b="0">
+                <a:solidFill>
+                  <a:srgbClr val="172033"/>
+                </a:solidFill>
+                <a:latin typeface="Segoe UI"/>
+                <a:ea typeface="Segoe UI"/>
+                <a:cs typeface="Segoe UI"/>
+              </a:rPr>
+              <a:t>     region</a:t>
+            </a:r>
+          </a:p>
+        </p:txBody>
+      </p:sp>
+      <p:sp>
+        <p:nvSpPr>
+          <p:cNvPr id="16" name="">
+            <a:extLst xmlns:a="http://schemas.openxmlformats.org/drawingml/2006/main">
+              <a:ext uri="{FF2B5EF4-FFF2-40B4-BE49-F238E27FC236}">
+                <a16:creationId xmlns:a16="http://schemas.microsoft.com/office/drawing/2014/main" id="{DF1A6089-6C7A-4406-A363-852B4634847B}"/>
+              </a:ext>
+            </a:extLst>
+          </p:cNvPr>
+          <p:cNvSpPr>
+            <a:spLocks xmlns:a="http://schemas.openxmlformats.org/drawingml/2006/main" noGrp="1"/>
+          </p:cNvSpPr>
+          <p:nvPr/>
+        </p:nvSpPr>
+        <p:spPr>
+          <a:xfrm xmlns:a="http://schemas.openxmlformats.org/drawingml/2006/main">
+            <a:off x="4324350" y="2095500"/>
+            <a:ext cx="3543300" cy="2571750"/>
+          </a:xfrm>
+          <a:prstGeom xmlns:a="http://schemas.openxmlformats.org/drawingml/2006/main" prst="roundRect">
+            <a:avLst>
+              <a:gd name="adj" fmla="val 2963"/>
+            </a:avLst>
+          </a:prstGeom>
+          <a:solidFill xmlns:a="http://schemas.openxmlformats.org/drawingml/2006/main">
+            <a:srgbClr val="101C33"/>
+          </a:solidFill>
+          <a:ln xmlns:a="http://schemas.openxmlformats.org/drawingml/2006/main" w="9525">
+            <a:solidFill>
+              <a:srgbClr val="101C33"/>
+            </a:solidFill>
+            <a:prstDash val="solid"/>
+          </a:ln>
+        </p:spPr>
+      </p:sp>
+      <p:sp>
+        <p:nvSpPr>
+          <p:cNvPr id="17" name="">
+            <a:extLst xmlns:a="http://schemas.openxmlformats.org/drawingml/2006/main">
+              <a:ext uri="{FF2B5EF4-FFF2-40B4-BE49-F238E27FC236}">
+                <a16:creationId xmlns:a16="http://schemas.microsoft.com/office/drawing/2014/main" id="{24E8D7BB-32D1-4A2D-B793-0D43E80E0C7A}"/>
+              </a:ext>
+            </a:extLst>
+          </p:cNvPr>
+          <p:cNvSpPr>
+            <a:spLocks xmlns:a="http://schemas.openxmlformats.org/drawingml/2006/main" noGrp="1"/>
+          </p:cNvSpPr>
+          <p:nvPr/>
+        </p:nvSpPr>
+        <p:spPr>
+          <a:xfrm xmlns:a="http://schemas.openxmlformats.org/drawingml/2006/main">
+            <a:off x="4324350" y="2095500"/>
+            <a:ext cx="76200" cy="2571750"/>
+          </a:xfrm>
+          <a:prstGeom xmlns:a="http://schemas.openxmlformats.org/drawingml/2006/main" prst="rect">
+            <a:avLst/>
+          </a:prstGeom>
+          <a:solidFill xmlns:a="http://schemas.openxmlformats.org/drawingml/2006/main">
+            <a:srgbClr val="F2A03D"/>
+          </a:solidFill>
+          <a:ln xmlns:a="http://schemas.openxmlformats.org/drawingml/2006/main" w="0">
+            <a:noFill/>
+            <a:prstDash val="solid"/>
+          </a:ln>
+        </p:spPr>
+      </p:sp>
+      <p:sp>
+        <p:nvSpPr>
+          <p:cNvPr id="18" name="">
+            <a:extLst xmlns:a="http://schemas.openxmlformats.org/drawingml/2006/main">
+              <a:ext uri="{FF2B5EF4-FFF2-40B4-BE49-F238E27FC236}">
+                <a16:creationId xmlns:a16="http://schemas.microsoft.com/office/drawing/2014/main" id="{40AED444-B6C0-40A7-B576-8015E3C22915}"/>
+              </a:ext>
+            </a:extLst>
+          </p:cNvPr>
+          <p:cNvSpPr>
+            <a:spLocks xmlns:a="http://schemas.openxmlformats.org/drawingml/2006/main" noGrp="1"/>
+          </p:cNvSpPr>
+          <p:nvPr/>
+        </p:nvSpPr>
+        <p:spPr>
+          <a:xfrm xmlns:a="http://schemas.openxmlformats.org/drawingml/2006/main">
+            <a:off x="4572000" y="2228850"/>
+            <a:ext cx="3048000" cy="304800"/>
+          </a:xfrm>
+          <a:prstGeom xmlns:a="http://schemas.openxmlformats.org/drawingml/2006/main" prst="rect">
+            <a:avLst/>
+          </a:prstGeom>
+          <a:noFill xmlns:a="http://schemas.openxmlformats.org/drawingml/2006/main"/>
+          <a:ln xmlns:a="http://schemas.openxmlformats.org/drawingml/2006/main" w="0">
+            <a:noFill/>
+            <a:prstDash val="solid"/>
+          </a:ln>
+        </p:spPr>
+        <p:txBody>
+          <a:bodyPr xmlns:a="http://schemas.openxmlformats.org/drawingml/2006/main" anchor="t">
+            <a:normAutofit fontScale="74667"/>
+          </a:bodyPr>
+          <a:lstStyle xmlns:a="http://schemas.openxmlformats.org/drawingml/2006/main">
+            <a:defPPr algn="l">
+              <a:defRPr sz="1875" b="1">
+                <a:solidFill>
+                  <a:srgbClr val="FFFFFF"/>
+                </a:solidFill>
+                <a:latin typeface="Segoe UI"/>
+                <a:ea typeface="Segoe UI"/>
+                <a:cs typeface="Segoe UI"/>
+              </a:defRPr>
+            </a:defPPr>
+          </a:lstStyle>
+          <a:p xmlns:a="http://schemas.openxmlformats.org/drawingml/2006/main">
+            <a:pPr algn="l">
+              <a:defRPr sz="1875" b="1">
+                <a:solidFill>
+                  <a:srgbClr val="FFFFFF"/>
+                </a:solidFill>
+                <a:latin typeface="Segoe UI"/>
+                <a:ea typeface="Segoe UI"/>
+                <a:cs typeface="Segoe UI"/>
+              </a:defRPr>
+            </a:pPr>
+            <a:r>
+              <a:rPr sz="1875" b="1">
+                <a:solidFill>
+                  <a:srgbClr val="FFFFFF"/>
+                </a:solidFill>
+                <a:latin typeface="Segoe UI"/>
+                <a:ea typeface="Segoe UI"/>
+                <a:cs typeface="Segoe UI"/>
+              </a:rPr>
+              <a:t>FACT_SALES</a:t>
+            </a:r>
+          </a:p>
+        </p:txBody>
+      </p:sp>
+      <p:sp>
+        <p:nvSpPr>
+          <p:cNvPr id="19" name="">
+            <a:extLst xmlns:a="http://schemas.openxmlformats.org/drawingml/2006/main">
+              <a:ext uri="{FF2B5EF4-FFF2-40B4-BE49-F238E27FC236}">
+                <a16:creationId xmlns:a16="http://schemas.microsoft.com/office/drawing/2014/main" id="{88521BA9-20A6-4AAA-98B7-4A10969DAB44}"/>
+              </a:ext>
+            </a:extLst>
+          </p:cNvPr>
+          <p:cNvSpPr>
+            <a:spLocks xmlns:a="http://schemas.openxmlformats.org/drawingml/2006/main" noGrp="1"/>
+          </p:cNvSpPr>
+          <p:nvPr/>
+        </p:nvSpPr>
+        <p:spPr>
+          <a:xfrm xmlns:a="http://schemas.openxmlformats.org/drawingml/2006/main">
+            <a:off x="4572000" y="2590800"/>
+            <a:ext cx="3048000" cy="247650"/>
+          </a:xfrm>
+          <a:prstGeom xmlns:a="http://schemas.openxmlformats.org/drawingml/2006/main" prst="rect">
+            <a:avLst/>
+          </a:prstGeom>
+          <a:noFill xmlns:a="http://schemas.openxmlformats.org/drawingml/2006/main"/>
+          <a:ln xmlns:a="http://schemas.openxmlformats.org/drawingml/2006/main" w="0">
+            <a:noFill/>
+            <a:prstDash val="solid"/>
+          </a:ln>
+        </p:spPr>
+        <p:txBody>
+          <a:bodyPr xmlns:a="http://schemas.openxmlformats.org/drawingml/2006/main" anchor="t">
+            <a:normAutofit fontScale="85417"/>
+          </a:bodyPr>
+          <a:lstStyle xmlns:a="http://schemas.openxmlformats.org/drawingml/2006/main">
+            <a:defPPr algn="l">
+              <a:defRPr sz="1200" b="1">
+                <a:solidFill>
+                  <a:srgbClr val="F2A03D"/>
+                </a:solidFill>
+                <a:latin typeface="Segoe UI"/>
+                <a:ea typeface="Segoe UI"/>
+                <a:cs typeface="Segoe UI"/>
+              </a:defRPr>
+            </a:defPPr>
+          </a:lstStyle>
+          <a:p xmlns:a="http://schemas.openxmlformats.org/drawingml/2006/main">
+            <a:pPr algn="l">
+              <a:defRPr sz="1200" b="1">
+                <a:solidFill>
+                  <a:srgbClr val="F2A03D"/>
+                </a:solidFill>
+                <a:latin typeface="Segoe UI"/>
+                <a:ea typeface="Segoe UI"/>
+                <a:cs typeface="Segoe UI"/>
+              </a:defRPr>
+            </a:pPr>
+            <a:r>
+              <a:rPr sz="1200" b="1">
+                <a:solidFill>
+                  <a:srgbClr val="F2A03D"/>
+                </a:solidFill>
+                <a:latin typeface="Segoe UI"/>
+                <a:ea typeface="Segoe UI"/>
+                <a:cs typeface="Segoe UI"/>
+              </a:rPr>
+              <a:t>GRAIN  one accepted order line</a:t>
+            </a:r>
+          </a:p>
+        </p:txBody>
+      </p:sp>
+      <p:sp>
+        <p:nvSpPr>
+          <p:cNvPr id="20" name="">
+            <a:extLst xmlns:a="http://schemas.openxmlformats.org/drawingml/2006/main">
+              <a:ext uri="{FF2B5EF4-FFF2-40B4-BE49-F238E27FC236}">
+                <a16:creationId xmlns:a16="http://schemas.microsoft.com/office/drawing/2014/main" id="{AF1A6B69-7F9E-49AE-8BF2-36FBE4794AC4}"/>
+              </a:ext>
+            </a:extLst>
+          </p:cNvPr>
+          <p:cNvSpPr>
+            <a:spLocks xmlns:a="http://schemas.openxmlformats.org/drawingml/2006/main" noGrp="1"/>
+          </p:cNvSpPr>
+          <p:nvPr/>
+        </p:nvSpPr>
+        <p:spPr>
+          <a:xfrm xmlns:a="http://schemas.openxmlformats.org/drawingml/2006/main">
+            <a:off x="4572000" y="2952750"/>
+            <a:ext cx="1524000" cy="1257300"/>
+          </a:xfrm>
+          <a:prstGeom xmlns:a="http://schemas.openxmlformats.org/drawingml/2006/main" prst="rect">
+            <a:avLst/>
+          </a:prstGeom>
+          <a:noFill xmlns:a="http://schemas.openxmlformats.org/drawingml/2006/main"/>
+          <a:ln xmlns:a="http://schemas.openxmlformats.org/drawingml/2006/main" w="0">
+            <a:noFill/>
+            <a:prstDash val="solid"/>
+          </a:ln>
+        </p:spPr>
+        <p:txBody>
+          <a:bodyPr xmlns:a="http://schemas.openxmlformats.org/drawingml/2006/main" anchor="t">
+            <a:normAutofit fontScale="100000"/>
+          </a:bodyPr>
+          <a:lstStyle xmlns:a="http://schemas.openxmlformats.org/drawingml/2006/main">
+            <a:defPPr algn="l">
+              <a:defRPr sz="1200" b="0">
+                <a:solidFill>
+                  <a:srgbClr val="EAF0F8"/>
+                </a:solidFill>
+                <a:latin typeface="Segoe UI"/>
+                <a:ea typeface="Segoe UI"/>
+                <a:cs typeface="Segoe UI"/>
+              </a:defRPr>
+            </a:defPPr>
+          </a:lstStyle>
+          <a:p xmlns:a="http://schemas.openxmlformats.org/drawingml/2006/main">
+            <a:pPr algn="l">
+              <a:defRPr sz="1200" b="0">
+                <a:solidFill>
+                  <a:srgbClr val="EAF0F8"/>
+                </a:solidFill>
+                <a:latin typeface="Segoe UI"/>
+                <a:ea typeface="Segoe UI"/>
+                <a:cs typeface="Segoe UI"/>
+              </a:defRPr>
+            </a:pPr>
+            <a:r>
+              <a:rPr sz="1200" b="0">
+                <a:solidFill>
+                  <a:srgbClr val="EAF0F8"/>
+                </a:solidFill>
+                <a:latin typeface="Segoe UI"/>
+                <a:ea typeface="Segoe UI"/>
+                <a:cs typeface="Segoe UI"/>
+              </a:rPr>
+              <a:t>PK   line_id</a:t>
+            </a:r>
+          </a:p>
+          <a:p xmlns:a="http://schemas.openxmlformats.org/drawingml/2006/main">
+            <a:pPr algn="l">
+              <a:defRPr sz="1200" b="0">
+                <a:solidFill>
+                  <a:srgbClr val="EAF0F8"/>
+                </a:solidFill>
+                <a:latin typeface="Segoe UI"/>
+                <a:ea typeface="Segoe UI"/>
+                <a:cs typeface="Segoe UI"/>
+              </a:defRPr>
+            </a:pPr>
+            <a:r>
+              <a:rPr sz="1200" b="0">
+                <a:solidFill>
+                  <a:srgbClr val="EAF0F8"/>
+                </a:solidFill>
+                <a:latin typeface="Segoe UI"/>
+                <a:ea typeface="Segoe UI"/>
+                <a:cs typeface="Segoe UI"/>
+              </a:rPr>
+              <a:t>DD   order_id · order_date</a:t>
+            </a:r>
+          </a:p>
+          <a:p xmlns:a="http://schemas.openxmlformats.org/drawingml/2006/main">
+            <a:pPr algn="l">
+              <a:defRPr sz="1200" b="0">
+                <a:solidFill>
+                  <a:srgbClr val="EAF0F8"/>
+                </a:solidFill>
+                <a:latin typeface="Segoe UI"/>
+                <a:ea typeface="Segoe UI"/>
+                <a:cs typeface="Segoe UI"/>
+              </a:defRPr>
+            </a:pPr>
+            <a:r>
+              <a:rPr sz="1200" b="0">
+                <a:solidFill>
+                  <a:srgbClr val="EAF0F8"/>
+                </a:solidFill>
+                <a:latin typeface="Segoe UI"/>
+                <a:ea typeface="Segoe UI"/>
+                <a:cs typeface="Segoe UI"/>
+              </a:rPr>
+              <a:t>FK   date_key</a:t>
+            </a:r>
+          </a:p>
+          <a:p xmlns:a="http://schemas.openxmlformats.org/drawingml/2006/main">
+            <a:pPr algn="l">
+              <a:defRPr sz="1200" b="0">
+                <a:solidFill>
+                  <a:srgbClr val="EAF0F8"/>
+                </a:solidFill>
+                <a:latin typeface="Segoe UI"/>
+                <a:ea typeface="Segoe UI"/>
+                <a:cs typeface="Segoe UI"/>
+              </a:defRPr>
+            </a:pPr>
+            <a:r>
+              <a:rPr sz="1200" b="0">
+                <a:solidFill>
+                  <a:srgbClr val="EAF0F8"/>
+                </a:solidFill>
+                <a:latin typeface="Segoe UI"/>
+                <a:ea typeface="Segoe UI"/>
+                <a:cs typeface="Segoe UI"/>
+              </a:rPr>
+              <a:t>FK   customer_key</a:t>
+            </a:r>
+          </a:p>
+          <a:p xmlns:a="http://schemas.openxmlformats.org/drawingml/2006/main">
+            <a:pPr algn="l">
+              <a:defRPr sz="1200" b="0">
+                <a:solidFill>
+                  <a:srgbClr val="EAF0F8"/>
+                </a:solidFill>
+                <a:latin typeface="Segoe UI"/>
+                <a:ea typeface="Segoe UI"/>
+                <a:cs typeface="Segoe UI"/>
+              </a:defRPr>
+            </a:pPr>
+            <a:r>
+              <a:rPr sz="1200" b="0">
+                <a:solidFill>
+                  <a:srgbClr val="EAF0F8"/>
+                </a:solidFill>
+                <a:latin typeface="Segoe UI"/>
+                <a:ea typeface="Segoe UI"/>
+                <a:cs typeface="Segoe UI"/>
+              </a:rPr>
+              <a:t>FK   product_key</a:t>
+            </a:r>
+          </a:p>
+        </p:txBody>
+      </p:sp>
+      <p:sp>
+        <p:nvSpPr>
+          <p:cNvPr id="21" name="">
+            <a:extLst xmlns:a="http://schemas.openxmlformats.org/drawingml/2006/main">
+              <a:ext uri="{FF2B5EF4-FFF2-40B4-BE49-F238E27FC236}">
+                <a16:creationId xmlns:a16="http://schemas.microsoft.com/office/drawing/2014/main" id="{E78430DB-ABC6-4225-A527-07F7AEE6DED2}"/>
+              </a:ext>
+            </a:extLst>
+          </p:cNvPr>
+          <p:cNvSpPr>
+            <a:spLocks xmlns:a="http://schemas.openxmlformats.org/drawingml/2006/main" noGrp="1"/>
+          </p:cNvSpPr>
+          <p:nvPr/>
+        </p:nvSpPr>
+        <p:spPr>
+          <a:xfrm xmlns:a="http://schemas.openxmlformats.org/drawingml/2006/main">
+            <a:off x="6115050" y="2952750"/>
+            <a:ext cx="1524000" cy="1390650"/>
+          </a:xfrm>
+          <a:prstGeom xmlns:a="http://schemas.openxmlformats.org/drawingml/2006/main" prst="rect">
+            <a:avLst/>
+          </a:prstGeom>
+          <a:noFill xmlns:a="http://schemas.openxmlformats.org/drawingml/2006/main"/>
+          <a:ln xmlns:a="http://schemas.openxmlformats.org/drawingml/2006/main" w="0">
+            <a:noFill/>
+            <a:prstDash val="solid"/>
+          </a:ln>
+        </p:spPr>
+        <p:txBody>
+          <a:bodyPr xmlns:a="http://schemas.openxmlformats.org/drawingml/2006/main" anchor="t">
+            <a:normAutofit fontScale="94722"/>
+          </a:bodyPr>
+          <a:lstStyle xmlns:a="http://schemas.openxmlformats.org/drawingml/2006/main">
+            <a:defPPr algn="l">
+              <a:defRPr sz="1125" b="0">
+                <a:solidFill>
+                  <a:srgbClr val="EAF0F8"/>
+                </a:solidFill>
+                <a:latin typeface="Segoe UI"/>
+                <a:ea typeface="Segoe UI"/>
+                <a:cs typeface="Segoe UI"/>
+              </a:defRPr>
+            </a:defPPr>
+          </a:lstStyle>
+          <a:p xmlns:a="http://schemas.openxmlformats.org/drawingml/2006/main">
+            <a:pPr algn="l">
+              <a:defRPr sz="1125" b="0">
+                <a:solidFill>
+                  <a:srgbClr val="EAF0F8"/>
+                </a:solidFill>
+                <a:latin typeface="Segoe UI"/>
+                <a:ea typeface="Segoe UI"/>
+                <a:cs typeface="Segoe UI"/>
+              </a:defRPr>
+            </a:pPr>
+            <a:r>
+              <a:rPr sz="1125" b="0">
+                <a:solidFill>
+                  <a:srgbClr val="EAF0F8"/>
+                </a:solidFill>
+                <a:latin typeface="Segoe UI"/>
+                <a:ea typeface="Segoe UI"/>
+                <a:cs typeface="Segoe UI"/>
+              </a:rPr>
+              <a:t>MEASURES</a:t>
+            </a:r>
+          </a:p>
+          <a:p xmlns:a="http://schemas.openxmlformats.org/drawingml/2006/main">
+            <a:pPr algn="l">
+              <a:defRPr sz="1125" b="0">
+                <a:solidFill>
+                  <a:srgbClr val="EAF0F8"/>
+                </a:solidFill>
+                <a:latin typeface="Segoe UI"/>
+                <a:ea typeface="Segoe UI"/>
+                <a:cs typeface="Segoe UI"/>
+              </a:defRPr>
+            </a:pPr>
+            <a:r>
+              <a:rPr sz="1125" b="0">
+                <a:solidFill>
+                  <a:srgbClr val="EAF0F8"/>
+                </a:solidFill>
+                <a:latin typeface="Segoe UI"/>
+                <a:ea typeface="Segoe UI"/>
+                <a:cs typeface="Segoe UI"/>
+              </a:rPr>
+              <a:t>quantity · unit_price</a:t>
+            </a:r>
+          </a:p>
+          <a:p xmlns:a="http://schemas.openxmlformats.org/drawingml/2006/main">
+            <a:pPr algn="l">
+              <a:defRPr sz="1125" b="0">
+                <a:solidFill>
+                  <a:srgbClr val="EAF0F8"/>
+                </a:solidFill>
+                <a:latin typeface="Segoe UI"/>
+                <a:ea typeface="Segoe UI"/>
+                <a:cs typeface="Segoe UI"/>
+              </a:defRPr>
+            </a:pPr>
+            <a:r>
+              <a:rPr sz="1125" b="0">
+                <a:solidFill>
+                  <a:srgbClr val="EAF0F8"/>
+                </a:solidFill>
+                <a:latin typeface="Segoe UI"/>
+                <a:ea typeface="Segoe UI"/>
+                <a:cs typeface="Segoe UI"/>
+              </a:rPr>
+              <a:t>gross_amount · net_revenue</a:t>
+            </a:r>
+          </a:p>
+          <a:p xmlns:a="http://schemas.openxmlformats.org/drawingml/2006/main">
+            <a:r>
+              <a:t/>
+            </a:r>
+          </a:p>
+          <a:p xmlns:a="http://schemas.openxmlformats.org/drawingml/2006/main">
+            <a:pPr algn="l">
+              <a:defRPr sz="1125" b="0">
+                <a:solidFill>
+                  <a:srgbClr val="EAF0F8"/>
+                </a:solidFill>
+                <a:latin typeface="Segoe UI"/>
+                <a:ea typeface="Segoe UI"/>
+                <a:cs typeface="Segoe UI"/>
+              </a:defRPr>
+            </a:pPr>
+            <a:r>
+              <a:rPr sz="1125" b="0">
+                <a:solidFill>
+                  <a:srgbClr val="EAF0F8"/>
+                </a:solidFill>
+                <a:latin typeface="Segoe UI"/>
+                <a:ea typeface="Segoe UI"/>
+                <a:cs typeface="Segoe UI"/>
+              </a:rPr>
+              <a:t>ATTRIBUTES</a:t>
+            </a:r>
+          </a:p>
+          <a:p xmlns:a="http://schemas.openxmlformats.org/drawingml/2006/main">
+            <a:pPr algn="l">
+              <a:defRPr sz="1125" b="0">
+                <a:solidFill>
+                  <a:srgbClr val="EAF0F8"/>
+                </a:solidFill>
+                <a:latin typeface="Segoe UI"/>
+                <a:ea typeface="Segoe UI"/>
+                <a:cs typeface="Segoe UI"/>
+              </a:defRPr>
+            </a:pPr>
+            <a:r>
+              <a:rPr sz="1125" b="0">
+                <a:solidFill>
+                  <a:srgbClr val="EAF0F8"/>
+                </a:solidFill>
+                <a:latin typeface="Segoe UI"/>
+                <a:ea typeface="Segoe UI"/>
+                <a:cs typeface="Segoe UI"/>
+              </a:rPr>
+              <a:t>channel · payment · status</a:t>
+            </a:r>
+          </a:p>
+        </p:txBody>
+      </p:sp>
+      <p:sp>
+        <p:nvSpPr>
+          <p:cNvPr id="22" name="">
+            <a:extLst xmlns:a="http://schemas.openxmlformats.org/drawingml/2006/main">
+              <a:ext uri="{FF2B5EF4-FFF2-40B4-BE49-F238E27FC236}">
+                <a16:creationId xmlns:a16="http://schemas.microsoft.com/office/drawing/2014/main" id="{9C052B90-E1FA-4AE3-8DC5-487CDDAE7C6D}"/>
+              </a:ext>
+            </a:extLst>
+          </p:cNvPr>
+          <p:cNvSpPr>
+            <a:spLocks xmlns:a="http://schemas.openxmlformats.org/drawingml/2006/main" noGrp="1"/>
+          </p:cNvSpPr>
+          <p:nvPr/>
+        </p:nvSpPr>
+        <p:spPr>
+          <a:xfrm xmlns:a="http://schemas.openxmlformats.org/drawingml/2006/main">
+            <a:off x="4572000" y="4324350"/>
+            <a:ext cx="3048000" cy="228600"/>
+          </a:xfrm>
+          <a:prstGeom xmlns:a="http://schemas.openxmlformats.org/drawingml/2006/main" prst="rect">
+            <a:avLst/>
+          </a:prstGeom>
+          <a:noFill xmlns:a="http://schemas.openxmlformats.org/drawingml/2006/main"/>
+          <a:ln xmlns:a="http://schemas.openxmlformats.org/drawingml/2006/main" w="0">
+            <a:noFill/>
+            <a:prstDash val="solid"/>
+          </a:ln>
+        </p:spPr>
+        <p:txBody>
+          <a:bodyPr xmlns:a="http://schemas.openxmlformats.org/drawingml/2006/main" anchor="t">
+            <a:normAutofit fontScale="70588"/>
+          </a:bodyPr>
+          <a:lstStyle xmlns:a="http://schemas.openxmlformats.org/drawingml/2006/main">
+            <a:defPPr algn="ctr">
+              <a:defRPr sz="1275" b="1">
+                <a:solidFill>
+                  <a:srgbClr val="16B8A6"/>
+                </a:solidFill>
+                <a:latin typeface="Segoe UI"/>
+                <a:ea typeface="Segoe UI"/>
+                <a:cs typeface="Segoe UI"/>
+              </a:defRPr>
+            </a:defPPr>
+          </a:lstStyle>
+          <a:p xmlns:a="http://schemas.openxmlformats.org/drawingml/2006/main">
+            <a:pPr algn="ctr">
+              <a:defRPr sz="1275" b="1">
+                <a:solidFill>
+                  <a:srgbClr val="16B8A6"/>
+                </a:solidFill>
+                <a:latin typeface="Segoe UI"/>
+                <a:ea typeface="Segoe UI"/>
+                <a:cs typeface="Segoe UI"/>
+              </a:defRPr>
+            </a:pPr>
+            <a:r>
+              <a:rPr sz="1275" b="1">
+                <a:solidFill>
+                  <a:srgbClr val="16B8A6"/>
+                </a:solidFill>
+                <a:latin typeface="Segoe UI"/>
+                <a:ea typeface="Segoe UI"/>
+                <a:cs typeface="Segoe UI"/>
+              </a:rPr>
+              <a:t>248,555 trusted rows</a:t>
+            </a:r>
+          </a:p>
+        </p:txBody>
+      </p:sp>
+      <p:sp>
+        <p:nvSpPr>
+          <p:cNvPr id="23" name="">
+            <a:extLst xmlns:a="http://schemas.openxmlformats.org/drawingml/2006/main">
+              <a:ext uri="{FF2B5EF4-FFF2-40B4-BE49-F238E27FC236}">
+                <a16:creationId xmlns:a16="http://schemas.microsoft.com/office/drawing/2014/main" id="{0849FDEC-1747-4DDC-8A14-4DE5AB0D0CBF}"/>
+              </a:ext>
+            </a:extLst>
+          </p:cNvPr>
+          <p:cNvSpPr>
+            <a:spLocks xmlns:a="http://schemas.openxmlformats.org/drawingml/2006/main" noGrp="1"/>
+          </p:cNvSpPr>
+          <p:nvPr/>
+        </p:nvSpPr>
+        <p:spPr>
+          <a:xfrm xmlns:a="http://schemas.openxmlformats.org/drawingml/2006/main">
+            <a:off x="8724900" y="1562100"/>
+            <a:ext cx="2857500" cy="1428750"/>
+          </a:xfrm>
+          <a:prstGeom xmlns:a="http://schemas.openxmlformats.org/drawingml/2006/main" prst="roundRect">
+            <a:avLst>
+              <a:gd name="adj" fmla="val 5333"/>
+            </a:avLst>
+          </a:prstGeom>
+          <a:solidFill xmlns:a="http://schemas.openxmlformats.org/drawingml/2006/main">
+            <a:srgbClr val="FFFFFF"/>
+          </a:solidFill>
+          <a:ln xmlns:a="http://schemas.openxmlformats.org/drawingml/2006/main" w="14288">
+            <a:solidFill>
+              <a:srgbClr val="F4C37F"/>
+            </a:solidFill>
+            <a:prstDash val="solid"/>
+          </a:ln>
+        </p:spPr>
+      </p:sp>
+      <p:sp>
+        <p:nvSpPr>
+          <p:cNvPr id="24" name="">
+            <a:extLst xmlns:a="http://schemas.openxmlformats.org/drawingml/2006/main">
+              <a:ext uri="{FF2B5EF4-FFF2-40B4-BE49-F238E27FC236}">
+                <a16:creationId xmlns:a16="http://schemas.microsoft.com/office/drawing/2014/main" id="{B62D54C8-D4AC-4FC1-9062-86EE7E99126B}"/>
+              </a:ext>
+            </a:extLst>
+          </p:cNvPr>
+          <p:cNvSpPr>
+            <a:spLocks xmlns:a="http://schemas.openxmlformats.org/drawingml/2006/main" noGrp="1"/>
+          </p:cNvSpPr>
+          <p:nvPr/>
+        </p:nvSpPr>
+        <p:spPr>
+          <a:xfrm xmlns:a="http://schemas.openxmlformats.org/drawingml/2006/main">
+            <a:off x="8724900" y="1562100"/>
+            <a:ext cx="2857500" cy="361950"/>
+          </a:xfrm>
+          <a:prstGeom xmlns:a="http://schemas.openxmlformats.org/drawingml/2006/main" prst="roundRect">
+            <a:avLst>
+              <a:gd name="adj" fmla="val 21053"/>
+            </a:avLst>
+          </a:prstGeom>
+          <a:solidFill xmlns:a="http://schemas.openxmlformats.org/drawingml/2006/main">
+            <a:srgbClr val="F2A03D"/>
+          </a:solidFill>
+          <a:ln xmlns:a="http://schemas.openxmlformats.org/drawingml/2006/main" w="9525">
+            <a:solidFill>
+              <a:srgbClr val="F2A03D"/>
+            </a:solidFill>
+            <a:prstDash val="solid"/>
+          </a:ln>
+        </p:spPr>
+      </p:sp>
+      <p:sp>
+        <p:nvSpPr>
+          <p:cNvPr id="25" name="">
+            <a:extLst xmlns:a="http://schemas.openxmlformats.org/drawingml/2006/main">
+              <a:ext uri="{FF2B5EF4-FFF2-40B4-BE49-F238E27FC236}">
+                <a16:creationId xmlns:a16="http://schemas.microsoft.com/office/drawing/2014/main" id="{75A518A3-07C4-4D64-B17D-1848534B5BCD}"/>
+              </a:ext>
+            </a:extLst>
+          </p:cNvPr>
+          <p:cNvSpPr>
+            <a:spLocks xmlns:a="http://schemas.openxmlformats.org/drawingml/2006/main" noGrp="1"/>
+          </p:cNvSpPr>
+          <p:nvPr/>
+        </p:nvSpPr>
+        <p:spPr>
+          <a:xfrm xmlns:a="http://schemas.openxmlformats.org/drawingml/2006/main">
+            <a:off x="8896350" y="1628775"/>
+            <a:ext cx="2514600" cy="228600"/>
+          </a:xfrm>
+          <a:prstGeom xmlns:a="http://schemas.openxmlformats.org/drawingml/2006/main" prst="rect">
+            <a:avLst/>
+          </a:prstGeom>
+          <a:noFill xmlns:a="http://schemas.openxmlformats.org/drawingml/2006/main"/>
+          <a:ln xmlns:a="http://schemas.openxmlformats.org/drawingml/2006/main" w="0">
+            <a:noFill/>
+            <a:prstDash val="solid"/>
+          </a:ln>
+        </p:spPr>
+        <p:txBody>
+          <a:bodyPr xmlns:a="http://schemas.openxmlformats.org/drawingml/2006/main" anchor="t">
+            <a:normAutofit fontScale="63158"/>
+          </a:bodyPr>
+          <a:lstStyle xmlns:a="http://schemas.openxmlformats.org/drawingml/2006/main">
+            <a:defPPr algn="l">
+              <a:defRPr sz="1425" b="1">
+                <a:solidFill>
+                  <a:srgbClr val="FFFFFF"/>
+                </a:solidFill>
+                <a:latin typeface="Segoe UI"/>
+                <a:ea typeface="Segoe UI"/>
+                <a:cs typeface="Segoe UI"/>
+              </a:defRPr>
+            </a:defPPr>
+          </a:lstStyle>
+          <a:p xmlns:a="http://schemas.openxmlformats.org/drawingml/2006/main">
+            <a:pPr algn="l">
+              <a:defRPr sz="1425" b="1">
+                <a:solidFill>
+                  <a:srgbClr val="FFFFFF"/>
+                </a:solidFill>
+                <a:latin typeface="Segoe UI"/>
+                <a:ea typeface="Segoe UI"/>
+                <a:cs typeface="Segoe UI"/>
+              </a:defRPr>
+            </a:pPr>
+            <a:r>
+              <a:rPr sz="1425" b="1">
+                <a:solidFill>
+                  <a:srgbClr val="FFFFFF"/>
+                </a:solidFill>
+                <a:latin typeface="Segoe UI"/>
+                <a:ea typeface="Segoe UI"/>
+                <a:cs typeface="Segoe UI"/>
+              </a:rPr>
+              <a:t>DIM_PRODUCT</a:t>
+            </a:r>
+          </a:p>
+        </p:txBody>
+      </p:sp>
+      <p:sp>
+        <p:nvSpPr>
+          <p:cNvPr id="26" name="">
+            <a:extLst xmlns:a="http://schemas.openxmlformats.org/drawingml/2006/main">
+              <a:ext uri="{FF2B5EF4-FFF2-40B4-BE49-F238E27FC236}">
+                <a16:creationId xmlns:a16="http://schemas.microsoft.com/office/drawing/2014/main" id="{400983AA-17AD-4387-9E11-3EB6FBA96C01}"/>
+              </a:ext>
+            </a:extLst>
+          </p:cNvPr>
+          <p:cNvSpPr>
+            <a:spLocks xmlns:a="http://schemas.openxmlformats.org/drawingml/2006/main" noGrp="1"/>
+          </p:cNvSpPr>
+          <p:nvPr/>
+        </p:nvSpPr>
+        <p:spPr>
+          <a:xfrm xmlns:a="http://schemas.openxmlformats.org/drawingml/2006/main">
+            <a:off x="8896350" y="2000250"/>
+            <a:ext cx="2514600" cy="876300"/>
+          </a:xfrm>
+          <a:prstGeom xmlns:a="http://schemas.openxmlformats.org/drawingml/2006/main" prst="rect">
+            <a:avLst/>
+          </a:prstGeom>
+          <a:noFill xmlns:a="http://schemas.openxmlformats.org/drawingml/2006/main"/>
+          <a:ln xmlns:a="http://schemas.openxmlformats.org/drawingml/2006/main" w="0">
+            <a:noFill/>
+            <a:prstDash val="solid"/>
+          </a:ln>
+        </p:spPr>
+        <p:txBody>
+          <a:bodyPr xmlns:a="http://schemas.openxmlformats.org/drawingml/2006/main" anchor="t">
+            <a:normAutofit fontScale="100000"/>
+          </a:bodyPr>
+          <a:lstStyle xmlns:a="http://schemas.openxmlformats.org/drawingml/2006/main">
+            <a:defPPr algn="l">
+              <a:defRPr sz="1200" b="0">
+                <a:solidFill>
+                  <a:srgbClr val="172033"/>
+                </a:solidFill>
+                <a:latin typeface="Segoe UI"/>
+                <a:ea typeface="Segoe UI"/>
+                <a:cs typeface="Segoe UI"/>
+              </a:defRPr>
+            </a:defPPr>
+          </a:lstStyle>
+          <a:p xmlns:a="http://schemas.openxmlformats.org/drawingml/2006/main">
+            <a:pPr algn="l">
+              <a:defRPr sz="1200" b="0">
+                <a:solidFill>
+                  <a:srgbClr val="172033"/>
+                </a:solidFill>
+                <a:latin typeface="Segoe UI"/>
+                <a:ea typeface="Segoe UI"/>
+                <a:cs typeface="Segoe UI"/>
+              </a:defRPr>
+            </a:pPr>
+            <a:r>
+              <a:rPr sz="1200" b="0">
+                <a:solidFill>
+                  <a:srgbClr val="172033"/>
+                </a:solidFill>
+                <a:latin typeface="Segoe UI"/>
+                <a:ea typeface="Segoe UI"/>
+                <a:cs typeface="Segoe UI"/>
+              </a:rPr>
+              <a:t>PK  product_key</a:t>
+            </a:r>
+          </a:p>
+          <a:p xmlns:a="http://schemas.openxmlformats.org/drawingml/2006/main">
+            <a:pPr algn="l">
+              <a:defRPr sz="1200" b="0">
+                <a:solidFill>
+                  <a:srgbClr val="172033"/>
+                </a:solidFill>
+                <a:latin typeface="Segoe UI"/>
+                <a:ea typeface="Segoe UI"/>
+                <a:cs typeface="Segoe UI"/>
+              </a:defRPr>
+            </a:pPr>
+            <a:r>
+              <a:rPr sz="1200" b="0">
+                <a:solidFill>
+                  <a:srgbClr val="172033"/>
+                </a:solidFill>
+                <a:latin typeface="Segoe UI"/>
+                <a:ea typeface="Segoe UI"/>
+                <a:cs typeface="Segoe UI"/>
+              </a:rPr>
+              <a:t>     product_id</a:t>
+            </a:r>
+          </a:p>
+          <a:p xmlns:a="http://schemas.openxmlformats.org/drawingml/2006/main">
+            <a:pPr algn="l">
+              <a:defRPr sz="1200" b="0">
+                <a:solidFill>
+                  <a:srgbClr val="172033"/>
+                </a:solidFill>
+                <a:latin typeface="Segoe UI"/>
+                <a:ea typeface="Segoe UI"/>
+                <a:cs typeface="Segoe UI"/>
+              </a:defRPr>
+            </a:pPr>
+            <a:r>
+              <a:rPr sz="1200" b="0">
+                <a:solidFill>
+                  <a:srgbClr val="172033"/>
+                </a:solidFill>
+                <a:latin typeface="Segoe UI"/>
+                <a:ea typeface="Segoe UI"/>
+                <a:cs typeface="Segoe UI"/>
+              </a:rPr>
+              <a:t>     product_name</a:t>
+            </a:r>
+          </a:p>
+          <a:p xmlns:a="http://schemas.openxmlformats.org/drawingml/2006/main">
+            <a:pPr algn="l">
+              <a:defRPr sz="1200" b="0">
+                <a:solidFill>
+                  <a:srgbClr val="172033"/>
+                </a:solidFill>
+                <a:latin typeface="Segoe UI"/>
+                <a:ea typeface="Segoe UI"/>
+                <a:cs typeface="Segoe UI"/>
+              </a:defRPr>
+            </a:pPr>
+            <a:r>
+              <a:rPr sz="1200" b="0">
+                <a:solidFill>
+                  <a:srgbClr val="172033"/>
+                </a:solidFill>
+                <a:latin typeface="Segoe UI"/>
+                <a:ea typeface="Segoe UI"/>
+                <a:cs typeface="Segoe UI"/>
+              </a:rPr>
+              <a:t>     category</a:t>
+            </a:r>
+          </a:p>
+        </p:txBody>
+      </p:sp>
+      <p:sp>
+        <p:nvSpPr>
+          <p:cNvPr id="27" name="">
+            <a:extLst xmlns:a="http://schemas.openxmlformats.org/drawingml/2006/main">
+              <a:ext uri="{FF2B5EF4-FFF2-40B4-BE49-F238E27FC236}">
+                <a16:creationId xmlns:a16="http://schemas.microsoft.com/office/drawing/2014/main" id="{C3D64049-2881-4A46-8206-38B29F30E52C}"/>
+              </a:ext>
+            </a:extLst>
+          </p:cNvPr>
+          <p:cNvSpPr>
+            <a:spLocks xmlns:a="http://schemas.openxmlformats.org/drawingml/2006/main" noGrp="1"/>
+          </p:cNvSpPr>
+          <p:nvPr/>
+        </p:nvSpPr>
+        <p:spPr>
+          <a:xfrm xmlns:a="http://schemas.openxmlformats.org/drawingml/2006/main">
+            <a:off x="8724900" y="3543300"/>
+            <a:ext cx="2857500" cy="1428750"/>
+          </a:xfrm>
+          <a:prstGeom xmlns:a="http://schemas.openxmlformats.org/drawingml/2006/main" prst="roundRect">
+            <a:avLst>
+              <a:gd name="adj" fmla="val 5333"/>
+            </a:avLst>
+          </a:prstGeom>
+          <a:solidFill xmlns:a="http://schemas.openxmlformats.org/drawingml/2006/main">
+            <a:srgbClr val="FCE8EA"/>
+          </a:solidFill>
+          <a:ln xmlns:a="http://schemas.openxmlformats.org/drawingml/2006/main" w="14288">
+            <a:solidFill>
+              <a:srgbClr val="F3ABB1"/>
+            </a:solidFill>
+            <a:prstDash val="solid"/>
+          </a:ln>
+        </p:spPr>
+      </p:sp>
+      <p:sp>
+        <p:nvSpPr>
+          <p:cNvPr id="28" name="">
+            <a:extLst xmlns:a="http://schemas.openxmlformats.org/drawingml/2006/main">
+              <a:ext uri="{FF2B5EF4-FFF2-40B4-BE49-F238E27FC236}">
+                <a16:creationId xmlns:a16="http://schemas.microsoft.com/office/drawing/2014/main" id="{B46B6675-A3A3-4119-BE82-958847387385}"/>
+              </a:ext>
+            </a:extLst>
+          </p:cNvPr>
+          <p:cNvSpPr>
+            <a:spLocks xmlns:a="http://schemas.openxmlformats.org/drawingml/2006/main" noGrp="1"/>
+          </p:cNvSpPr>
+          <p:nvPr/>
+        </p:nvSpPr>
+        <p:spPr>
+          <a:xfrm xmlns:a="http://schemas.openxmlformats.org/drawingml/2006/main">
+            <a:off x="8724900" y="3543300"/>
+            <a:ext cx="2857500" cy="361950"/>
+          </a:xfrm>
+          <a:prstGeom xmlns:a="http://schemas.openxmlformats.org/drawingml/2006/main" prst="roundRect">
+            <a:avLst>
+              <a:gd name="adj" fmla="val 21053"/>
+            </a:avLst>
+          </a:prstGeom>
+          <a:solidFill xmlns:a="http://schemas.openxmlformats.org/drawingml/2006/main">
+            <a:srgbClr val="E65B65"/>
+          </a:solidFill>
+          <a:ln xmlns:a="http://schemas.openxmlformats.org/drawingml/2006/main" w="9525">
+            <a:solidFill>
+              <a:srgbClr val="E65B65"/>
+            </a:solidFill>
+            <a:prstDash val="solid"/>
+          </a:ln>
+        </p:spPr>
+      </p:sp>
+      <p:sp>
+        <p:nvSpPr>
+          <p:cNvPr id="29" name="">
+            <a:extLst xmlns:a="http://schemas.openxmlformats.org/drawingml/2006/main">
+              <a:ext uri="{FF2B5EF4-FFF2-40B4-BE49-F238E27FC236}">
+                <a16:creationId xmlns:a16="http://schemas.microsoft.com/office/drawing/2014/main" id="{BBC7E258-67C7-41E0-BB54-BA2019F83D95}"/>
+              </a:ext>
+            </a:extLst>
+          </p:cNvPr>
+          <p:cNvSpPr>
+            <a:spLocks xmlns:a="http://schemas.openxmlformats.org/drawingml/2006/main" noGrp="1"/>
+          </p:cNvSpPr>
+          <p:nvPr/>
+        </p:nvSpPr>
+        <p:spPr>
+          <a:xfrm xmlns:a="http://schemas.openxmlformats.org/drawingml/2006/main">
+            <a:off x="8896350" y="3609975"/>
+            <a:ext cx="2514600" cy="228600"/>
+          </a:xfrm>
+          <a:prstGeom xmlns:a="http://schemas.openxmlformats.org/drawingml/2006/main" prst="rect">
+            <a:avLst/>
+          </a:prstGeom>
+          <a:noFill xmlns:a="http://schemas.openxmlformats.org/drawingml/2006/main"/>
+          <a:ln xmlns:a="http://schemas.openxmlformats.org/drawingml/2006/main" w="0">
+            <a:noFill/>
+            <a:prstDash val="solid"/>
+          </a:ln>
+        </p:spPr>
+        <p:txBody>
+          <a:bodyPr xmlns:a="http://schemas.openxmlformats.org/drawingml/2006/main" anchor="t">
+            <a:normAutofit fontScale="63158"/>
+          </a:bodyPr>
+          <a:lstStyle xmlns:a="http://schemas.openxmlformats.org/drawingml/2006/main">
+            <a:defPPr algn="l">
+              <a:defRPr sz="1425" b="1">
+                <a:solidFill>
+                  <a:srgbClr val="FFFFFF"/>
+                </a:solidFill>
+                <a:latin typeface="Segoe UI"/>
+                <a:ea typeface="Segoe UI"/>
+                <a:cs typeface="Segoe UI"/>
+              </a:defRPr>
+            </a:defPPr>
+          </a:lstStyle>
+          <a:p xmlns:a="http://schemas.openxmlformats.org/drawingml/2006/main">
+            <a:pPr algn="l">
+              <a:defRPr sz="1425" b="1">
+                <a:solidFill>
+                  <a:srgbClr val="FFFFFF"/>
+                </a:solidFill>
+                <a:latin typeface="Segoe UI"/>
+                <a:ea typeface="Segoe UI"/>
+                <a:cs typeface="Segoe UI"/>
+              </a:defRPr>
+            </a:pPr>
+            <a:r>
+              <a:rPr sz="1425" b="1">
+                <a:solidFill>
+                  <a:srgbClr val="FFFFFF"/>
+                </a:solidFill>
+                <a:latin typeface="Segoe UI"/>
+                <a:ea typeface="Segoe UI"/>
+                <a:cs typeface="Segoe UI"/>
+              </a:rPr>
+              <a:t>REJECTED_ORDERS</a:t>
+            </a:r>
+          </a:p>
+        </p:txBody>
+      </p:sp>
+      <p:sp>
+        <p:nvSpPr>
+          <p:cNvPr id="30" name="">
+            <a:extLst xmlns:a="http://schemas.openxmlformats.org/drawingml/2006/main">
+              <a:ext uri="{FF2B5EF4-FFF2-40B4-BE49-F238E27FC236}">
+                <a16:creationId xmlns:a16="http://schemas.microsoft.com/office/drawing/2014/main" id="{11A0918C-33D4-481D-8EF0-348A1C8D8FA2}"/>
+              </a:ext>
+            </a:extLst>
+          </p:cNvPr>
+          <p:cNvSpPr>
+            <a:spLocks xmlns:a="http://schemas.openxmlformats.org/drawingml/2006/main" noGrp="1"/>
+          </p:cNvSpPr>
+          <p:nvPr/>
+        </p:nvSpPr>
+        <p:spPr>
+          <a:xfrm xmlns:a="http://schemas.openxmlformats.org/drawingml/2006/main">
+            <a:off x="8896350" y="3981450"/>
+            <a:ext cx="2514600" cy="876300"/>
+          </a:xfrm>
+          <a:prstGeom xmlns:a="http://schemas.openxmlformats.org/drawingml/2006/main" prst="rect">
+            <a:avLst/>
+          </a:prstGeom>
+          <a:noFill xmlns:a="http://schemas.openxmlformats.org/drawingml/2006/main"/>
+          <a:ln xmlns:a="http://schemas.openxmlformats.org/drawingml/2006/main" w="0">
+            <a:noFill/>
+            <a:prstDash val="solid"/>
+          </a:ln>
+        </p:spPr>
+        <p:txBody>
+          <a:bodyPr xmlns:a="http://schemas.openxmlformats.org/drawingml/2006/main" anchor="t">
+            <a:normAutofit fontScale="91556"/>
+          </a:bodyPr>
+          <a:lstStyle xmlns:a="http://schemas.openxmlformats.org/drawingml/2006/main">
+            <a:defPPr algn="l">
+              <a:defRPr sz="1125" b="0">
+                <a:solidFill>
+                  <a:srgbClr val="172033"/>
+                </a:solidFill>
+                <a:latin typeface="Segoe UI"/>
+                <a:ea typeface="Segoe UI"/>
+                <a:cs typeface="Segoe UI"/>
+              </a:defRPr>
+            </a:defPPr>
+          </a:lstStyle>
+          <a:p xmlns:a="http://schemas.openxmlformats.org/drawingml/2006/main">
+            <a:pPr algn="l">
+              <a:defRPr sz="1125" b="0">
+                <a:solidFill>
+                  <a:srgbClr val="172033"/>
+                </a:solidFill>
+                <a:latin typeface="Segoe UI"/>
+                <a:ea typeface="Segoe UI"/>
+                <a:cs typeface="Segoe UI"/>
+              </a:defRPr>
+            </a:pPr>
+            <a:r>
+              <a:rPr sz="1125" b="0">
+                <a:solidFill>
+                  <a:srgbClr val="172033"/>
+                </a:solidFill>
+                <a:latin typeface="Segoe UI"/>
+                <a:ea typeface="Segoe UI"/>
+                <a:cs typeface="Segoe UI"/>
+              </a:rPr>
+              <a:t>line_id · original values</a:t>
+            </a:r>
+          </a:p>
+          <a:p xmlns:a="http://schemas.openxmlformats.org/drawingml/2006/main">
+            <a:pPr algn="l">
+              <a:defRPr sz="1125" b="0">
+                <a:solidFill>
+                  <a:srgbClr val="172033"/>
+                </a:solidFill>
+                <a:latin typeface="Segoe UI"/>
+                <a:ea typeface="Segoe UI"/>
+                <a:cs typeface="Segoe UI"/>
+              </a:defRPr>
+            </a:pPr>
+            <a:r>
+              <a:rPr sz="1125" b="0">
+                <a:solidFill>
+                  <a:srgbClr val="172033"/>
+                </a:solidFill>
+                <a:latin typeface="Segoe UI"/>
+                <a:ea typeface="Segoe UI"/>
+                <a:cs typeface="Segoe UI"/>
+              </a:rPr>
+              <a:t>rejection_reason</a:t>
+            </a:r>
+          </a:p>
+          <a:p xmlns:a="http://schemas.openxmlformats.org/drawingml/2006/main">
+            <a:r>
+              <a:t/>
+            </a:r>
+          </a:p>
+          <a:p xmlns:a="http://schemas.openxmlformats.org/drawingml/2006/main">
+            <a:pPr algn="l">
+              <a:defRPr sz="1125" b="0">
+                <a:solidFill>
+                  <a:srgbClr val="172033"/>
+                </a:solidFill>
+                <a:latin typeface="Segoe UI"/>
+                <a:ea typeface="Segoe UI"/>
+                <a:cs typeface="Segoe UI"/>
+              </a:defRPr>
+            </a:pPr>
+            <a:r>
+              <a:rPr sz="1125" b="0">
+                <a:solidFill>
+                  <a:srgbClr val="172033"/>
+                </a:solidFill>
+                <a:latin typeface="Segoe UI"/>
+                <a:ea typeface="Segoe UI"/>
+                <a:cs typeface="Segoe UI"/>
+              </a:rPr>
+              <a:t>QUALITY SIDE OUTPUT</a:t>
+            </a:r>
+          </a:p>
+          <a:p xmlns:a="http://schemas.openxmlformats.org/drawingml/2006/main">
+            <a:pPr algn="l">
+              <a:defRPr sz="1125" b="0">
+                <a:solidFill>
+                  <a:srgbClr val="172033"/>
+                </a:solidFill>
+                <a:latin typeface="Segoe UI"/>
+                <a:ea typeface="Segoe UI"/>
+                <a:cs typeface="Segoe UI"/>
+              </a:defRPr>
+            </a:pPr>
+            <a:r>
+              <a:rPr sz="1125" b="0">
+                <a:solidFill>
+                  <a:srgbClr val="172033"/>
+                </a:solidFill>
+                <a:latin typeface="Segoe UI"/>
+                <a:ea typeface="Segoe UI"/>
+                <a:cs typeface="Segoe UI"/>
+              </a:rPr>
+              <a:t>Excluded from analytical KPIs</a:t>
+            </a:r>
+          </a:p>
+        </p:txBody>
+      </p:sp>
+      <p:sp>
+        <p:nvSpPr>
+          <p:cNvPr id="31" name="">
+            <a:extLst xmlns:a="http://schemas.openxmlformats.org/drawingml/2006/main">
+              <a:ext uri="{FF2B5EF4-FFF2-40B4-BE49-F238E27FC236}">
+                <a16:creationId xmlns:a16="http://schemas.microsoft.com/office/drawing/2014/main" id="{A073241F-9D1B-43FE-8EDD-31665289A8DE}"/>
+              </a:ext>
+            </a:extLst>
+          </p:cNvPr>
+          <p:cNvSpPr>
+            <a:spLocks xmlns:a="http://schemas.openxmlformats.org/drawingml/2006/main" noGrp="1"/>
+          </p:cNvSpPr>
+          <p:nvPr/>
+        </p:nvSpPr>
+        <p:spPr>
+          <a:xfrm xmlns:a="http://schemas.openxmlformats.org/drawingml/2006/main">
+            <a:off x="3467100" y="2266950"/>
+            <a:ext cx="857250" cy="38100"/>
+          </a:xfrm>
+          <a:prstGeom xmlns:a="http://schemas.openxmlformats.org/drawingml/2006/main" prst="rect">
+            <a:avLst/>
+          </a:prstGeom>
+          <a:solidFill xmlns:a="http://schemas.openxmlformats.org/drawingml/2006/main">
+            <a:srgbClr val="5267D7"/>
+          </a:solidFill>
+          <a:ln xmlns:a="http://schemas.openxmlformats.org/drawingml/2006/main" w="0">
+            <a:noFill/>
+            <a:prstDash val="solid"/>
+          </a:ln>
+        </p:spPr>
+      </p:sp>
+      <p:sp>
+        <p:nvSpPr>
+          <p:cNvPr id="32" name="">
+            <a:extLst xmlns:a="http://schemas.openxmlformats.org/drawingml/2006/main">
+              <a:ext uri="{FF2B5EF4-FFF2-40B4-BE49-F238E27FC236}">
+                <a16:creationId xmlns:a16="http://schemas.microsoft.com/office/drawing/2014/main" id="{258D6E6A-065D-45A1-9750-CD0997FFF870}"/>
+              </a:ext>
+            </a:extLst>
+          </p:cNvPr>
+          <p:cNvSpPr>
+            <a:spLocks xmlns:a="http://schemas.openxmlformats.org/drawingml/2006/main" noGrp="1"/>
+          </p:cNvSpPr>
+          <p:nvPr/>
+        </p:nvSpPr>
+        <p:spPr>
+          <a:xfrm xmlns:a="http://schemas.openxmlformats.org/drawingml/2006/main">
+            <a:off x="3524250" y="2009775"/>
+            <a:ext cx="228600" cy="209550"/>
+          </a:xfrm>
+          <a:prstGeom xmlns:a="http://schemas.openxmlformats.org/drawingml/2006/main" prst="rect">
+            <a:avLst/>
+          </a:prstGeom>
+          <a:noFill xmlns:a="http://schemas.openxmlformats.org/drawingml/2006/main"/>
+          <a:ln xmlns:a="http://schemas.openxmlformats.org/drawingml/2006/main" w="0">
+            <a:noFill/>
+            <a:prstDash val="solid"/>
+          </a:ln>
+        </p:spPr>
+        <p:txBody>
+          <a:bodyPr xmlns:a="http://schemas.openxmlformats.org/drawingml/2006/main" anchor="t">
+            <a:normAutofit fontScale="54997"/>
+          </a:bodyPr>
+          <a:lstStyle xmlns:a="http://schemas.openxmlformats.org/drawingml/2006/main">
+            <a:defPPr algn="ctr">
+              <a:defRPr sz="1125" b="1">
+                <a:solidFill>
+                  <a:srgbClr val="5267D7"/>
+                </a:solidFill>
+                <a:latin typeface="Segoe UI"/>
+                <a:ea typeface="Segoe UI"/>
+                <a:cs typeface="Segoe UI"/>
+              </a:defRPr>
+            </a:defPPr>
+          </a:lstStyle>
+          <a:p xmlns:a="http://schemas.openxmlformats.org/drawingml/2006/main">
+            <a:pPr algn="ctr">
+              <a:defRPr sz="1125" b="1">
+                <a:solidFill>
+                  <a:srgbClr val="5267D7"/>
+                </a:solidFill>
+                <a:latin typeface="Segoe UI"/>
+                <a:ea typeface="Segoe UI"/>
+                <a:cs typeface="Segoe UI"/>
+              </a:defRPr>
+            </a:pPr>
+            <a:r>
+              <a:rPr sz="1125" b="1">
+                <a:solidFill>
+                  <a:srgbClr val="5267D7"/>
+                </a:solidFill>
+                <a:latin typeface="Segoe UI"/>
+                <a:ea typeface="Segoe UI"/>
+                <a:cs typeface="Segoe UI"/>
+              </a:rPr>
+              <a:t>1</a:t>
+            </a:r>
+          </a:p>
+        </p:txBody>
+      </p:sp>
+      <p:sp>
+        <p:nvSpPr>
+          <p:cNvPr id="33" name="">
+            <a:extLst xmlns:a="http://schemas.openxmlformats.org/drawingml/2006/main">
+              <a:ext uri="{FF2B5EF4-FFF2-40B4-BE49-F238E27FC236}">
+                <a16:creationId xmlns:a16="http://schemas.microsoft.com/office/drawing/2014/main" id="{F1AED929-4D59-4E04-AE12-598C8518117F}"/>
+              </a:ext>
+            </a:extLst>
+          </p:cNvPr>
+          <p:cNvSpPr>
+            <a:spLocks xmlns:a="http://schemas.openxmlformats.org/drawingml/2006/main" noGrp="1"/>
+          </p:cNvSpPr>
+          <p:nvPr/>
+        </p:nvSpPr>
+        <p:spPr>
+          <a:xfrm xmlns:a="http://schemas.openxmlformats.org/drawingml/2006/main">
+            <a:off x="4038600" y="2009775"/>
+            <a:ext cx="247650" cy="228600"/>
+          </a:xfrm>
+          <a:prstGeom xmlns:a="http://schemas.openxmlformats.org/drawingml/2006/main" prst="rect">
+            <a:avLst/>
+          </a:prstGeom>
+          <a:noFill xmlns:a="http://schemas.openxmlformats.org/drawingml/2006/main"/>
+          <a:ln xmlns:a="http://schemas.openxmlformats.org/drawingml/2006/main" w="0">
+            <a:noFill/>
+            <a:prstDash val="solid"/>
+          </a:ln>
+        </p:spPr>
+        <p:txBody>
+          <a:bodyPr xmlns:a="http://schemas.openxmlformats.org/drawingml/2006/main" anchor="t">
+            <a:normAutofit fontScale="43692"/>
+          </a:bodyPr>
+          <a:lstStyle xmlns:a="http://schemas.openxmlformats.org/drawingml/2006/main">
+            <a:defPPr algn="ctr">
+              <a:defRPr sz="1425" b="1">
+                <a:solidFill>
+                  <a:srgbClr val="101C33"/>
+                </a:solidFill>
+                <a:latin typeface="Segoe UI"/>
+                <a:ea typeface="Segoe UI"/>
+                <a:cs typeface="Segoe UI"/>
+              </a:defRPr>
+            </a:defPPr>
+          </a:lstStyle>
+          <a:p xmlns:a="http://schemas.openxmlformats.org/drawingml/2006/main">
+            <a:pPr algn="ctr">
+              <a:defRPr sz="1425" b="1">
+                <a:solidFill>
+                  <a:srgbClr val="101C33"/>
+                </a:solidFill>
+                <a:latin typeface="Segoe UI"/>
+                <a:ea typeface="Segoe UI"/>
+                <a:cs typeface="Segoe UI"/>
+              </a:defRPr>
+            </a:pPr>
+            <a:r>
+              <a:rPr sz="1425" b="1">
+                <a:solidFill>
+                  <a:srgbClr val="101C33"/>
+                </a:solidFill>
+                <a:latin typeface="Segoe UI"/>
+                <a:ea typeface="Segoe UI"/>
+                <a:cs typeface="Segoe UI"/>
+              </a:rPr>
+              <a:t>∞</a:t>
+            </a:r>
+          </a:p>
+        </p:txBody>
+      </p:sp>
+      <p:sp>
+        <p:nvSpPr>
+          <p:cNvPr id="34" name="">
+            <a:extLst xmlns:a="http://schemas.openxmlformats.org/drawingml/2006/main">
+              <a:ext uri="{FF2B5EF4-FFF2-40B4-BE49-F238E27FC236}">
+                <a16:creationId xmlns:a16="http://schemas.microsoft.com/office/drawing/2014/main" id="{61A790BB-A8C7-4D55-981A-E0DDDE6DD241}"/>
+              </a:ext>
+            </a:extLst>
+          </p:cNvPr>
+          <p:cNvSpPr>
+            <a:spLocks xmlns:a="http://schemas.openxmlformats.org/drawingml/2006/main" noGrp="1"/>
+          </p:cNvSpPr>
+          <p:nvPr/>
+        </p:nvSpPr>
+        <p:spPr>
+          <a:xfrm xmlns:a="http://schemas.openxmlformats.org/drawingml/2006/main">
+            <a:off x="3505200" y="2343150"/>
+            <a:ext cx="781050" cy="209550"/>
+          </a:xfrm>
+          <a:prstGeom xmlns:a="http://schemas.openxmlformats.org/drawingml/2006/main" prst="rect">
+            <a:avLst/>
+          </a:prstGeom>
+          <a:noFill xmlns:a="http://schemas.openxmlformats.org/drawingml/2006/main"/>
+          <a:ln xmlns:a="http://schemas.openxmlformats.org/drawingml/2006/main" w="0">
+            <a:noFill/>
+            <a:prstDash val="solid"/>
+          </a:ln>
+        </p:spPr>
+        <p:txBody>
+          <a:bodyPr xmlns:a="http://schemas.openxmlformats.org/drawingml/2006/main" anchor="t">
+            <a:normAutofit fontScale="79487"/>
+          </a:bodyPr>
+          <a:lstStyle xmlns:a="http://schemas.openxmlformats.org/drawingml/2006/main">
+            <a:defPPr algn="ctr">
+              <a:defRPr sz="975" b="0">
+                <a:solidFill>
+                  <a:srgbClr val="56657A"/>
+                </a:solidFill>
+                <a:latin typeface="Segoe UI"/>
+                <a:ea typeface="Segoe UI"/>
+                <a:cs typeface="Segoe UI"/>
+              </a:defRPr>
+            </a:defPPr>
+          </a:lstStyle>
+          <a:p xmlns:a="http://schemas.openxmlformats.org/drawingml/2006/main">
+            <a:pPr algn="ctr">
+              <a:defRPr sz="975" b="0">
+                <a:solidFill>
+                  <a:srgbClr val="56657A"/>
+                </a:solidFill>
+                <a:latin typeface="Segoe UI"/>
+                <a:ea typeface="Segoe UI"/>
+                <a:cs typeface="Segoe UI"/>
+              </a:defRPr>
+            </a:pPr>
+            <a:r>
+              <a:rPr sz="975" b="0">
+                <a:solidFill>
+                  <a:srgbClr val="56657A"/>
+                </a:solidFill>
+                <a:latin typeface="Segoe UI"/>
+                <a:ea typeface="Segoe UI"/>
+                <a:cs typeface="Segoe UI"/>
+              </a:rPr>
+              <a:t>date_key</a:t>
+            </a:r>
+          </a:p>
+        </p:txBody>
+      </p:sp>
+      <p:sp>
+        <p:nvSpPr>
+          <p:cNvPr id="35" name="">
+            <a:extLst xmlns:a="http://schemas.openxmlformats.org/drawingml/2006/main">
+              <a:ext uri="{FF2B5EF4-FFF2-40B4-BE49-F238E27FC236}">
+                <a16:creationId xmlns:a16="http://schemas.microsoft.com/office/drawing/2014/main" id="{C8EE34DC-BD9D-4F4B-A5DC-7D3F0D518E8D}"/>
+              </a:ext>
+            </a:extLst>
+          </p:cNvPr>
+          <p:cNvSpPr>
+            <a:spLocks xmlns:a="http://schemas.openxmlformats.org/drawingml/2006/main" noGrp="1"/>
+          </p:cNvSpPr>
+          <p:nvPr/>
+        </p:nvSpPr>
+        <p:spPr>
+          <a:xfrm xmlns:a="http://schemas.openxmlformats.org/drawingml/2006/main">
+            <a:off x="3467100" y="4248150"/>
+            <a:ext cx="857250" cy="38100"/>
+          </a:xfrm>
+          <a:prstGeom xmlns:a="http://schemas.openxmlformats.org/drawingml/2006/main" prst="rect">
+            <a:avLst/>
+          </a:prstGeom>
+          <a:solidFill xmlns:a="http://schemas.openxmlformats.org/drawingml/2006/main">
+            <a:srgbClr val="16B8A6"/>
+          </a:solidFill>
+          <a:ln xmlns:a="http://schemas.openxmlformats.org/drawingml/2006/main" w="0">
+            <a:noFill/>
+            <a:prstDash val="solid"/>
+          </a:ln>
+        </p:spPr>
+      </p:sp>
+      <p:sp>
+        <p:nvSpPr>
+          <p:cNvPr id="36" name="">
+            <a:extLst xmlns:a="http://schemas.openxmlformats.org/drawingml/2006/main">
+              <a:ext uri="{FF2B5EF4-FFF2-40B4-BE49-F238E27FC236}">
+                <a16:creationId xmlns:a16="http://schemas.microsoft.com/office/drawing/2014/main" id="{39982AA5-FA02-4518-B77A-BBF180EA93C2}"/>
+              </a:ext>
+            </a:extLst>
+          </p:cNvPr>
+          <p:cNvSpPr>
+            <a:spLocks xmlns:a="http://schemas.openxmlformats.org/drawingml/2006/main" noGrp="1"/>
+          </p:cNvSpPr>
+          <p:nvPr/>
+        </p:nvSpPr>
+        <p:spPr>
+          <a:xfrm xmlns:a="http://schemas.openxmlformats.org/drawingml/2006/main">
+            <a:off x="3524250" y="3990975"/>
+            <a:ext cx="228600" cy="209550"/>
+          </a:xfrm>
+          <a:prstGeom xmlns:a="http://schemas.openxmlformats.org/drawingml/2006/main" prst="rect">
+            <a:avLst/>
+          </a:prstGeom>
+          <a:noFill xmlns:a="http://schemas.openxmlformats.org/drawingml/2006/main"/>
+          <a:ln xmlns:a="http://schemas.openxmlformats.org/drawingml/2006/main" w="0">
+            <a:noFill/>
+            <a:prstDash val="solid"/>
+          </a:ln>
+        </p:spPr>
+        <p:txBody>
+          <a:bodyPr xmlns:a="http://schemas.openxmlformats.org/drawingml/2006/main" anchor="t">
+            <a:normAutofit fontScale="54997"/>
+          </a:bodyPr>
+          <a:lstStyle xmlns:a="http://schemas.openxmlformats.org/drawingml/2006/main">
+            <a:defPPr algn="ctr">
+              <a:defRPr sz="1125" b="1">
+                <a:solidFill>
+                  <a:srgbClr val="16B8A6"/>
+                </a:solidFill>
+                <a:latin typeface="Segoe UI"/>
+                <a:ea typeface="Segoe UI"/>
+                <a:cs typeface="Segoe UI"/>
+              </a:defRPr>
+            </a:defPPr>
+          </a:lstStyle>
+          <a:p xmlns:a="http://schemas.openxmlformats.org/drawingml/2006/main">
+            <a:pPr algn="ctr">
+              <a:defRPr sz="1125" b="1">
+                <a:solidFill>
+                  <a:srgbClr val="16B8A6"/>
+                </a:solidFill>
+                <a:latin typeface="Segoe UI"/>
+                <a:ea typeface="Segoe UI"/>
+                <a:cs typeface="Segoe UI"/>
+              </a:defRPr>
+            </a:pPr>
+            <a:r>
+              <a:rPr sz="1125" b="1">
+                <a:solidFill>
+                  <a:srgbClr val="16B8A6"/>
+                </a:solidFill>
+                <a:latin typeface="Segoe UI"/>
+                <a:ea typeface="Segoe UI"/>
+                <a:cs typeface="Segoe UI"/>
+              </a:rPr>
+              <a:t>1</a:t>
+            </a:r>
+          </a:p>
+        </p:txBody>
+      </p:sp>
+      <p:sp>
+        <p:nvSpPr>
+          <p:cNvPr id="37" name="">
+            <a:extLst xmlns:a="http://schemas.openxmlformats.org/drawingml/2006/main">
+              <a:ext uri="{FF2B5EF4-FFF2-40B4-BE49-F238E27FC236}">
+                <a16:creationId xmlns:a16="http://schemas.microsoft.com/office/drawing/2014/main" id="{862DB380-D0B8-41C6-A96A-306FD5174A21}"/>
+              </a:ext>
+            </a:extLst>
+          </p:cNvPr>
+          <p:cNvSpPr>
+            <a:spLocks xmlns:a="http://schemas.openxmlformats.org/drawingml/2006/main" noGrp="1"/>
+          </p:cNvSpPr>
+          <p:nvPr/>
+        </p:nvSpPr>
+        <p:spPr>
+          <a:xfrm xmlns:a="http://schemas.openxmlformats.org/drawingml/2006/main">
+            <a:off x="4038600" y="3990975"/>
+            <a:ext cx="247650" cy="228600"/>
+          </a:xfrm>
+          <a:prstGeom xmlns:a="http://schemas.openxmlformats.org/drawingml/2006/main" prst="rect">
+            <a:avLst/>
+          </a:prstGeom>
+          <a:noFill xmlns:a="http://schemas.openxmlformats.org/drawingml/2006/main"/>
+          <a:ln xmlns:a="http://schemas.openxmlformats.org/drawingml/2006/main" w="0">
+            <a:noFill/>
+            <a:prstDash val="solid"/>
+          </a:ln>
+        </p:spPr>
+        <p:txBody>
+          <a:bodyPr xmlns:a="http://schemas.openxmlformats.org/drawingml/2006/main" anchor="t">
+            <a:normAutofit fontScale="43692"/>
+          </a:bodyPr>
+          <a:lstStyle xmlns:a="http://schemas.openxmlformats.org/drawingml/2006/main">
+            <a:defPPr algn="ctr">
+              <a:defRPr sz="1425" b="1">
+                <a:solidFill>
+                  <a:srgbClr val="101C33"/>
+                </a:solidFill>
+                <a:latin typeface="Segoe UI"/>
+                <a:ea typeface="Segoe UI"/>
+                <a:cs typeface="Segoe UI"/>
+              </a:defRPr>
+            </a:defPPr>
+          </a:lstStyle>
+          <a:p xmlns:a="http://schemas.openxmlformats.org/drawingml/2006/main">
+            <a:pPr algn="ctr">
+              <a:defRPr sz="1425" b="1">
+                <a:solidFill>
+                  <a:srgbClr val="101C33"/>
+                </a:solidFill>
+                <a:latin typeface="Segoe UI"/>
+                <a:ea typeface="Segoe UI"/>
+                <a:cs typeface="Segoe UI"/>
+              </a:defRPr>
+            </a:pPr>
+            <a:r>
+              <a:rPr sz="1425" b="1">
+                <a:solidFill>
+                  <a:srgbClr val="101C33"/>
+                </a:solidFill>
+                <a:latin typeface="Segoe UI"/>
+                <a:ea typeface="Segoe UI"/>
+                <a:cs typeface="Segoe UI"/>
+              </a:rPr>
+              <a:t>∞</a:t>
+            </a:r>
+          </a:p>
+        </p:txBody>
+      </p:sp>
+      <p:sp>
+        <p:nvSpPr>
+          <p:cNvPr id="38" name="">
+            <a:extLst xmlns:a="http://schemas.openxmlformats.org/drawingml/2006/main">
+              <a:ext uri="{FF2B5EF4-FFF2-40B4-BE49-F238E27FC236}">
+                <a16:creationId xmlns:a16="http://schemas.microsoft.com/office/drawing/2014/main" id="{7B71AE3C-5EDB-49C0-B55E-C70586320479}"/>
+              </a:ext>
+            </a:extLst>
+          </p:cNvPr>
+          <p:cNvSpPr>
+            <a:spLocks xmlns:a="http://schemas.openxmlformats.org/drawingml/2006/main" noGrp="1"/>
+          </p:cNvSpPr>
+          <p:nvPr/>
+        </p:nvSpPr>
+        <p:spPr>
+          <a:xfrm xmlns:a="http://schemas.openxmlformats.org/drawingml/2006/main">
+            <a:off x="3448050" y="4324350"/>
+            <a:ext cx="876300" cy="209550"/>
+          </a:xfrm>
+          <a:prstGeom xmlns:a="http://schemas.openxmlformats.org/drawingml/2006/main" prst="rect">
+            <a:avLst/>
+          </a:prstGeom>
+          <a:noFill xmlns:a="http://schemas.openxmlformats.org/drawingml/2006/main"/>
+          <a:ln xmlns:a="http://schemas.openxmlformats.org/drawingml/2006/main" w="0">
+            <a:noFill/>
+            <a:prstDash val="solid"/>
+          </a:ln>
+        </p:spPr>
+        <p:txBody>
+          <a:bodyPr xmlns:a="http://schemas.openxmlformats.org/drawingml/2006/main" anchor="t">
+            <a:normAutofit fontScale="86111"/>
+          </a:bodyPr>
+          <a:lstStyle xmlns:a="http://schemas.openxmlformats.org/drawingml/2006/main">
+            <a:defPPr algn="ctr">
+              <a:defRPr sz="900" b="0">
+                <a:solidFill>
+                  <a:srgbClr val="56657A"/>
+                </a:solidFill>
+                <a:latin typeface="Segoe UI"/>
+                <a:ea typeface="Segoe UI"/>
+                <a:cs typeface="Segoe UI"/>
+              </a:defRPr>
+            </a:defPPr>
+          </a:lstStyle>
+          <a:p xmlns:a="http://schemas.openxmlformats.org/drawingml/2006/main">
+            <a:pPr algn="ctr">
+              <a:defRPr sz="900" b="0">
+                <a:solidFill>
+                  <a:srgbClr val="56657A"/>
+                </a:solidFill>
+                <a:latin typeface="Segoe UI"/>
+                <a:ea typeface="Segoe UI"/>
+                <a:cs typeface="Segoe UI"/>
+              </a:defRPr>
+            </a:pPr>
+            <a:r>
+              <a:rPr sz="900" b="0">
+                <a:solidFill>
+                  <a:srgbClr val="56657A"/>
+                </a:solidFill>
+                <a:latin typeface="Segoe UI"/>
+                <a:ea typeface="Segoe UI"/>
+                <a:cs typeface="Segoe UI"/>
+              </a:rPr>
+              <a:t>customer_key</a:t>
+            </a:r>
+          </a:p>
+        </p:txBody>
+      </p:sp>
+      <p:sp>
+        <p:nvSpPr>
+          <p:cNvPr id="39" name="">
+            <a:extLst xmlns:a="http://schemas.openxmlformats.org/drawingml/2006/main">
+              <a:ext uri="{FF2B5EF4-FFF2-40B4-BE49-F238E27FC236}">
+                <a16:creationId xmlns:a16="http://schemas.microsoft.com/office/drawing/2014/main" id="{0561AA90-9DD6-47CF-95B3-B6354CE654FF}"/>
+              </a:ext>
+            </a:extLst>
+          </p:cNvPr>
+          <p:cNvSpPr>
+            <a:spLocks xmlns:a="http://schemas.openxmlformats.org/drawingml/2006/main" noGrp="1"/>
+          </p:cNvSpPr>
+          <p:nvPr/>
+        </p:nvSpPr>
+        <p:spPr>
+          <a:xfrm xmlns:a="http://schemas.openxmlformats.org/drawingml/2006/main">
+            <a:off x="7867650" y="2266950"/>
+            <a:ext cx="857250" cy="38100"/>
+          </a:xfrm>
+          <a:prstGeom xmlns:a="http://schemas.openxmlformats.org/drawingml/2006/main" prst="rect">
+            <a:avLst/>
+          </a:prstGeom>
+          <a:solidFill xmlns:a="http://schemas.openxmlformats.org/drawingml/2006/main">
+            <a:srgbClr val="F2A03D"/>
+          </a:solidFill>
+          <a:ln xmlns:a="http://schemas.openxmlformats.org/drawingml/2006/main" w="0">
+            <a:noFill/>
+            <a:prstDash val="solid"/>
+          </a:ln>
+        </p:spPr>
+      </p:sp>
+      <p:sp>
+        <p:nvSpPr>
+          <p:cNvPr id="40" name="">
+            <a:extLst xmlns:a="http://schemas.openxmlformats.org/drawingml/2006/main">
+              <a:ext uri="{FF2B5EF4-FFF2-40B4-BE49-F238E27FC236}">
+                <a16:creationId xmlns:a16="http://schemas.microsoft.com/office/drawing/2014/main" id="{4D6C93CD-41BC-4FD8-9D13-AB047F03E3D1}"/>
+              </a:ext>
+            </a:extLst>
+          </p:cNvPr>
+          <p:cNvSpPr>
+            <a:spLocks xmlns:a="http://schemas.openxmlformats.org/drawingml/2006/main" noGrp="1"/>
+          </p:cNvSpPr>
+          <p:nvPr/>
+        </p:nvSpPr>
+        <p:spPr>
+          <a:xfrm xmlns:a="http://schemas.openxmlformats.org/drawingml/2006/main">
+            <a:off x="7924800" y="2009775"/>
+            <a:ext cx="247650" cy="228600"/>
+          </a:xfrm>
+          <a:prstGeom xmlns:a="http://schemas.openxmlformats.org/drawingml/2006/main" prst="rect">
+            <a:avLst/>
+          </a:prstGeom>
+          <a:noFill xmlns:a="http://schemas.openxmlformats.org/drawingml/2006/main"/>
+          <a:ln xmlns:a="http://schemas.openxmlformats.org/drawingml/2006/main" w="0">
+            <a:noFill/>
+            <a:prstDash val="solid"/>
+          </a:ln>
+        </p:spPr>
+        <p:txBody>
+          <a:bodyPr xmlns:a="http://schemas.openxmlformats.org/drawingml/2006/main" anchor="t">
+            <a:normAutofit fontScale="43692"/>
+          </a:bodyPr>
+          <a:lstStyle xmlns:a="http://schemas.openxmlformats.org/drawingml/2006/main">
+            <a:defPPr algn="ctr">
+              <a:defRPr sz="1425" b="1">
+                <a:solidFill>
+                  <a:srgbClr val="101C33"/>
+                </a:solidFill>
+                <a:latin typeface="Segoe UI"/>
+                <a:ea typeface="Segoe UI"/>
+                <a:cs typeface="Segoe UI"/>
+              </a:defRPr>
+            </a:defPPr>
+          </a:lstStyle>
+          <a:p xmlns:a="http://schemas.openxmlformats.org/drawingml/2006/main">
+            <a:pPr algn="ctr">
+              <a:defRPr sz="1425" b="1">
+                <a:solidFill>
+                  <a:srgbClr val="101C33"/>
+                </a:solidFill>
+                <a:latin typeface="Segoe UI"/>
+                <a:ea typeface="Segoe UI"/>
+                <a:cs typeface="Segoe UI"/>
+              </a:defRPr>
+            </a:pPr>
+            <a:r>
+              <a:rPr sz="1425" b="1">
+                <a:solidFill>
+                  <a:srgbClr val="101C33"/>
+                </a:solidFill>
+                <a:latin typeface="Segoe UI"/>
+                <a:ea typeface="Segoe UI"/>
+                <a:cs typeface="Segoe UI"/>
+              </a:rPr>
+              <a:t>∞</a:t>
+            </a:r>
+          </a:p>
+        </p:txBody>
+      </p:sp>
+      <p:sp>
+        <p:nvSpPr>
+          <p:cNvPr id="41" name="">
+            <a:extLst xmlns:a="http://schemas.openxmlformats.org/drawingml/2006/main">
+              <a:ext uri="{FF2B5EF4-FFF2-40B4-BE49-F238E27FC236}">
+                <a16:creationId xmlns:a16="http://schemas.microsoft.com/office/drawing/2014/main" id="{E6380F86-E24C-4A37-82A7-9C0FFF8983CE}"/>
+              </a:ext>
+            </a:extLst>
+          </p:cNvPr>
+          <p:cNvSpPr>
+            <a:spLocks xmlns:a="http://schemas.openxmlformats.org/drawingml/2006/main" noGrp="1"/>
+          </p:cNvSpPr>
+          <p:nvPr/>
+        </p:nvSpPr>
+        <p:spPr>
+          <a:xfrm xmlns:a="http://schemas.openxmlformats.org/drawingml/2006/main">
+            <a:off x="8439150" y="2009775"/>
+            <a:ext cx="228600" cy="209550"/>
+          </a:xfrm>
+          <a:prstGeom xmlns:a="http://schemas.openxmlformats.org/drawingml/2006/main" prst="rect">
+            <a:avLst/>
+          </a:prstGeom>
+          <a:noFill xmlns:a="http://schemas.openxmlformats.org/drawingml/2006/main"/>
+          <a:ln xmlns:a="http://schemas.openxmlformats.org/drawingml/2006/main" w="0">
+            <a:noFill/>
+            <a:prstDash val="solid"/>
+          </a:ln>
+        </p:spPr>
+        <p:txBody>
+          <a:bodyPr xmlns:a="http://schemas.openxmlformats.org/drawingml/2006/main" anchor="t">
+            <a:normAutofit fontScale="54997"/>
+          </a:bodyPr>
+          <a:lstStyle xmlns:a="http://schemas.openxmlformats.org/drawingml/2006/main">
+            <a:defPPr algn="ctr">
+              <a:defRPr sz="1125" b="1">
+                <a:solidFill>
+                  <a:srgbClr val="F2A03D"/>
+                </a:solidFill>
+                <a:latin typeface="Segoe UI"/>
+                <a:ea typeface="Segoe UI"/>
+                <a:cs typeface="Segoe UI"/>
+              </a:defRPr>
+            </a:defPPr>
+          </a:lstStyle>
+          <a:p xmlns:a="http://schemas.openxmlformats.org/drawingml/2006/main">
+            <a:pPr algn="ctr">
+              <a:defRPr sz="1125" b="1">
+                <a:solidFill>
+                  <a:srgbClr val="F2A03D"/>
+                </a:solidFill>
+                <a:latin typeface="Segoe UI"/>
+                <a:ea typeface="Segoe UI"/>
+                <a:cs typeface="Segoe UI"/>
+              </a:defRPr>
+            </a:pPr>
+            <a:r>
+              <a:rPr sz="1125" b="1">
+                <a:solidFill>
+                  <a:srgbClr val="F2A03D"/>
+                </a:solidFill>
+                <a:latin typeface="Segoe UI"/>
+                <a:ea typeface="Segoe UI"/>
+                <a:cs typeface="Segoe UI"/>
+              </a:rPr>
+              <a:t>1</a:t>
+            </a:r>
+          </a:p>
+        </p:txBody>
+      </p:sp>
+      <p:sp>
+        <p:nvSpPr>
+          <p:cNvPr id="42" name="">
+            <a:extLst xmlns:a="http://schemas.openxmlformats.org/drawingml/2006/main">
+              <a:ext uri="{FF2B5EF4-FFF2-40B4-BE49-F238E27FC236}">
+                <a16:creationId xmlns:a16="http://schemas.microsoft.com/office/drawing/2014/main" id="{483EC0EC-6854-42A2-8159-AE8C913B6B01}"/>
+              </a:ext>
+            </a:extLst>
+          </p:cNvPr>
+          <p:cNvSpPr>
+            <a:spLocks xmlns:a="http://schemas.openxmlformats.org/drawingml/2006/main" noGrp="1"/>
+          </p:cNvSpPr>
+          <p:nvPr/>
+        </p:nvSpPr>
+        <p:spPr>
+          <a:xfrm xmlns:a="http://schemas.openxmlformats.org/drawingml/2006/main">
+            <a:off x="7905750" y="2343150"/>
+            <a:ext cx="781050" cy="209550"/>
+          </a:xfrm>
+          <a:prstGeom xmlns:a="http://schemas.openxmlformats.org/drawingml/2006/main" prst="rect">
+            <a:avLst/>
+          </a:prstGeom>
+          <a:noFill xmlns:a="http://schemas.openxmlformats.org/drawingml/2006/main"/>
+          <a:ln xmlns:a="http://schemas.openxmlformats.org/drawingml/2006/main" w="0">
+            <a:noFill/>
+            <a:prstDash val="solid"/>
+          </a:ln>
+        </p:spPr>
+        <p:txBody>
+          <a:bodyPr xmlns:a="http://schemas.openxmlformats.org/drawingml/2006/main" anchor="t">
+            <a:normAutofit fontScale="86111"/>
+          </a:bodyPr>
+          <a:lstStyle xmlns:a="http://schemas.openxmlformats.org/drawingml/2006/main">
+            <a:defPPr algn="ctr">
+              <a:defRPr sz="900" b="0">
+                <a:solidFill>
+                  <a:srgbClr val="56657A"/>
+                </a:solidFill>
+                <a:latin typeface="Segoe UI"/>
+                <a:ea typeface="Segoe UI"/>
+                <a:cs typeface="Segoe UI"/>
+              </a:defRPr>
+            </a:defPPr>
+          </a:lstStyle>
+          <a:p xmlns:a="http://schemas.openxmlformats.org/drawingml/2006/main">
+            <a:pPr algn="ctr">
+              <a:defRPr sz="900" b="0">
+                <a:solidFill>
+                  <a:srgbClr val="56657A"/>
+                </a:solidFill>
+                <a:latin typeface="Segoe UI"/>
+                <a:ea typeface="Segoe UI"/>
+                <a:cs typeface="Segoe UI"/>
+              </a:defRPr>
+            </a:pPr>
+            <a:r>
+              <a:rPr sz="900" b="0">
+                <a:solidFill>
+                  <a:srgbClr val="56657A"/>
+                </a:solidFill>
+                <a:latin typeface="Segoe UI"/>
+                <a:ea typeface="Segoe UI"/>
+                <a:cs typeface="Segoe UI"/>
+              </a:rPr>
+              <a:t>product_key</a:t>
+            </a:r>
+          </a:p>
+        </p:txBody>
+      </p:sp>
+      <p:sp>
+        <p:nvSpPr>
+          <p:cNvPr id="43" name="">
+            <a:extLst xmlns:a="http://schemas.openxmlformats.org/drawingml/2006/main">
+              <a:ext uri="{FF2B5EF4-FFF2-40B4-BE49-F238E27FC236}">
+                <a16:creationId xmlns:a16="http://schemas.microsoft.com/office/drawing/2014/main" id="{A91E9A7F-80E6-475A-A8EA-C847F605DBE0}"/>
+              </a:ext>
+            </a:extLst>
+          </p:cNvPr>
+          <p:cNvSpPr>
+            <a:spLocks xmlns:a="http://schemas.openxmlformats.org/drawingml/2006/main" noGrp="1"/>
+          </p:cNvSpPr>
+          <p:nvPr/>
+        </p:nvSpPr>
+        <p:spPr>
+          <a:xfrm xmlns:a="http://schemas.openxmlformats.org/drawingml/2006/main">
+            <a:off x="609600" y="5276850"/>
+            <a:ext cx="10972800" cy="857250"/>
+          </a:xfrm>
+          <a:prstGeom xmlns:a="http://schemas.openxmlformats.org/drawingml/2006/main" prst="roundRect">
+            <a:avLst>
+              <a:gd name="adj" fmla="val 8889"/>
+            </a:avLst>
+          </a:prstGeom>
+          <a:solidFill xmlns:a="http://schemas.openxmlformats.org/drawingml/2006/main">
+            <a:srgbClr val="FFFFFF"/>
+          </a:solidFill>
+          <a:ln xmlns:a="http://schemas.openxmlformats.org/drawingml/2006/main" w="9525">
+            <a:solidFill>
+              <a:srgbClr val="DCE2EA"/>
+            </a:solidFill>
+            <a:prstDash val="solid"/>
+          </a:ln>
+        </p:spPr>
+      </p:sp>
+      <p:sp>
+        <p:nvSpPr>
+          <p:cNvPr id="44" name="">
+            <a:extLst xmlns:a="http://schemas.openxmlformats.org/drawingml/2006/main">
+              <a:ext uri="{FF2B5EF4-FFF2-40B4-BE49-F238E27FC236}">
+                <a16:creationId xmlns:a16="http://schemas.microsoft.com/office/drawing/2014/main" id="{FA9568B5-2CF1-40A7-BB6C-E198D31C3489}"/>
+              </a:ext>
+            </a:extLst>
+          </p:cNvPr>
+          <p:cNvSpPr>
+            <a:spLocks xmlns:a="http://schemas.openxmlformats.org/drawingml/2006/main" noGrp="1"/>
+          </p:cNvSpPr>
+          <p:nvPr/>
+        </p:nvSpPr>
+        <p:spPr>
+          <a:xfrm xmlns:a="http://schemas.openxmlformats.org/drawingml/2006/main">
+            <a:off x="781050" y="5410200"/>
+            <a:ext cx="952500" cy="209550"/>
+          </a:xfrm>
+          <a:prstGeom xmlns:a="http://schemas.openxmlformats.org/drawingml/2006/main" prst="rect">
+            <a:avLst/>
+          </a:prstGeom>
+          <a:noFill xmlns:a="http://schemas.openxmlformats.org/drawingml/2006/main"/>
+          <a:ln xmlns:a="http://schemas.openxmlformats.org/drawingml/2006/main" w="0">
+            <a:noFill/>
+            <a:prstDash val="solid"/>
+          </a:ln>
+        </p:spPr>
+        <p:txBody>
+          <a:bodyPr xmlns:a="http://schemas.openxmlformats.org/drawingml/2006/main" anchor="t">
+            <a:normAutofit fontScale="64583"/>
+          </a:bodyPr>
+          <a:lstStyle xmlns:a="http://schemas.openxmlformats.org/drawingml/2006/main">
+            <a:defPPr algn="l">
+              <a:defRPr sz="1200" b="1">
+                <a:solidFill>
+                  <a:srgbClr val="56657A"/>
+                </a:solidFill>
+                <a:latin typeface="Segoe UI"/>
+                <a:ea typeface="Segoe UI"/>
+                <a:cs typeface="Segoe UI"/>
+              </a:defRPr>
+            </a:defPPr>
+          </a:lstStyle>
+          <a:p xmlns:a="http://schemas.openxmlformats.org/drawingml/2006/main">
+            <a:pPr algn="l">
+              <a:defRPr sz="1200" b="1">
+                <a:solidFill>
+                  <a:srgbClr val="56657A"/>
+                </a:solidFill>
+                <a:latin typeface="Segoe UI"/>
+                <a:ea typeface="Segoe UI"/>
+                <a:cs typeface="Segoe UI"/>
+              </a:defRPr>
+            </a:pPr>
+            <a:r>
+              <a:rPr sz="1200" b="1">
+                <a:solidFill>
+                  <a:srgbClr val="56657A"/>
+                </a:solidFill>
+                <a:latin typeface="Segoe UI"/>
+                <a:ea typeface="Segoe UI"/>
+                <a:cs typeface="Segoe UI"/>
+              </a:rPr>
+              <a:t>ETL FLOW</a:t>
+            </a:r>
+          </a:p>
+        </p:txBody>
+      </p:sp>
+      <p:sp>
+        <p:nvSpPr>
+          <p:cNvPr id="45" name="">
+            <a:extLst xmlns:a="http://schemas.openxmlformats.org/drawingml/2006/main">
+              <a:ext uri="{FF2B5EF4-FFF2-40B4-BE49-F238E27FC236}">
+                <a16:creationId xmlns:a16="http://schemas.microsoft.com/office/drawing/2014/main" id="{6617DE38-C4FE-468E-ABBF-DBDB837EDA81}"/>
+              </a:ext>
+            </a:extLst>
+          </p:cNvPr>
+          <p:cNvSpPr>
+            <a:spLocks xmlns:a="http://schemas.openxmlformats.org/drawingml/2006/main" noGrp="1"/>
+          </p:cNvSpPr>
+          <p:nvPr/>
+        </p:nvSpPr>
+        <p:spPr>
+          <a:xfrm xmlns:a="http://schemas.openxmlformats.org/drawingml/2006/main">
+            <a:off x="1809750" y="5381625"/>
+            <a:ext cx="1524000" cy="552450"/>
+          </a:xfrm>
+          <a:prstGeom xmlns:a="http://schemas.openxmlformats.org/drawingml/2006/main" prst="roundRect">
+            <a:avLst>
+              <a:gd name="adj" fmla="val 13793"/>
             </a:avLst>
           </a:prstGeom>
           <a:solidFill xmlns:a="http://schemas.openxmlformats.org/drawingml/2006/main">
@@ -17675,22 +20275,22 @@
       </p:sp>
       <p:sp>
         <p:nvSpPr>
-          <p:cNvPr id="8" name="">
-            <a:extLst xmlns:a="http://schemas.openxmlformats.org/drawingml/2006/main">
-              <a:ext uri="{FF2B5EF4-FFF2-40B4-BE49-F238E27FC236}">
-                <a16:creationId xmlns:a16="http://schemas.microsoft.com/office/drawing/2014/main" id="{426C9738-2D60-45C6-A0AF-1136D1C0AD57}"/>
-              </a:ext>
-            </a:extLst>
-          </p:cNvPr>
-          <p:cNvSpPr>
-            <a:spLocks xmlns:a="http://schemas.openxmlformats.org/drawingml/2006/main" noGrp="1"/>
-          </p:cNvSpPr>
-          <p:nvPr/>
-        </p:nvSpPr>
-        <p:spPr>
-          <a:xfrm xmlns:a="http://schemas.openxmlformats.org/drawingml/2006/main">
-            <a:off x="971550" y="1828800"/>
-            <a:ext cx="2171700" cy="285750"/>
+          <p:cNvPr id="46" name="">
+            <a:extLst xmlns:a="http://schemas.openxmlformats.org/drawingml/2006/main">
+              <a:ext uri="{FF2B5EF4-FFF2-40B4-BE49-F238E27FC236}">
+                <a16:creationId xmlns:a16="http://schemas.microsoft.com/office/drawing/2014/main" id="{73B4DB0E-F636-4688-A50F-E536130399B1}"/>
+              </a:ext>
+            </a:extLst>
+          </p:cNvPr>
+          <p:cNvSpPr>
+            <a:spLocks xmlns:a="http://schemas.openxmlformats.org/drawingml/2006/main" noGrp="1"/>
+          </p:cNvSpPr>
+          <p:nvPr/>
+        </p:nvSpPr>
+        <p:spPr>
+          <a:xfrm xmlns:a="http://schemas.openxmlformats.org/drawingml/2006/main">
+            <a:off x="1924050" y="5495925"/>
+            <a:ext cx="1295400" cy="285750"/>
           </a:xfrm>
           <a:prstGeom xmlns:a="http://schemas.openxmlformats.org/drawingml/2006/main" prst="rect">
             <a:avLst/>
@@ -17737,29 +20337,29 @@
                 <a:ea typeface="Segoe UI"/>
                 <a:cs typeface="Segoe UI"/>
               </a:rPr>
-              <a:t>dim_date</a:t>
-            </a:r>
-          </a:p>
-        </p:txBody>
-      </p:sp>
-      <p:sp>
-        <p:nvSpPr>
-          <p:cNvPr id="9" name="">
-            <a:extLst xmlns:a="http://schemas.openxmlformats.org/drawingml/2006/main">
-              <a:ext uri="{FF2B5EF4-FFF2-40B4-BE49-F238E27FC236}">
-                <a16:creationId xmlns:a16="http://schemas.microsoft.com/office/drawing/2014/main" id="{C7C6DF39-A19E-4C6D-B97C-200181B9F954}"/>
-              </a:ext>
-            </a:extLst>
-          </p:cNvPr>
-          <p:cNvSpPr>
-            <a:spLocks xmlns:a="http://schemas.openxmlformats.org/drawingml/2006/main" noGrp="1"/>
-          </p:cNvSpPr>
-          <p:nvPr/>
-        </p:nvSpPr>
-        <p:spPr>
-          <a:xfrm xmlns:a="http://schemas.openxmlformats.org/drawingml/2006/main">
-            <a:off x="952500" y="2152650"/>
-            <a:ext cx="2209800" cy="495300"/>
+              <a:t>raw_orders</a:t>
+            </a:r>
+          </a:p>
+        </p:txBody>
+      </p:sp>
+      <p:sp>
+        <p:nvSpPr>
+          <p:cNvPr id="47" name="">
+            <a:extLst xmlns:a="http://schemas.openxmlformats.org/drawingml/2006/main">
+              <a:ext uri="{FF2B5EF4-FFF2-40B4-BE49-F238E27FC236}">
+                <a16:creationId xmlns:a16="http://schemas.microsoft.com/office/drawing/2014/main" id="{199FC168-D716-4B2D-861E-95E4F11F8ED0}"/>
+              </a:ext>
+            </a:extLst>
+          </p:cNvPr>
+          <p:cNvSpPr>
+            <a:spLocks xmlns:a="http://schemas.openxmlformats.org/drawingml/2006/main" noGrp="1"/>
+          </p:cNvSpPr>
+          <p:nvPr/>
+        </p:nvSpPr>
+        <p:spPr>
+          <a:xfrm xmlns:a="http://schemas.openxmlformats.org/drawingml/2006/main">
+            <a:off x="1905000" y="5819775"/>
+            <a:ext cx="1333500" cy="38100"/>
           </a:xfrm>
           <a:prstGeom xmlns:a="http://schemas.openxmlformats.org/drawingml/2006/main" prst="rect">
             <a:avLst/>
@@ -17772,7 +20372,7 @@
         </p:spPr>
         <p:txBody>
           <a:bodyPr xmlns:a="http://schemas.openxmlformats.org/drawingml/2006/main" anchor="t">
-            <a:normAutofit fontScale="100000"/>
+            <a:normAutofit fontScale="10000"/>
           </a:bodyPr>
           <a:lstStyle xmlns:a="http://schemas.openxmlformats.org/drawingml/2006/main">
             <a:defPPr algn="ctr">
@@ -17806,56 +20406,95 @@
                 <a:ea typeface="Segoe UI"/>
                 <a:cs typeface="Segoe UI"/>
               </a:rPr>
-              <a:t>date_key · year · quarter</a:t>
-            </a:r>
-          </a:p>
-          <a:p xmlns:a="http://schemas.openxmlformats.org/drawingml/2006/main">
-            <a:pPr algn="ctr">
-              <a:defRPr sz="1200" b="0">
-                <a:solidFill>
-                  <a:srgbClr val="172033"/>
-                </a:solidFill>
-                <a:latin typeface="Segoe UI"/>
-                <a:ea typeface="Segoe UI"/>
-                <a:cs typeface="Segoe UI"/>
-              </a:defRPr>
-            </a:pPr>
-            <a:r>
-              <a:rPr sz="1200" b="0">
-                <a:solidFill>
-                  <a:srgbClr val="172033"/>
-                </a:solidFill>
-                <a:latin typeface="Segoe UI"/>
-                <a:ea typeface="Segoe UI"/>
-                <a:cs typeface="Segoe UI"/>
-              </a:rPr>
-              <a:t>month · week · weekday</a:t>
-            </a:r>
-          </a:p>
-        </p:txBody>
-      </p:sp>
-      <p:sp>
-        <p:nvSpPr>
-          <p:cNvPr id="10" name="">
-            <a:extLst xmlns:a="http://schemas.openxmlformats.org/drawingml/2006/main">
-              <a:ext uri="{FF2B5EF4-FFF2-40B4-BE49-F238E27FC236}">
-                <a16:creationId xmlns:a16="http://schemas.microsoft.com/office/drawing/2014/main" id="{E6B9C74E-61E1-4E35-8993-27970EDEFBB7}"/>
-              </a:ext>
-            </a:extLst>
-          </p:cNvPr>
-          <p:cNvSpPr>
-            <a:spLocks xmlns:a="http://schemas.openxmlformats.org/drawingml/2006/main" noGrp="1"/>
-          </p:cNvSpPr>
-          <p:nvPr/>
-        </p:nvSpPr>
-        <p:spPr>
-          <a:xfrm xmlns:a="http://schemas.openxmlformats.org/drawingml/2006/main">
-            <a:off x="857250" y="4057650"/>
-            <a:ext cx="2400300" cy="1009650"/>
+              <a:t>CSV landing</a:t>
+            </a:r>
+          </a:p>
+        </p:txBody>
+      </p:sp>
+      <p:sp>
+        <p:nvSpPr>
+          <p:cNvPr id="48" name="">
+            <a:extLst xmlns:a="http://schemas.openxmlformats.org/drawingml/2006/main">
+              <a:ext uri="{FF2B5EF4-FFF2-40B4-BE49-F238E27FC236}">
+                <a16:creationId xmlns:a16="http://schemas.microsoft.com/office/drawing/2014/main" id="{40987675-8A88-4C83-9EE0-34D003597C64}"/>
+              </a:ext>
+            </a:extLst>
+          </p:cNvPr>
+          <p:cNvSpPr>
+            <a:spLocks xmlns:a="http://schemas.openxmlformats.org/drawingml/2006/main" noGrp="1"/>
+          </p:cNvSpPr>
+          <p:nvPr/>
+        </p:nvSpPr>
+        <p:spPr>
+          <a:xfrm xmlns:a="http://schemas.openxmlformats.org/drawingml/2006/main">
+            <a:off x="3352800" y="5648325"/>
+            <a:ext cx="342900" cy="38100"/>
+          </a:xfrm>
+          <a:prstGeom xmlns:a="http://schemas.openxmlformats.org/drawingml/2006/main" prst="rect">
+            <a:avLst/>
+          </a:prstGeom>
+          <a:solidFill xmlns:a="http://schemas.openxmlformats.org/drawingml/2006/main">
+            <a:srgbClr val="5267D7"/>
+          </a:solidFill>
+          <a:ln xmlns:a="http://schemas.openxmlformats.org/drawingml/2006/main" w="0">
+            <a:noFill/>
+            <a:prstDash val="solid"/>
+          </a:ln>
+        </p:spPr>
+      </p:sp>
+      <p:sp>
+        <p:nvSpPr>
+          <p:cNvPr id="49" name="">
+            <a:extLst xmlns:a="http://schemas.openxmlformats.org/drawingml/2006/main">
+              <a:ext uri="{FF2B5EF4-FFF2-40B4-BE49-F238E27FC236}">
+                <a16:creationId xmlns:a16="http://schemas.microsoft.com/office/drawing/2014/main" id="{4D3CECF8-B2AD-4008-897C-A3B80F642CD6}"/>
+              </a:ext>
+            </a:extLst>
+          </p:cNvPr>
+          <p:cNvSpPr>
+            <a:spLocks xmlns:a="http://schemas.openxmlformats.org/drawingml/2006/main" noGrp="1"/>
+          </p:cNvSpPr>
+          <p:nvPr/>
+        </p:nvSpPr>
+        <p:spPr>
+          <a:xfrm xmlns:a="http://schemas.openxmlformats.org/drawingml/2006/main">
+            <a:off x="3676650" y="5581650"/>
+            <a:ext cx="171450" cy="171450"/>
+          </a:xfrm>
+          <a:prstGeom xmlns:a="http://schemas.openxmlformats.org/drawingml/2006/main" prst="chevron">
+            <a:avLst/>
+          </a:prstGeom>
+          <a:solidFill xmlns:a="http://schemas.openxmlformats.org/drawingml/2006/main">
+            <a:srgbClr val="5267D7"/>
+          </a:solidFill>
+          <a:ln xmlns:a="http://schemas.openxmlformats.org/drawingml/2006/main" w="0">
+            <a:noFill/>
+            <a:prstDash val="solid"/>
+          </a:ln>
+        </p:spPr>
+      </p:sp>
+      <p:sp>
+        <p:nvSpPr>
+          <p:cNvPr id="50" name="">
+            <a:extLst xmlns:a="http://schemas.openxmlformats.org/drawingml/2006/main">
+              <a:ext uri="{FF2B5EF4-FFF2-40B4-BE49-F238E27FC236}">
+                <a16:creationId xmlns:a16="http://schemas.microsoft.com/office/drawing/2014/main" id="{3B7DFBDC-BD77-4323-B084-B5F629DA6283}"/>
+              </a:ext>
+            </a:extLst>
+          </p:cNvPr>
+          <p:cNvSpPr>
+            <a:spLocks xmlns:a="http://schemas.openxmlformats.org/drawingml/2006/main" noGrp="1"/>
+          </p:cNvSpPr>
+          <p:nvPr/>
+        </p:nvSpPr>
+        <p:spPr>
+          <a:xfrm xmlns:a="http://schemas.openxmlformats.org/drawingml/2006/main">
+            <a:off x="3867150" y="5381625"/>
+            <a:ext cx="1657350" cy="552450"/>
           </a:xfrm>
           <a:prstGeom xmlns:a="http://schemas.openxmlformats.org/drawingml/2006/main" prst="roundRect">
             <a:avLst>
-              <a:gd name="adj" fmla="val 7547"/>
+              <a:gd name="adj" fmla="val 13793"/>
             </a:avLst>
           </a:prstGeom>
           <a:solidFill xmlns:a="http://schemas.openxmlformats.org/drawingml/2006/main">
@@ -17869,22 +20508,22 @@
       </p:sp>
       <p:sp>
         <p:nvSpPr>
-          <p:cNvPr id="11" name="">
-            <a:extLst xmlns:a="http://schemas.openxmlformats.org/drawingml/2006/main">
-              <a:ext uri="{FF2B5EF4-FFF2-40B4-BE49-F238E27FC236}">
-                <a16:creationId xmlns:a16="http://schemas.microsoft.com/office/drawing/2014/main" id="{F6CE2295-E5CA-4D00-8F83-7A5D1F0AE307}"/>
-              </a:ext>
-            </a:extLst>
-          </p:cNvPr>
-          <p:cNvSpPr>
-            <a:spLocks xmlns:a="http://schemas.openxmlformats.org/drawingml/2006/main" noGrp="1"/>
-          </p:cNvSpPr>
-          <p:nvPr/>
-        </p:nvSpPr>
-        <p:spPr>
-          <a:xfrm xmlns:a="http://schemas.openxmlformats.org/drawingml/2006/main">
-            <a:off x="971550" y="4171950"/>
-            <a:ext cx="2171700" cy="285750"/>
+          <p:cNvPr id="51" name="">
+            <a:extLst xmlns:a="http://schemas.openxmlformats.org/drawingml/2006/main">
+              <a:ext uri="{FF2B5EF4-FFF2-40B4-BE49-F238E27FC236}">
+                <a16:creationId xmlns:a16="http://schemas.microsoft.com/office/drawing/2014/main" id="{A74CD69A-9A50-4B82-AA1B-7291937211F3}"/>
+              </a:ext>
+            </a:extLst>
+          </p:cNvPr>
+          <p:cNvSpPr>
+            <a:spLocks xmlns:a="http://schemas.openxmlformats.org/drawingml/2006/main" noGrp="1"/>
+          </p:cNvSpPr>
+          <p:nvPr/>
+        </p:nvSpPr>
+        <p:spPr>
+          <a:xfrm xmlns:a="http://schemas.openxmlformats.org/drawingml/2006/main">
+            <a:off x="3981450" y="5495925"/>
+            <a:ext cx="1428750" cy="285750"/>
           </a:xfrm>
           <a:prstGeom xmlns:a="http://schemas.openxmlformats.org/drawingml/2006/main" prst="rect">
             <a:avLst/>
@@ -17931,29 +20570,29 @@
                 <a:ea typeface="Segoe UI"/>
                 <a:cs typeface="Segoe UI"/>
               </a:rPr>
-              <a:t>dim_customer</a:t>
-            </a:r>
-          </a:p>
-        </p:txBody>
-      </p:sp>
-      <p:sp>
-        <p:nvSpPr>
-          <p:cNvPr id="12" name="">
-            <a:extLst xmlns:a="http://schemas.openxmlformats.org/drawingml/2006/main">
-              <a:ext uri="{FF2B5EF4-FFF2-40B4-BE49-F238E27FC236}">
-                <a16:creationId xmlns:a16="http://schemas.microsoft.com/office/drawing/2014/main" id="{426E6A0C-DEB4-4E41-AF77-451FAACC2F2B}"/>
-              </a:ext>
-            </a:extLst>
-          </p:cNvPr>
-          <p:cNvSpPr>
-            <a:spLocks xmlns:a="http://schemas.openxmlformats.org/drawingml/2006/main" noGrp="1"/>
-          </p:cNvSpPr>
-          <p:nvPr/>
-        </p:nvSpPr>
-        <p:spPr>
-          <a:xfrm xmlns:a="http://schemas.openxmlformats.org/drawingml/2006/main">
-            <a:off x="952500" y="4495800"/>
-            <a:ext cx="2209800" cy="495300"/>
+              <a:t>stg_orders</a:t>
+            </a:r>
+          </a:p>
+        </p:txBody>
+      </p:sp>
+      <p:sp>
+        <p:nvSpPr>
+          <p:cNvPr id="52" name="">
+            <a:extLst xmlns:a="http://schemas.openxmlformats.org/drawingml/2006/main">
+              <a:ext uri="{FF2B5EF4-FFF2-40B4-BE49-F238E27FC236}">
+                <a16:creationId xmlns:a16="http://schemas.microsoft.com/office/drawing/2014/main" id="{427837F3-1976-4E29-A017-39B542A163DD}"/>
+              </a:ext>
+            </a:extLst>
+          </p:cNvPr>
+          <p:cNvSpPr>
+            <a:spLocks xmlns:a="http://schemas.openxmlformats.org/drawingml/2006/main" noGrp="1"/>
+          </p:cNvSpPr>
+          <p:nvPr/>
+        </p:nvSpPr>
+        <p:spPr>
+          <a:xfrm xmlns:a="http://schemas.openxmlformats.org/drawingml/2006/main">
+            <a:off x="3962400" y="5819775"/>
+            <a:ext cx="1466850" cy="38100"/>
           </a:xfrm>
           <a:prstGeom xmlns:a="http://schemas.openxmlformats.org/drawingml/2006/main" prst="rect">
             <a:avLst/>
@@ -17966,7 +20605,7 @@
         </p:spPr>
         <p:txBody>
           <a:bodyPr xmlns:a="http://schemas.openxmlformats.org/drawingml/2006/main" anchor="t">
-            <a:normAutofit fontScale="100000"/>
+            <a:normAutofit fontScale="10000"/>
           </a:bodyPr>
           <a:lstStyle xmlns:a="http://schemas.openxmlformats.org/drawingml/2006/main">
             <a:defPPr algn="ctr">
@@ -18000,60 +20639,99 @@
                 <a:ea typeface="Segoe UI"/>
                 <a:cs typeface="Segoe UI"/>
               </a:rPr>
-              <a:t>customer_key · customer_id</a:t>
-            </a:r>
-          </a:p>
-          <a:p xmlns:a="http://schemas.openxmlformats.org/drawingml/2006/main">
-            <a:pPr algn="ctr">
-              <a:defRPr sz="1200" b="0">
-                <a:solidFill>
-                  <a:srgbClr val="172033"/>
-                </a:solidFill>
-                <a:latin typeface="Segoe UI"/>
-                <a:ea typeface="Segoe UI"/>
-                <a:cs typeface="Segoe UI"/>
-              </a:defRPr>
-            </a:pPr>
-            <a:r>
-              <a:rPr sz="1200" b="0">
-                <a:solidFill>
-                  <a:srgbClr val="172033"/>
-                </a:solidFill>
-                <a:latin typeface="Segoe UI"/>
-                <a:ea typeface="Segoe UI"/>
-                <a:cs typeface="Segoe UI"/>
-              </a:rPr>
-              <a:t>segment · region</a:t>
-            </a:r>
-          </a:p>
-        </p:txBody>
-      </p:sp>
-      <p:sp>
-        <p:nvSpPr>
-          <p:cNvPr id="13" name="">
-            <a:extLst xmlns:a="http://schemas.openxmlformats.org/drawingml/2006/main">
-              <a:ext uri="{FF2B5EF4-FFF2-40B4-BE49-F238E27FC236}">
-                <a16:creationId xmlns:a16="http://schemas.microsoft.com/office/drawing/2014/main" id="{CC429A33-E79E-461E-A869-6DC624A21655}"/>
-              </a:ext>
-            </a:extLst>
-          </p:cNvPr>
-          <p:cNvSpPr>
-            <a:spLocks xmlns:a="http://schemas.openxmlformats.org/drawingml/2006/main" noGrp="1"/>
-          </p:cNvSpPr>
-          <p:nvPr/>
-        </p:nvSpPr>
-        <p:spPr>
-          <a:xfrm xmlns:a="http://schemas.openxmlformats.org/drawingml/2006/main">
-            <a:off x="4038600" y="2647950"/>
-            <a:ext cx="3105150" cy="1428750"/>
+              <a:t>typed + deduped</a:t>
+            </a:r>
+          </a:p>
+        </p:txBody>
+      </p:sp>
+      <p:sp>
+        <p:nvSpPr>
+          <p:cNvPr id="53" name="">
+            <a:extLst xmlns:a="http://schemas.openxmlformats.org/drawingml/2006/main">
+              <a:ext uri="{FF2B5EF4-FFF2-40B4-BE49-F238E27FC236}">
+                <a16:creationId xmlns:a16="http://schemas.microsoft.com/office/drawing/2014/main" id="{CC63682F-5AB0-40DD-88FF-03346D326F46}"/>
+              </a:ext>
+            </a:extLst>
+          </p:cNvPr>
+          <p:cNvSpPr>
+            <a:spLocks xmlns:a="http://schemas.openxmlformats.org/drawingml/2006/main" noGrp="1"/>
+          </p:cNvSpPr>
+          <p:nvPr/>
+        </p:nvSpPr>
+        <p:spPr>
+          <a:xfrm xmlns:a="http://schemas.openxmlformats.org/drawingml/2006/main">
+            <a:off x="5543550" y="5648325"/>
+            <a:ext cx="342900" cy="38100"/>
+          </a:xfrm>
+          <a:prstGeom xmlns:a="http://schemas.openxmlformats.org/drawingml/2006/main" prst="rect">
+            <a:avLst/>
+          </a:prstGeom>
+          <a:solidFill xmlns:a="http://schemas.openxmlformats.org/drawingml/2006/main">
+            <a:srgbClr val="16B8A6"/>
+          </a:solidFill>
+          <a:ln xmlns:a="http://schemas.openxmlformats.org/drawingml/2006/main" w="0">
+            <a:noFill/>
+            <a:prstDash val="solid"/>
+          </a:ln>
+        </p:spPr>
+      </p:sp>
+      <p:sp>
+        <p:nvSpPr>
+          <p:cNvPr id="54" name="">
+            <a:extLst xmlns:a="http://schemas.openxmlformats.org/drawingml/2006/main">
+              <a:ext uri="{FF2B5EF4-FFF2-40B4-BE49-F238E27FC236}">
+                <a16:creationId xmlns:a16="http://schemas.microsoft.com/office/drawing/2014/main" id="{2C22F205-8584-4D0C-AE32-9AC4FB0DED7F}"/>
+              </a:ext>
+            </a:extLst>
+          </p:cNvPr>
+          <p:cNvSpPr>
+            <a:spLocks xmlns:a="http://schemas.openxmlformats.org/drawingml/2006/main" noGrp="1"/>
+          </p:cNvSpPr>
+          <p:nvPr/>
+        </p:nvSpPr>
+        <p:spPr>
+          <a:xfrm xmlns:a="http://schemas.openxmlformats.org/drawingml/2006/main">
+            <a:off x="5867400" y="5581650"/>
+            <a:ext cx="171450" cy="171450"/>
+          </a:xfrm>
+          <a:prstGeom xmlns:a="http://schemas.openxmlformats.org/drawingml/2006/main" prst="chevron">
+            <a:avLst/>
+          </a:prstGeom>
+          <a:solidFill xmlns:a="http://schemas.openxmlformats.org/drawingml/2006/main">
+            <a:srgbClr val="16B8A6"/>
+          </a:solidFill>
+          <a:ln xmlns:a="http://schemas.openxmlformats.org/drawingml/2006/main" w="0">
+            <a:noFill/>
+            <a:prstDash val="solid"/>
+          </a:ln>
+        </p:spPr>
+      </p:sp>
+      <p:sp>
+        <p:nvSpPr>
+          <p:cNvPr id="55" name="">
+            <a:extLst xmlns:a="http://schemas.openxmlformats.org/drawingml/2006/main">
+              <a:ext uri="{FF2B5EF4-FFF2-40B4-BE49-F238E27FC236}">
+                <a16:creationId xmlns:a16="http://schemas.microsoft.com/office/drawing/2014/main" id="{C337BB84-CEA6-4F06-B2CD-88D320E68DD4}"/>
+              </a:ext>
+            </a:extLst>
+          </p:cNvPr>
+          <p:cNvSpPr>
+            <a:spLocks xmlns:a="http://schemas.openxmlformats.org/drawingml/2006/main" noGrp="1"/>
+          </p:cNvSpPr>
+          <p:nvPr/>
+        </p:nvSpPr>
+        <p:spPr>
+          <a:xfrm xmlns:a="http://schemas.openxmlformats.org/drawingml/2006/main">
+            <a:off x="6057900" y="5381625"/>
+            <a:ext cx="1657350" cy="552450"/>
           </a:xfrm>
           <a:prstGeom xmlns:a="http://schemas.openxmlformats.org/drawingml/2006/main" prst="roundRect">
             <a:avLst>
-              <a:gd name="adj" fmla="val 5333"/>
+              <a:gd name="adj" fmla="val 13793"/>
             </a:avLst>
           </a:prstGeom>
           <a:solidFill xmlns:a="http://schemas.openxmlformats.org/drawingml/2006/main">
-            <a:srgbClr val="101C33"/>
+            <a:srgbClr val="FFF0DB"/>
           </a:solidFill>
           <a:ln xmlns:a="http://schemas.openxmlformats.org/drawingml/2006/main" w="0">
             <a:noFill/>
@@ -18063,22 +20741,22 @@
       </p:sp>
       <p:sp>
         <p:nvSpPr>
-          <p:cNvPr id="14" name="">
-            <a:extLst xmlns:a="http://schemas.openxmlformats.org/drawingml/2006/main">
-              <a:ext uri="{FF2B5EF4-FFF2-40B4-BE49-F238E27FC236}">
-                <a16:creationId xmlns:a16="http://schemas.microsoft.com/office/drawing/2014/main" id="{A9E73736-630B-4CBA-9056-B2DA8044B78C}"/>
-              </a:ext>
-            </a:extLst>
-          </p:cNvPr>
-          <p:cNvSpPr>
-            <a:spLocks xmlns:a="http://schemas.openxmlformats.org/drawingml/2006/main" noGrp="1"/>
-          </p:cNvSpPr>
-          <p:nvPr/>
-        </p:nvSpPr>
-        <p:spPr>
-          <a:xfrm xmlns:a="http://schemas.openxmlformats.org/drawingml/2006/main">
-            <a:off x="4152900" y="2762250"/>
-            <a:ext cx="2876550" cy="285750"/>
+          <p:cNvPr id="56" name="">
+            <a:extLst xmlns:a="http://schemas.openxmlformats.org/drawingml/2006/main">
+              <a:ext uri="{FF2B5EF4-FFF2-40B4-BE49-F238E27FC236}">
+                <a16:creationId xmlns:a16="http://schemas.microsoft.com/office/drawing/2014/main" id="{E3E7C39A-9DD9-42AC-A314-2F705C17A06C}"/>
+              </a:ext>
+            </a:extLst>
+          </p:cNvPr>
+          <p:cNvSpPr>
+            <a:spLocks xmlns:a="http://schemas.openxmlformats.org/drawingml/2006/main" noGrp="1"/>
+          </p:cNvSpPr>
+          <p:nvPr/>
+        </p:nvSpPr>
+        <p:spPr>
+          <a:xfrm xmlns:a="http://schemas.openxmlformats.org/drawingml/2006/main">
+            <a:off x="6172200" y="5495925"/>
+            <a:ext cx="1428750" cy="285750"/>
           </a:xfrm>
           <a:prstGeom xmlns:a="http://schemas.openxmlformats.org/drawingml/2006/main" prst="rect">
             <a:avLst/>
@@ -18097,7 +20775,7 @@
             <a:defPPr algn="ctr">
               <a:defRPr sz="1575" b="1">
                 <a:solidFill>
-                  <a:srgbClr val="FFFFFF"/>
+                  <a:srgbClr val="172033"/>
                 </a:solidFill>
                 <a:latin typeface="Segoe UI"/>
                 <a:ea typeface="Segoe UI"/>
@@ -18109,7 +20787,7 @@
             <a:pPr algn="ctr">
               <a:defRPr sz="1575" b="1">
                 <a:solidFill>
-                  <a:srgbClr val="FFFFFF"/>
+                  <a:srgbClr val="172033"/>
                 </a:solidFill>
                 <a:latin typeface="Segoe UI"/>
                 <a:ea typeface="Segoe UI"/>
@@ -18119,35 +20797,35 @@
             <a:r>
               <a:rPr sz="1575" b="1">
                 <a:solidFill>
-                  <a:srgbClr val="FFFFFF"/>
-                </a:solidFill>
-                <a:latin typeface="Segoe UI"/>
-                <a:ea typeface="Segoe UI"/>
-                <a:cs typeface="Segoe UI"/>
-              </a:rPr>
-              <a:t>fact_sales</a:t>
-            </a:r>
-          </a:p>
-        </p:txBody>
-      </p:sp>
-      <p:sp>
-        <p:nvSpPr>
-          <p:cNvPr id="15" name="">
-            <a:extLst xmlns:a="http://schemas.openxmlformats.org/drawingml/2006/main">
-              <a:ext uri="{FF2B5EF4-FFF2-40B4-BE49-F238E27FC236}">
-                <a16:creationId xmlns:a16="http://schemas.microsoft.com/office/drawing/2014/main" id="{E5D94701-70C6-4F34-90E3-E0D065C47586}"/>
-              </a:ext>
-            </a:extLst>
-          </p:cNvPr>
-          <p:cNvSpPr>
-            <a:spLocks xmlns:a="http://schemas.openxmlformats.org/drawingml/2006/main" noGrp="1"/>
-          </p:cNvSpPr>
-          <p:nvPr/>
-        </p:nvSpPr>
-        <p:spPr>
-          <a:xfrm xmlns:a="http://schemas.openxmlformats.org/drawingml/2006/main">
-            <a:off x="4133850" y="3086100"/>
-            <a:ext cx="2914650" cy="914400"/>
+                  <a:srgbClr val="172033"/>
+                </a:solidFill>
+                <a:latin typeface="Segoe UI"/>
+                <a:ea typeface="Segoe UI"/>
+                <a:cs typeface="Segoe UI"/>
+              </a:rPr>
+              <a:t>dimensions</a:t>
+            </a:r>
+          </a:p>
+        </p:txBody>
+      </p:sp>
+      <p:sp>
+        <p:nvSpPr>
+          <p:cNvPr id="57" name="">
+            <a:extLst xmlns:a="http://schemas.openxmlformats.org/drawingml/2006/main">
+              <a:ext uri="{FF2B5EF4-FFF2-40B4-BE49-F238E27FC236}">
+                <a16:creationId xmlns:a16="http://schemas.microsoft.com/office/drawing/2014/main" id="{099E2E17-0C4D-4ADF-B2A8-8A7DFD516775}"/>
+              </a:ext>
+            </a:extLst>
+          </p:cNvPr>
+          <p:cNvSpPr>
+            <a:spLocks xmlns:a="http://schemas.openxmlformats.org/drawingml/2006/main" noGrp="1"/>
+          </p:cNvSpPr>
+          <p:nvPr/>
+        </p:nvSpPr>
+        <p:spPr>
+          <a:xfrm xmlns:a="http://schemas.openxmlformats.org/drawingml/2006/main">
+            <a:off x="6153150" y="5819775"/>
+            <a:ext cx="1466850" cy="38100"/>
           </a:xfrm>
           <a:prstGeom xmlns:a="http://schemas.openxmlformats.org/drawingml/2006/main" prst="rect">
             <a:avLst/>
@@ -18160,13 +20838,13 @@
         </p:spPr>
         <p:txBody>
           <a:bodyPr xmlns:a="http://schemas.openxmlformats.org/drawingml/2006/main" anchor="t">
-            <a:normAutofit fontScale="100000"/>
+            <a:normAutofit fontScale="10000"/>
           </a:bodyPr>
           <a:lstStyle xmlns:a="http://schemas.openxmlformats.org/drawingml/2006/main">
             <a:defPPr algn="ctr">
               <a:defRPr sz="1200" b="0">
                 <a:solidFill>
-                  <a:srgbClr val="FFFFFF"/>
+                  <a:srgbClr val="172033"/>
                 </a:solidFill>
                 <a:latin typeface="Segoe UI"/>
                 <a:ea typeface="Segoe UI"/>
@@ -18178,7 +20856,7 @@
             <a:pPr algn="ctr">
               <a:defRPr sz="1200" b="0">
                 <a:solidFill>
-                  <a:srgbClr val="FFFFFF"/>
+                  <a:srgbClr val="172033"/>
                 </a:solidFill>
                 <a:latin typeface="Segoe UI"/>
                 <a:ea typeface="Segoe UI"/>
@@ -18188,89 +20866,105 @@
             <a:r>
               <a:rPr sz="1200" b="0">
                 <a:solidFill>
-                  <a:srgbClr val="FFFFFF"/>
-                </a:solidFill>
-                <a:latin typeface="Segoe UI"/>
-                <a:ea typeface="Segoe UI"/>
-                <a:cs typeface="Segoe UI"/>
-              </a:rPr>
-              <a:t>one row per order line</a:t>
-            </a:r>
-          </a:p>
-          <a:p xmlns:a="http://schemas.openxmlformats.org/drawingml/2006/main">
-            <a:pPr algn="ctr">
-              <a:defRPr sz="1200" b="0">
-                <a:solidFill>
-                  <a:srgbClr val="FFFFFF"/>
-                </a:solidFill>
-                <a:latin typeface="Segoe UI"/>
-                <a:ea typeface="Segoe UI"/>
-                <a:cs typeface="Segoe UI"/>
-              </a:defRPr>
-            </a:pPr>
-            <a:r>
-              <a:rPr sz="1200" b="0">
-                <a:solidFill>
-                  <a:srgbClr val="FFFFFF"/>
-                </a:solidFill>
-                <a:latin typeface="Segoe UI"/>
-                <a:ea typeface="Segoe UI"/>
-                <a:cs typeface="Segoe UI"/>
-              </a:rPr>
-              <a:t>248,555 clean rows</a:t>
-            </a:r>
-          </a:p>
-          <a:p xmlns:a="http://schemas.openxmlformats.org/drawingml/2006/main">
-            <a:pPr algn="ctr">
-              <a:defRPr sz="1200" b="0">
-                <a:solidFill>
-                  <a:srgbClr val="FFFFFF"/>
-                </a:solidFill>
-                <a:latin typeface="Segoe UI"/>
-                <a:ea typeface="Segoe UI"/>
-                <a:cs typeface="Segoe UI"/>
-              </a:defRPr>
-            </a:pPr>
-            <a:r>
-              <a:rPr sz="1200" b="0">
-                <a:solidFill>
-                  <a:srgbClr val="FFFFFF"/>
-                </a:solidFill>
-                <a:latin typeface="Segoe UI"/>
-                <a:ea typeface="Segoe UI"/>
-                <a:cs typeface="Segoe UI"/>
-              </a:rPr>
-              <a:t>FKs + measures + status</a:t>
-            </a:r>
-          </a:p>
-        </p:txBody>
-      </p:sp>
-      <p:sp>
-        <p:nvSpPr>
-          <p:cNvPr id="16" name="">
-            <a:extLst xmlns:a="http://schemas.openxmlformats.org/drawingml/2006/main">
-              <a:ext uri="{FF2B5EF4-FFF2-40B4-BE49-F238E27FC236}">
-                <a16:creationId xmlns:a16="http://schemas.microsoft.com/office/drawing/2014/main" id="{D0319B4E-D081-4A4E-B15C-8E291896F665}"/>
-              </a:ext>
-            </a:extLst>
-          </p:cNvPr>
-          <p:cNvSpPr>
-            <a:spLocks xmlns:a="http://schemas.openxmlformats.org/drawingml/2006/main" noGrp="1"/>
-          </p:cNvSpPr>
-          <p:nvPr/>
-        </p:nvSpPr>
-        <p:spPr>
-          <a:xfrm xmlns:a="http://schemas.openxmlformats.org/drawingml/2006/main">
-            <a:off x="7962900" y="1714500"/>
-            <a:ext cx="2667000" cy="1009650"/>
+                  <a:srgbClr val="172033"/>
+                </a:solidFill>
+                <a:latin typeface="Segoe UI"/>
+                <a:ea typeface="Segoe UI"/>
+                <a:cs typeface="Segoe UI"/>
+              </a:rPr>
+              <a:t>surrogate keys</a:t>
+            </a:r>
+          </a:p>
+        </p:txBody>
+      </p:sp>
+      <p:sp>
+        <p:nvSpPr>
+          <p:cNvPr id="58" name="">
+            <a:extLst xmlns:a="http://schemas.openxmlformats.org/drawingml/2006/main">
+              <a:ext uri="{FF2B5EF4-FFF2-40B4-BE49-F238E27FC236}">
+                <a16:creationId xmlns:a16="http://schemas.microsoft.com/office/drawing/2014/main" id="{A22B01B0-989A-414E-B728-B6CBC165BCE8}"/>
+              </a:ext>
+            </a:extLst>
+          </p:cNvPr>
+          <p:cNvSpPr>
+            <a:spLocks xmlns:a="http://schemas.openxmlformats.org/drawingml/2006/main" noGrp="1"/>
+          </p:cNvSpPr>
+          <p:nvPr/>
+        </p:nvSpPr>
+        <p:spPr>
+          <a:xfrm xmlns:a="http://schemas.openxmlformats.org/drawingml/2006/main">
+            <a:off x="7734300" y="5648325"/>
+            <a:ext cx="342900" cy="38100"/>
+          </a:xfrm>
+          <a:prstGeom xmlns:a="http://schemas.openxmlformats.org/drawingml/2006/main" prst="rect">
+            <a:avLst/>
+          </a:prstGeom>
+          <a:solidFill xmlns:a="http://schemas.openxmlformats.org/drawingml/2006/main">
+            <a:srgbClr val="F2A03D"/>
+          </a:solidFill>
+          <a:ln xmlns:a="http://schemas.openxmlformats.org/drawingml/2006/main" w="0">
+            <a:noFill/>
+            <a:prstDash val="solid"/>
+          </a:ln>
+        </p:spPr>
+      </p:sp>
+      <p:sp>
+        <p:nvSpPr>
+          <p:cNvPr id="59" name="">
+            <a:extLst xmlns:a="http://schemas.openxmlformats.org/drawingml/2006/main">
+              <a:ext uri="{FF2B5EF4-FFF2-40B4-BE49-F238E27FC236}">
+                <a16:creationId xmlns:a16="http://schemas.microsoft.com/office/drawing/2014/main" id="{D10B3E40-B99B-4B1D-9140-3288CBD42864}"/>
+              </a:ext>
+            </a:extLst>
+          </p:cNvPr>
+          <p:cNvSpPr>
+            <a:spLocks xmlns:a="http://schemas.openxmlformats.org/drawingml/2006/main" noGrp="1"/>
+          </p:cNvSpPr>
+          <p:nvPr/>
+        </p:nvSpPr>
+        <p:spPr>
+          <a:xfrm xmlns:a="http://schemas.openxmlformats.org/drawingml/2006/main">
+            <a:off x="8058150" y="5581650"/>
+            <a:ext cx="171450" cy="171450"/>
+          </a:xfrm>
+          <a:prstGeom xmlns:a="http://schemas.openxmlformats.org/drawingml/2006/main" prst="chevron">
+            <a:avLst/>
+          </a:prstGeom>
+          <a:solidFill xmlns:a="http://schemas.openxmlformats.org/drawingml/2006/main">
+            <a:srgbClr val="F2A03D"/>
+          </a:solidFill>
+          <a:ln xmlns:a="http://schemas.openxmlformats.org/drawingml/2006/main" w="0">
+            <a:noFill/>
+            <a:prstDash val="solid"/>
+          </a:ln>
+        </p:spPr>
+      </p:sp>
+      <p:sp>
+        <p:nvSpPr>
+          <p:cNvPr id="60" name="">
+            <a:extLst xmlns:a="http://schemas.openxmlformats.org/drawingml/2006/main">
+              <a:ext uri="{FF2B5EF4-FFF2-40B4-BE49-F238E27FC236}">
+                <a16:creationId xmlns:a16="http://schemas.microsoft.com/office/drawing/2014/main" id="{B71C56D5-4929-43ED-A764-B906EDFF290E}"/>
+              </a:ext>
+            </a:extLst>
+          </p:cNvPr>
+          <p:cNvSpPr>
+            <a:spLocks xmlns:a="http://schemas.openxmlformats.org/drawingml/2006/main" noGrp="1"/>
+          </p:cNvSpPr>
+          <p:nvPr/>
+        </p:nvSpPr>
+        <p:spPr>
+          <a:xfrm xmlns:a="http://schemas.openxmlformats.org/drawingml/2006/main">
+            <a:off x="8248650" y="5381625"/>
+            <a:ext cx="1524000" cy="552450"/>
           </a:xfrm>
           <a:prstGeom xmlns:a="http://schemas.openxmlformats.org/drawingml/2006/main" prst="roundRect">
             <a:avLst>
-              <a:gd name="adj" fmla="val 7547"/>
+              <a:gd name="adj" fmla="val 13793"/>
             </a:avLst>
           </a:prstGeom>
           <a:solidFill xmlns:a="http://schemas.openxmlformats.org/drawingml/2006/main">
-            <a:srgbClr val="FFF0DB"/>
+            <a:srgbClr val="101C33"/>
           </a:solidFill>
           <a:ln xmlns:a="http://schemas.openxmlformats.org/drawingml/2006/main" w="0">
             <a:noFill/>
@@ -18280,22 +20974,22 @@
       </p:sp>
       <p:sp>
         <p:nvSpPr>
-          <p:cNvPr id="17" name="">
-            <a:extLst xmlns:a="http://schemas.openxmlformats.org/drawingml/2006/main">
-              <a:ext uri="{FF2B5EF4-FFF2-40B4-BE49-F238E27FC236}">
-                <a16:creationId xmlns:a16="http://schemas.microsoft.com/office/drawing/2014/main" id="{AE182365-41EE-4909-9540-EDC201EB8DD6}"/>
-              </a:ext>
-            </a:extLst>
-          </p:cNvPr>
-          <p:cNvSpPr>
-            <a:spLocks xmlns:a="http://schemas.openxmlformats.org/drawingml/2006/main" noGrp="1"/>
-          </p:cNvSpPr>
-          <p:nvPr/>
-        </p:nvSpPr>
-        <p:spPr>
-          <a:xfrm xmlns:a="http://schemas.openxmlformats.org/drawingml/2006/main">
-            <a:off x="8077200" y="1828800"/>
-            <a:ext cx="2438400" cy="285750"/>
+          <p:cNvPr id="61" name="">
+            <a:extLst xmlns:a="http://schemas.openxmlformats.org/drawingml/2006/main">
+              <a:ext uri="{FF2B5EF4-FFF2-40B4-BE49-F238E27FC236}">
+                <a16:creationId xmlns:a16="http://schemas.microsoft.com/office/drawing/2014/main" id="{A3997A9F-4AAB-479C-9E29-3C182225F895}"/>
+              </a:ext>
+            </a:extLst>
+          </p:cNvPr>
+          <p:cNvSpPr>
+            <a:spLocks xmlns:a="http://schemas.openxmlformats.org/drawingml/2006/main" noGrp="1"/>
+          </p:cNvSpPr>
+          <p:nvPr/>
+        </p:nvSpPr>
+        <p:spPr>
+          <a:xfrm xmlns:a="http://schemas.openxmlformats.org/drawingml/2006/main">
+            <a:off x="8362950" y="5495925"/>
+            <a:ext cx="1295400" cy="285750"/>
           </a:xfrm>
           <a:prstGeom xmlns:a="http://schemas.openxmlformats.org/drawingml/2006/main" prst="rect">
             <a:avLst/>
@@ -18314,7 +21008,7 @@
             <a:defPPr algn="ctr">
               <a:defRPr sz="1575" b="1">
                 <a:solidFill>
-                  <a:srgbClr val="172033"/>
+                  <a:srgbClr val="FFFFFF"/>
                 </a:solidFill>
                 <a:latin typeface="Segoe UI"/>
                 <a:ea typeface="Segoe UI"/>
@@ -18326,7 +21020,7 @@
             <a:pPr algn="ctr">
               <a:defRPr sz="1575" b="1">
                 <a:solidFill>
-                  <a:srgbClr val="172033"/>
+                  <a:srgbClr val="FFFFFF"/>
                 </a:solidFill>
                 <a:latin typeface="Segoe UI"/>
                 <a:ea typeface="Segoe UI"/>
@@ -18336,35 +21030,35 @@
             <a:r>
               <a:rPr sz="1575" b="1">
                 <a:solidFill>
-                  <a:srgbClr val="172033"/>
-                </a:solidFill>
-                <a:latin typeface="Segoe UI"/>
-                <a:ea typeface="Segoe UI"/>
-                <a:cs typeface="Segoe UI"/>
-              </a:rPr>
-              <a:t>dim_product</a:t>
-            </a:r>
-          </a:p>
-        </p:txBody>
-      </p:sp>
-      <p:sp>
-        <p:nvSpPr>
-          <p:cNvPr id="18" name="">
-            <a:extLst xmlns:a="http://schemas.openxmlformats.org/drawingml/2006/main">
-              <a:ext uri="{FF2B5EF4-FFF2-40B4-BE49-F238E27FC236}">
-                <a16:creationId xmlns:a16="http://schemas.microsoft.com/office/drawing/2014/main" id="{DE144B93-BBF4-4FCA-90EC-92EFFBB76448}"/>
-              </a:ext>
-            </a:extLst>
-          </p:cNvPr>
-          <p:cNvSpPr>
-            <a:spLocks xmlns:a="http://schemas.openxmlformats.org/drawingml/2006/main" noGrp="1"/>
-          </p:cNvSpPr>
-          <p:nvPr/>
-        </p:nvSpPr>
-        <p:spPr>
-          <a:xfrm xmlns:a="http://schemas.openxmlformats.org/drawingml/2006/main">
-            <a:off x="8058150" y="2152650"/>
-            <a:ext cx="2476500" cy="495300"/>
+                  <a:srgbClr val="FFFFFF"/>
+                </a:solidFill>
+                <a:latin typeface="Segoe UI"/>
+                <a:ea typeface="Segoe UI"/>
+                <a:cs typeface="Segoe UI"/>
+              </a:rPr>
+              <a:t>fact_sales</a:t>
+            </a:r>
+          </a:p>
+        </p:txBody>
+      </p:sp>
+      <p:sp>
+        <p:nvSpPr>
+          <p:cNvPr id="62" name="">
+            <a:extLst xmlns:a="http://schemas.openxmlformats.org/drawingml/2006/main">
+              <a:ext uri="{FF2B5EF4-FFF2-40B4-BE49-F238E27FC236}">
+                <a16:creationId xmlns:a16="http://schemas.microsoft.com/office/drawing/2014/main" id="{3B282AA0-A15F-4F1E-AC3A-6F2CD053BC3E}"/>
+              </a:ext>
+            </a:extLst>
+          </p:cNvPr>
+          <p:cNvSpPr>
+            <a:spLocks xmlns:a="http://schemas.openxmlformats.org/drawingml/2006/main" noGrp="1"/>
+          </p:cNvSpPr>
+          <p:nvPr/>
+        </p:nvSpPr>
+        <p:spPr>
+          <a:xfrm xmlns:a="http://schemas.openxmlformats.org/drawingml/2006/main">
+            <a:off x="8343900" y="5819775"/>
+            <a:ext cx="1333500" cy="38100"/>
           </a:xfrm>
           <a:prstGeom xmlns:a="http://schemas.openxmlformats.org/drawingml/2006/main" prst="rect">
             <a:avLst/>
@@ -18377,13 +21071,13 @@
         </p:spPr>
         <p:txBody>
           <a:bodyPr xmlns:a="http://schemas.openxmlformats.org/drawingml/2006/main" anchor="t">
-            <a:normAutofit fontScale="100000"/>
+            <a:normAutofit fontScale="10000"/>
           </a:bodyPr>
           <a:lstStyle xmlns:a="http://schemas.openxmlformats.org/drawingml/2006/main">
             <a:defPPr algn="ctr">
               <a:defRPr sz="1200" b="0">
                 <a:solidFill>
-                  <a:srgbClr val="172033"/>
+                  <a:srgbClr val="FFFFFF"/>
                 </a:solidFill>
                 <a:latin typeface="Segoe UI"/>
                 <a:ea typeface="Segoe UI"/>
@@ -18395,7 +21089,7 @@
             <a:pPr algn="ctr">
               <a:defRPr sz="1200" b="0">
                 <a:solidFill>
-                  <a:srgbClr val="172033"/>
+                  <a:srgbClr val="FFFFFF"/>
                 </a:solidFill>
                 <a:latin typeface="Segoe UI"/>
                 <a:ea typeface="Segoe UI"/>
@@ -18405,66 +21099,105 @@
             <a:r>
               <a:rPr sz="1200" b="0">
                 <a:solidFill>
-                  <a:srgbClr val="172033"/>
-                </a:solidFill>
-                <a:latin typeface="Segoe UI"/>
-                <a:ea typeface="Segoe UI"/>
-                <a:cs typeface="Segoe UI"/>
-              </a:rPr>
-              <a:t>product_key · product_id</a:t>
-            </a:r>
-          </a:p>
-          <a:p xmlns:a="http://schemas.openxmlformats.org/drawingml/2006/main">
-            <a:pPr algn="ctr">
-              <a:defRPr sz="1200" b="0">
-                <a:solidFill>
-                  <a:srgbClr val="172033"/>
-                </a:solidFill>
-                <a:latin typeface="Segoe UI"/>
-                <a:ea typeface="Segoe UI"/>
-                <a:cs typeface="Segoe UI"/>
-              </a:defRPr>
-            </a:pPr>
-            <a:r>
-              <a:rPr sz="1200" b="0">
-                <a:solidFill>
-                  <a:srgbClr val="172033"/>
-                </a:solidFill>
-                <a:latin typeface="Segoe UI"/>
-                <a:ea typeface="Segoe UI"/>
-                <a:cs typeface="Segoe UI"/>
-              </a:rPr>
-              <a:t>product_name · category</a:t>
-            </a:r>
-          </a:p>
-        </p:txBody>
-      </p:sp>
-      <p:sp>
-        <p:nvSpPr>
-          <p:cNvPr id="19" name="">
-            <a:extLst xmlns:a="http://schemas.openxmlformats.org/drawingml/2006/main">
-              <a:ext uri="{FF2B5EF4-FFF2-40B4-BE49-F238E27FC236}">
-                <a16:creationId xmlns:a16="http://schemas.microsoft.com/office/drawing/2014/main" id="{8DBD368A-93FC-4F1D-A7AF-8BA3E6B31C04}"/>
-              </a:ext>
-            </a:extLst>
-          </p:cNvPr>
-          <p:cNvSpPr>
-            <a:spLocks xmlns:a="http://schemas.openxmlformats.org/drawingml/2006/main" noGrp="1"/>
-          </p:cNvSpPr>
-          <p:nvPr/>
-        </p:nvSpPr>
-        <p:spPr>
-          <a:xfrm xmlns:a="http://schemas.openxmlformats.org/drawingml/2006/main">
-            <a:off x="7962900" y="4057650"/>
-            <a:ext cx="2667000" cy="1009650"/>
+                  <a:srgbClr val="FFFFFF"/>
+                </a:solidFill>
+                <a:latin typeface="Segoe UI"/>
+                <a:ea typeface="Segoe UI"/>
+                <a:cs typeface="Segoe UI"/>
+              </a:rPr>
+              <a:t>clean metrics</a:t>
+            </a:r>
+          </a:p>
+        </p:txBody>
+      </p:sp>
+      <p:sp>
+        <p:nvSpPr>
+          <p:cNvPr id="63" name="">
+            <a:extLst xmlns:a="http://schemas.openxmlformats.org/drawingml/2006/main">
+              <a:ext uri="{FF2B5EF4-FFF2-40B4-BE49-F238E27FC236}">
+                <a16:creationId xmlns:a16="http://schemas.microsoft.com/office/drawing/2014/main" id="{F110EDDE-F10D-4BD8-894F-5B3B1E986069}"/>
+              </a:ext>
+            </a:extLst>
+          </p:cNvPr>
+          <p:cNvSpPr>
+            <a:spLocks xmlns:a="http://schemas.openxmlformats.org/drawingml/2006/main" noGrp="1"/>
+          </p:cNvSpPr>
+          <p:nvPr/>
+        </p:nvSpPr>
+        <p:spPr>
+          <a:xfrm xmlns:a="http://schemas.openxmlformats.org/drawingml/2006/main">
+            <a:off x="9791700" y="5648325"/>
+            <a:ext cx="342900" cy="38100"/>
+          </a:xfrm>
+          <a:prstGeom xmlns:a="http://schemas.openxmlformats.org/drawingml/2006/main" prst="rect">
+            <a:avLst/>
+          </a:prstGeom>
+          <a:solidFill xmlns:a="http://schemas.openxmlformats.org/drawingml/2006/main">
+            <a:srgbClr val="5267D7"/>
+          </a:solidFill>
+          <a:ln xmlns:a="http://schemas.openxmlformats.org/drawingml/2006/main" w="0">
+            <a:noFill/>
+            <a:prstDash val="solid"/>
+          </a:ln>
+        </p:spPr>
+      </p:sp>
+      <p:sp>
+        <p:nvSpPr>
+          <p:cNvPr id="64" name="">
+            <a:extLst xmlns:a="http://schemas.openxmlformats.org/drawingml/2006/main">
+              <a:ext uri="{FF2B5EF4-FFF2-40B4-BE49-F238E27FC236}">
+                <a16:creationId xmlns:a16="http://schemas.microsoft.com/office/drawing/2014/main" id="{36282E9D-5C30-412C-AAD7-69342B0AE82E}"/>
+              </a:ext>
+            </a:extLst>
+          </p:cNvPr>
+          <p:cNvSpPr>
+            <a:spLocks xmlns:a="http://schemas.openxmlformats.org/drawingml/2006/main" noGrp="1"/>
+          </p:cNvSpPr>
+          <p:nvPr/>
+        </p:nvSpPr>
+        <p:spPr>
+          <a:xfrm xmlns:a="http://schemas.openxmlformats.org/drawingml/2006/main">
+            <a:off x="10115550" y="5581650"/>
+            <a:ext cx="171450" cy="171450"/>
+          </a:xfrm>
+          <a:prstGeom xmlns:a="http://schemas.openxmlformats.org/drawingml/2006/main" prst="chevron">
+            <a:avLst/>
+          </a:prstGeom>
+          <a:solidFill xmlns:a="http://schemas.openxmlformats.org/drawingml/2006/main">
+            <a:srgbClr val="5267D7"/>
+          </a:solidFill>
+          <a:ln xmlns:a="http://schemas.openxmlformats.org/drawingml/2006/main" w="0">
+            <a:noFill/>
+            <a:prstDash val="solid"/>
+          </a:ln>
+        </p:spPr>
+      </p:sp>
+      <p:sp>
+        <p:nvSpPr>
+          <p:cNvPr id="65" name="">
+            <a:extLst xmlns:a="http://schemas.openxmlformats.org/drawingml/2006/main">
+              <a:ext uri="{FF2B5EF4-FFF2-40B4-BE49-F238E27FC236}">
+                <a16:creationId xmlns:a16="http://schemas.microsoft.com/office/drawing/2014/main" id="{3426D507-0E49-491E-81B3-F22E616D6ED1}"/>
+              </a:ext>
+            </a:extLst>
+          </p:cNvPr>
+          <p:cNvSpPr>
+            <a:spLocks xmlns:a="http://schemas.openxmlformats.org/drawingml/2006/main" noGrp="1"/>
+          </p:cNvSpPr>
+          <p:nvPr/>
+        </p:nvSpPr>
+        <p:spPr>
+          <a:xfrm xmlns:a="http://schemas.openxmlformats.org/drawingml/2006/main">
+            <a:off x="10306050" y="5381625"/>
+            <a:ext cx="1104900" cy="552450"/>
           </a:xfrm>
           <a:prstGeom xmlns:a="http://schemas.openxmlformats.org/drawingml/2006/main" prst="roundRect">
             <a:avLst>
-              <a:gd name="adj" fmla="val 7547"/>
+              <a:gd name="adj" fmla="val 13793"/>
             </a:avLst>
           </a:prstGeom>
           <a:solidFill xmlns:a="http://schemas.openxmlformats.org/drawingml/2006/main">
-            <a:srgbClr val="FCE8EA"/>
+            <a:srgbClr val="E8EBFC"/>
           </a:solidFill>
           <a:ln xmlns:a="http://schemas.openxmlformats.org/drawingml/2006/main" w="0">
             <a:noFill/>
@@ -18474,22 +21207,22 @@
       </p:sp>
       <p:sp>
         <p:nvSpPr>
-          <p:cNvPr id="20" name="">
-            <a:extLst xmlns:a="http://schemas.openxmlformats.org/drawingml/2006/main">
-              <a:ext uri="{FF2B5EF4-FFF2-40B4-BE49-F238E27FC236}">
-                <a16:creationId xmlns:a16="http://schemas.microsoft.com/office/drawing/2014/main" id="{82400B56-17E1-41BE-B9CF-575F4D1871F3}"/>
-              </a:ext>
-            </a:extLst>
-          </p:cNvPr>
-          <p:cNvSpPr>
-            <a:spLocks xmlns:a="http://schemas.openxmlformats.org/drawingml/2006/main" noGrp="1"/>
-          </p:cNvSpPr>
-          <p:nvPr/>
-        </p:nvSpPr>
-        <p:spPr>
-          <a:xfrm xmlns:a="http://schemas.openxmlformats.org/drawingml/2006/main">
-            <a:off x="8077200" y="4171950"/>
-            <a:ext cx="2438400" cy="285750"/>
+          <p:cNvPr id="66" name="">
+            <a:extLst xmlns:a="http://schemas.openxmlformats.org/drawingml/2006/main">
+              <a:ext uri="{FF2B5EF4-FFF2-40B4-BE49-F238E27FC236}">
+                <a16:creationId xmlns:a16="http://schemas.microsoft.com/office/drawing/2014/main" id="{15C3589C-3B85-4D3B-A87E-3A11F4E5E2B7}"/>
+              </a:ext>
+            </a:extLst>
+          </p:cNvPr>
+          <p:cNvSpPr>
+            <a:spLocks xmlns:a="http://schemas.openxmlformats.org/drawingml/2006/main" noGrp="1"/>
+          </p:cNvSpPr>
+          <p:nvPr/>
+        </p:nvSpPr>
+        <p:spPr>
+          <a:xfrm xmlns:a="http://schemas.openxmlformats.org/drawingml/2006/main">
+            <a:off x="10420350" y="5495925"/>
+            <a:ext cx="876300" cy="285750"/>
           </a:xfrm>
           <a:prstGeom xmlns:a="http://schemas.openxmlformats.org/drawingml/2006/main" prst="rect">
             <a:avLst/>
@@ -18536,29 +21269,29 @@
                 <a:ea typeface="Segoe UI"/>
                 <a:cs typeface="Segoe UI"/>
               </a:rPr>
-              <a:t>rejected_orders</a:t>
-            </a:r>
-          </a:p>
-        </p:txBody>
-      </p:sp>
-      <p:sp>
-        <p:nvSpPr>
-          <p:cNvPr id="21" name="">
-            <a:extLst xmlns:a="http://schemas.openxmlformats.org/drawingml/2006/main">
-              <a:ext uri="{FF2B5EF4-FFF2-40B4-BE49-F238E27FC236}">
-                <a16:creationId xmlns:a16="http://schemas.microsoft.com/office/drawing/2014/main" id="{3BC78226-03F1-4F14-AF55-6DD21C77A5F2}"/>
-              </a:ext>
-            </a:extLst>
-          </p:cNvPr>
-          <p:cNvSpPr>
-            <a:spLocks xmlns:a="http://schemas.openxmlformats.org/drawingml/2006/main" noGrp="1"/>
-          </p:cNvSpPr>
-          <p:nvPr/>
-        </p:nvSpPr>
-        <p:spPr>
-          <a:xfrm xmlns:a="http://schemas.openxmlformats.org/drawingml/2006/main">
-            <a:off x="8058150" y="4495800"/>
-            <a:ext cx="2476500" cy="495300"/>
+              <a:t>Parquet</a:t>
+            </a:r>
+          </a:p>
+        </p:txBody>
+      </p:sp>
+      <p:sp>
+        <p:nvSpPr>
+          <p:cNvPr id="67" name="">
+            <a:extLst xmlns:a="http://schemas.openxmlformats.org/drawingml/2006/main">
+              <a:ext uri="{FF2B5EF4-FFF2-40B4-BE49-F238E27FC236}">
+                <a16:creationId xmlns:a16="http://schemas.microsoft.com/office/drawing/2014/main" id="{CD09D6D0-9FF5-453E-8335-A989CC07F48F}"/>
+              </a:ext>
+            </a:extLst>
+          </p:cNvPr>
+          <p:cNvSpPr>
+            <a:spLocks xmlns:a="http://schemas.openxmlformats.org/drawingml/2006/main" noGrp="1"/>
+          </p:cNvSpPr>
+          <p:nvPr/>
+        </p:nvSpPr>
+        <p:spPr>
+          <a:xfrm xmlns:a="http://schemas.openxmlformats.org/drawingml/2006/main">
+            <a:off x="10401300" y="5819775"/>
+            <a:ext cx="914400" cy="38100"/>
           </a:xfrm>
           <a:prstGeom xmlns:a="http://schemas.openxmlformats.org/drawingml/2006/main" prst="rect">
             <a:avLst/>
@@ -18571,7 +21304,7 @@
         </p:spPr>
         <p:txBody>
           <a:bodyPr xmlns:a="http://schemas.openxmlformats.org/drawingml/2006/main" anchor="t">
-            <a:normAutofit fontScale="100000"/>
+            <a:normAutofit fontScale="10000"/>
           </a:bodyPr>
           <a:lstStyle xmlns:a="http://schemas.openxmlformats.org/drawingml/2006/main">
             <a:defPPr algn="ctr">
@@ -18605,145 +21338,29 @@
                 <a:ea typeface="Segoe UI"/>
                 <a:cs typeface="Segoe UI"/>
               </a:rPr>
-              <a:t>failed rule · original values</a:t>
-            </a:r>
-          </a:p>
-          <a:p xmlns:a="http://schemas.openxmlformats.org/drawingml/2006/main">
-            <a:pPr algn="ctr">
-              <a:defRPr sz="1200" b="0">
-                <a:solidFill>
-                  <a:srgbClr val="172033"/>
-                </a:solidFill>
-                <a:latin typeface="Segoe UI"/>
-                <a:ea typeface="Segoe UI"/>
-                <a:cs typeface="Segoe UI"/>
-              </a:defRPr>
-            </a:pPr>
-            <a:r>
-              <a:rPr sz="1200" b="0">
-                <a:solidFill>
-                  <a:srgbClr val="172033"/>
-                </a:solidFill>
-                <a:latin typeface="Segoe UI"/>
-                <a:ea typeface="Segoe UI"/>
-                <a:cs typeface="Segoe UI"/>
-              </a:rPr>
-              <a:t>rejection_reason</a:t>
-            </a:r>
-          </a:p>
-        </p:txBody>
-      </p:sp>
-      <p:sp>
-        <p:nvSpPr>
-          <p:cNvPr id="22" name="">
-            <a:extLst xmlns:a="http://schemas.openxmlformats.org/drawingml/2006/main">
-              <a:ext uri="{FF2B5EF4-FFF2-40B4-BE49-F238E27FC236}">
-                <a16:creationId xmlns:a16="http://schemas.microsoft.com/office/drawing/2014/main" id="{08B53800-E5BC-4D3D-8B88-3D1439545B91}"/>
-              </a:ext>
-            </a:extLst>
-          </p:cNvPr>
-          <p:cNvSpPr>
-            <a:spLocks xmlns:a="http://schemas.openxmlformats.org/drawingml/2006/main" noGrp="1"/>
-          </p:cNvSpPr>
-          <p:nvPr/>
-        </p:nvSpPr>
-        <p:spPr>
-          <a:xfrm xmlns:a="http://schemas.openxmlformats.org/drawingml/2006/main">
-            <a:off x="3257550" y="2190750"/>
-            <a:ext cx="781050" cy="38100"/>
-          </a:xfrm>
-          <a:prstGeom xmlns:a="http://schemas.openxmlformats.org/drawingml/2006/main" prst="rect">
-            <a:avLst/>
-          </a:prstGeom>
-          <a:solidFill xmlns:a="http://schemas.openxmlformats.org/drawingml/2006/main">
-            <a:srgbClr val="5267D7"/>
-          </a:solidFill>
-          <a:ln xmlns:a="http://schemas.openxmlformats.org/drawingml/2006/main" w="0">
-            <a:noFill/>
-            <a:prstDash val="solid"/>
-          </a:ln>
-        </p:spPr>
-      </p:sp>
-      <p:sp>
-        <p:nvSpPr>
-          <p:cNvPr id="23" name="">
-            <a:extLst xmlns:a="http://schemas.openxmlformats.org/drawingml/2006/main">
-              <a:ext uri="{FF2B5EF4-FFF2-40B4-BE49-F238E27FC236}">
-                <a16:creationId xmlns:a16="http://schemas.microsoft.com/office/drawing/2014/main" id="{99096B6D-6099-4C02-937B-C4A8B5C06C0D}"/>
-              </a:ext>
-            </a:extLst>
-          </p:cNvPr>
-          <p:cNvSpPr>
-            <a:spLocks xmlns:a="http://schemas.openxmlformats.org/drawingml/2006/main" noGrp="1"/>
-          </p:cNvSpPr>
-          <p:nvPr/>
-        </p:nvSpPr>
-        <p:spPr>
-          <a:xfrm xmlns:a="http://schemas.openxmlformats.org/drawingml/2006/main">
-            <a:off x="3257550" y="4533900"/>
-            <a:ext cx="781050" cy="38100"/>
-          </a:xfrm>
-          <a:prstGeom xmlns:a="http://schemas.openxmlformats.org/drawingml/2006/main" prst="rect">
-            <a:avLst/>
-          </a:prstGeom>
-          <a:solidFill xmlns:a="http://schemas.openxmlformats.org/drawingml/2006/main">
-            <a:srgbClr val="16B8A6"/>
-          </a:solidFill>
-          <a:ln xmlns:a="http://schemas.openxmlformats.org/drawingml/2006/main" w="0">
-            <a:noFill/>
-            <a:prstDash val="solid"/>
-          </a:ln>
-        </p:spPr>
-      </p:sp>
-      <p:sp>
-        <p:nvSpPr>
-          <p:cNvPr id="24" name="">
-            <a:extLst xmlns:a="http://schemas.openxmlformats.org/drawingml/2006/main">
-              <a:ext uri="{FF2B5EF4-FFF2-40B4-BE49-F238E27FC236}">
-                <a16:creationId xmlns:a16="http://schemas.microsoft.com/office/drawing/2014/main" id="{E780A4BF-B9F1-43ED-ACF5-68FFEFC0B156}"/>
-              </a:ext>
-            </a:extLst>
-          </p:cNvPr>
-          <p:cNvSpPr>
-            <a:spLocks xmlns:a="http://schemas.openxmlformats.org/drawingml/2006/main" noGrp="1"/>
-          </p:cNvSpPr>
-          <p:nvPr/>
-        </p:nvSpPr>
-        <p:spPr>
-          <a:xfrm xmlns:a="http://schemas.openxmlformats.org/drawingml/2006/main">
-            <a:off x="7143750" y="2190750"/>
-            <a:ext cx="819150" cy="38100"/>
-          </a:xfrm>
-          <a:prstGeom xmlns:a="http://schemas.openxmlformats.org/drawingml/2006/main" prst="rect">
-            <a:avLst/>
-          </a:prstGeom>
-          <a:solidFill xmlns:a="http://schemas.openxmlformats.org/drawingml/2006/main">
-            <a:srgbClr val="F2A03D"/>
-          </a:solidFill>
-          <a:ln xmlns:a="http://schemas.openxmlformats.org/drawingml/2006/main" w="0">
-            <a:noFill/>
-            <a:prstDash val="solid"/>
-          </a:ln>
-        </p:spPr>
-      </p:sp>
-      <p:sp>
-        <p:nvSpPr>
-          <p:cNvPr id="25" name="">
-            <a:extLst xmlns:a="http://schemas.openxmlformats.org/drawingml/2006/main">
-              <a:ext uri="{FF2B5EF4-FFF2-40B4-BE49-F238E27FC236}">
-                <a16:creationId xmlns:a16="http://schemas.microsoft.com/office/drawing/2014/main" id="{F92B5BD0-9782-485E-AE29-D98397C3FD2A}"/>
-              </a:ext>
-            </a:extLst>
-          </p:cNvPr>
-          <p:cNvSpPr>
-            <a:spLocks xmlns:a="http://schemas.openxmlformats.org/drawingml/2006/main" noGrp="1"/>
-          </p:cNvSpPr>
-          <p:nvPr/>
-        </p:nvSpPr>
-        <p:spPr>
-          <a:xfrm xmlns:a="http://schemas.openxmlformats.org/drawingml/2006/main">
-            <a:off x="8077200" y="3790950"/>
-            <a:ext cx="2457450" cy="209550"/>
+              <a:t>ZSTD · year/month</a:t>
+            </a:r>
+          </a:p>
+        </p:txBody>
+      </p:sp>
+      <p:sp>
+        <p:nvSpPr>
+          <p:cNvPr id="68" name="">
+            <a:extLst xmlns:a="http://schemas.openxmlformats.org/drawingml/2006/main">
+              <a:ext uri="{FF2B5EF4-FFF2-40B4-BE49-F238E27FC236}">
+                <a16:creationId xmlns:a16="http://schemas.microsoft.com/office/drawing/2014/main" id="{54A5607B-59E2-4843-AA7C-E423D27F6DA5}"/>
+              </a:ext>
+            </a:extLst>
+          </p:cNvPr>
+          <p:cNvSpPr>
+            <a:spLocks xmlns:a="http://schemas.openxmlformats.org/drawingml/2006/main" noGrp="1"/>
+          </p:cNvSpPr>
+          <p:nvPr/>
+        </p:nvSpPr>
+        <p:spPr>
+          <a:xfrm xmlns:a="http://schemas.openxmlformats.org/drawingml/2006/main">
+            <a:off x="3867150" y="5981700"/>
+            <a:ext cx="4000500" cy="180975"/>
           </a:xfrm>
           <a:prstGeom xmlns:a="http://schemas.openxmlformats.org/drawingml/2006/main" prst="rect">
             <a:avLst/>
@@ -18756,11 +21373,11 @@
         </p:spPr>
         <p:txBody>
           <a:bodyPr xmlns:a="http://schemas.openxmlformats.org/drawingml/2006/main" anchor="t">
-            <a:normAutofit fontScale="68889"/>
+            <a:normAutofit fontScale="60256"/>
           </a:bodyPr>
           <a:lstStyle xmlns:a="http://schemas.openxmlformats.org/drawingml/2006/main">
-            <a:defPPr algn="ctr">
-              <a:defRPr sz="1125" b="0">
+            <a:defPPr algn="l">
+              <a:defRPr sz="975" b="0">
                 <a:solidFill>
                   <a:srgbClr val="E65B65"/>
                 </a:solidFill>
@@ -18771,8 +21388,8 @@
             </a:defPPr>
           </a:lstStyle>
           <a:p xmlns:a="http://schemas.openxmlformats.org/drawingml/2006/main">
-            <a:pPr algn="ctr">
-              <a:defRPr sz="1125" b="0">
+            <a:pPr algn="l">
+              <a:defRPr sz="975" b="0">
                 <a:solidFill>
                   <a:srgbClr val="E65B65"/>
                 </a:solidFill>
@@ -18782,7 +21399,7 @@
               </a:defRPr>
             </a:pPr>
             <a:r>
-              <a:rPr sz="1125" b="0">
+              <a:rPr sz="975" b="0">
                 <a:solidFill>
                   <a:srgbClr val="E65B65"/>
                 </a:solidFill>
@@ -18790,145 +21407,7 @@
                 <a:ea typeface="Segoe UI"/>
                 <a:cs typeface="Segoe UI"/>
               </a:rPr>
-              <a:t>side output from stg_orders</a:t>
-            </a:r>
-          </a:p>
-        </p:txBody>
-      </p:sp>
-      <p:sp>
-        <p:nvSpPr>
-          <p:cNvPr id="26" name="">
-            <a:extLst xmlns:a="http://schemas.openxmlformats.org/drawingml/2006/main">
-              <a:ext uri="{FF2B5EF4-FFF2-40B4-BE49-F238E27FC236}">
-                <a16:creationId xmlns:a16="http://schemas.microsoft.com/office/drawing/2014/main" id="{96B03C78-4B92-4F90-81F5-9B739F2BECE3}"/>
-              </a:ext>
-            </a:extLst>
-          </p:cNvPr>
-          <p:cNvSpPr>
-            <a:spLocks xmlns:a="http://schemas.openxmlformats.org/drawingml/2006/main" noGrp="1"/>
-          </p:cNvSpPr>
-          <p:nvPr/>
-        </p:nvSpPr>
-        <p:spPr>
-          <a:xfrm xmlns:a="http://schemas.openxmlformats.org/drawingml/2006/main">
-            <a:off x="1733550" y="5391150"/>
-            <a:ext cx="8763000" cy="361950"/>
-          </a:xfrm>
-          <a:prstGeom xmlns:a="http://schemas.openxmlformats.org/drawingml/2006/main" prst="rect">
-            <a:avLst/>
-          </a:prstGeom>
-          <a:noFill xmlns:a="http://schemas.openxmlformats.org/drawingml/2006/main"/>
-          <a:ln xmlns:a="http://schemas.openxmlformats.org/drawingml/2006/main" w="0">
-            <a:noFill/>
-            <a:prstDash val="solid"/>
-          </a:ln>
-        </p:spPr>
-        <p:txBody>
-          <a:bodyPr xmlns:a="http://schemas.openxmlformats.org/drawingml/2006/main" anchor="t">
-            <a:normAutofit fontScale="99689"/>
-          </a:bodyPr>
-          <a:lstStyle xmlns:a="http://schemas.openxmlformats.org/drawingml/2006/main">
-            <a:defPPr algn="ctr">
-              <a:defRPr sz="1650" b="0">
-                <a:solidFill>
-                  <a:srgbClr val="172033"/>
-                </a:solidFill>
-                <a:latin typeface="Segoe UI"/>
-                <a:ea typeface="Segoe UI"/>
-                <a:cs typeface="Segoe UI"/>
-              </a:defRPr>
-            </a:defPPr>
-          </a:lstStyle>
-          <a:p xmlns:a="http://schemas.openxmlformats.org/drawingml/2006/main">
-            <a:pPr algn="ctr">
-              <a:defRPr sz="1650" b="0">
-                <a:solidFill>
-                  <a:srgbClr val="172033"/>
-                </a:solidFill>
-                <a:latin typeface="Segoe UI"/>
-                <a:ea typeface="Segoe UI"/>
-                <a:cs typeface="Segoe UI"/>
-              </a:defRPr>
-            </a:pPr>
-            <a:r>
-              <a:rPr sz="1650" b="0">
-                <a:solidFill>
-                  <a:srgbClr val="172033"/>
-                </a:solidFill>
-                <a:latin typeface="Segoe UI"/>
-                <a:ea typeface="Segoe UI"/>
-                <a:cs typeface="Segoe UI"/>
-              </a:rPr>
-              <a:t>Surrogate integer keys stabilize joins; the fact table keeps order_id and line_id for traceability.</a:t>
-            </a:r>
-          </a:p>
-        </p:txBody>
-      </p:sp>
-      <p:sp>
-        <p:nvSpPr>
-          <p:cNvPr id="27" name="">
-            <a:extLst xmlns:a="http://schemas.openxmlformats.org/drawingml/2006/main">
-              <a:ext uri="{FF2B5EF4-FFF2-40B4-BE49-F238E27FC236}">
-                <a16:creationId xmlns:a16="http://schemas.microsoft.com/office/drawing/2014/main" id="{B76432A2-624A-40D6-B2C3-9CCE708B6E08}"/>
-              </a:ext>
-            </a:extLst>
-          </p:cNvPr>
-          <p:cNvSpPr>
-            <a:spLocks xmlns:a="http://schemas.openxmlformats.org/drawingml/2006/main" noGrp="1"/>
-          </p:cNvSpPr>
-          <p:nvPr/>
-        </p:nvSpPr>
-        <p:spPr>
-          <a:xfrm xmlns:a="http://schemas.openxmlformats.org/drawingml/2006/main">
-            <a:off x="1276350" y="5886450"/>
-            <a:ext cx="9715500" cy="285750"/>
-          </a:xfrm>
-          <a:prstGeom xmlns:a="http://schemas.openxmlformats.org/drawingml/2006/main" prst="rect">
-            <a:avLst/>
-          </a:prstGeom>
-          <a:noFill xmlns:a="http://schemas.openxmlformats.org/drawingml/2006/main"/>
-          <a:ln xmlns:a="http://schemas.openxmlformats.org/drawingml/2006/main" w="0">
-            <a:noFill/>
-            <a:prstDash val="solid"/>
-          </a:ln>
-        </p:spPr>
-        <p:txBody>
-          <a:bodyPr xmlns:a="http://schemas.openxmlformats.org/drawingml/2006/main" anchor="t">
-            <a:normAutofit fontScale="89474"/>
-          </a:bodyPr>
-          <a:lstStyle xmlns:a="http://schemas.openxmlformats.org/drawingml/2006/main">
-            <a:defPPr algn="ctr">
-              <a:defRPr sz="1425" b="1">
-                <a:solidFill>
-                  <a:srgbClr val="5267D7"/>
-                </a:solidFill>
-                <a:latin typeface="Segoe UI"/>
-                <a:ea typeface="Segoe UI"/>
-                <a:cs typeface="Segoe UI"/>
-              </a:defRPr>
-            </a:defPPr>
-          </a:lstStyle>
-          <a:p xmlns:a="http://schemas.openxmlformats.org/drawingml/2006/main">
-            <a:pPr algn="ctr">
-              <a:defRPr sz="1425" b="1">
-                <a:solidFill>
-                  <a:srgbClr val="5267D7"/>
-                </a:solidFill>
-                <a:latin typeface="Segoe UI"/>
-                <a:ea typeface="Segoe UI"/>
-                <a:cs typeface="Segoe UI"/>
-              </a:defRPr>
-            </a:pPr>
-            <a:r>
-              <a:rPr sz="1425" b="1">
-                <a:solidFill>
-                  <a:srgbClr val="5267D7"/>
-                </a:solidFill>
-                <a:latin typeface="Segoe UI"/>
-                <a:ea typeface="Segoe UI"/>
-                <a:cs typeface="Segoe UI"/>
-              </a:rPr>
-              <a:t>ETL path: raw_orders → stg_orders → dimensions → fact_sales → ZSTD Parquet partitioned by year/month</a:t>
+              <a:t>Failed rules branch from stg_orders → rejected_orders</a:t>
             </a:r>
           </a:p>
         </p:txBody>
@@ -18936,7 +21415,7 @@
     </p:spTree>
     <p:extLst>
       <p:ext uri="{BB962C8B-B14F-4D97-AF65-F5344CB8AC3E}">
-        <p14:creationId xmlns:p14="http://schemas.microsoft.com/office/powerpoint/2010/main" val="627087226"/>
+        <p14:creationId xmlns:p14="http://schemas.microsoft.com/office/powerpoint/2010/main" val="863649115"/>
       </p:ext>
     </p:extLst>
   </p:cSld>
@@ -18967,7 +21446,7 @@
           <p:cNvPr id="28" name="">
             <a:extLst xmlns:a="http://schemas.openxmlformats.org/drawingml/2006/main">
               <a:ext uri="{FF2B5EF4-FFF2-40B4-BE49-F238E27FC236}">
-                <a16:creationId xmlns:a16="http://schemas.microsoft.com/office/drawing/2014/main" id="{8AA63449-C8DB-40E0-BFA6-0774B163C064}"/>
+                <a16:creationId xmlns:a16="http://schemas.microsoft.com/office/drawing/2014/main" id="{844BE7D5-54F6-4F69-B3B0-D2604EB3DB90}"/>
               </a:ext>
             </a:extLst>
           </p:cNvPr>
@@ -19036,7 +21515,7 @@
           <p:cNvPr id="2" name="">
             <a:extLst xmlns:a="http://schemas.openxmlformats.org/drawingml/2006/main">
               <a:ext uri="{FF2B5EF4-FFF2-40B4-BE49-F238E27FC236}">
-                <a16:creationId xmlns:a16="http://schemas.microsoft.com/office/drawing/2014/main" id="{CB0371AA-BDFD-4EE1-827D-7757C9716E70}"/>
+                <a16:creationId xmlns:a16="http://schemas.microsoft.com/office/drawing/2014/main" id="{51CF0A98-C6DD-4213-AC88-59A148864709}"/>
               </a:ext>
             </a:extLst>
           </p:cNvPr>
@@ -19105,7 +21584,7 @@
           <p:cNvPr id="3" name="">
             <a:extLst xmlns:a="http://schemas.openxmlformats.org/drawingml/2006/main">
               <a:ext uri="{FF2B5EF4-FFF2-40B4-BE49-F238E27FC236}">
-                <a16:creationId xmlns:a16="http://schemas.microsoft.com/office/drawing/2014/main" id="{4D2BF610-8CF1-4792-928D-F7F875537DE1}"/>
+                <a16:creationId xmlns:a16="http://schemas.microsoft.com/office/drawing/2014/main" id="{A9665AC8-EF5A-4FC5-82A6-42B47C86F4A2}"/>
               </a:ext>
             </a:extLst>
           </p:cNvPr>
@@ -19136,7 +21615,7 @@
           <p:cNvPr id="4" name="">
             <a:extLst xmlns:a="http://schemas.openxmlformats.org/drawingml/2006/main">
               <a:ext uri="{FF2B5EF4-FFF2-40B4-BE49-F238E27FC236}">
-                <a16:creationId xmlns:a16="http://schemas.microsoft.com/office/drawing/2014/main" id="{3B23284F-BD51-4172-AC29-6FFB265A3DD5}"/>
+                <a16:creationId xmlns:a16="http://schemas.microsoft.com/office/drawing/2014/main" id="{DB0CE519-0FA7-4B11-B0BA-F96A4ADCB662}"/>
               </a:ext>
             </a:extLst>
           </p:cNvPr>
@@ -19195,7 +21674,7 @@
                 <a:ea typeface="Segoe UI"/>
                 <a:cs typeface="Segoe UI"/>
               </a:rPr>
-              <a:t>Presenter: Member 2</a:t>
+              <a:t>Presenter: Aayush Chavanke</a:t>
             </a:r>
           </a:p>
         </p:txBody>
@@ -19205,7 +21684,7 @@
           <p:cNvPr id="5" name="">
             <a:extLst xmlns:a="http://schemas.openxmlformats.org/drawingml/2006/main">
               <a:ext uri="{FF2B5EF4-FFF2-40B4-BE49-F238E27FC236}">
-                <a16:creationId xmlns:a16="http://schemas.microsoft.com/office/drawing/2014/main" id="{9A07EE35-5488-4EE1-B688-5524BCC16383}"/>
+                <a16:creationId xmlns:a16="http://schemas.microsoft.com/office/drawing/2014/main" id="{5F05A9E0-28DC-49A3-8631-48DEB03F4225}"/>
               </a:ext>
             </a:extLst>
           </p:cNvPr>
@@ -19274,7 +21753,7 @@
           <p:cNvPr id="6" name="">
             <a:extLst xmlns:a="http://schemas.openxmlformats.org/drawingml/2006/main">
               <a:ext uri="{FF2B5EF4-FFF2-40B4-BE49-F238E27FC236}">
-                <a16:creationId xmlns:a16="http://schemas.microsoft.com/office/drawing/2014/main" id="{65EF2774-665C-44BE-8BF7-E04C82BAECD0}"/>
+                <a16:creationId xmlns:a16="http://schemas.microsoft.com/office/drawing/2014/main" id="{BE97C552-CD01-40FF-A9D8-DCAC45FF9A2B}"/>
               </a:ext>
             </a:extLst>
           </p:cNvPr>
@@ -19343,7 +21822,7 @@
           <p:cNvPr id="7" name="">
             <a:extLst xmlns:a="http://schemas.openxmlformats.org/drawingml/2006/main">
               <a:ext uri="{FF2B5EF4-FFF2-40B4-BE49-F238E27FC236}">
-                <a16:creationId xmlns:a16="http://schemas.microsoft.com/office/drawing/2014/main" id="{C1ED1C6B-2DD2-4934-B213-53B968947DC4}"/>
+                <a16:creationId xmlns:a16="http://schemas.microsoft.com/office/drawing/2014/main" id="{26C150D5-A13B-489F-95ED-38EC4F2EEFFB}"/>
               </a:ext>
             </a:extLst>
           </p:cNvPr>
@@ -19374,7 +21853,7 @@
           <p:cNvPr id="8" name="">
             <a:extLst xmlns:a="http://schemas.openxmlformats.org/drawingml/2006/main">
               <a:ext uri="{FF2B5EF4-FFF2-40B4-BE49-F238E27FC236}">
-                <a16:creationId xmlns:a16="http://schemas.microsoft.com/office/drawing/2014/main" id="{C5528C5D-BB79-46F8-BFF2-5CCA356E5E1A}"/>
+                <a16:creationId xmlns:a16="http://schemas.microsoft.com/office/drawing/2014/main" id="{E0CE71A4-51E9-44D0-992A-EF2D5D9C2583}"/>
               </a:ext>
             </a:extLst>
           </p:cNvPr>
@@ -19443,7 +21922,7 @@
           <p:cNvPr id="9" name="">
             <a:extLst xmlns:a="http://schemas.openxmlformats.org/drawingml/2006/main">
               <a:ext uri="{FF2B5EF4-FFF2-40B4-BE49-F238E27FC236}">
-                <a16:creationId xmlns:a16="http://schemas.microsoft.com/office/drawing/2014/main" id="{0314EB76-12F4-445D-B64F-9C9D63CFDB21}"/>
+                <a16:creationId xmlns:a16="http://schemas.microsoft.com/office/drawing/2014/main" id="{91E40910-955C-47B3-A760-9062922DAEA2}"/>
               </a:ext>
             </a:extLst>
           </p:cNvPr>
@@ -19512,7 +21991,7 @@
           <p:cNvPr id="10" name="">
             <a:extLst xmlns:a="http://schemas.openxmlformats.org/drawingml/2006/main">
               <a:ext uri="{FF2B5EF4-FFF2-40B4-BE49-F238E27FC236}">
-                <a16:creationId xmlns:a16="http://schemas.microsoft.com/office/drawing/2014/main" id="{B4216DBE-BBAC-468C-95EC-411BCCF114A9}"/>
+                <a16:creationId xmlns:a16="http://schemas.microsoft.com/office/drawing/2014/main" id="{44DD8CD3-C792-48A6-9E2F-F48FE7604498}"/>
               </a:ext>
             </a:extLst>
           </p:cNvPr>
@@ -19543,7 +22022,7 @@
           <p:cNvPr id="11" name="">
             <a:extLst xmlns:a="http://schemas.openxmlformats.org/drawingml/2006/main">
               <a:ext uri="{FF2B5EF4-FFF2-40B4-BE49-F238E27FC236}">
-                <a16:creationId xmlns:a16="http://schemas.microsoft.com/office/drawing/2014/main" id="{BE265671-C6C8-4733-9846-31975602B9FA}"/>
+                <a16:creationId xmlns:a16="http://schemas.microsoft.com/office/drawing/2014/main" id="{E2ECE7F3-3B72-4B74-87AD-43FD89C9DFB6}"/>
               </a:ext>
             </a:extLst>
           </p:cNvPr>
@@ -19612,7 +22091,7 @@
           <p:cNvPr id="12" name="">
             <a:extLst xmlns:a="http://schemas.openxmlformats.org/drawingml/2006/main">
               <a:ext uri="{FF2B5EF4-FFF2-40B4-BE49-F238E27FC236}">
-                <a16:creationId xmlns:a16="http://schemas.microsoft.com/office/drawing/2014/main" id="{1C46671D-BE38-49B6-924F-C8463B81D377}"/>
+                <a16:creationId xmlns:a16="http://schemas.microsoft.com/office/drawing/2014/main" id="{C80E82A8-6E21-41F3-84A3-55278E1C1F30}"/>
               </a:ext>
             </a:extLst>
           </p:cNvPr>
@@ -19681,7 +22160,7 @@
           <p:cNvPr id="13" name="">
             <a:extLst xmlns:a="http://schemas.openxmlformats.org/drawingml/2006/main">
               <a:ext uri="{FF2B5EF4-FFF2-40B4-BE49-F238E27FC236}">
-                <a16:creationId xmlns:a16="http://schemas.microsoft.com/office/drawing/2014/main" id="{D7E2406C-2BC0-4F8C-A46D-F3674376C565}"/>
+                <a16:creationId xmlns:a16="http://schemas.microsoft.com/office/drawing/2014/main" id="{3013B457-F745-474A-B6CD-11B56A4F015B}"/>
               </a:ext>
             </a:extLst>
           </p:cNvPr>
@@ -19712,7 +22191,7 @@
           <p:cNvPr id="14" name="">
             <a:extLst xmlns:a="http://schemas.openxmlformats.org/drawingml/2006/main">
               <a:ext uri="{FF2B5EF4-FFF2-40B4-BE49-F238E27FC236}">
-                <a16:creationId xmlns:a16="http://schemas.microsoft.com/office/drawing/2014/main" id="{60953293-1C42-4829-B34E-006B92FD8C2C}"/>
+                <a16:creationId xmlns:a16="http://schemas.microsoft.com/office/drawing/2014/main" id="{DE673949-2F5A-418F-8B99-371BCEFC6E96}"/>
               </a:ext>
             </a:extLst>
           </p:cNvPr>
@@ -19781,7 +22260,7 @@
           <p:cNvPr id="15" name="">
             <a:extLst xmlns:a="http://schemas.openxmlformats.org/drawingml/2006/main">
               <a:ext uri="{FF2B5EF4-FFF2-40B4-BE49-F238E27FC236}">
-                <a16:creationId xmlns:a16="http://schemas.microsoft.com/office/drawing/2014/main" id="{2C86A341-14B6-4489-8933-2764447A0617}"/>
+                <a16:creationId xmlns:a16="http://schemas.microsoft.com/office/drawing/2014/main" id="{32997727-A4CD-4418-AC6F-E62C51D92BF5}"/>
               </a:ext>
             </a:extLst>
           </p:cNvPr>
@@ -19850,7 +22329,7 @@
           <p:cNvPr id="16" name="">
             <a:extLst xmlns:a="http://schemas.openxmlformats.org/drawingml/2006/main">
               <a:ext uri="{FF2B5EF4-FFF2-40B4-BE49-F238E27FC236}">
-                <a16:creationId xmlns:a16="http://schemas.microsoft.com/office/drawing/2014/main" id="{4FC1AFA1-1DB0-4BB8-B758-852A5917CA87}"/>
+                <a16:creationId xmlns:a16="http://schemas.microsoft.com/office/drawing/2014/main" id="{834FFB55-2B20-4E78-B268-2AA2B82E2C3E}"/>
               </a:ext>
             </a:extLst>
           </p:cNvPr>
@@ -19919,7 +22398,7 @@
           <p:cNvPr id="17" name="">
             <a:extLst xmlns:a="http://schemas.openxmlformats.org/drawingml/2006/main">
               <a:ext uri="{FF2B5EF4-FFF2-40B4-BE49-F238E27FC236}">
-                <a16:creationId xmlns:a16="http://schemas.microsoft.com/office/drawing/2014/main" id="{5033D7AB-3B33-4F43-B23A-D95B4832CADF}"/>
+                <a16:creationId xmlns:a16="http://schemas.microsoft.com/office/drawing/2014/main" id="{266F8B8C-1FA0-4E3E-A648-52E2CBB3BE77}"/>
               </a:ext>
             </a:extLst>
           </p:cNvPr>
@@ -19988,7 +22467,7 @@
           <p:cNvPr id="18" name="">
             <a:extLst xmlns:a="http://schemas.openxmlformats.org/drawingml/2006/main">
               <a:ext uri="{FF2B5EF4-FFF2-40B4-BE49-F238E27FC236}">
-                <a16:creationId xmlns:a16="http://schemas.microsoft.com/office/drawing/2014/main" id="{3D003877-8DCA-4AFC-AED4-A3B4101C6928}"/>
+                <a16:creationId xmlns:a16="http://schemas.microsoft.com/office/drawing/2014/main" id="{45CD0863-EF05-4EBF-8DAC-809B824B4D5F}"/>
               </a:ext>
             </a:extLst>
           </p:cNvPr>
@@ -20023,7 +22502,7 @@
           <p:cNvPr id="19" name="">
             <a:extLst xmlns:a="http://schemas.openxmlformats.org/drawingml/2006/main">
               <a:ext uri="{FF2B5EF4-FFF2-40B4-BE49-F238E27FC236}">
-                <a16:creationId xmlns:a16="http://schemas.microsoft.com/office/drawing/2014/main" id="{50D137D4-3FD4-43CD-84FE-D70A8FB08D81}"/>
+                <a16:creationId xmlns:a16="http://schemas.microsoft.com/office/drawing/2014/main" id="{F7EB1302-03D0-420D-8559-7738F434B7EA}"/>
               </a:ext>
             </a:extLst>
           </p:cNvPr>
@@ -20054,7 +22533,7 @@
           <p:cNvPr id="20" name="">
             <a:extLst xmlns:a="http://schemas.openxmlformats.org/drawingml/2006/main">
               <a:ext uri="{FF2B5EF4-FFF2-40B4-BE49-F238E27FC236}">
-                <a16:creationId xmlns:a16="http://schemas.microsoft.com/office/drawing/2014/main" id="{87A283E9-736E-46FB-9E79-FF853A69C20F}"/>
+                <a16:creationId xmlns:a16="http://schemas.microsoft.com/office/drawing/2014/main" id="{82EF40B8-F285-47B0-8873-8FC396010A0E}"/>
               </a:ext>
             </a:extLst>
           </p:cNvPr>
@@ -20225,7 +22704,7 @@
           <p:cNvPr id="21" name="">
             <a:extLst xmlns:a="http://schemas.openxmlformats.org/drawingml/2006/main">
               <a:ext uri="{FF2B5EF4-FFF2-40B4-BE49-F238E27FC236}">
-                <a16:creationId xmlns:a16="http://schemas.microsoft.com/office/drawing/2014/main" id="{B34F8CCD-B56A-458F-BDD3-74096CC83E04}"/>
+                <a16:creationId xmlns:a16="http://schemas.microsoft.com/office/drawing/2014/main" id="{B1679BE7-B90C-4DE7-A091-BDC443DC5F5A}"/>
               </a:ext>
             </a:extLst>
           </p:cNvPr>
@@ -20258,7 +22737,7 @@
           <p:cNvPr id="22" name="">
             <a:extLst xmlns:a="http://schemas.openxmlformats.org/drawingml/2006/main">
               <a:ext uri="{FF2B5EF4-FFF2-40B4-BE49-F238E27FC236}">
-                <a16:creationId xmlns:a16="http://schemas.microsoft.com/office/drawing/2014/main" id="{C681A0E2-DFCF-4364-8B76-3B7E863CA690}"/>
+                <a16:creationId xmlns:a16="http://schemas.microsoft.com/office/drawing/2014/main" id="{AE042659-E7D9-4BD8-929F-94C5D5760071}"/>
               </a:ext>
             </a:extLst>
           </p:cNvPr>
@@ -20327,7 +22806,7 @@
           <p:cNvPr id="23" name="">
             <a:extLst xmlns:a="http://schemas.openxmlformats.org/drawingml/2006/main">
               <a:ext uri="{FF2B5EF4-FFF2-40B4-BE49-F238E27FC236}">
-                <a16:creationId xmlns:a16="http://schemas.microsoft.com/office/drawing/2014/main" id="{715EDB62-2149-420D-81D4-2C00348C9E88}"/>
+                <a16:creationId xmlns:a16="http://schemas.microsoft.com/office/drawing/2014/main" id="{66F09578-16FB-4F37-9E5E-E51E29C5B057}"/>
               </a:ext>
             </a:extLst>
           </p:cNvPr>
@@ -20396,7 +22875,7 @@
           <p:cNvPr id="24" name="">
             <a:extLst xmlns:a="http://schemas.openxmlformats.org/drawingml/2006/main">
               <a:ext uri="{FF2B5EF4-FFF2-40B4-BE49-F238E27FC236}">
-                <a16:creationId xmlns:a16="http://schemas.microsoft.com/office/drawing/2014/main" id="{5B00DA68-4E2A-487C-81DD-A553E2F45ACB}"/>
+                <a16:creationId xmlns:a16="http://schemas.microsoft.com/office/drawing/2014/main" id="{E45DA269-C621-42DC-B09F-A4DCB0B92F38}"/>
               </a:ext>
             </a:extLst>
           </p:cNvPr>
@@ -20465,7 +22944,7 @@
           <p:cNvPr id="25" name="">
             <a:extLst xmlns:a="http://schemas.openxmlformats.org/drawingml/2006/main">
               <a:ext uri="{FF2B5EF4-FFF2-40B4-BE49-F238E27FC236}">
-                <a16:creationId xmlns:a16="http://schemas.microsoft.com/office/drawing/2014/main" id="{2DCC2D75-8BF0-40A3-BCF4-7226BE4DAFE5}"/>
+                <a16:creationId xmlns:a16="http://schemas.microsoft.com/office/drawing/2014/main" id="{BB97097E-26F3-4A19-8615-A8884D50C1E1}"/>
               </a:ext>
             </a:extLst>
           </p:cNvPr>
@@ -20534,7 +23013,7 @@
           <p:cNvPr id="26" name="">
             <a:extLst xmlns:a="http://schemas.openxmlformats.org/drawingml/2006/main">
               <a:ext uri="{FF2B5EF4-FFF2-40B4-BE49-F238E27FC236}">
-                <a16:creationId xmlns:a16="http://schemas.microsoft.com/office/drawing/2014/main" id="{2D6BBF25-6707-4E55-AF68-B64591C1C359}"/>
+                <a16:creationId xmlns:a16="http://schemas.microsoft.com/office/drawing/2014/main" id="{83BDBBDE-29DF-46CF-AFE7-E3D0EDCA714C}"/>
               </a:ext>
             </a:extLst>
           </p:cNvPr>
@@ -20603,7 +23082,7 @@
           <p:cNvPr id="27" name="">
             <a:extLst xmlns:a="http://schemas.openxmlformats.org/drawingml/2006/main">
               <a:ext uri="{FF2B5EF4-FFF2-40B4-BE49-F238E27FC236}">
-                <a16:creationId xmlns:a16="http://schemas.microsoft.com/office/drawing/2014/main" id="{9D9ADBB0-31A5-405D-8D45-77ED23242C9A}"/>
+                <a16:creationId xmlns:a16="http://schemas.microsoft.com/office/drawing/2014/main" id="{ABF2A7A1-510C-48EF-AECF-9433B49BE26C}"/>
               </a:ext>
             </a:extLst>
           </p:cNvPr>
@@ -20670,7 +23149,7 @@
     </p:spTree>
     <p:extLst>
       <p:ext uri="{BB962C8B-B14F-4D97-AF65-F5344CB8AC3E}">
-        <p14:creationId xmlns:p14="http://schemas.microsoft.com/office/powerpoint/2010/main" val="1548724449"/>
+        <p14:creationId xmlns:p14="http://schemas.microsoft.com/office/powerpoint/2010/main" val="1074847007"/>
       </p:ext>
     </p:extLst>
   </p:cSld>
@@ -20701,7 +23180,7 @@
           <p:cNvPr id="14" name="">
             <a:extLst xmlns:a="http://schemas.openxmlformats.org/drawingml/2006/main">
               <a:ext uri="{FF2B5EF4-FFF2-40B4-BE49-F238E27FC236}">
-                <a16:creationId xmlns:a16="http://schemas.microsoft.com/office/drawing/2014/main" id="{1E41A638-5129-4ECB-9E5D-F33B2CFB4240}"/>
+                <a16:creationId xmlns:a16="http://schemas.microsoft.com/office/drawing/2014/main" id="{23435AE6-DDDB-4120-BD8B-EC37EB23C954}"/>
               </a:ext>
             </a:extLst>
           </p:cNvPr>
@@ -20770,7 +23249,7 @@
           <p:cNvPr id="2" name="">
             <a:extLst xmlns:a="http://schemas.openxmlformats.org/drawingml/2006/main">
               <a:ext uri="{FF2B5EF4-FFF2-40B4-BE49-F238E27FC236}">
-                <a16:creationId xmlns:a16="http://schemas.microsoft.com/office/drawing/2014/main" id="{9C747519-FC38-4BDE-A320-F5C557EEF13B}"/>
+                <a16:creationId xmlns:a16="http://schemas.microsoft.com/office/drawing/2014/main" id="{F7259970-8A65-415D-9BA7-824F972CDA00}"/>
               </a:ext>
             </a:extLst>
           </p:cNvPr>
@@ -20839,7 +23318,7 @@
           <p:cNvPr id="3" name="">
             <a:extLst xmlns:a="http://schemas.openxmlformats.org/drawingml/2006/main">
               <a:ext uri="{FF2B5EF4-FFF2-40B4-BE49-F238E27FC236}">
-                <a16:creationId xmlns:a16="http://schemas.microsoft.com/office/drawing/2014/main" id="{C977CC41-B0A5-4E46-82FE-F5CAD6AEB11E}"/>
+                <a16:creationId xmlns:a16="http://schemas.microsoft.com/office/drawing/2014/main" id="{C05BDA54-6B25-4AA5-A5AB-0516C2243699}"/>
               </a:ext>
             </a:extLst>
           </p:cNvPr>
@@ -20870,7 +23349,7 @@
           <p:cNvPr id="4" name="">
             <a:extLst xmlns:a="http://schemas.openxmlformats.org/drawingml/2006/main">
               <a:ext uri="{FF2B5EF4-FFF2-40B4-BE49-F238E27FC236}">
-                <a16:creationId xmlns:a16="http://schemas.microsoft.com/office/drawing/2014/main" id="{FC91F454-A9C1-4220-BCCF-293B0BBBB50F}"/>
+                <a16:creationId xmlns:a16="http://schemas.microsoft.com/office/drawing/2014/main" id="{84C948E5-A8CD-4C40-B3F2-1C260C4F6433}"/>
               </a:ext>
             </a:extLst>
           </p:cNvPr>
@@ -20929,7 +23408,7 @@
                 <a:ea typeface="Segoe UI"/>
                 <a:cs typeface="Segoe UI"/>
               </a:rPr>
-              <a:t>Presenter: Member 3</a:t>
+              <a:t>Presenter: Aniket Nikam</a:t>
             </a:r>
           </a:p>
         </p:txBody>
@@ -20939,7 +23418,7 @@
           <p:cNvPr id="5" name="">
             <a:extLst xmlns:a="http://schemas.openxmlformats.org/drawingml/2006/main">
               <a:ext uri="{FF2B5EF4-FFF2-40B4-BE49-F238E27FC236}">
-                <a16:creationId xmlns:a16="http://schemas.microsoft.com/office/drawing/2014/main" id="{A34B0578-5A56-4FAD-9BC1-2AF0E3000394}"/>
+                <a16:creationId xmlns:a16="http://schemas.microsoft.com/office/drawing/2014/main" id="{40D82C17-AE49-40EA-8690-7E8EB3786C8A}"/>
               </a:ext>
             </a:extLst>
           </p:cNvPr>
@@ -21008,7 +23487,7 @@
           <p:cNvPr id="6" name="">
             <a:extLst xmlns:a="http://schemas.openxmlformats.org/drawingml/2006/main">
               <a:ext uri="{FF2B5EF4-FFF2-40B4-BE49-F238E27FC236}">
-                <a16:creationId xmlns:a16="http://schemas.microsoft.com/office/drawing/2014/main" id="{EBEC8CB9-972A-486D-B14B-732B11A4B46D}"/>
+                <a16:creationId xmlns:a16="http://schemas.microsoft.com/office/drawing/2014/main" id="{E3341F6C-1940-4B31-BA9F-6F16B7A094C8}"/>
               </a:ext>
             </a:extLst>
           </p:cNvPr>
@@ -21077,7 +23556,7 @@
           <p:cNvPr id="7" name="Chart">
             <a:extLst xmlns:a="http://schemas.openxmlformats.org/drawingml/2006/main">
               <a:ext uri="{FF2B5EF4-FFF2-40B4-BE49-F238E27FC236}">
-                <a16:creationId xmlns:a16="http://schemas.microsoft.com/office/drawing/2014/main" id="{531EF3F1-29C6-463E-B0AE-51CB860BAC4E}"/>
+                <a16:creationId xmlns:a16="http://schemas.microsoft.com/office/drawing/2014/main" id="{077A3E34-822D-47E5-B827-9C30D6228530}"/>
               </a:ext>
             </a:extLst>
           </p:cNvPr>
@@ -21090,7 +23569,7 @@
         </p:xfrm>
         <a:graphic xmlns:a="http://schemas.openxmlformats.org/drawingml/2006/main">
           <a:graphicData uri="http://schemas.openxmlformats.org/drawingml/2006/chart">
-            <c:chart xmlns:r="http://schemas.openxmlformats.org/officeDocument/2006/relationships" xmlns:c="http://schemas.openxmlformats.org/drawingml/2006/chart" r:id="R0c570bb680614bdb"/>
+            <c:chart xmlns:r="http://schemas.openxmlformats.org/officeDocument/2006/relationships" xmlns:c="http://schemas.openxmlformats.org/drawingml/2006/chart" r:id="R1afb0e5f30064475"/>
           </a:graphicData>
         </a:graphic>
       </p:graphicFrame>
@@ -21099,7 +23578,7 @@
           <p:cNvPr id="8" name="">
             <a:extLst xmlns:a="http://schemas.openxmlformats.org/drawingml/2006/main">
               <a:ext uri="{FF2B5EF4-FFF2-40B4-BE49-F238E27FC236}">
-                <a16:creationId xmlns:a16="http://schemas.microsoft.com/office/drawing/2014/main" id="{D927C0BD-6C69-4EDA-82CB-8ED195DE5DCC}"/>
+                <a16:creationId xmlns:a16="http://schemas.microsoft.com/office/drawing/2014/main" id="{80EB8960-9B0D-48C6-9B8B-C0C730C4C165}"/>
               </a:ext>
             </a:extLst>
           </p:cNvPr>
@@ -21130,7 +23609,7 @@
           <p:cNvPr id="9" name="">
             <a:extLst xmlns:a="http://schemas.openxmlformats.org/drawingml/2006/main">
               <a:ext uri="{FF2B5EF4-FFF2-40B4-BE49-F238E27FC236}">
-                <a16:creationId xmlns:a16="http://schemas.microsoft.com/office/drawing/2014/main" id="{ED5269AE-8B6C-4C74-91A7-2AB834C2170E}"/>
+                <a16:creationId xmlns:a16="http://schemas.microsoft.com/office/drawing/2014/main" id="{80743388-1F92-4B2D-8537-82913015B4C5}"/>
               </a:ext>
             </a:extLst>
           </p:cNvPr>
@@ -21199,7 +23678,7 @@
           <p:cNvPr id="10" name="">
             <a:extLst xmlns:a="http://schemas.openxmlformats.org/drawingml/2006/main">
               <a:ext uri="{FF2B5EF4-FFF2-40B4-BE49-F238E27FC236}">
-                <a16:creationId xmlns:a16="http://schemas.microsoft.com/office/drawing/2014/main" id="{5FC4D588-FC49-4A8F-82F0-CB2DE66DFF63}"/>
+                <a16:creationId xmlns:a16="http://schemas.microsoft.com/office/drawing/2014/main" id="{088C422C-5E33-4BBF-BB98-7AFFB3D4E3D4}"/>
               </a:ext>
             </a:extLst>
           </p:cNvPr>
@@ -21380,7 +23859,7 @@
           <p:cNvPr id="11" name="">
             <a:extLst xmlns:a="http://schemas.openxmlformats.org/drawingml/2006/main">
               <a:ext uri="{FF2B5EF4-FFF2-40B4-BE49-F238E27FC236}">
-                <a16:creationId xmlns:a16="http://schemas.microsoft.com/office/drawing/2014/main" id="{A2AF33DA-09CE-4441-9EA7-97631568D20E}"/>
+                <a16:creationId xmlns:a16="http://schemas.microsoft.com/office/drawing/2014/main" id="{BC3C5B86-2253-4E49-82FD-02F96B1CA874}"/>
               </a:ext>
             </a:extLst>
           </p:cNvPr>
@@ -21449,7 +23928,7 @@
           <p:cNvPr id="12" name="">
             <a:extLst xmlns:a="http://schemas.openxmlformats.org/drawingml/2006/main">
               <a:ext uri="{FF2B5EF4-FFF2-40B4-BE49-F238E27FC236}">
-                <a16:creationId xmlns:a16="http://schemas.microsoft.com/office/drawing/2014/main" id="{D33ED7EC-8335-41BE-B60E-A4E6B97802B0}"/>
+                <a16:creationId xmlns:a16="http://schemas.microsoft.com/office/drawing/2014/main" id="{8AAD4D37-37C8-4BD9-8314-9D9350F0045F}"/>
               </a:ext>
             </a:extLst>
           </p:cNvPr>
@@ -21518,7 +23997,7 @@
           <p:cNvPr id="13" name="">
             <a:extLst xmlns:a="http://schemas.openxmlformats.org/drawingml/2006/main">
               <a:ext uri="{FF2B5EF4-FFF2-40B4-BE49-F238E27FC236}">
-                <a16:creationId xmlns:a16="http://schemas.microsoft.com/office/drawing/2014/main" id="{F6E895E3-DB76-4F3F-9A89-7F721AD78AF9}"/>
+                <a16:creationId xmlns:a16="http://schemas.microsoft.com/office/drawing/2014/main" id="{838E0D41-034C-4A4F-84E5-F47404ECE597}"/>
               </a:ext>
             </a:extLst>
           </p:cNvPr>
@@ -21585,7 +24064,7 @@
     </p:spTree>
     <p:extLst>
       <p:ext uri="{BB962C8B-B14F-4D97-AF65-F5344CB8AC3E}">
-        <p14:creationId xmlns:p14="http://schemas.microsoft.com/office/powerpoint/2010/main" val="1138658933"/>
+        <p14:creationId xmlns:p14="http://schemas.microsoft.com/office/powerpoint/2010/main" val="17139428"/>
       </p:ext>
     </p:extLst>
   </p:cSld>
@@ -21616,7 +24095,7 @@
           <p:cNvPr id="19" name="">
             <a:extLst xmlns:a="http://schemas.openxmlformats.org/drawingml/2006/main">
               <a:ext uri="{FF2B5EF4-FFF2-40B4-BE49-F238E27FC236}">
-                <a16:creationId xmlns:a16="http://schemas.microsoft.com/office/drawing/2014/main" id="{65D368C2-406A-4D0B-9076-CF8B267F9585}"/>
+                <a16:creationId xmlns:a16="http://schemas.microsoft.com/office/drawing/2014/main" id="{66B68301-028B-475C-A3ED-C70B6B9A7E7F}"/>
               </a:ext>
             </a:extLst>
           </p:cNvPr>
@@ -21685,7 +24164,7 @@
           <p:cNvPr id="2" name="">
             <a:extLst xmlns:a="http://schemas.openxmlformats.org/drawingml/2006/main">
               <a:ext uri="{FF2B5EF4-FFF2-40B4-BE49-F238E27FC236}">
-                <a16:creationId xmlns:a16="http://schemas.microsoft.com/office/drawing/2014/main" id="{5FD7469E-5E46-45DD-9CAD-557D41BC8A20}"/>
+                <a16:creationId xmlns:a16="http://schemas.microsoft.com/office/drawing/2014/main" id="{DFFD275A-2C0F-4DA6-9CBB-271651B0E147}"/>
               </a:ext>
             </a:extLst>
           </p:cNvPr>
@@ -21754,7 +24233,7 @@
           <p:cNvPr id="3" name="">
             <a:extLst xmlns:a="http://schemas.openxmlformats.org/drawingml/2006/main">
               <a:ext uri="{FF2B5EF4-FFF2-40B4-BE49-F238E27FC236}">
-                <a16:creationId xmlns:a16="http://schemas.microsoft.com/office/drawing/2014/main" id="{465354A6-3F33-45C4-B878-AADB2C76CCDE}"/>
+                <a16:creationId xmlns:a16="http://schemas.microsoft.com/office/drawing/2014/main" id="{09DDEFC9-11D6-4D96-AA85-29E09A05B144}"/>
               </a:ext>
             </a:extLst>
           </p:cNvPr>
@@ -21785,7 +24264,7 @@
           <p:cNvPr id="4" name="">
             <a:extLst xmlns:a="http://schemas.openxmlformats.org/drawingml/2006/main">
               <a:ext uri="{FF2B5EF4-FFF2-40B4-BE49-F238E27FC236}">
-                <a16:creationId xmlns:a16="http://schemas.microsoft.com/office/drawing/2014/main" id="{6B5DD282-9DAF-4BEB-9362-ED2725C08F97}"/>
+                <a16:creationId xmlns:a16="http://schemas.microsoft.com/office/drawing/2014/main" id="{D4A588F0-5F9A-4790-A37E-618A7F1D8D7D}"/>
               </a:ext>
             </a:extLst>
           </p:cNvPr>
@@ -21844,7 +24323,7 @@
                 <a:ea typeface="Segoe UI"/>
                 <a:cs typeface="Segoe UI"/>
               </a:rPr>
-              <a:t>Presenter: Member 3</a:t>
+              <a:t>Presenter: Aniket Nikam</a:t>
             </a:r>
           </a:p>
         </p:txBody>
@@ -21854,7 +24333,7 @@
           <p:cNvPr id="5" name="">
             <a:extLst xmlns:a="http://schemas.openxmlformats.org/drawingml/2006/main">
               <a:ext uri="{FF2B5EF4-FFF2-40B4-BE49-F238E27FC236}">
-                <a16:creationId xmlns:a16="http://schemas.microsoft.com/office/drawing/2014/main" id="{CBFDF1AA-27F2-4F38-9357-3F4463229957}"/>
+                <a16:creationId xmlns:a16="http://schemas.microsoft.com/office/drawing/2014/main" id="{84CB324D-E2CD-4BE5-BF5A-F646A7D55053}"/>
               </a:ext>
             </a:extLst>
           </p:cNvPr>
@@ -21923,7 +24402,7 @@
           <p:cNvPr id="6" name="">
             <a:extLst xmlns:a="http://schemas.openxmlformats.org/drawingml/2006/main">
               <a:ext uri="{FF2B5EF4-FFF2-40B4-BE49-F238E27FC236}">
-                <a16:creationId xmlns:a16="http://schemas.microsoft.com/office/drawing/2014/main" id="{BB41A180-EDB4-4D08-A081-5FF6AB6B2448}"/>
+                <a16:creationId xmlns:a16="http://schemas.microsoft.com/office/drawing/2014/main" id="{F416A082-5E2B-4E2D-BC3F-32A0D363E60B}"/>
               </a:ext>
             </a:extLst>
           </p:cNvPr>
@@ -21958,7 +24437,7 @@
           <p:cNvPr id="7" name="">
             <a:extLst xmlns:a="http://schemas.openxmlformats.org/drawingml/2006/main">
               <a:ext uri="{FF2B5EF4-FFF2-40B4-BE49-F238E27FC236}">
-                <a16:creationId xmlns:a16="http://schemas.microsoft.com/office/drawing/2014/main" id="{E55E2AC0-06E1-4AAB-8C05-52A89605C838}"/>
+                <a16:creationId xmlns:a16="http://schemas.microsoft.com/office/drawing/2014/main" id="{1A51F441-1437-42A1-8964-015F3078A27E}"/>
               </a:ext>
             </a:extLst>
           </p:cNvPr>
@@ -21968,7 +24447,7 @@
           <p:nvPr/>
         </p:nvPicPr>
         <p:blipFill>
-          <a:blip xmlns:r="http://schemas.openxmlformats.org/officeDocument/2006/relationships" xmlns:a="http://schemas.openxmlformats.org/drawingml/2006/main" r:embed="R9c9c1cdc59c44f4d"/>
+          <a:blip xmlns:r="http://schemas.openxmlformats.org/officeDocument/2006/relationships" xmlns:a="http://schemas.openxmlformats.org/drawingml/2006/main" r:embed="R7a70ef0c89524c92"/>
           <a:stretch xmlns:a="http://schemas.openxmlformats.org/drawingml/2006/main"/>
         </p:blipFill>
         <p:spPr>
@@ -21988,7 +24467,7 @@
           <p:cNvPr id="8" name="">
             <a:extLst xmlns:a="http://schemas.openxmlformats.org/drawingml/2006/main">
               <a:ext uri="{FF2B5EF4-FFF2-40B4-BE49-F238E27FC236}">
-                <a16:creationId xmlns:a16="http://schemas.microsoft.com/office/drawing/2014/main" id="{B863BD7A-B13B-4E3E-A926-26BED728B2B7}"/>
+                <a16:creationId xmlns:a16="http://schemas.microsoft.com/office/drawing/2014/main" id="{C420406F-9238-4A44-8FC7-EA5ABBD4508B}"/>
               </a:ext>
             </a:extLst>
           </p:cNvPr>
@@ -22057,7 +24536,7 @@
           <p:cNvPr id="9" name="">
             <a:extLst xmlns:a="http://schemas.openxmlformats.org/drawingml/2006/main">
               <a:ext uri="{FF2B5EF4-FFF2-40B4-BE49-F238E27FC236}">
-                <a16:creationId xmlns:a16="http://schemas.microsoft.com/office/drawing/2014/main" id="{67ED544F-C10A-4D11-A5DF-357871EC4FC6}"/>
+                <a16:creationId xmlns:a16="http://schemas.microsoft.com/office/drawing/2014/main" id="{3ED4F755-B56A-4AE9-A69B-BC866ECBEEB0}"/>
               </a:ext>
             </a:extLst>
           </p:cNvPr>
@@ -22126,7 +24605,7 @@
           <p:cNvPr id="10" name="">
             <a:extLst xmlns:a="http://schemas.openxmlformats.org/drawingml/2006/main">
               <a:ext uri="{FF2B5EF4-FFF2-40B4-BE49-F238E27FC236}">
-                <a16:creationId xmlns:a16="http://schemas.microsoft.com/office/drawing/2014/main" id="{F12A5175-C935-4550-8B01-BE2FA27265A1}"/>
+                <a16:creationId xmlns:a16="http://schemas.microsoft.com/office/drawing/2014/main" id="{ACAFC929-3271-4EFF-8C73-FFA8C91AE8CF}"/>
               </a:ext>
             </a:extLst>
           </p:cNvPr>
@@ -22195,7 +24674,7 @@
           <p:cNvPr id="11" name="">
             <a:extLst xmlns:a="http://schemas.openxmlformats.org/drawingml/2006/main">
               <a:ext uri="{FF2B5EF4-FFF2-40B4-BE49-F238E27FC236}">
-                <a16:creationId xmlns:a16="http://schemas.microsoft.com/office/drawing/2014/main" id="{D3165900-B2A5-48CC-9FB7-46A42C606C87}"/>
+                <a16:creationId xmlns:a16="http://schemas.microsoft.com/office/drawing/2014/main" id="{2DC7E26A-ECA7-42DF-B1A8-4D7C5DE31304}"/>
               </a:ext>
             </a:extLst>
           </p:cNvPr>
@@ -22264,7 +24743,7 @@
           <p:cNvPr id="12" name="">
             <a:extLst xmlns:a="http://schemas.openxmlformats.org/drawingml/2006/main">
               <a:ext uri="{FF2B5EF4-FFF2-40B4-BE49-F238E27FC236}">
-                <a16:creationId xmlns:a16="http://schemas.microsoft.com/office/drawing/2014/main" id="{8631257E-C80D-429C-BB29-B75166B059EA}"/>
+                <a16:creationId xmlns:a16="http://schemas.microsoft.com/office/drawing/2014/main" id="{153BDCE0-9EC4-4802-ABFD-3028857C2A02}"/>
               </a:ext>
             </a:extLst>
           </p:cNvPr>
@@ -22333,7 +24812,7 @@
           <p:cNvPr id="13" name="">
             <a:extLst xmlns:a="http://schemas.openxmlformats.org/drawingml/2006/main">
               <a:ext uri="{FF2B5EF4-FFF2-40B4-BE49-F238E27FC236}">
-                <a16:creationId xmlns:a16="http://schemas.microsoft.com/office/drawing/2014/main" id="{86368220-3804-439B-B7FC-70E37BC5318C}"/>
+                <a16:creationId xmlns:a16="http://schemas.microsoft.com/office/drawing/2014/main" id="{2443A193-198E-4B16-8804-B0E42943401B}"/>
               </a:ext>
             </a:extLst>
           </p:cNvPr>
@@ -22402,7 +24881,7 @@
           <p:cNvPr id="14" name="">
             <a:extLst xmlns:a="http://schemas.openxmlformats.org/drawingml/2006/main">
               <a:ext uri="{FF2B5EF4-FFF2-40B4-BE49-F238E27FC236}">
-                <a16:creationId xmlns:a16="http://schemas.microsoft.com/office/drawing/2014/main" id="{52DFC618-AEB4-40BD-A367-36CBBD055B98}"/>
+                <a16:creationId xmlns:a16="http://schemas.microsoft.com/office/drawing/2014/main" id="{1EEE4039-79E5-4299-8F7E-B1E0F95C65C2}"/>
               </a:ext>
             </a:extLst>
           </p:cNvPr>
@@ -22471,7 +24950,7 @@
           <p:cNvPr id="15" name="">
             <a:extLst xmlns:a="http://schemas.openxmlformats.org/drawingml/2006/main">
               <a:ext uri="{FF2B5EF4-FFF2-40B4-BE49-F238E27FC236}">
-                <a16:creationId xmlns:a16="http://schemas.microsoft.com/office/drawing/2014/main" id="{D89FE02F-DD30-4AAD-8273-5E216C9F09DD}"/>
+                <a16:creationId xmlns:a16="http://schemas.microsoft.com/office/drawing/2014/main" id="{0A869607-6B9C-4529-8125-78B5DA5F4C32}"/>
               </a:ext>
             </a:extLst>
           </p:cNvPr>
@@ -22540,7 +25019,7 @@
           <p:cNvPr id="16" name="">
             <a:extLst xmlns:a="http://schemas.openxmlformats.org/drawingml/2006/main">
               <a:ext uri="{FF2B5EF4-FFF2-40B4-BE49-F238E27FC236}">
-                <a16:creationId xmlns:a16="http://schemas.microsoft.com/office/drawing/2014/main" id="{CFCFFEB9-F6C5-4779-8AD4-6CF9E9F437C8}"/>
+                <a16:creationId xmlns:a16="http://schemas.microsoft.com/office/drawing/2014/main" id="{D4CD9E21-7771-4845-B0ED-5B2544B57EBA}"/>
               </a:ext>
             </a:extLst>
           </p:cNvPr>
@@ -22609,7 +25088,7 @@
           <p:cNvPr id="17" name="">
             <a:extLst xmlns:a="http://schemas.openxmlformats.org/drawingml/2006/main">
               <a:ext uri="{FF2B5EF4-FFF2-40B4-BE49-F238E27FC236}">
-                <a16:creationId xmlns:a16="http://schemas.microsoft.com/office/drawing/2014/main" id="{2B0364A7-2562-4666-AF89-03EC1DB6A2CA}"/>
+                <a16:creationId xmlns:a16="http://schemas.microsoft.com/office/drawing/2014/main" id="{8E69287E-73FE-4AA5-9C92-B10D0D9BC648}"/>
               </a:ext>
             </a:extLst>
           </p:cNvPr>
@@ -22678,7 +25157,7 @@
           <p:cNvPr id="18" name="">
             <a:extLst xmlns:a="http://schemas.openxmlformats.org/drawingml/2006/main">
               <a:ext uri="{FF2B5EF4-FFF2-40B4-BE49-F238E27FC236}">
-                <a16:creationId xmlns:a16="http://schemas.microsoft.com/office/drawing/2014/main" id="{5E943441-599F-4675-B3DB-11F1E4A6CEC0}"/>
+                <a16:creationId xmlns:a16="http://schemas.microsoft.com/office/drawing/2014/main" id="{395C2F18-3F72-432C-86E4-BCC1E0B8C83E}"/>
               </a:ext>
             </a:extLst>
           </p:cNvPr>
@@ -22803,7 +25282,7 @@
     </p:spTree>
     <p:extLst>
       <p:ext uri="{BB962C8B-B14F-4D97-AF65-F5344CB8AC3E}">
-        <p14:creationId xmlns:p14="http://schemas.microsoft.com/office/powerpoint/2010/main" val="1478712206"/>
+        <p14:creationId xmlns:p14="http://schemas.microsoft.com/office/powerpoint/2010/main" val="1658081606"/>
       </p:ext>
     </p:extLst>
   </p:cSld>
@@ -22834,7 +25313,7 @@
           <p:cNvPr id="45" name="">
             <a:extLst xmlns:a="http://schemas.openxmlformats.org/drawingml/2006/main">
               <a:ext uri="{FF2B5EF4-FFF2-40B4-BE49-F238E27FC236}">
-                <a16:creationId xmlns:a16="http://schemas.microsoft.com/office/drawing/2014/main" id="{6DA8C66D-CE63-4B29-BAD9-E27C6506A867}"/>
+                <a16:creationId xmlns:a16="http://schemas.microsoft.com/office/drawing/2014/main" id="{5CEA87FE-2896-4217-A690-F7A21DF50400}"/>
               </a:ext>
             </a:extLst>
           </p:cNvPr>
@@ -22903,7 +25382,7 @@
           <p:cNvPr id="2" name="">
             <a:extLst xmlns:a="http://schemas.openxmlformats.org/drawingml/2006/main">
               <a:ext uri="{FF2B5EF4-FFF2-40B4-BE49-F238E27FC236}">
-                <a16:creationId xmlns:a16="http://schemas.microsoft.com/office/drawing/2014/main" id="{0E6F3043-7550-45BF-9FA2-AB4611ABD82F}"/>
+                <a16:creationId xmlns:a16="http://schemas.microsoft.com/office/drawing/2014/main" id="{B5458B87-E167-4889-A933-CDFFC258920D}"/>
               </a:ext>
             </a:extLst>
           </p:cNvPr>
@@ -22972,7 +25451,7 @@
           <p:cNvPr id="3" name="">
             <a:extLst xmlns:a="http://schemas.openxmlformats.org/drawingml/2006/main">
               <a:ext uri="{FF2B5EF4-FFF2-40B4-BE49-F238E27FC236}">
-                <a16:creationId xmlns:a16="http://schemas.microsoft.com/office/drawing/2014/main" id="{9437F43F-F3F6-4C0B-9103-05D828E53AD0}"/>
+                <a16:creationId xmlns:a16="http://schemas.microsoft.com/office/drawing/2014/main" id="{C3779111-D74D-41D8-90C7-01EE57E203F7}"/>
               </a:ext>
             </a:extLst>
           </p:cNvPr>
@@ -23003,7 +25482,7 @@
           <p:cNvPr id="4" name="">
             <a:extLst xmlns:a="http://schemas.openxmlformats.org/drawingml/2006/main">
               <a:ext uri="{FF2B5EF4-FFF2-40B4-BE49-F238E27FC236}">
-                <a16:creationId xmlns:a16="http://schemas.microsoft.com/office/drawing/2014/main" id="{6ED3C0BA-933A-46CC-83B4-6657B504DA4D}"/>
+                <a16:creationId xmlns:a16="http://schemas.microsoft.com/office/drawing/2014/main" id="{06054740-2BD9-40BC-A941-E7968149BD44}"/>
               </a:ext>
             </a:extLst>
           </p:cNvPr>
@@ -23062,7 +25541,7 @@
                 <a:ea typeface="Segoe UI"/>
                 <a:cs typeface="Segoe UI"/>
               </a:rPr>
-              <a:t>Presenter: Member 3</a:t>
+              <a:t>Presenter: Aniket Nikam</a:t>
             </a:r>
           </a:p>
         </p:txBody>
@@ -23072,7 +25551,7 @@
           <p:cNvPr id="5" name="">
             <a:extLst xmlns:a="http://schemas.openxmlformats.org/drawingml/2006/main">
               <a:ext uri="{FF2B5EF4-FFF2-40B4-BE49-F238E27FC236}">
-                <a16:creationId xmlns:a16="http://schemas.microsoft.com/office/drawing/2014/main" id="{1FDE0265-2871-44AE-B1C4-D0506F051A03}"/>
+                <a16:creationId xmlns:a16="http://schemas.microsoft.com/office/drawing/2014/main" id="{F1512AEF-1886-4ABF-8751-AF77C02B6E9C}"/>
               </a:ext>
             </a:extLst>
           </p:cNvPr>
@@ -23141,7 +25620,7 @@
           <p:cNvPr id="6" name="">
             <a:extLst xmlns:a="http://schemas.openxmlformats.org/drawingml/2006/main">
               <a:ext uri="{FF2B5EF4-FFF2-40B4-BE49-F238E27FC236}">
-                <a16:creationId xmlns:a16="http://schemas.microsoft.com/office/drawing/2014/main" id="{B89E8CFC-D8AC-4CE0-9BAA-4F7D503497CD}"/>
+                <a16:creationId xmlns:a16="http://schemas.microsoft.com/office/drawing/2014/main" id="{70F1DAAD-1430-496E-B8D3-965E2A6EB173}"/>
               </a:ext>
             </a:extLst>
           </p:cNvPr>
@@ -23210,7 +25689,7 @@
           <p:cNvPr id="7" name="">
             <a:extLst xmlns:a="http://schemas.openxmlformats.org/drawingml/2006/main">
               <a:ext uri="{FF2B5EF4-FFF2-40B4-BE49-F238E27FC236}">
-                <a16:creationId xmlns:a16="http://schemas.microsoft.com/office/drawing/2014/main" id="{D2C4E517-8D1F-4C23-8DE3-A5E175A6D84F}"/>
+                <a16:creationId xmlns:a16="http://schemas.microsoft.com/office/drawing/2014/main" id="{5782DF7D-F4D7-4D39-B7ED-D05DB4D56255}"/>
               </a:ext>
             </a:extLst>
           </p:cNvPr>
@@ -23243,7 +25722,7 @@
           <p:cNvPr id="8" name="">
             <a:extLst xmlns:a="http://schemas.openxmlformats.org/drawingml/2006/main">
               <a:ext uri="{FF2B5EF4-FFF2-40B4-BE49-F238E27FC236}">
-                <a16:creationId xmlns:a16="http://schemas.microsoft.com/office/drawing/2014/main" id="{ABCAFDC3-488C-46E1-9C9A-029C1A043E9A}"/>
+                <a16:creationId xmlns:a16="http://schemas.microsoft.com/office/drawing/2014/main" id="{D60B1E9B-89A9-4455-9C38-0BC19713AFB2}"/>
               </a:ext>
             </a:extLst>
           </p:cNvPr>
@@ -23312,7 +25791,7 @@
           <p:cNvPr id="9" name="">
             <a:extLst xmlns:a="http://schemas.openxmlformats.org/drawingml/2006/main">
               <a:ext uri="{FF2B5EF4-FFF2-40B4-BE49-F238E27FC236}">
-                <a16:creationId xmlns:a16="http://schemas.microsoft.com/office/drawing/2014/main" id="{B8BE2791-34AD-4030-B7B6-476CA5D624BE}"/>
+                <a16:creationId xmlns:a16="http://schemas.microsoft.com/office/drawing/2014/main" id="{1290CC37-6A38-43CA-B520-D597EC0F3277}"/>
               </a:ext>
             </a:extLst>
           </p:cNvPr>
@@ -23381,7 +25860,7 @@
           <p:cNvPr id="10" name="">
             <a:extLst xmlns:a="http://schemas.openxmlformats.org/drawingml/2006/main">
               <a:ext uri="{FF2B5EF4-FFF2-40B4-BE49-F238E27FC236}">
-                <a16:creationId xmlns:a16="http://schemas.microsoft.com/office/drawing/2014/main" id="{66DEC491-3C8B-4935-B8B5-4E5804249A80}"/>
+                <a16:creationId xmlns:a16="http://schemas.microsoft.com/office/drawing/2014/main" id="{819BB133-2950-4A80-A326-ACFFA66D93B5}"/>
               </a:ext>
             </a:extLst>
           </p:cNvPr>
@@ -23412,7 +25891,7 @@
           <p:cNvPr id="11" name="">
             <a:extLst xmlns:a="http://schemas.openxmlformats.org/drawingml/2006/main">
               <a:ext uri="{FF2B5EF4-FFF2-40B4-BE49-F238E27FC236}">
-                <a16:creationId xmlns:a16="http://schemas.microsoft.com/office/drawing/2014/main" id="{B6411AFC-5F44-42B6-A1E0-BDB016443275}"/>
+                <a16:creationId xmlns:a16="http://schemas.microsoft.com/office/drawing/2014/main" id="{F83DEDB1-4BA6-41CF-A8DD-23140D18985B}"/>
               </a:ext>
             </a:extLst>
           </p:cNvPr>
@@ -23481,7 +25960,7 @@
           <p:cNvPr id="12" name="">
             <a:extLst xmlns:a="http://schemas.openxmlformats.org/drawingml/2006/main">
               <a:ext uri="{FF2B5EF4-FFF2-40B4-BE49-F238E27FC236}">
-                <a16:creationId xmlns:a16="http://schemas.microsoft.com/office/drawing/2014/main" id="{7F694DB2-0171-4A18-BF18-6D86FE9DD444}"/>
+                <a16:creationId xmlns:a16="http://schemas.microsoft.com/office/drawing/2014/main" id="{19A294BD-9DDA-4593-9C4A-9445F566E551}"/>
               </a:ext>
             </a:extLst>
           </p:cNvPr>
@@ -23512,7 +25991,7 @@
           <p:cNvPr id="13" name="">
             <a:extLst xmlns:a="http://schemas.openxmlformats.org/drawingml/2006/main">
               <a:ext uri="{FF2B5EF4-FFF2-40B4-BE49-F238E27FC236}">
-                <a16:creationId xmlns:a16="http://schemas.microsoft.com/office/drawing/2014/main" id="{1CFD46B4-2027-4579-A123-77A5366932DB}"/>
+                <a16:creationId xmlns:a16="http://schemas.microsoft.com/office/drawing/2014/main" id="{1EABC9C1-4698-47CE-89F7-1257DD86065C}"/>
               </a:ext>
             </a:extLst>
           </p:cNvPr>
@@ -23543,7 +26022,7 @@
           <p:cNvPr id="14" name="">
             <a:extLst xmlns:a="http://schemas.openxmlformats.org/drawingml/2006/main">
               <a:ext uri="{FF2B5EF4-FFF2-40B4-BE49-F238E27FC236}">
-                <a16:creationId xmlns:a16="http://schemas.microsoft.com/office/drawing/2014/main" id="{86E780AD-C63A-4035-A01E-31A539CAD0EB}"/>
+                <a16:creationId xmlns:a16="http://schemas.microsoft.com/office/drawing/2014/main" id="{E604A40B-2A1D-4786-A968-11E801CDABD5}"/>
               </a:ext>
             </a:extLst>
           </p:cNvPr>
@@ -23576,7 +26055,7 @@
           <p:cNvPr id="15" name="">
             <a:extLst xmlns:a="http://schemas.openxmlformats.org/drawingml/2006/main">
               <a:ext uri="{FF2B5EF4-FFF2-40B4-BE49-F238E27FC236}">
-                <a16:creationId xmlns:a16="http://schemas.microsoft.com/office/drawing/2014/main" id="{B1848079-33AF-4AC3-A253-F520EA250E16}"/>
+                <a16:creationId xmlns:a16="http://schemas.microsoft.com/office/drawing/2014/main" id="{413EDBB2-3666-4D86-8EB9-5334E5F35551}"/>
               </a:ext>
             </a:extLst>
           </p:cNvPr>
@@ -23645,7 +26124,7 @@
           <p:cNvPr id="16" name="">
             <a:extLst xmlns:a="http://schemas.openxmlformats.org/drawingml/2006/main">
               <a:ext uri="{FF2B5EF4-FFF2-40B4-BE49-F238E27FC236}">
-                <a16:creationId xmlns:a16="http://schemas.microsoft.com/office/drawing/2014/main" id="{CD4E63F4-7C5A-49C5-B001-057E8642313D}"/>
+                <a16:creationId xmlns:a16="http://schemas.microsoft.com/office/drawing/2014/main" id="{58E91E1D-D064-46E6-81C8-3C660BC4F2F1}"/>
               </a:ext>
             </a:extLst>
           </p:cNvPr>
@@ -23714,7 +26193,7 @@
           <p:cNvPr id="17" name="">
             <a:extLst xmlns:a="http://schemas.openxmlformats.org/drawingml/2006/main">
               <a:ext uri="{FF2B5EF4-FFF2-40B4-BE49-F238E27FC236}">
-                <a16:creationId xmlns:a16="http://schemas.microsoft.com/office/drawing/2014/main" id="{18345B69-29ED-4FD1-8305-2B3D71686ABD}"/>
+                <a16:creationId xmlns:a16="http://schemas.microsoft.com/office/drawing/2014/main" id="{864974EC-85DE-47F3-865A-3C09E04123CF}"/>
               </a:ext>
             </a:extLst>
           </p:cNvPr>
@@ -23745,7 +26224,7 @@
           <p:cNvPr id="18" name="">
             <a:extLst xmlns:a="http://schemas.openxmlformats.org/drawingml/2006/main">
               <a:ext uri="{FF2B5EF4-FFF2-40B4-BE49-F238E27FC236}">
-                <a16:creationId xmlns:a16="http://schemas.microsoft.com/office/drawing/2014/main" id="{487FB45B-B2D5-49C3-B749-614CCDB62ECB}"/>
+                <a16:creationId xmlns:a16="http://schemas.microsoft.com/office/drawing/2014/main" id="{EE3580A1-5B9B-4D8A-9FA8-856F6AD88690}"/>
               </a:ext>
             </a:extLst>
           </p:cNvPr>
@@ -23814,7 +26293,7 @@
           <p:cNvPr id="19" name="">
             <a:extLst xmlns:a="http://schemas.openxmlformats.org/drawingml/2006/main">
               <a:ext uri="{FF2B5EF4-FFF2-40B4-BE49-F238E27FC236}">
-                <a16:creationId xmlns:a16="http://schemas.microsoft.com/office/drawing/2014/main" id="{B4523793-4BE7-410F-B49D-C654729E2FFF}"/>
+                <a16:creationId xmlns:a16="http://schemas.microsoft.com/office/drawing/2014/main" id="{432F50F5-ACBE-42AD-AFB1-582E7B18ADEB}"/>
               </a:ext>
             </a:extLst>
           </p:cNvPr>
@@ -23845,7 +26324,7 @@
           <p:cNvPr id="20" name="">
             <a:extLst xmlns:a="http://schemas.openxmlformats.org/drawingml/2006/main">
               <a:ext uri="{FF2B5EF4-FFF2-40B4-BE49-F238E27FC236}">
-                <a16:creationId xmlns:a16="http://schemas.microsoft.com/office/drawing/2014/main" id="{4319B220-073D-4D23-99E1-EFB2BB1EAB3C}"/>
+                <a16:creationId xmlns:a16="http://schemas.microsoft.com/office/drawing/2014/main" id="{1E620620-1DC9-4D6A-A140-340A1E50CDAF}"/>
               </a:ext>
             </a:extLst>
           </p:cNvPr>
@@ -23876,7 +26355,7 @@
           <p:cNvPr id="21" name="">
             <a:extLst xmlns:a="http://schemas.openxmlformats.org/drawingml/2006/main">
               <a:ext uri="{FF2B5EF4-FFF2-40B4-BE49-F238E27FC236}">
-                <a16:creationId xmlns:a16="http://schemas.microsoft.com/office/drawing/2014/main" id="{A92AB6C4-102F-4AF2-8B33-99C4C2F0941F}"/>
+                <a16:creationId xmlns:a16="http://schemas.microsoft.com/office/drawing/2014/main" id="{3EF4CDD2-7FE0-48BA-856F-D869F53E2F80}"/>
               </a:ext>
             </a:extLst>
           </p:cNvPr>
@@ -23909,7 +26388,7 @@
           <p:cNvPr id="22" name="">
             <a:extLst xmlns:a="http://schemas.openxmlformats.org/drawingml/2006/main">
               <a:ext uri="{FF2B5EF4-FFF2-40B4-BE49-F238E27FC236}">
-                <a16:creationId xmlns:a16="http://schemas.microsoft.com/office/drawing/2014/main" id="{BB42C530-D041-4A68-9444-44007047EE90}"/>
+                <a16:creationId xmlns:a16="http://schemas.microsoft.com/office/drawing/2014/main" id="{9E417093-C60D-444B-BCE9-014E86515C33}"/>
               </a:ext>
             </a:extLst>
           </p:cNvPr>
@@ -23978,7 +26457,7 @@
           <p:cNvPr id="23" name="">
             <a:extLst xmlns:a="http://schemas.openxmlformats.org/drawingml/2006/main">
               <a:ext uri="{FF2B5EF4-FFF2-40B4-BE49-F238E27FC236}">
-                <a16:creationId xmlns:a16="http://schemas.microsoft.com/office/drawing/2014/main" id="{4EFA5892-241F-4CB2-A481-B94298DA8195}"/>
+                <a16:creationId xmlns:a16="http://schemas.microsoft.com/office/drawing/2014/main" id="{3A71FB75-CE85-4F4A-BF78-DC7A2A949257}"/>
               </a:ext>
             </a:extLst>
           </p:cNvPr>
@@ -24047,7 +26526,7 @@
           <p:cNvPr id="24" name="">
             <a:extLst xmlns:a="http://schemas.openxmlformats.org/drawingml/2006/main">
               <a:ext uri="{FF2B5EF4-FFF2-40B4-BE49-F238E27FC236}">
-                <a16:creationId xmlns:a16="http://schemas.microsoft.com/office/drawing/2014/main" id="{6CA52151-B403-4105-A2BD-C0ABEB6DC0A7}"/>
+                <a16:creationId xmlns:a16="http://schemas.microsoft.com/office/drawing/2014/main" id="{A90699CF-454F-4BB2-A40A-563F42BC25BE}"/>
               </a:ext>
             </a:extLst>
           </p:cNvPr>
@@ -24078,7 +26557,7 @@
           <p:cNvPr id="25" name="">
             <a:extLst xmlns:a="http://schemas.openxmlformats.org/drawingml/2006/main">
               <a:ext uri="{FF2B5EF4-FFF2-40B4-BE49-F238E27FC236}">
-                <a16:creationId xmlns:a16="http://schemas.microsoft.com/office/drawing/2014/main" id="{691CCD1F-020C-425A-9148-2A8D5273ACEB}"/>
+                <a16:creationId xmlns:a16="http://schemas.microsoft.com/office/drawing/2014/main" id="{7E4417CC-9440-4262-B279-9D16881D0B15}"/>
               </a:ext>
             </a:extLst>
           </p:cNvPr>
@@ -24147,7 +26626,7 @@
           <p:cNvPr id="26" name="">
             <a:extLst xmlns:a="http://schemas.openxmlformats.org/drawingml/2006/main">
               <a:ext uri="{FF2B5EF4-FFF2-40B4-BE49-F238E27FC236}">
-                <a16:creationId xmlns:a16="http://schemas.microsoft.com/office/drawing/2014/main" id="{81149300-9B85-43C1-9884-F6B643CDB6F9}"/>
+                <a16:creationId xmlns:a16="http://schemas.microsoft.com/office/drawing/2014/main" id="{EDF7F612-B17D-4F5D-9A29-17D2287B8C7B}"/>
               </a:ext>
             </a:extLst>
           </p:cNvPr>
@@ -24178,7 +26657,7 @@
           <p:cNvPr id="27" name="">
             <a:extLst xmlns:a="http://schemas.openxmlformats.org/drawingml/2006/main">
               <a:ext uri="{FF2B5EF4-FFF2-40B4-BE49-F238E27FC236}">
-                <a16:creationId xmlns:a16="http://schemas.microsoft.com/office/drawing/2014/main" id="{EF6FD1D0-B63A-40FC-9B81-9AF69062CFD4}"/>
+                <a16:creationId xmlns:a16="http://schemas.microsoft.com/office/drawing/2014/main" id="{328CBDB2-1F7D-4334-9C95-5FFCE3D9C1B4}"/>
               </a:ext>
             </a:extLst>
           </p:cNvPr>
@@ -24209,7 +26688,7 @@
           <p:cNvPr id="28" name="">
             <a:extLst xmlns:a="http://schemas.openxmlformats.org/drawingml/2006/main">
               <a:ext uri="{FF2B5EF4-FFF2-40B4-BE49-F238E27FC236}">
-                <a16:creationId xmlns:a16="http://schemas.microsoft.com/office/drawing/2014/main" id="{8B2E015E-E2F4-4FEB-9B67-76053F43291E}"/>
+                <a16:creationId xmlns:a16="http://schemas.microsoft.com/office/drawing/2014/main" id="{3CBD70CF-069B-4763-93F7-4B85A73CCBC1}"/>
               </a:ext>
             </a:extLst>
           </p:cNvPr>
@@ -24242,7 +26721,7 @@
           <p:cNvPr id="29" name="">
             <a:extLst xmlns:a="http://schemas.openxmlformats.org/drawingml/2006/main">
               <a:ext uri="{FF2B5EF4-FFF2-40B4-BE49-F238E27FC236}">
-                <a16:creationId xmlns:a16="http://schemas.microsoft.com/office/drawing/2014/main" id="{9D55985A-1DDC-4EA3-82A8-51076E5B117E}"/>
+                <a16:creationId xmlns:a16="http://schemas.microsoft.com/office/drawing/2014/main" id="{0FA91DAB-5CC2-44A3-8CF1-088E528660E8}"/>
               </a:ext>
             </a:extLst>
           </p:cNvPr>
@@ -24311,7 +26790,7 @@
           <p:cNvPr id="30" name="">
             <a:extLst xmlns:a="http://schemas.openxmlformats.org/drawingml/2006/main">
               <a:ext uri="{FF2B5EF4-FFF2-40B4-BE49-F238E27FC236}">
-                <a16:creationId xmlns:a16="http://schemas.microsoft.com/office/drawing/2014/main" id="{4228E543-8BD7-40B4-89B3-172D84BE00A0}"/>
+                <a16:creationId xmlns:a16="http://schemas.microsoft.com/office/drawing/2014/main" id="{715E588E-7854-45BA-9529-D7A4C1143104}"/>
               </a:ext>
             </a:extLst>
           </p:cNvPr>
@@ -24380,7 +26859,7 @@
           <p:cNvPr id="31" name="">
             <a:extLst xmlns:a="http://schemas.openxmlformats.org/drawingml/2006/main">
               <a:ext uri="{FF2B5EF4-FFF2-40B4-BE49-F238E27FC236}">
-                <a16:creationId xmlns:a16="http://schemas.microsoft.com/office/drawing/2014/main" id="{6D1A8D28-E158-45E9-B1B5-0BBDA0C2C894}"/>
+                <a16:creationId xmlns:a16="http://schemas.microsoft.com/office/drawing/2014/main" id="{94E3EAF4-C01E-4445-9B86-BA5EEE2E1927}"/>
               </a:ext>
             </a:extLst>
           </p:cNvPr>
@@ -24411,7 +26890,7 @@
           <p:cNvPr id="32" name="">
             <a:extLst xmlns:a="http://schemas.openxmlformats.org/drawingml/2006/main">
               <a:ext uri="{FF2B5EF4-FFF2-40B4-BE49-F238E27FC236}">
-                <a16:creationId xmlns:a16="http://schemas.microsoft.com/office/drawing/2014/main" id="{55379214-0CDD-4F84-B5B6-CC3565464C67}"/>
+                <a16:creationId xmlns:a16="http://schemas.microsoft.com/office/drawing/2014/main" id="{F14977F1-AB3E-42E0-9542-CA5C0A1147B2}"/>
               </a:ext>
             </a:extLst>
           </p:cNvPr>
@@ -24480,7 +26959,7 @@
           <p:cNvPr id="33" name="">
             <a:extLst xmlns:a="http://schemas.openxmlformats.org/drawingml/2006/main">
               <a:ext uri="{FF2B5EF4-FFF2-40B4-BE49-F238E27FC236}">
-                <a16:creationId xmlns:a16="http://schemas.microsoft.com/office/drawing/2014/main" id="{FB5B9542-459C-4249-8FE7-5C6490320CF4}"/>
+                <a16:creationId xmlns:a16="http://schemas.microsoft.com/office/drawing/2014/main" id="{98C5A864-4DE8-4AD3-806C-0AC3E3AB4E8E}"/>
               </a:ext>
             </a:extLst>
           </p:cNvPr>
@@ -24511,7 +26990,7 @@
           <p:cNvPr id="34" name="">
             <a:extLst xmlns:a="http://schemas.openxmlformats.org/drawingml/2006/main">
               <a:ext uri="{FF2B5EF4-FFF2-40B4-BE49-F238E27FC236}">
-                <a16:creationId xmlns:a16="http://schemas.microsoft.com/office/drawing/2014/main" id="{5BFE7C10-F3A9-4279-901A-616C62CFBF7C}"/>
+                <a16:creationId xmlns:a16="http://schemas.microsoft.com/office/drawing/2014/main" id="{B2CF2D0F-DD66-47A7-BE62-8B0EFBB42C99}"/>
               </a:ext>
             </a:extLst>
           </p:cNvPr>
@@ -24542,7 +27021,7 @@
           <p:cNvPr id="35" name="">
             <a:extLst xmlns:a="http://schemas.openxmlformats.org/drawingml/2006/main">
               <a:ext uri="{FF2B5EF4-FFF2-40B4-BE49-F238E27FC236}">
-                <a16:creationId xmlns:a16="http://schemas.microsoft.com/office/drawing/2014/main" id="{4E68AB50-AB47-4288-B917-EC88C565E301}"/>
+                <a16:creationId xmlns:a16="http://schemas.microsoft.com/office/drawing/2014/main" id="{4E4A0F44-DC2E-4242-A0D6-75463ACA5490}"/>
               </a:ext>
             </a:extLst>
           </p:cNvPr>
@@ -24575,7 +27054,7 @@
           <p:cNvPr id="36" name="">
             <a:extLst xmlns:a="http://schemas.openxmlformats.org/drawingml/2006/main">
               <a:ext uri="{FF2B5EF4-FFF2-40B4-BE49-F238E27FC236}">
-                <a16:creationId xmlns:a16="http://schemas.microsoft.com/office/drawing/2014/main" id="{DC50E42D-8F94-4AC8-8297-36C5DC1A7EF3}"/>
+                <a16:creationId xmlns:a16="http://schemas.microsoft.com/office/drawing/2014/main" id="{5C695D79-C866-4202-9EB4-1AF473C1A49B}"/>
               </a:ext>
             </a:extLst>
           </p:cNvPr>
@@ -24644,7 +27123,7 @@
           <p:cNvPr id="37" name="">
             <a:extLst xmlns:a="http://schemas.openxmlformats.org/drawingml/2006/main">
               <a:ext uri="{FF2B5EF4-FFF2-40B4-BE49-F238E27FC236}">
-                <a16:creationId xmlns:a16="http://schemas.microsoft.com/office/drawing/2014/main" id="{4336AFEF-703A-403A-B57B-F908718C7EC5}"/>
+                <a16:creationId xmlns:a16="http://schemas.microsoft.com/office/drawing/2014/main" id="{B0511C73-18B1-4DFA-9615-7B3F92611E8A}"/>
               </a:ext>
             </a:extLst>
           </p:cNvPr>
@@ -24713,7 +27192,7 @@
           <p:cNvPr id="38" name="">
             <a:extLst xmlns:a="http://schemas.openxmlformats.org/drawingml/2006/main">
               <a:ext uri="{FF2B5EF4-FFF2-40B4-BE49-F238E27FC236}">
-                <a16:creationId xmlns:a16="http://schemas.microsoft.com/office/drawing/2014/main" id="{64B7E778-3A77-402F-BF95-7B0B01E8E301}"/>
+                <a16:creationId xmlns:a16="http://schemas.microsoft.com/office/drawing/2014/main" id="{3303D737-8355-463B-BE8D-E314263F826D}"/>
               </a:ext>
             </a:extLst>
           </p:cNvPr>
@@ -24744,7 +27223,7 @@
           <p:cNvPr id="39" name="">
             <a:extLst xmlns:a="http://schemas.openxmlformats.org/drawingml/2006/main">
               <a:ext uri="{FF2B5EF4-FFF2-40B4-BE49-F238E27FC236}">
-                <a16:creationId xmlns:a16="http://schemas.microsoft.com/office/drawing/2014/main" id="{B98915C9-3C2C-49ED-863D-5B80CB7188DD}"/>
+                <a16:creationId xmlns:a16="http://schemas.microsoft.com/office/drawing/2014/main" id="{3E5B6D6F-CD2A-48B7-AFF7-299DF5A8182D}"/>
               </a:ext>
             </a:extLst>
           </p:cNvPr>
@@ -24813,7 +27292,7 @@
           <p:cNvPr id="40" name="">
             <a:extLst xmlns:a="http://schemas.openxmlformats.org/drawingml/2006/main">
               <a:ext uri="{FF2B5EF4-FFF2-40B4-BE49-F238E27FC236}">
-                <a16:creationId xmlns:a16="http://schemas.microsoft.com/office/drawing/2014/main" id="{F1AACDF8-CE2E-447A-97EB-DA015ED4CEDF}"/>
+                <a16:creationId xmlns:a16="http://schemas.microsoft.com/office/drawing/2014/main" id="{E6BD10F7-3E36-4081-ABBF-9C3FA2FB5489}"/>
               </a:ext>
             </a:extLst>
           </p:cNvPr>
@@ -24882,7 +27361,7 @@
           <p:cNvPr id="41" name="">
             <a:extLst xmlns:a="http://schemas.openxmlformats.org/drawingml/2006/main">
               <a:ext uri="{FF2B5EF4-FFF2-40B4-BE49-F238E27FC236}">
-                <a16:creationId xmlns:a16="http://schemas.microsoft.com/office/drawing/2014/main" id="{30BA3EEB-7083-4BFF-BDA9-7B3345265040}"/>
+                <a16:creationId xmlns:a16="http://schemas.microsoft.com/office/drawing/2014/main" id="{48600304-B487-45C8-8080-14FA8A45B168}"/>
               </a:ext>
             </a:extLst>
           </p:cNvPr>
@@ -25090,7 +27569,7 @@
           <p:cNvPr id="42" name="">
             <a:extLst xmlns:a="http://schemas.openxmlformats.org/drawingml/2006/main">
               <a:ext uri="{FF2B5EF4-FFF2-40B4-BE49-F238E27FC236}">
-                <a16:creationId xmlns:a16="http://schemas.microsoft.com/office/drawing/2014/main" id="{7E21454B-9B4D-47F5-B78D-E038A7F54508}"/>
+                <a16:creationId xmlns:a16="http://schemas.microsoft.com/office/drawing/2014/main" id="{EE8BCF37-0D03-4A30-860B-82CD46C589F3}"/>
               </a:ext>
             </a:extLst>
           </p:cNvPr>
@@ -25125,7 +27604,7 @@
           <p:cNvPr id="43" name="">
             <a:extLst xmlns:a="http://schemas.openxmlformats.org/drawingml/2006/main">
               <a:ext uri="{FF2B5EF4-FFF2-40B4-BE49-F238E27FC236}">
-                <a16:creationId xmlns:a16="http://schemas.microsoft.com/office/drawing/2014/main" id="{BB384F91-833B-4B24-AC6C-49F48ED61636}"/>
+                <a16:creationId xmlns:a16="http://schemas.microsoft.com/office/drawing/2014/main" id="{982F2B0E-C6D7-4E0C-9A4C-BA0A877C4EC9}"/>
               </a:ext>
             </a:extLst>
           </p:cNvPr>
@@ -25156,7 +27635,7 @@
           <p:cNvPr id="44" name="">
             <a:extLst xmlns:a="http://schemas.openxmlformats.org/drawingml/2006/main">
               <a:ext uri="{FF2B5EF4-FFF2-40B4-BE49-F238E27FC236}">
-                <a16:creationId xmlns:a16="http://schemas.microsoft.com/office/drawing/2014/main" id="{82D034AD-9960-44BD-9D83-E4E573EE5968}"/>
+                <a16:creationId xmlns:a16="http://schemas.microsoft.com/office/drawing/2014/main" id="{34F7FFDB-DFC6-42B6-AB2F-C6CCFDACF46F}"/>
               </a:ext>
             </a:extLst>
           </p:cNvPr>
@@ -25435,7 +27914,7 @@
     </p:spTree>
     <p:extLst>
       <p:ext uri="{BB962C8B-B14F-4D97-AF65-F5344CB8AC3E}">
-        <p14:creationId xmlns:p14="http://schemas.microsoft.com/office/powerpoint/2010/main" val="807372887"/>
+        <p14:creationId xmlns:p14="http://schemas.microsoft.com/office/powerpoint/2010/main" val="660549000"/>
       </p:ext>
     </p:extLst>
   </p:cSld>
